--- a/assets/lessons/pochemu-emu-bolshe-chem-mne/de/Präsentation.pptx
+++ b/assets/lessons/pochemu-emu-bolshe-chem-mne/de/Präsentation.pptx
@@ -2,24 +2,24 @@
 <file path=ppt/presentation.xml><?xml version="1.0" encoding="utf-8"?>
 <p:presentation xmlns:p="http://schemas.openxmlformats.org/presentationml/2006/main">
   <p:sldMasterIdLst>
-    <p:sldMasterId xmlns:r="http://schemas.openxmlformats.org/officeDocument/2006/relationships" id="2147483648" r:id="Rb5e6bd24996a4642"/>
+    <p:sldMasterId xmlns:r="http://schemas.openxmlformats.org/officeDocument/2006/relationships" id="2147483648" r:id="R22fafe0029fc4bd0"/>
   </p:sldMasterIdLst>
   <p:notesMasterIdLst>
-    <p:notesMasterId xmlns:r="http://schemas.openxmlformats.org/officeDocument/2006/relationships" r:id="R3a285930f0a64737"/>
+    <p:notesMasterId xmlns:r="http://schemas.openxmlformats.org/officeDocument/2006/relationships" r:id="R9f9b198307b8478f"/>
   </p:notesMasterIdLst>
   <p:sldIdLst>
-    <p:sldId xmlns:r="http://schemas.openxmlformats.org/officeDocument/2006/relationships" id="256" r:id="Rbc43a22e9ac0464c"/>
-    <p:sldId xmlns:r="http://schemas.openxmlformats.org/officeDocument/2006/relationships" id="257" r:id="Rb637f3db5958424c"/>
-    <p:sldId xmlns:r="http://schemas.openxmlformats.org/officeDocument/2006/relationships" id="258" r:id="R2645faca3aa34702"/>
-    <p:sldId xmlns:r="http://schemas.openxmlformats.org/officeDocument/2006/relationships" id="259" r:id="R22e4e8a6da174da5"/>
-    <p:sldId xmlns:r="http://schemas.openxmlformats.org/officeDocument/2006/relationships" id="260" r:id="Rbdac87879c624d8f"/>
-    <p:sldId xmlns:r="http://schemas.openxmlformats.org/officeDocument/2006/relationships" id="261" r:id="Rc9a3425941e74fd5"/>
-    <p:sldId xmlns:r="http://schemas.openxmlformats.org/officeDocument/2006/relationships" id="262" r:id="R342ebe3a48cf48ff"/>
-    <p:sldId xmlns:r="http://schemas.openxmlformats.org/officeDocument/2006/relationships" id="263" r:id="Rbc44aaf9ea9b4bec"/>
-    <p:sldId xmlns:r="http://schemas.openxmlformats.org/officeDocument/2006/relationships" id="264" r:id="R214304afe0c04889"/>
-    <p:sldId xmlns:r="http://schemas.openxmlformats.org/officeDocument/2006/relationships" id="265" r:id="Ra21dab8f374a4d6a"/>
-    <p:sldId xmlns:r="http://schemas.openxmlformats.org/officeDocument/2006/relationships" id="266" r:id="Rfb49cf5234f44837"/>
-    <p:sldId xmlns:r="http://schemas.openxmlformats.org/officeDocument/2006/relationships" id="267" r:id="Rd42f27a0ad8a465e"/>
+    <p:sldId xmlns:r="http://schemas.openxmlformats.org/officeDocument/2006/relationships" id="256" r:id="R15a4307758b542e2"/>
+    <p:sldId xmlns:r="http://schemas.openxmlformats.org/officeDocument/2006/relationships" id="257" r:id="R5900f3097827400f"/>
+    <p:sldId xmlns:r="http://schemas.openxmlformats.org/officeDocument/2006/relationships" id="258" r:id="Re9f5b6cf059b4008"/>
+    <p:sldId xmlns:r="http://schemas.openxmlformats.org/officeDocument/2006/relationships" id="259" r:id="R74acea41d51b4f7b"/>
+    <p:sldId xmlns:r="http://schemas.openxmlformats.org/officeDocument/2006/relationships" id="260" r:id="R300e5f1e262443b5"/>
+    <p:sldId xmlns:r="http://schemas.openxmlformats.org/officeDocument/2006/relationships" id="261" r:id="R88b0165ba1d442b0"/>
+    <p:sldId xmlns:r="http://schemas.openxmlformats.org/officeDocument/2006/relationships" id="262" r:id="Rb0f6245cd63a4305"/>
+    <p:sldId xmlns:r="http://schemas.openxmlformats.org/officeDocument/2006/relationships" id="263" r:id="Recc4adfaa9d74386"/>
+    <p:sldId xmlns:r="http://schemas.openxmlformats.org/officeDocument/2006/relationships" id="264" r:id="R88850436a27348b3"/>
+    <p:sldId xmlns:r="http://schemas.openxmlformats.org/officeDocument/2006/relationships" id="265" r:id="R7669a1acdafc4347"/>
+    <p:sldId xmlns:r="http://schemas.openxmlformats.org/officeDocument/2006/relationships" id="266" r:id="Rd2e5f25b3fee40e7"/>
+    <p:sldId xmlns:r="http://schemas.openxmlformats.org/officeDocument/2006/relationships" id="267" r:id="R3379eac4879a4d0c"/>
   </p:sldIdLst>
   <p:sldSz cx="12192000" cy="6858000"/>
   <p:notesSz cx="6858000" cy="9144000"/>
@@ -453,122 +453,132 @@
           <a:lstStyle xmlns:a="http://schemas.openxmlformats.org/drawingml/2006/main"/>
           <a:p xmlns:a="http://schemas.openxmlformats.org/drawingml/2006/main">
             <a:r>
-              <a:t>1. Warum bekommt er mehr als ich? — 2 Minuten.</a:t>
-            </a:r>
-          </a:p>
-          <a:p xmlns:a="http://schemas.openxmlformats.org/drawingml/2006/main">
-            <a:r>
-              <a:t>Worte: Ein anderer bekam einen neuen Malkasten. Ich schaue auf meinen und denke: Warum bekommt er mehr? Was weiß ich, was vermute ich? Hören wir eine Geschichte, in der die ersten Arbeiter mehr erwarteten.</a:t>
-            </a:r>
-          </a:p>
-          <a:p xmlns:a="http://schemas.openxmlformats.org/drawingml/2006/main">
-            <a:r>
-              <a:t>Durchführung: Erfundenes Beispiel eines Geschenks nennen. Jeder bemerkt still sein erstes Gefühl. Keine persönlichen Bekenntnisse sammeln; zum Lesen übergehen.</a:t>
-            </a:r>
-          </a:p>
-          <a:p xmlns:a="http://schemas.openxmlformats.org/drawingml/2006/main">
-            <a:r>
-              <a:t>Frage: Denke ich zuerst an mein Bedürfnis oder an das, was ein anderer bekam?</a:t>
-            </a:r>
-          </a:p>
-          <a:p xmlns:a="http://schemas.openxmlformats.org/drawingml/2006/main">
-            <a:r>
-              <a:t>Orientierung: Gefühl bemerken. Der Schluss „Ich werde weniger geschätzt“ muss geprüft werden. Heute geht es um Zusagen, Großzügigkeit und Vergleiche.</a:t>
-            </a:r>
-          </a:p>
-          <a:p xmlns:a="http://schemas.openxmlformats.org/drawingml/2006/main">
-            <a:r>
-              <a:t>Rhythmus: 1 Minute Beispiel; 1 Minute persönliche Wahl und Übergang.</a:t>
-            </a:r>
-          </a:p>
-          <a:p xmlns:a="http://schemas.openxmlformats.org/drawingml/2006/main">
-            <a:r>
-              <a:t/>
-            </a:r>
-          </a:p>
-          <a:p xmlns:a="http://schemas.openxmlformats.org/drawingml/2006/main">
-            <a:r>
-              <a:t>Vorbereitung</a:t>
-            </a:r>
-          </a:p>
-          <a:p xmlns:a="http://schemas.openxmlformats.org/drawingml/2006/main">
-            <a:r>
-              <a:t>1. Zwölf Folien und Moderationsnotizen öffnen. Ganzes Matthäus 20,1–16 vorbereiten. Sofort nach dem Lesen spielen, danach besprechen.</a:t>
-            </a:r>
-          </a:p>
-          <a:p xmlns:a="http://schemas.openxmlformats.org/drawingml/2006/main">
-            <a:r>
-              <a:t>2. Seiten 1–2 pro Gruppe, 3–4 pro Paar, 5 pro Viererteam, 6 pro Person drucken. Schreibfelder auf Seiten 3 und 5 nicht zerschneiden. Alle Karten illustriert; Graustufen möglich.</a:t>
-            </a:r>
-          </a:p>
-          <a:p xmlns:a="http://schemas.openxmlformats.org/drawingml/2006/main">
-            <a:r>
-              <a:t>3. Fünf gleiche Spielsteine oder Knöpfe: jeder ein Denar. Requisiten, keine Teilnehmerbelohnung. Sieben Rollen auswählen; Lehrkraft liest Erzählung und Christi Schlussworte.</a:t>
-            </a:r>
-          </a:p>
-          <a:p xmlns:a="http://schemas.openxmlformats.org/drawingml/2006/main">
-            <a:r>
-              <a:t>4. Paare und Viererteams bilden. Bei kleinerem Team liest einer zwei Informationen. Neue Bedingung über fünf Minuten bis Phase 9 zurückhalten. Ersten Plan nicht löschen.</a:t>
-            </a:r>
-          </a:p>
-          <a:p xmlns:a="http://schemas.openxmlformats.org/drawingml/2006/main">
-            <a:r>
-              <a:t>5. Stifte und gegebenenfalls Werkstattmaterial vorbereiten. Persönliches Blatt bleibt beim Jugendlichen; erfundene Fälle zulässig.</a:t>
-            </a:r>
-          </a:p>
-          <a:p xmlns:a="http://schemas.openxmlformats.org/drawingml/2006/main">
-            <a:r>
-              <a:t>Hinweise</a:t>
-            </a:r>
-          </a:p>
-          <a:p xmlns:a="http://schemas.openxmlformats.org/drawingml/2006/main">
-            <a:r>
-              <a:t>1. Im Gleichnis bekommt der Letzte gleich viel wie der Erste. Titel beschreibt Vergleichsgefühl. Nicht zwei Münzen gegen eine erzählen. Jeder einen Denar; Zusage an Erste erfüllt.</a:t>
-            </a:r>
-          </a:p>
-          <a:p xmlns:a="http://schemas.openxmlformats.org/drawingml/2006/main">
-            <a:r>
-              <a:t>2. Fünf Einladungszeiten, Auszahlung von den Letzten an erhalten. Sieben Rollen sind Bühnenwahl, fünf Vertreter sind Gruppen, keine Evangelien-Gesamtzahl. Niemand stellte die Letzten ein; nicht faul nennen.</a:t>
-            </a:r>
-          </a:p>
-          <a:p xmlns:a="http://schemas.openxmlformats.org/drawingml/2006/main">
-            <a:r>
-              <a:t>3. Anfang vom Himmelreich bestimmt Bedeutung. Gottes Barmherzigkeit nicht als Lohn für Überlegenheit beanspruchen. Theophylakt sieht Möglichkeit, auch spät durch Umkehr ins Reich zu kommen. Nicht folgern, gute Taten aufzuschieben: Eingeladene arbeiten. Quelle: https://azbyka.ru/otechnik/Feofilakt_Bolgarskij/tolkovanie-na-evangelie-ot-matfeja/20.</a:t>
-            </a:r>
-          </a:p>
-          <a:p xmlns:a="http://schemas.openxmlformats.org/drawingml/2006/main">
-            <a:r>
-              <a:t>4. Keine universelle Lohn-, Noten- oder Wettbewerbsregel. Im Alltag Zusage, Regeln und wirklichen Bedarf prüfen. Ruhige Bitte um Korrektur und gute Haltung zu anderen vereinbar.</a:t>
-            </a:r>
-          </a:p>
-          <a:p xmlns:a="http://schemas.openxmlformats.org/drawingml/2006/main">
-            <a:r>
-              <a:t>5. Reihenfolge Seite 3: 2,4,1,3 von links oben. Seite 4: Zusage gebrochen 1,6; Hilfe/Geschenk 2,3; Nachfragen 4,5. Anderer Kontext kann Schluss ändern.</a:t>
-            </a:r>
-          </a:p>
-          <a:p xmlns:a="http://schemas.openxmlformats.org/drawingml/2006/main">
-            <a:r>
-              <a:t>6. Erster Plan: Saschas Termin steht noch aus. Zweiter: fünf statt zehn Minuten, Zusage gebrochen. Nicht jede Bitte Neid nennen. Zeit klären; Geschenk bleibt.</a:t>
-            </a:r>
-          </a:p>
-          <a:p xmlns:a="http://schemas.openxmlformats.org/drawingml/2006/main">
-            <a:r>
-              <a:t>7. Vergleich kann echtes Bedürfnis zeigen. Es benennen, nicht „undankbar“ oder „schlechter“ urteilen. Fremder Erfolg bestimmt meinen Wert vor Gott nicht. Dank und Bitte zusammen.</a:t>
-            </a:r>
-          </a:p>
-          <a:p xmlns:a="http://schemas.openxmlformats.org/drawingml/2006/main">
-            <a:r>
-              <a:t>8. Keine sofortige Freude oder öffentliche Neidbeichte verlangen. Freundlichen Satz und Tat anbieten, auch wenn Gefühl bleibt. Gebet eigens verfasst, stilles Zuhören möglich. Bei Fragen zu Umkehr und Beichte Gespräch mit Priester anbieten.</a:t>
-            </a:r>
-          </a:p>
-          <a:p xmlns:a="http://schemas.openxmlformats.org/drawingml/2006/main">
-            <a:r>
-              <a:t/>
-            </a:r>
-          </a:p>
-          <a:p xmlns:a="http://schemas.openxmlformats.org/drawingml/2006/main">
-            <a:r>
-              <a:t>Quelle: vorhandener zweisprachiger Unterricht auf lessons.atapin.de; vorhandene Illustrationen unverändert.</a:t>
+              <a:t>1. Warum bekommt er genauso viel wie ich? — 2 Minuten.</a:t>
+            </a:r>
+          </a:p>
+          <a:p xmlns:a="http://schemas.openxmlformats.org/drawingml/2006/main">
+            <a:r>
+              <a:t/>
+            </a:r>
+          </a:p>
+          <a:p xmlns:a="http://schemas.openxmlformats.org/drawingml/2006/main">
+            <a:r>
+              <a:t>Worte: Ein Arbeiter arbeitete seit dem Morgen, ein anderer nur eine Stunde. Am Abend bekommt jeder einen Denar. Der Erste fragt: Warum bekommt er genauso viel wie ich?</a:t>
+            </a:r>
+          </a:p>
+          <a:p xmlns:a="http://schemas.openxmlformats.org/drawingml/2006/main">
+            <a:r>
+              <a:t/>
+            </a:r>
+          </a:p>
+          <a:p xmlns:a="http://schemas.openxmlformats.org/drawingml/2006/main">
+            <a:r>
+              <a:t>Durchführung: Zeige zwei gleiche Spielsteine. Jeder bemerkt still seine erste Reaktion. Vor der Lesung nicht über den Hausherrn abstimmen.</a:t>
+            </a:r>
+          </a:p>
+          <a:p xmlns:a="http://schemas.openxmlformats.org/drawingml/2006/main">
+            <a:r>
+              <a:t/>
+            </a:r>
+          </a:p>
+          <a:p xmlns:a="http://schemas.openxmlformats.org/drawingml/2006/main">
+            <a:r>
+              <a:t>Frage: Wer bekam mehr Münzen?</a:t>
+            </a:r>
+          </a:p>
+          <a:p xmlns:a="http://schemas.openxmlformats.org/drawingml/2006/main">
+            <a:r>
+              <a:t/>
+            </a:r>
+          </a:p>
+          <a:p xmlns:a="http://schemas.openxmlformats.org/drawingml/2006/main">
+            <a:r>
+              <a:t>Orientierung: Niemand. Arbeitszeit verschieden, Lohn gleich. Die Ersten ärgern sich über die Gleichstellung. Wir hören das ganze Gleichnis vom Reich der Himmel.</a:t>
+            </a:r>
+          </a:p>
+          <a:p xmlns:a="http://schemas.openxmlformats.org/drawingml/2006/main">
+            <a:r>
+              <a:t/>
+            </a:r>
+          </a:p>
+          <a:p xmlns:a="http://schemas.openxmlformats.org/drawingml/2006/main">
+            <a:r>
+              <a:t>Rhythmus: 1+1 Minuten in der Reihenfolge der Schritte.</a:t>
+            </a:r>
+          </a:p>
+          <a:p xmlns:a="http://schemas.openxmlformats.org/drawingml/2006/main">
+            <a:r>
+              <a:t/>
+            </a:r>
+          </a:p>
+          <a:p xmlns:a="http://schemas.openxmlformats.org/drawingml/2006/main">
+            <a:r>
+              <a:t>Vorbereitung: Vollständiges Matthäus 20,1–16, fünf gleiche Spielsteine und sieben Rollen. Fünf Vertreter stehen für Gruppen, Gesamtzahl nicht zählen. Lesung, sofort Rollenspiel, erst dann Gespräch. Seiten 3–4 für Paare, 5 für Viererteams, 6 persönlich. Ersten Plan behalten.</a:t>
+            </a:r>
+          </a:p>
+          <a:p xmlns:a="http://schemas.openxmlformats.org/drawingml/2006/main">
+            <a:r>
+              <a:t/>
+            </a:r>
+          </a:p>
+          <a:p xmlns:a="http://schemas.openxmlformats.org/drawingml/2006/main">
+            <a:r>
+              <a:t>Sinn: Jeder bekommt einen Denar. Erste arbeiteten länger, Letzte eine Stunde. Vereinbarung erfüllt, Murren wegen Gleichstellung. Der Letzte bekam nicht mehr. Reich der Himmel: Gottes Güte zu spät Gekommenen richtet sich nicht nach einem Anspruch auf Vorrang. Arbeit bleibt wichtig: Eingeladene gehen arbeiten. Umkehr nicht aufschieben.</a:t>
+            </a:r>
+          </a:p>
+          <a:p xmlns:a="http://schemas.openxmlformats.org/drawingml/2006/main">
+            <a:r>
+              <a:t/>
+            </a:r>
+          </a:p>
+          <a:p xmlns:a="http://schemas.openxmlformats.org/drawingml/2006/main">
+            <a:r>
+              <a:t>Theophylakt verbindet das Gleichnis mit Aufnahme spät Umkehrender. Quelle: https://azbyka.ru/otechnik/Feofilakt_Bolgarskij/tolkovanie-na-evangelie-ot-matfeja/20</a:t>
+            </a:r>
+          </a:p>
+          <a:p xmlns:a="http://schemas.openxmlformats.org/drawingml/2006/main">
+            <a:r>
+              <a:t/>
+            </a:r>
+          </a:p>
+          <a:p xmlns:a="http://schemas.openxmlformats.org/drawingml/2006/main">
+            <a:r>
+              <a:t>Keine universelle Lohn-, Noten- oder Wettbewerbsregel. Stundenlohn muss nach Vertrag gezahlt werden, keine Ausbeutung. Im Gleichnis lautet der Grund: Niemand hat uns eingestellt. Mischas Grund gehört nur zum erfundenen Beispiel. Neue Information verändert keine Portionen und führt keine gebrochene Zusage ein.</a:t>
+            </a:r>
+          </a:p>
+          <a:p xmlns:a="http://schemas.openxmlformats.org/drawingml/2006/main">
+            <a:r>
+              <a:t/>
+            </a:r>
+          </a:p>
+          <a:p xmlns:a="http://schemas.openxmlformats.org/drawingml/2006/main">
+            <a:r>
+              <a:t>Schlüssel: Vereinbarung, neue Einladungen, Auszahlung, Murren und Antwort. Fälle: gemeinsame Gabe 1–3; Regel verletzt 4–5; nachfragen 6. Zuerst Hauptfälle behandeln.</a:t>
+            </a:r>
+          </a:p>
+          <a:p xmlns:a="http://schemas.openxmlformats.org/drawingml/2006/main">
+            <a:r>
+              <a:t/>
+            </a:r>
+          </a:p>
+          <a:p xmlns:a="http://schemas.openxmlformats.org/drawingml/2006/main">
+            <a:r>
+              <a:t>Keine sofortige Freude und keine öffentlichen Bekenntnisse verlangen. Persönliches Blatt bleibt beim Jugendlichen, Gebet freiwillig und eigens verfasst. Aufrichtige Umkehr anderer nicht beurteilen. Persönliche Fragen können mit einem Priester besprochen werden.</a:t>
+            </a:r>
+          </a:p>
+          <a:p xmlns:a="http://schemas.openxmlformats.org/drawingml/2006/main">
+            <a:r>
+              <a:t/>
+            </a:r>
+          </a:p>
+          <a:p xmlns:a="http://schemas.openxmlformats.org/drawingml/2006/main">
+            <a:r>
+              <a:t/>
+            </a:r>
+          </a:p>
+          <a:p xmlns:a="http://schemas.openxmlformats.org/drawingml/2006/main">
+            <a:r>
+              <a:t>Quelle: https://bible.by/syn/40/20/</a:t>
             </a:r>
           </a:p>
         </p:txBody>
@@ -638,122 +648,132 @@
           <a:lstStyle xmlns:a="http://schemas.openxmlformats.org/drawingml/2006/main"/>
           <a:p xmlns:a="http://schemas.openxmlformats.org/drawingml/2006/main">
             <a:r>
-              <a:t>10. Meine Bitte und die Freude des anderen — 4 Minuten.</a:t>
-            </a:r>
-          </a:p>
-          <a:p xmlns:a="http://schemas.openxmlformats.org/drawingml/2006/main">
-            <a:r>
-              <a:t>Worte: Erfüllung des Versprechens verlangen und Mischa freundlich begegnen. Bitte an Lehrkraft sagen, dann freundlicher Satz oder Hilfe für Freund.</a:t>
-            </a:r>
-          </a:p>
-          <a:p xmlns:a="http://schemas.openxmlformats.org/drawingml/2006/main">
-            <a:r>
-              <a:t>Durchführung: Im Paar spricht einer die Bitte, anderer antwortet und wiederholt ihren Sinn. Rollen wechseln. Jeder nennt am Ende Satz an Mischa oder machbare Hilfe in der Werkstatt.</a:t>
-            </a:r>
-          </a:p>
-          <a:p xmlns:a="http://schemas.openxmlformats.org/drawingml/2006/main">
-            <a:r>
-              <a:t>Frage: Warum darf Bitte um Gerechtigkeit kein Kampf gegen Gutes für andere werden?</a:t>
-            </a:r>
-          </a:p>
-          <a:p xmlns:a="http://schemas.openxmlformats.org/drawingml/2006/main">
-            <a:r>
-              <a:t>Orientierung: Mein Bedürfnis ist real; fremdes Geschenk verursacht es nicht. Fehlende fünf Minuten verlangen und Mischa beim Ankommen helfen. Keine sofortige Lösung versprechen; bei Bedarf Vereinbarung nochmals klären.</a:t>
-            </a:r>
-          </a:p>
-          <a:p xmlns:a="http://schemas.openxmlformats.org/drawingml/2006/main">
-            <a:r>
-              <a:t>Rhythmus: 2 Minuten Bitten im Paar; 2 Minuten freundliche Antwort und Hilfe.</a:t>
-            </a:r>
-          </a:p>
-          <a:p xmlns:a="http://schemas.openxmlformats.org/drawingml/2006/main">
-            <a:r>
-              <a:t/>
-            </a:r>
-          </a:p>
-          <a:p xmlns:a="http://schemas.openxmlformats.org/drawingml/2006/main">
-            <a:r>
-              <a:t>Vorbereitung</a:t>
-            </a:r>
-          </a:p>
-          <a:p xmlns:a="http://schemas.openxmlformats.org/drawingml/2006/main">
-            <a:r>
-              <a:t>1. Zwölf Folien und Moderationsnotizen öffnen. Ganzes Matthäus 20,1–16 vorbereiten. Sofort nach dem Lesen spielen, danach besprechen.</a:t>
-            </a:r>
-          </a:p>
-          <a:p xmlns:a="http://schemas.openxmlformats.org/drawingml/2006/main">
-            <a:r>
-              <a:t>2. Seiten 1–2 pro Gruppe, 3–4 pro Paar, 5 pro Viererteam, 6 pro Person drucken. Schreibfelder auf Seiten 3 und 5 nicht zerschneiden. Alle Karten illustriert; Graustufen möglich.</a:t>
-            </a:r>
-          </a:p>
-          <a:p xmlns:a="http://schemas.openxmlformats.org/drawingml/2006/main">
-            <a:r>
-              <a:t>3. Fünf gleiche Spielsteine oder Knöpfe: jeder ein Denar. Requisiten, keine Teilnehmerbelohnung. Sieben Rollen auswählen; Lehrkraft liest Erzählung und Christi Schlussworte.</a:t>
-            </a:r>
-          </a:p>
-          <a:p xmlns:a="http://schemas.openxmlformats.org/drawingml/2006/main">
-            <a:r>
-              <a:t>4. Paare und Viererteams bilden. Bei kleinerem Team liest einer zwei Informationen. Neue Bedingung über fünf Minuten bis Phase 9 zurückhalten. Ersten Plan nicht löschen.</a:t>
-            </a:r>
-          </a:p>
-          <a:p xmlns:a="http://schemas.openxmlformats.org/drawingml/2006/main">
-            <a:r>
-              <a:t>5. Stifte und gegebenenfalls Werkstattmaterial vorbereiten. Persönliches Blatt bleibt beim Jugendlichen; erfundene Fälle zulässig.</a:t>
-            </a:r>
-          </a:p>
-          <a:p xmlns:a="http://schemas.openxmlformats.org/drawingml/2006/main">
-            <a:r>
-              <a:t>Hinweise</a:t>
-            </a:r>
-          </a:p>
-          <a:p xmlns:a="http://schemas.openxmlformats.org/drawingml/2006/main">
-            <a:r>
-              <a:t>1. Im Gleichnis bekommt der Letzte gleich viel wie der Erste. Titel beschreibt Vergleichsgefühl. Nicht zwei Münzen gegen eine erzählen. Jeder einen Denar; Zusage an Erste erfüllt.</a:t>
-            </a:r>
-          </a:p>
-          <a:p xmlns:a="http://schemas.openxmlformats.org/drawingml/2006/main">
-            <a:r>
-              <a:t>2. Fünf Einladungszeiten, Auszahlung von den Letzten an erhalten. Sieben Rollen sind Bühnenwahl, fünf Vertreter sind Gruppen, keine Evangelien-Gesamtzahl. Niemand stellte die Letzten ein; nicht faul nennen.</a:t>
-            </a:r>
-          </a:p>
-          <a:p xmlns:a="http://schemas.openxmlformats.org/drawingml/2006/main">
-            <a:r>
-              <a:t>3. Anfang vom Himmelreich bestimmt Bedeutung. Gottes Barmherzigkeit nicht als Lohn für Überlegenheit beanspruchen. Theophylakt sieht Möglichkeit, auch spät durch Umkehr ins Reich zu kommen. Nicht folgern, gute Taten aufzuschieben: Eingeladene arbeiten. Quelle: https://azbyka.ru/otechnik/Feofilakt_Bolgarskij/tolkovanie-na-evangelie-ot-matfeja/20.</a:t>
-            </a:r>
-          </a:p>
-          <a:p xmlns:a="http://schemas.openxmlformats.org/drawingml/2006/main">
-            <a:r>
-              <a:t>4. Keine universelle Lohn-, Noten- oder Wettbewerbsregel. Im Alltag Zusage, Regeln und wirklichen Bedarf prüfen. Ruhige Bitte um Korrektur und gute Haltung zu anderen vereinbar.</a:t>
-            </a:r>
-          </a:p>
-          <a:p xmlns:a="http://schemas.openxmlformats.org/drawingml/2006/main">
-            <a:r>
-              <a:t>5. Reihenfolge Seite 3: 2,4,1,3 von links oben. Seite 4: Zusage gebrochen 1,6; Hilfe/Geschenk 2,3; Nachfragen 4,5. Anderer Kontext kann Schluss ändern.</a:t>
-            </a:r>
-          </a:p>
-          <a:p xmlns:a="http://schemas.openxmlformats.org/drawingml/2006/main">
-            <a:r>
-              <a:t>6. Erster Plan: Saschas Termin steht noch aus. Zweiter: fünf statt zehn Minuten, Zusage gebrochen. Nicht jede Bitte Neid nennen. Zeit klären; Geschenk bleibt.</a:t>
-            </a:r>
-          </a:p>
-          <a:p xmlns:a="http://schemas.openxmlformats.org/drawingml/2006/main">
-            <a:r>
-              <a:t>7. Vergleich kann echtes Bedürfnis zeigen. Es benennen, nicht „undankbar“ oder „schlechter“ urteilen. Fremder Erfolg bestimmt meinen Wert vor Gott nicht. Dank und Bitte zusammen.</a:t>
-            </a:r>
-          </a:p>
-          <a:p xmlns:a="http://schemas.openxmlformats.org/drawingml/2006/main">
-            <a:r>
-              <a:t>8. Keine sofortige Freude oder öffentliche Neidbeichte verlangen. Freundlichen Satz und Tat anbieten, auch wenn Gefühl bleibt. Gebet eigens verfasst, stilles Zuhören möglich. Bei Fragen zu Umkehr und Beichte Gespräch mit Priester anbieten.</a:t>
-            </a:r>
-          </a:p>
-          <a:p xmlns:a="http://schemas.openxmlformats.org/drawingml/2006/main">
-            <a:r>
-              <a:t/>
-            </a:r>
-          </a:p>
-          <a:p xmlns:a="http://schemas.openxmlformats.org/drawingml/2006/main">
-            <a:r>
-              <a:t>Quelle: vorhandener zweisprachiger Unterricht auf lessons.atapin.de; vorhandene Illustrationen unverändert.</a:t>
+              <a:t>10. Antwort ohne Anspruch auf Vorrang — 4 Minuten.</a:t>
+            </a:r>
+          </a:p>
+          <a:p xmlns:a="http://schemas.openxmlformats.org/drawingml/2006/main">
+            <a:r>
+              <a:t/>
+            </a:r>
+          </a:p>
+          <a:p xmlns:a="http://schemas.openxmlformats.org/drawingml/2006/main">
+            <a:r>
+              <a:t>Worte: Sascha kann sagen: Der Tag war anstrengend und ich wollte Anerkennung. Ich bekam das Versprochene. Mischa ist ebenfalls eingeladen. Führt das Gespräch weiter.</a:t>
+            </a:r>
+          </a:p>
+          <a:p xmlns:a="http://schemas.openxmlformats.org/drawingml/2006/main">
+            <a:r>
+              <a:t/>
+            </a:r>
+          </a:p>
+          <a:p xmlns:a="http://schemas.openxmlformats.org/drawingml/2006/main">
+            <a:r>
+              <a:t>Durchführung: Paare sprechen und hören ohne Beschuldigung. Rollen wechseln. Wie kann Saschas Hilfe gewürdigt werden, während alle das gleiche Essen behalten?</a:t>
+            </a:r>
+          </a:p>
+          <a:p xmlns:a="http://schemas.openxmlformats.org/drawingml/2006/main">
+            <a:r>
+              <a:t/>
+            </a:r>
+          </a:p>
+          <a:p xmlns:a="http://schemas.openxmlformats.org/drawingml/2006/main">
+            <a:r>
+              <a:t>Frage: Kann ich Anerkennung wünschen, ohne eine kleinere Gabe für andere zu verlangen?</a:t>
+            </a:r>
+          </a:p>
+          <a:p xmlns:a="http://schemas.openxmlformats.org/drawingml/2006/main">
+            <a:r>
+              <a:t/>
+            </a:r>
+          </a:p>
+          <a:p xmlns:a="http://schemas.openxmlformats.org/drawingml/2006/main">
+            <a:r>
+              <a:t>Orientierung: Ja. Für Saschas Hilfe danken und seine Müdigkeit hören. Anerkennung gibt kein Recht, fremde Gabe zu kürzen. Mischa an den Tisch einladen oder zusammen aufräumen.</a:t>
+            </a:r>
+          </a:p>
+          <a:p xmlns:a="http://schemas.openxmlformats.org/drawingml/2006/main">
+            <a:r>
+              <a:t/>
+            </a:r>
+          </a:p>
+          <a:p xmlns:a="http://schemas.openxmlformats.org/drawingml/2006/main">
+            <a:r>
+              <a:t>Rhythmus: 2+2 Minuten in der Reihenfolge der Schritte.</a:t>
+            </a:r>
+          </a:p>
+          <a:p xmlns:a="http://schemas.openxmlformats.org/drawingml/2006/main">
+            <a:r>
+              <a:t/>
+            </a:r>
+          </a:p>
+          <a:p xmlns:a="http://schemas.openxmlformats.org/drawingml/2006/main">
+            <a:r>
+              <a:t>Vorbereitung: Vollständiges Matthäus 20,1–16, fünf gleiche Spielsteine und sieben Rollen. Fünf Vertreter stehen für Gruppen, Gesamtzahl nicht zählen. Lesung, sofort Rollenspiel, erst dann Gespräch. Seiten 3–4 für Paare, 5 für Viererteams, 6 persönlich. Ersten Plan behalten.</a:t>
+            </a:r>
+          </a:p>
+          <a:p xmlns:a="http://schemas.openxmlformats.org/drawingml/2006/main">
+            <a:r>
+              <a:t/>
+            </a:r>
+          </a:p>
+          <a:p xmlns:a="http://schemas.openxmlformats.org/drawingml/2006/main">
+            <a:r>
+              <a:t>Sinn: Jeder bekommt einen Denar. Erste arbeiteten länger, Letzte eine Stunde. Vereinbarung erfüllt, Murren wegen Gleichstellung. Der Letzte bekam nicht mehr. Reich der Himmel: Gottes Güte zu spät Gekommenen richtet sich nicht nach einem Anspruch auf Vorrang. Arbeit bleibt wichtig: Eingeladene gehen arbeiten. Umkehr nicht aufschieben.</a:t>
+            </a:r>
+          </a:p>
+          <a:p xmlns:a="http://schemas.openxmlformats.org/drawingml/2006/main">
+            <a:r>
+              <a:t/>
+            </a:r>
+          </a:p>
+          <a:p xmlns:a="http://schemas.openxmlformats.org/drawingml/2006/main">
+            <a:r>
+              <a:t>Theophylakt verbindet das Gleichnis mit Aufnahme spät Umkehrender. Quelle: https://azbyka.ru/otechnik/Feofilakt_Bolgarskij/tolkovanie-na-evangelie-ot-matfeja/20</a:t>
+            </a:r>
+          </a:p>
+          <a:p xmlns:a="http://schemas.openxmlformats.org/drawingml/2006/main">
+            <a:r>
+              <a:t/>
+            </a:r>
+          </a:p>
+          <a:p xmlns:a="http://schemas.openxmlformats.org/drawingml/2006/main">
+            <a:r>
+              <a:t>Keine universelle Lohn-, Noten- oder Wettbewerbsregel. Stundenlohn muss nach Vertrag gezahlt werden, keine Ausbeutung. Im Gleichnis lautet der Grund: Niemand hat uns eingestellt. Mischas Grund gehört nur zum erfundenen Beispiel. Neue Information verändert keine Portionen und führt keine gebrochene Zusage ein.</a:t>
+            </a:r>
+          </a:p>
+          <a:p xmlns:a="http://schemas.openxmlformats.org/drawingml/2006/main">
+            <a:r>
+              <a:t/>
+            </a:r>
+          </a:p>
+          <a:p xmlns:a="http://schemas.openxmlformats.org/drawingml/2006/main">
+            <a:r>
+              <a:t>Schlüssel: Vereinbarung, neue Einladungen, Auszahlung, Murren und Antwort. Fälle: gemeinsame Gabe 1–3; Regel verletzt 4–5; nachfragen 6. Zuerst Hauptfälle behandeln.</a:t>
+            </a:r>
+          </a:p>
+          <a:p xmlns:a="http://schemas.openxmlformats.org/drawingml/2006/main">
+            <a:r>
+              <a:t/>
+            </a:r>
+          </a:p>
+          <a:p xmlns:a="http://schemas.openxmlformats.org/drawingml/2006/main">
+            <a:r>
+              <a:t>Keine sofortige Freude und keine öffentlichen Bekenntnisse verlangen. Persönliches Blatt bleibt beim Jugendlichen, Gebet freiwillig und eigens verfasst. Aufrichtige Umkehr anderer nicht beurteilen. Persönliche Fragen können mit einem Priester besprochen werden.</a:t>
+            </a:r>
+          </a:p>
+          <a:p xmlns:a="http://schemas.openxmlformats.org/drawingml/2006/main">
+            <a:r>
+              <a:t/>
+            </a:r>
+          </a:p>
+          <a:p xmlns:a="http://schemas.openxmlformats.org/drawingml/2006/main">
+            <a:r>
+              <a:t/>
+            </a:r>
+          </a:p>
+          <a:p xmlns:a="http://schemas.openxmlformats.org/drawingml/2006/main">
+            <a:r>
+              <a:t>Quelle: https://bible.by/syn/40/20/</a:t>
             </a:r>
           </a:p>
         </p:txBody>
@@ -823,122 +843,142 @@
           <a:lstStyle xmlns:a="http://schemas.openxmlformats.org/drawingml/2006/main"/>
           <a:p xmlns:a="http://schemas.openxmlformats.org/drawingml/2006/main">
             <a:r>
-              <a:t>11. Mein nächster Schritt — 3 Minuten.</a:t>
-            </a:r>
-          </a:p>
-          <a:p xmlns:a="http://schemas.openxmlformats.org/drawingml/2006/main">
-            <a:r>
-              <a:t>Worte: Echten oder erfundenen Fall wählen. Was brauche ich, was wurde versprochen, was bekam ein anderer? Welche Frage, Dankbarkeit oder Hilfe folgt?</a:t>
-            </a:r>
-          </a:p>
-          <a:p xmlns:a="http://schemas.openxmlformats.org/drawingml/2006/main">
-            <a:r>
-              <a:t>Durchführung: Sechs Felder des persönlichen Blatts ausfüllen. Nur gewählten Satz nennen ist möglich. Kurze Stille und eigens verfasstes Gebet. Blatt bleibt beim Jugendlichen.</a:t>
-            </a:r>
-          </a:p>
-          <a:p xmlns:a="http://schemas.openxmlformats.org/drawingml/2006/main">
-            <a:r>
-              <a:t>Frage: Was kann ich tun, auch wenn das Vergleichsgefühl bleibt?</a:t>
-            </a:r>
-          </a:p>
-          <a:p xmlns:a="http://schemas.openxmlformats.org/drawingml/2006/main">
-            <a:r>
-              <a:t>Orientierung: Fakten prüfen, Bedürfnis nennen, Zusage einfordern, danken, sich über andere freuen oder helfen. Gott um Hilfe gegen Neid bitten, ohne sich selbst abzuwerten.</a:t>
-            </a:r>
-          </a:p>
-          <a:p xmlns:a="http://schemas.openxmlformats.org/drawingml/2006/main">
-            <a:r>
-              <a:t>Rhythmus: 2 Minuten persönliches Blatt; 1 Minute Stille und Gebet.</a:t>
-            </a:r>
-          </a:p>
-          <a:p xmlns:a="http://schemas.openxmlformats.org/drawingml/2006/main">
-            <a:r>
-              <a:t/>
-            </a:r>
-          </a:p>
-          <a:p xmlns:a="http://schemas.openxmlformats.org/drawingml/2006/main">
-            <a:r>
-              <a:t>Vorbereitung</a:t>
-            </a:r>
-          </a:p>
-          <a:p xmlns:a="http://schemas.openxmlformats.org/drawingml/2006/main">
-            <a:r>
-              <a:t>1. Zwölf Folien und Moderationsnotizen öffnen. Ganzes Matthäus 20,1–16 vorbereiten. Sofort nach dem Lesen spielen, danach besprechen.</a:t>
-            </a:r>
-          </a:p>
-          <a:p xmlns:a="http://schemas.openxmlformats.org/drawingml/2006/main">
-            <a:r>
-              <a:t>2. Seiten 1–2 pro Gruppe, 3–4 pro Paar, 5 pro Viererteam, 6 pro Person drucken. Schreibfelder auf Seiten 3 und 5 nicht zerschneiden. Alle Karten illustriert; Graustufen möglich.</a:t>
-            </a:r>
-          </a:p>
-          <a:p xmlns:a="http://schemas.openxmlformats.org/drawingml/2006/main">
-            <a:r>
-              <a:t>3. Fünf gleiche Spielsteine oder Knöpfe: jeder ein Denar. Requisiten, keine Teilnehmerbelohnung. Sieben Rollen auswählen; Lehrkraft liest Erzählung und Christi Schlussworte.</a:t>
-            </a:r>
-          </a:p>
-          <a:p xmlns:a="http://schemas.openxmlformats.org/drawingml/2006/main">
-            <a:r>
-              <a:t>4. Paare und Viererteams bilden. Bei kleinerem Team liest einer zwei Informationen. Neue Bedingung über fünf Minuten bis Phase 9 zurückhalten. Ersten Plan nicht löschen.</a:t>
-            </a:r>
-          </a:p>
-          <a:p xmlns:a="http://schemas.openxmlformats.org/drawingml/2006/main">
-            <a:r>
-              <a:t>5. Stifte und gegebenenfalls Werkstattmaterial vorbereiten. Persönliches Blatt bleibt beim Jugendlichen; erfundene Fälle zulässig.</a:t>
-            </a:r>
-          </a:p>
-          <a:p xmlns:a="http://schemas.openxmlformats.org/drawingml/2006/main">
-            <a:r>
-              <a:t>Hinweise</a:t>
-            </a:r>
-          </a:p>
-          <a:p xmlns:a="http://schemas.openxmlformats.org/drawingml/2006/main">
-            <a:r>
-              <a:t>1. Im Gleichnis bekommt der Letzte gleich viel wie der Erste. Titel beschreibt Vergleichsgefühl. Nicht zwei Münzen gegen eine erzählen. Jeder einen Denar; Zusage an Erste erfüllt.</a:t>
-            </a:r>
-          </a:p>
-          <a:p xmlns:a="http://schemas.openxmlformats.org/drawingml/2006/main">
-            <a:r>
-              <a:t>2. Fünf Einladungszeiten, Auszahlung von den Letzten an erhalten. Sieben Rollen sind Bühnenwahl, fünf Vertreter sind Gruppen, keine Evangelien-Gesamtzahl. Niemand stellte die Letzten ein; nicht faul nennen.</a:t>
-            </a:r>
-          </a:p>
-          <a:p xmlns:a="http://schemas.openxmlformats.org/drawingml/2006/main">
-            <a:r>
-              <a:t>3. Anfang vom Himmelreich bestimmt Bedeutung. Gottes Barmherzigkeit nicht als Lohn für Überlegenheit beanspruchen. Theophylakt sieht Möglichkeit, auch spät durch Umkehr ins Reich zu kommen. Nicht folgern, gute Taten aufzuschieben: Eingeladene arbeiten. Quelle: https://azbyka.ru/otechnik/Feofilakt_Bolgarskij/tolkovanie-na-evangelie-ot-matfeja/20.</a:t>
-            </a:r>
-          </a:p>
-          <a:p xmlns:a="http://schemas.openxmlformats.org/drawingml/2006/main">
-            <a:r>
-              <a:t>4. Keine universelle Lohn-, Noten- oder Wettbewerbsregel. Im Alltag Zusage, Regeln und wirklichen Bedarf prüfen. Ruhige Bitte um Korrektur und gute Haltung zu anderen vereinbar.</a:t>
-            </a:r>
-          </a:p>
-          <a:p xmlns:a="http://schemas.openxmlformats.org/drawingml/2006/main">
-            <a:r>
-              <a:t>5. Reihenfolge Seite 3: 2,4,1,3 von links oben. Seite 4: Zusage gebrochen 1,6; Hilfe/Geschenk 2,3; Nachfragen 4,5. Anderer Kontext kann Schluss ändern.</a:t>
-            </a:r>
-          </a:p>
-          <a:p xmlns:a="http://schemas.openxmlformats.org/drawingml/2006/main">
-            <a:r>
-              <a:t>6. Erster Plan: Saschas Termin steht noch aus. Zweiter: fünf statt zehn Minuten, Zusage gebrochen. Nicht jede Bitte Neid nennen. Zeit klären; Geschenk bleibt.</a:t>
-            </a:r>
-          </a:p>
-          <a:p xmlns:a="http://schemas.openxmlformats.org/drawingml/2006/main">
-            <a:r>
-              <a:t>7. Vergleich kann echtes Bedürfnis zeigen. Es benennen, nicht „undankbar“ oder „schlechter“ urteilen. Fremder Erfolg bestimmt meinen Wert vor Gott nicht. Dank und Bitte zusammen.</a:t>
-            </a:r>
-          </a:p>
-          <a:p xmlns:a="http://schemas.openxmlformats.org/drawingml/2006/main">
-            <a:r>
-              <a:t>8. Keine sofortige Freude oder öffentliche Neidbeichte verlangen. Freundlichen Satz und Tat anbieten, auch wenn Gefühl bleibt. Gebet eigens verfasst, stilles Zuhören möglich. Bei Fragen zu Umkehr und Beichte Gespräch mit Priester anbieten.</a:t>
-            </a:r>
-          </a:p>
-          <a:p xmlns:a="http://schemas.openxmlformats.org/drawingml/2006/main">
-            <a:r>
-              <a:t/>
-            </a:r>
-          </a:p>
-          <a:p xmlns:a="http://schemas.openxmlformats.org/drawingml/2006/main">
-            <a:r>
-              <a:t>Quelle: vorhandener zweisprachiger Unterricht auf lessons.atapin.de; vorhandene Illustrationen unverändert.</a:t>
+              <a:t>11. Meine Antwort auf Barmherzigkeit — 3 Minuten.</a:t>
+            </a:r>
+          </a:p>
+          <a:p xmlns:a="http://schemas.openxmlformats.org/drawingml/2006/main">
+            <a:r>
+              <a:t/>
+            </a:r>
+          </a:p>
+          <a:p xmlns:a="http://schemas.openxmlformats.org/drawingml/2006/main">
+            <a:r>
+              <a:t>Worte: Wähle einen echten oder erfundenen Fall gleicher Gabe bei verschieden langer Teilnahme. Was bekam ich? Was erwartete ich zusätzlich? Wie antworte ich auf Güte zu anderen?</a:t>
+            </a:r>
+          </a:p>
+          <a:p xmlns:a="http://schemas.openxmlformats.org/drawingml/2006/main">
+            <a:r>
+              <a:t/>
+            </a:r>
+          </a:p>
+          <a:p xmlns:a="http://schemas.openxmlformats.org/drawingml/2006/main">
+            <a:r>
+              <a:t>Durchführung: Sechs persönliche Felder. Blatt bleibt bei dir. Keine öffentlichen Bekenntnisse verlangen. Stille und freiwilliges, eigens verfasstes Gebet.</a:t>
+            </a:r>
+          </a:p>
+          <a:p xmlns:a="http://schemas.openxmlformats.org/drawingml/2006/main">
+            <a:r>
+              <a:t/>
+            </a:r>
+          </a:p>
+          <a:p xmlns:a="http://schemas.openxmlformats.org/drawingml/2006/main">
+            <a:r>
+              <a:t>Frage: Welcher Schritt geht, auch wenn Murren noch da ist?</a:t>
+            </a:r>
+          </a:p>
+          <a:p xmlns:a="http://schemas.openxmlformats.org/drawingml/2006/main">
+            <a:r>
+              <a:t/>
+            </a:r>
+          </a:p>
+          <a:p xmlns:a="http://schemas.openxmlformats.org/drawingml/2006/main">
+            <a:r>
+              <a:t>Orientierung: Arbeit und Gefühl nennen, Erhaltenes erinnern, keine Kürzung fremder Güte verlangen, danken oder den anderen willkommen heißen. Gottes Barmherzigkeit ist kein exklusiver Vorrang.</a:t>
+            </a:r>
+          </a:p>
+          <a:p xmlns:a="http://schemas.openxmlformats.org/drawingml/2006/main">
+            <a:r>
+              <a:t/>
+            </a:r>
+          </a:p>
+          <a:p xmlns:a="http://schemas.openxmlformats.org/drawingml/2006/main">
+            <a:r>
+              <a:t>Rhythmus: 2+1 Minuten in der Reihenfolge der Schritte.</a:t>
+            </a:r>
+          </a:p>
+          <a:p xmlns:a="http://schemas.openxmlformats.org/drawingml/2006/main">
+            <a:r>
+              <a:t/>
+            </a:r>
+          </a:p>
+          <a:p xmlns:a="http://schemas.openxmlformats.org/drawingml/2006/main">
+            <a:r>
+              <a:t>Vorbereitung: Vollständiges Matthäus 20,1–16, fünf gleiche Spielsteine und sieben Rollen. Fünf Vertreter stehen für Gruppen, Gesamtzahl nicht zählen. Lesung, sofort Rollenspiel, erst dann Gespräch. Seiten 3–4 für Paare, 5 für Viererteams, 6 persönlich. Ersten Plan behalten.</a:t>
+            </a:r>
+          </a:p>
+          <a:p xmlns:a="http://schemas.openxmlformats.org/drawingml/2006/main">
+            <a:r>
+              <a:t/>
+            </a:r>
+          </a:p>
+          <a:p xmlns:a="http://schemas.openxmlformats.org/drawingml/2006/main">
+            <a:r>
+              <a:t>Sinn: Jeder bekommt einen Denar. Erste arbeiteten länger, Letzte eine Stunde. Vereinbarung erfüllt, Murren wegen Gleichstellung. Der Letzte bekam nicht mehr. Reich der Himmel: Gottes Güte zu spät Gekommenen richtet sich nicht nach einem Anspruch auf Vorrang. Arbeit bleibt wichtig: Eingeladene gehen arbeiten. Umkehr nicht aufschieben.</a:t>
+            </a:r>
+          </a:p>
+          <a:p xmlns:a="http://schemas.openxmlformats.org/drawingml/2006/main">
+            <a:r>
+              <a:t/>
+            </a:r>
+          </a:p>
+          <a:p xmlns:a="http://schemas.openxmlformats.org/drawingml/2006/main">
+            <a:r>
+              <a:t>Theophylakt verbindet das Gleichnis mit Aufnahme spät Umkehrender. Quelle: https://azbyka.ru/otechnik/Feofilakt_Bolgarskij/tolkovanie-na-evangelie-ot-matfeja/20</a:t>
+            </a:r>
+          </a:p>
+          <a:p xmlns:a="http://schemas.openxmlformats.org/drawingml/2006/main">
+            <a:r>
+              <a:t/>
+            </a:r>
+          </a:p>
+          <a:p xmlns:a="http://schemas.openxmlformats.org/drawingml/2006/main">
+            <a:r>
+              <a:t>Keine universelle Lohn-, Noten- oder Wettbewerbsregel. Stundenlohn muss nach Vertrag gezahlt werden, keine Ausbeutung. Im Gleichnis lautet der Grund: Niemand hat uns eingestellt. Mischas Grund gehört nur zum erfundenen Beispiel. Neue Information verändert keine Portionen und führt keine gebrochene Zusage ein.</a:t>
+            </a:r>
+          </a:p>
+          <a:p xmlns:a="http://schemas.openxmlformats.org/drawingml/2006/main">
+            <a:r>
+              <a:t/>
+            </a:r>
+          </a:p>
+          <a:p xmlns:a="http://schemas.openxmlformats.org/drawingml/2006/main">
+            <a:r>
+              <a:t>Schlüssel: Vereinbarung, neue Einladungen, Auszahlung, Murren und Antwort. Fälle: gemeinsame Gabe 1–3; Regel verletzt 4–5; nachfragen 6. Zuerst Hauptfälle behandeln.</a:t>
+            </a:r>
+          </a:p>
+          <a:p xmlns:a="http://schemas.openxmlformats.org/drawingml/2006/main">
+            <a:r>
+              <a:t/>
+            </a:r>
+          </a:p>
+          <a:p xmlns:a="http://schemas.openxmlformats.org/drawingml/2006/main">
+            <a:r>
+              <a:t>Keine sofortige Freude und keine öffentlichen Bekenntnisse verlangen. Persönliches Blatt bleibt beim Jugendlichen, Gebet freiwillig und eigens verfasst. Aufrichtige Umkehr anderer nicht beurteilen. Persönliche Fragen können mit einem Priester besprochen werden.</a:t>
+            </a:r>
+          </a:p>
+          <a:p xmlns:a="http://schemas.openxmlformats.org/drawingml/2006/main">
+            <a:r>
+              <a:t/>
+            </a:r>
+          </a:p>
+          <a:p xmlns:a="http://schemas.openxmlformats.org/drawingml/2006/main">
+            <a:r>
+              <a:t/>
+            </a:r>
+          </a:p>
+          <a:p xmlns:a="http://schemas.openxmlformats.org/drawingml/2006/main">
+            <a:r>
+              <a:t>Herr Jesus Christus, ich danke Dir für Deine Barmherzigkeit. Vergib mein Murren, wenn Du einen anderen ebenso gütig annimmst. Hilf mir, mit Liebe zu arbeiten, keinen Vorrang zu verlangen und mich über die Umkehr meines Nächsten zu Dir zu freuen. Amen.</a:t>
+            </a:r>
+          </a:p>
+          <a:p xmlns:a="http://schemas.openxmlformats.org/drawingml/2006/main">
+            <a:r>
+              <a:t/>
+            </a:r>
+          </a:p>
+          <a:p xmlns:a="http://schemas.openxmlformats.org/drawingml/2006/main">
+            <a:r>
+              <a:t>Quelle: https://bible.by/syn/40/20/</a:t>
             </a:r>
           </a:p>
         </p:txBody>
@@ -1008,122 +1048,132 @@
           <a:lstStyle xmlns:a="http://schemas.openxmlformats.org/drawingml/2006/main"/>
           <a:p xmlns:a="http://schemas.openxmlformats.org/drawingml/2006/main">
             <a:r>
-              <a:t>12. Barmherzigkeit und mein Wert — 2 Minuten.</a:t>
-            </a:r>
-          </a:p>
-          <a:p xmlns:a="http://schemas.openxmlformats.org/drawingml/2006/main">
-            <a:r>
-              <a:t>Worte: Zwei Sätze abschließen: „Der erste Arbeiter bekam…“ und „Wenn einem anderen geholfen wurde, kann ich…“. Welche Tat beim nächsten Vergleich?</a:t>
-            </a:r>
-          </a:p>
-          <a:p xmlns:a="http://schemas.openxmlformats.org/drawingml/2006/main">
-            <a:r>
-              <a:t>Durchführung: Zwei kurze Antworten hören. Jeder wählt ersten Schritt und Zeitpunkt. Nächstes Treffen freiwillig von Versuch und Schwierigkeiten erzählen.</a:t>
-            </a:r>
-          </a:p>
-          <a:p xmlns:a="http://schemas.openxmlformats.org/drawingml/2006/main">
-            <a:r>
-              <a:t>Frage: Was lehrt das Gleichnis über Gott und den Nächsten?</a:t>
-            </a:r>
-          </a:p>
-          <a:p xmlns:a="http://schemas.openxmlformats.org/drawingml/2006/main">
-            <a:r>
-              <a:t>Orientierung: Gottes Barmherzigkeit ohne Anspruch auf Überlegenheit annehmen. Der Hausherr erfüllte die Vereinbarung und war großzügig. Freude über fremdes Gutes und ruhige Bitte um eigenes Bedürfnis verbinden.</a:t>
-            </a:r>
-          </a:p>
-          <a:p xmlns:a="http://schemas.openxmlformats.org/drawingml/2006/main">
-            <a:r>
-              <a:t>Rhythmus: 1 Minute Antworten; 1 Minute Schritt und Abschluss.</a:t>
-            </a:r>
-          </a:p>
-          <a:p xmlns:a="http://schemas.openxmlformats.org/drawingml/2006/main">
-            <a:r>
-              <a:t/>
-            </a:r>
-          </a:p>
-          <a:p xmlns:a="http://schemas.openxmlformats.org/drawingml/2006/main">
-            <a:r>
-              <a:t>Vorbereitung</a:t>
-            </a:r>
-          </a:p>
-          <a:p xmlns:a="http://schemas.openxmlformats.org/drawingml/2006/main">
-            <a:r>
-              <a:t>1. Zwölf Folien und Moderationsnotizen öffnen. Ganzes Matthäus 20,1–16 vorbereiten. Sofort nach dem Lesen spielen, danach besprechen.</a:t>
-            </a:r>
-          </a:p>
-          <a:p xmlns:a="http://schemas.openxmlformats.org/drawingml/2006/main">
-            <a:r>
-              <a:t>2. Seiten 1–2 pro Gruppe, 3–4 pro Paar, 5 pro Viererteam, 6 pro Person drucken. Schreibfelder auf Seiten 3 und 5 nicht zerschneiden. Alle Karten illustriert; Graustufen möglich.</a:t>
-            </a:r>
-          </a:p>
-          <a:p xmlns:a="http://schemas.openxmlformats.org/drawingml/2006/main">
-            <a:r>
-              <a:t>3. Fünf gleiche Spielsteine oder Knöpfe: jeder ein Denar. Requisiten, keine Teilnehmerbelohnung. Sieben Rollen auswählen; Lehrkraft liest Erzählung und Christi Schlussworte.</a:t>
-            </a:r>
-          </a:p>
-          <a:p xmlns:a="http://schemas.openxmlformats.org/drawingml/2006/main">
-            <a:r>
-              <a:t>4. Paare und Viererteams bilden. Bei kleinerem Team liest einer zwei Informationen. Neue Bedingung über fünf Minuten bis Phase 9 zurückhalten. Ersten Plan nicht löschen.</a:t>
-            </a:r>
-          </a:p>
-          <a:p xmlns:a="http://schemas.openxmlformats.org/drawingml/2006/main">
-            <a:r>
-              <a:t>5. Stifte und gegebenenfalls Werkstattmaterial vorbereiten. Persönliches Blatt bleibt beim Jugendlichen; erfundene Fälle zulässig.</a:t>
-            </a:r>
-          </a:p>
-          <a:p xmlns:a="http://schemas.openxmlformats.org/drawingml/2006/main">
-            <a:r>
-              <a:t>Hinweise</a:t>
-            </a:r>
-          </a:p>
-          <a:p xmlns:a="http://schemas.openxmlformats.org/drawingml/2006/main">
-            <a:r>
-              <a:t>1. Im Gleichnis bekommt der Letzte gleich viel wie der Erste. Titel beschreibt Vergleichsgefühl. Nicht zwei Münzen gegen eine erzählen. Jeder einen Denar; Zusage an Erste erfüllt.</a:t>
-            </a:r>
-          </a:p>
-          <a:p xmlns:a="http://schemas.openxmlformats.org/drawingml/2006/main">
-            <a:r>
-              <a:t>2. Fünf Einladungszeiten, Auszahlung von den Letzten an erhalten. Sieben Rollen sind Bühnenwahl, fünf Vertreter sind Gruppen, keine Evangelien-Gesamtzahl. Niemand stellte die Letzten ein; nicht faul nennen.</a:t>
-            </a:r>
-          </a:p>
-          <a:p xmlns:a="http://schemas.openxmlformats.org/drawingml/2006/main">
-            <a:r>
-              <a:t>3. Anfang vom Himmelreich bestimmt Bedeutung. Gottes Barmherzigkeit nicht als Lohn für Überlegenheit beanspruchen. Theophylakt sieht Möglichkeit, auch spät durch Umkehr ins Reich zu kommen. Nicht folgern, gute Taten aufzuschieben: Eingeladene arbeiten. Quelle: https://azbyka.ru/otechnik/Feofilakt_Bolgarskij/tolkovanie-na-evangelie-ot-matfeja/20.</a:t>
-            </a:r>
-          </a:p>
-          <a:p xmlns:a="http://schemas.openxmlformats.org/drawingml/2006/main">
-            <a:r>
-              <a:t>4. Keine universelle Lohn-, Noten- oder Wettbewerbsregel. Im Alltag Zusage, Regeln und wirklichen Bedarf prüfen. Ruhige Bitte um Korrektur und gute Haltung zu anderen vereinbar.</a:t>
-            </a:r>
-          </a:p>
-          <a:p xmlns:a="http://schemas.openxmlformats.org/drawingml/2006/main">
-            <a:r>
-              <a:t>5. Reihenfolge Seite 3: 2,4,1,3 von links oben. Seite 4: Zusage gebrochen 1,6; Hilfe/Geschenk 2,3; Nachfragen 4,5. Anderer Kontext kann Schluss ändern.</a:t>
-            </a:r>
-          </a:p>
-          <a:p xmlns:a="http://schemas.openxmlformats.org/drawingml/2006/main">
-            <a:r>
-              <a:t>6. Erster Plan: Saschas Termin steht noch aus. Zweiter: fünf statt zehn Minuten, Zusage gebrochen. Nicht jede Bitte Neid nennen. Zeit klären; Geschenk bleibt.</a:t>
-            </a:r>
-          </a:p>
-          <a:p xmlns:a="http://schemas.openxmlformats.org/drawingml/2006/main">
-            <a:r>
-              <a:t>7. Vergleich kann echtes Bedürfnis zeigen. Es benennen, nicht „undankbar“ oder „schlechter“ urteilen. Fremder Erfolg bestimmt meinen Wert vor Gott nicht. Dank und Bitte zusammen.</a:t>
-            </a:r>
-          </a:p>
-          <a:p xmlns:a="http://schemas.openxmlformats.org/drawingml/2006/main">
-            <a:r>
-              <a:t>8. Keine sofortige Freude oder öffentliche Neidbeichte verlangen. Freundlichen Satz und Tat anbieten, auch wenn Gefühl bleibt. Gebet eigens verfasst, stilles Zuhören möglich. Bei Fragen zu Umkehr und Beichte Gespräch mit Priester anbieten.</a:t>
-            </a:r>
-          </a:p>
-          <a:p xmlns:a="http://schemas.openxmlformats.org/drawingml/2006/main">
-            <a:r>
-              <a:t/>
-            </a:r>
-          </a:p>
-          <a:p xmlns:a="http://schemas.openxmlformats.org/drawingml/2006/main">
-            <a:r>
-              <a:t>Quelle: vorhandener zweisprachiger Unterricht auf lessons.atapin.de; vorhandene Illustrationen unverändert.</a:t>
+              <a:t>12. Die Großzügigkeit des Hausherrn — 2 Minuten.</a:t>
+            </a:r>
+          </a:p>
+          <a:p xmlns:a="http://schemas.openxmlformats.org/drawingml/2006/main">
+            <a:r>
+              <a:t/>
+            </a:r>
+          </a:p>
+          <a:p xmlns:a="http://schemas.openxmlformats.org/drawingml/2006/main">
+            <a:r>
+              <a:t>Worte: Ergänzt: Bei verschiedener Arbeitszeit bekamen alle … und Die Güte des Hausherrn lehrt mich … Nennt einen passenden Vers.</a:t>
+            </a:r>
+          </a:p>
+          <a:p xmlns:a="http://schemas.openxmlformats.org/drawingml/2006/main">
+            <a:r>
+              <a:t/>
+            </a:r>
+          </a:p>
+          <a:p xmlns:a="http://schemas.openxmlformats.org/drawingml/2006/main">
+            <a:r>
+              <a:t>Durchführung: Zwei unabhängige Antworten vor dem Abschluss annehmen. Verse 1 und 13–16 aufgreifen. Freiwilligen Schritt für die Woche wählen.</a:t>
+            </a:r>
+          </a:p>
+          <a:p xmlns:a="http://schemas.openxmlformats.org/drawingml/2006/main">
+            <a:r>
+              <a:t/>
+            </a:r>
+          </a:p>
+          <a:p xmlns:a="http://schemas.openxmlformats.org/drawingml/2006/main">
+            <a:r>
+              <a:t>Frage: Was zeigt das Gleichnis über Gottes Barmherzigkeit?</a:t>
+            </a:r>
+          </a:p>
+          <a:p xmlns:a="http://schemas.openxmlformats.org/drawingml/2006/main">
+            <a:r>
+              <a:t/>
+            </a:r>
+          </a:p>
+          <a:p xmlns:a="http://schemas.openxmlformats.org/drawingml/2006/main">
+            <a:r>
+              <a:t>Orientierung: Jeder bekam einen Denar. Gott ruft und nimmt auch spät Gekommene an. Die Ersten sollen über seine Güte nicht murren. Kein Aufschieben empfehlen: Eingeladene gehen arbeiten. Keine allgemeine Regel für gleiche Löhne oder Noten ableiten.</a:t>
+            </a:r>
+          </a:p>
+          <a:p xmlns:a="http://schemas.openxmlformats.org/drawingml/2006/main">
+            <a:r>
+              <a:t/>
+            </a:r>
+          </a:p>
+          <a:p xmlns:a="http://schemas.openxmlformats.org/drawingml/2006/main">
+            <a:r>
+              <a:t>Rhythmus: 1+1 Minuten in der Reihenfolge der Schritte.</a:t>
+            </a:r>
+          </a:p>
+          <a:p xmlns:a="http://schemas.openxmlformats.org/drawingml/2006/main">
+            <a:r>
+              <a:t/>
+            </a:r>
+          </a:p>
+          <a:p xmlns:a="http://schemas.openxmlformats.org/drawingml/2006/main">
+            <a:r>
+              <a:t>Vorbereitung: Vollständiges Matthäus 20,1–16, fünf gleiche Spielsteine und sieben Rollen. Fünf Vertreter stehen für Gruppen, Gesamtzahl nicht zählen. Lesung, sofort Rollenspiel, erst dann Gespräch. Seiten 3–4 für Paare, 5 für Viererteams, 6 persönlich. Ersten Plan behalten.</a:t>
+            </a:r>
+          </a:p>
+          <a:p xmlns:a="http://schemas.openxmlformats.org/drawingml/2006/main">
+            <a:r>
+              <a:t/>
+            </a:r>
+          </a:p>
+          <a:p xmlns:a="http://schemas.openxmlformats.org/drawingml/2006/main">
+            <a:r>
+              <a:t>Sinn: Jeder bekommt einen Denar. Erste arbeiteten länger, Letzte eine Stunde. Vereinbarung erfüllt, Murren wegen Gleichstellung. Der Letzte bekam nicht mehr. Reich der Himmel: Gottes Güte zu spät Gekommenen richtet sich nicht nach einem Anspruch auf Vorrang. Arbeit bleibt wichtig: Eingeladene gehen arbeiten. Umkehr nicht aufschieben.</a:t>
+            </a:r>
+          </a:p>
+          <a:p xmlns:a="http://schemas.openxmlformats.org/drawingml/2006/main">
+            <a:r>
+              <a:t/>
+            </a:r>
+          </a:p>
+          <a:p xmlns:a="http://schemas.openxmlformats.org/drawingml/2006/main">
+            <a:r>
+              <a:t>Theophylakt verbindet das Gleichnis mit Aufnahme spät Umkehrender. Quelle: https://azbyka.ru/otechnik/Feofilakt_Bolgarskij/tolkovanie-na-evangelie-ot-matfeja/20</a:t>
+            </a:r>
+          </a:p>
+          <a:p xmlns:a="http://schemas.openxmlformats.org/drawingml/2006/main">
+            <a:r>
+              <a:t/>
+            </a:r>
+          </a:p>
+          <a:p xmlns:a="http://schemas.openxmlformats.org/drawingml/2006/main">
+            <a:r>
+              <a:t>Keine universelle Lohn-, Noten- oder Wettbewerbsregel. Stundenlohn muss nach Vertrag gezahlt werden, keine Ausbeutung. Im Gleichnis lautet der Grund: Niemand hat uns eingestellt. Mischas Grund gehört nur zum erfundenen Beispiel. Neue Information verändert keine Portionen und führt keine gebrochene Zusage ein.</a:t>
+            </a:r>
+          </a:p>
+          <a:p xmlns:a="http://schemas.openxmlformats.org/drawingml/2006/main">
+            <a:r>
+              <a:t/>
+            </a:r>
+          </a:p>
+          <a:p xmlns:a="http://schemas.openxmlformats.org/drawingml/2006/main">
+            <a:r>
+              <a:t>Schlüssel: Vereinbarung, neue Einladungen, Auszahlung, Murren und Antwort. Fälle: gemeinsame Gabe 1–3; Regel verletzt 4–5; nachfragen 6. Zuerst Hauptfälle behandeln.</a:t>
+            </a:r>
+          </a:p>
+          <a:p xmlns:a="http://schemas.openxmlformats.org/drawingml/2006/main">
+            <a:r>
+              <a:t/>
+            </a:r>
+          </a:p>
+          <a:p xmlns:a="http://schemas.openxmlformats.org/drawingml/2006/main">
+            <a:r>
+              <a:t>Keine sofortige Freude und keine öffentlichen Bekenntnisse verlangen. Persönliches Blatt bleibt beim Jugendlichen, Gebet freiwillig und eigens verfasst. Aufrichtige Umkehr anderer nicht beurteilen. Persönliche Fragen können mit einem Priester besprochen werden.</a:t>
+            </a:r>
+          </a:p>
+          <a:p xmlns:a="http://schemas.openxmlformats.org/drawingml/2006/main">
+            <a:r>
+              <a:t/>
+            </a:r>
+          </a:p>
+          <a:p xmlns:a="http://schemas.openxmlformats.org/drawingml/2006/main">
+            <a:r>
+              <a:t/>
+            </a:r>
+          </a:p>
+          <a:p xmlns:a="http://schemas.openxmlformats.org/drawingml/2006/main">
+            <a:r>
+              <a:t>Quelle: https://bible.by/syn/40/20/</a:t>
             </a:r>
           </a:p>
         </p:txBody>
@@ -1198,107 +1248,117 @@
           </a:p>
           <a:p xmlns:a="http://schemas.openxmlformats.org/drawingml/2006/main">
             <a:r>
-              <a:t>Worte: Wir lesen Matthäus 20,1–16 vollständig. Hören wir alle fünf Ausgänge des Hausherrn und die Auszahlungsreihenfolge. Sofort danach spielen wir das Gleichnis.</a:t>
-            </a:r>
-          </a:p>
-          <a:p xmlns:a="http://schemas.openxmlformats.org/drawingml/2006/main">
-            <a:r>
-              <a:t>Durchführung: Alle 16 Verse ohne Zwischenbesprechung lesen. Sieben Teilnehmende erhalten vorher Rollen. Die Lehrkraft liest Erzähler und Schlussworte Christi. Danach sofort beginnen.</a:t>
-            </a:r>
-          </a:p>
-          <a:p xmlns:a="http://schemas.openxmlformats.org/drawingml/2006/main">
-            <a:r>
-              <a:t>Auftrag: Vereinbarung, Antwort der späten Arbeiter und Reihenfolge merken.</a:t>
-            </a:r>
-          </a:p>
-          <a:p xmlns:a="http://schemas.openxmlformats.org/drawingml/2006/main">
-            <a:r>
-              <a:t>Orientierung: Früh am Morgen ein Denar; dann dritte, sechste, neunte, elfte Stunde. Niemand stellte die Letzten ein. Abends Auszahlung von den Letzten an.</a:t>
-            </a:r>
-          </a:p>
-          <a:p xmlns:a="http://schemas.openxmlformats.org/drawingml/2006/main">
-            <a:r>
-              <a:t>Rhythmus: 2,5 Minuten Lesen; 30 Sekunden Übergang.</a:t>
-            </a:r>
-          </a:p>
-          <a:p xmlns:a="http://schemas.openxmlformats.org/drawingml/2006/main">
-            <a:r>
-              <a:t/>
-            </a:r>
-          </a:p>
-          <a:p xmlns:a="http://schemas.openxmlformats.org/drawingml/2006/main">
-            <a:r>
-              <a:t>Vorbereitung</a:t>
-            </a:r>
-          </a:p>
-          <a:p xmlns:a="http://schemas.openxmlformats.org/drawingml/2006/main">
-            <a:r>
-              <a:t>1. Zwölf Folien und Moderationsnotizen öffnen. Ganzes Matthäus 20,1–16 vorbereiten. Sofort nach dem Lesen spielen, danach besprechen.</a:t>
-            </a:r>
-          </a:p>
-          <a:p xmlns:a="http://schemas.openxmlformats.org/drawingml/2006/main">
-            <a:r>
-              <a:t>2. Seiten 1–2 pro Gruppe, 3–4 pro Paar, 5 pro Viererteam, 6 pro Person drucken. Schreibfelder auf Seiten 3 und 5 nicht zerschneiden. Alle Karten illustriert; Graustufen möglich.</a:t>
-            </a:r>
-          </a:p>
-          <a:p xmlns:a="http://schemas.openxmlformats.org/drawingml/2006/main">
-            <a:r>
-              <a:t>3. Fünf gleiche Spielsteine oder Knöpfe: jeder ein Denar. Requisiten, keine Teilnehmerbelohnung. Sieben Rollen auswählen; Lehrkraft liest Erzählung und Christi Schlussworte.</a:t>
-            </a:r>
-          </a:p>
-          <a:p xmlns:a="http://schemas.openxmlformats.org/drawingml/2006/main">
-            <a:r>
-              <a:t>4. Paare und Viererteams bilden. Bei kleinerem Team liest einer zwei Informationen. Neue Bedingung über fünf Minuten bis Phase 9 zurückhalten. Ersten Plan nicht löschen.</a:t>
-            </a:r>
-          </a:p>
-          <a:p xmlns:a="http://schemas.openxmlformats.org/drawingml/2006/main">
-            <a:r>
-              <a:t>5. Stifte und gegebenenfalls Werkstattmaterial vorbereiten. Persönliches Blatt bleibt beim Jugendlichen; erfundene Fälle zulässig.</a:t>
-            </a:r>
-          </a:p>
-          <a:p xmlns:a="http://schemas.openxmlformats.org/drawingml/2006/main">
-            <a:r>
-              <a:t>Hinweise</a:t>
-            </a:r>
-          </a:p>
-          <a:p xmlns:a="http://schemas.openxmlformats.org/drawingml/2006/main">
-            <a:r>
-              <a:t>1. Im Gleichnis bekommt der Letzte gleich viel wie der Erste. Titel beschreibt Vergleichsgefühl. Nicht zwei Münzen gegen eine erzählen. Jeder einen Denar; Zusage an Erste erfüllt.</a:t>
-            </a:r>
-          </a:p>
-          <a:p xmlns:a="http://schemas.openxmlformats.org/drawingml/2006/main">
-            <a:r>
-              <a:t>2. Fünf Einladungszeiten, Auszahlung von den Letzten an erhalten. Sieben Rollen sind Bühnenwahl, fünf Vertreter sind Gruppen, keine Evangelien-Gesamtzahl. Niemand stellte die Letzten ein; nicht faul nennen.</a:t>
-            </a:r>
-          </a:p>
-          <a:p xmlns:a="http://schemas.openxmlformats.org/drawingml/2006/main">
-            <a:r>
-              <a:t>3. Anfang vom Himmelreich bestimmt Bedeutung. Gottes Barmherzigkeit nicht als Lohn für Überlegenheit beanspruchen. Theophylakt sieht Möglichkeit, auch spät durch Umkehr ins Reich zu kommen. Nicht folgern, gute Taten aufzuschieben: Eingeladene arbeiten. Quelle: https://azbyka.ru/otechnik/Feofilakt_Bolgarskij/tolkovanie-na-evangelie-ot-matfeja/20.</a:t>
-            </a:r>
-          </a:p>
-          <a:p xmlns:a="http://schemas.openxmlformats.org/drawingml/2006/main">
-            <a:r>
-              <a:t>4. Keine universelle Lohn-, Noten- oder Wettbewerbsregel. Im Alltag Zusage, Regeln und wirklichen Bedarf prüfen. Ruhige Bitte um Korrektur und gute Haltung zu anderen vereinbar.</a:t>
-            </a:r>
-          </a:p>
-          <a:p xmlns:a="http://schemas.openxmlformats.org/drawingml/2006/main">
-            <a:r>
-              <a:t>5. Reihenfolge Seite 3: 2,4,1,3 von links oben. Seite 4: Zusage gebrochen 1,6; Hilfe/Geschenk 2,3; Nachfragen 4,5. Anderer Kontext kann Schluss ändern.</a:t>
-            </a:r>
-          </a:p>
-          <a:p xmlns:a="http://schemas.openxmlformats.org/drawingml/2006/main">
-            <a:r>
-              <a:t>6. Erster Plan: Saschas Termin steht noch aus. Zweiter: fünf statt zehn Minuten, Zusage gebrochen. Nicht jede Bitte Neid nennen. Zeit klären; Geschenk bleibt.</a:t>
-            </a:r>
-          </a:p>
-          <a:p xmlns:a="http://schemas.openxmlformats.org/drawingml/2006/main">
-            <a:r>
-              <a:t>7. Vergleich kann echtes Bedürfnis zeigen. Es benennen, nicht „undankbar“ oder „schlechter“ urteilen. Fremder Erfolg bestimmt meinen Wert vor Gott nicht. Dank und Bitte zusammen.</a:t>
-            </a:r>
-          </a:p>
-          <a:p xmlns:a="http://schemas.openxmlformats.org/drawingml/2006/main">
-            <a:r>
-              <a:t>8. Keine sofortige Freude oder öffentliche Neidbeichte verlangen. Freundlichen Satz und Tat anbieten, auch wenn Gefühl bleibt. Gebet eigens verfasst, stilles Zuhören möglich. Bei Fragen zu Umkehr und Beichte Gespräch mit Priester anbieten.</a:t>
+              <a:t/>
+            </a:r>
+          </a:p>
+          <a:p xmlns:a="http://schemas.openxmlformats.org/drawingml/2006/main">
+            <a:r>
+              <a:t>Worte: Wir lesen Matthäus 20,1–16 vollständig. Achtet auf die Vereinbarung, fünf Einladungen, Auszahlung und Antwort.</a:t>
+            </a:r>
+          </a:p>
+          <a:p xmlns:a="http://schemas.openxmlformats.org/drawingml/2006/main">
+            <a:r>
+              <a:t/>
+            </a:r>
+          </a:p>
+          <a:p xmlns:a="http://schemas.openxmlformats.org/drawingml/2006/main">
+            <a:r>
+              <a:t>Durchführung: Alle sechzehn Verse ohne Unterbrechung lesen. Sieben Rollen vorher verteilen. Sofort danach Rollenspiel, Besprechung erst nach dem Ende.</a:t>
+            </a:r>
+          </a:p>
+          <a:p xmlns:a="http://schemas.openxmlformats.org/drawingml/2006/main">
+            <a:r>
+              <a:t/>
+            </a:r>
+          </a:p>
+          <a:p xmlns:a="http://schemas.openxmlformats.org/drawingml/2006/main">
+            <a:r>
+              <a:t>Frage: Was wurde den Ersten versprochen und was bekamen die Letzten?</a:t>
+            </a:r>
+          </a:p>
+          <a:p xmlns:a="http://schemas.openxmlformats.org/drawingml/2006/main">
+            <a:r>
+              <a:t/>
+            </a:r>
+          </a:p>
+          <a:p xmlns:a="http://schemas.openxmlformats.org/drawingml/2006/main">
+            <a:r>
+              <a:t>Orientierung: Ein Denar für den Tag wurde vereinbart. Die Letzten bekamen einen Denar, die Ersten ebenso. Niemand hatte die Letzten eingestellt.</a:t>
+            </a:r>
+          </a:p>
+          <a:p xmlns:a="http://schemas.openxmlformats.org/drawingml/2006/main">
+            <a:r>
+              <a:t/>
+            </a:r>
+          </a:p>
+          <a:p xmlns:a="http://schemas.openxmlformats.org/drawingml/2006/main">
+            <a:r>
+              <a:t>Rhythmus: 2,5+0,5 Minuten in der Reihenfolge der Schritte.</a:t>
+            </a:r>
+          </a:p>
+          <a:p xmlns:a="http://schemas.openxmlformats.org/drawingml/2006/main">
+            <a:r>
+              <a:t/>
+            </a:r>
+          </a:p>
+          <a:p xmlns:a="http://schemas.openxmlformats.org/drawingml/2006/main">
+            <a:r>
+              <a:t>Vorbereitung: Vollständiges Matthäus 20,1–16, fünf gleiche Spielsteine und sieben Rollen. Fünf Vertreter stehen für Gruppen, Gesamtzahl nicht zählen. Lesung, sofort Rollenspiel, erst dann Gespräch. Seiten 3–4 für Paare, 5 für Viererteams, 6 persönlich. Ersten Plan behalten.</a:t>
+            </a:r>
+          </a:p>
+          <a:p xmlns:a="http://schemas.openxmlformats.org/drawingml/2006/main">
+            <a:r>
+              <a:t/>
+            </a:r>
+          </a:p>
+          <a:p xmlns:a="http://schemas.openxmlformats.org/drawingml/2006/main">
+            <a:r>
+              <a:t>Sinn: Jeder bekommt einen Denar. Erste arbeiteten länger, Letzte eine Stunde. Vereinbarung erfüllt, Murren wegen Gleichstellung. Der Letzte bekam nicht mehr. Reich der Himmel: Gottes Güte zu spät Gekommenen richtet sich nicht nach einem Anspruch auf Vorrang. Arbeit bleibt wichtig: Eingeladene gehen arbeiten. Umkehr nicht aufschieben.</a:t>
+            </a:r>
+          </a:p>
+          <a:p xmlns:a="http://schemas.openxmlformats.org/drawingml/2006/main">
+            <a:r>
+              <a:t/>
+            </a:r>
+          </a:p>
+          <a:p xmlns:a="http://schemas.openxmlformats.org/drawingml/2006/main">
+            <a:r>
+              <a:t>Theophylakt verbindet das Gleichnis mit Aufnahme spät Umkehrender. Quelle: https://azbyka.ru/otechnik/Feofilakt_Bolgarskij/tolkovanie-na-evangelie-ot-matfeja/20</a:t>
+            </a:r>
+          </a:p>
+          <a:p xmlns:a="http://schemas.openxmlformats.org/drawingml/2006/main">
+            <a:r>
+              <a:t/>
+            </a:r>
+          </a:p>
+          <a:p xmlns:a="http://schemas.openxmlformats.org/drawingml/2006/main">
+            <a:r>
+              <a:t>Keine universelle Lohn-, Noten- oder Wettbewerbsregel. Stundenlohn muss nach Vertrag gezahlt werden, keine Ausbeutung. Im Gleichnis lautet der Grund: Niemand hat uns eingestellt. Mischas Grund gehört nur zum erfundenen Beispiel. Neue Information verändert keine Portionen und führt keine gebrochene Zusage ein.</a:t>
+            </a:r>
+          </a:p>
+          <a:p xmlns:a="http://schemas.openxmlformats.org/drawingml/2006/main">
+            <a:r>
+              <a:t/>
+            </a:r>
+          </a:p>
+          <a:p xmlns:a="http://schemas.openxmlformats.org/drawingml/2006/main">
+            <a:r>
+              <a:t>Schlüssel: Vereinbarung, neue Einladungen, Auszahlung, Murren und Antwort. Fälle: gemeinsame Gabe 1–3; Regel verletzt 4–5; nachfragen 6. Zuerst Hauptfälle behandeln.</a:t>
+            </a:r>
+          </a:p>
+          <a:p xmlns:a="http://schemas.openxmlformats.org/drawingml/2006/main">
+            <a:r>
+              <a:t/>
+            </a:r>
+          </a:p>
+          <a:p xmlns:a="http://schemas.openxmlformats.org/drawingml/2006/main">
+            <a:r>
+              <a:t>Keine sofortige Freude und keine öffentlichen Bekenntnisse verlangen. Persönliches Blatt bleibt beim Jugendlichen, Gebet freiwillig und eigens verfasst. Aufrichtige Umkehr anderer nicht beurteilen. Persönliche Fragen können mit einem Priester besprochen werden.</a:t>
+            </a:r>
+          </a:p>
+          <a:p xmlns:a="http://schemas.openxmlformats.org/drawingml/2006/main">
+            <a:r>
+              <a:t/>
             </a:r>
           </a:p>
           <a:p xmlns:a="http://schemas.openxmlformats.org/drawingml/2006/main">
@@ -1458,7 +1518,7 @@
           </a:p>
           <a:p xmlns:a="http://schemas.openxmlformats.org/drawingml/2006/main">
             <a:r>
-              <a:t>Quelle: vorhandener zweisprachiger Unterricht auf lessons.atapin.de; vorhandene Illustrationen unverändert.</a:t>
+              <a:t>Quelle: https://bible.by/syn/40/20/</a:t>
             </a:r>
           </a:p>
         </p:txBody>
@@ -1528,112 +1588,122 @@
           <a:lstStyle xmlns:a="http://schemas.openxmlformats.org/drawingml/2006/main"/>
           <a:p xmlns:a="http://schemas.openxmlformats.org/drawingml/2006/main">
             <a:r>
-              <a:t>3. Ein Denar für jeden — 7 Minuten.</a:t>
-            </a:r>
-          </a:p>
-          <a:p xmlns:a="http://schemas.openxmlformats.org/drawingml/2006/main">
-            <a:r>
-              <a:t>Worte: Der Hausherr ruft zu verschiedenen Zeiten. Der Verwalter bezahlt von den Letzten an. Die Ersten erwarten mehr, obwohl sie einen Denar vereinbart hatten. Bis zur Antwort des Hausherrn und den Schlussworten Christi spielen.</a:t>
-            </a:r>
-          </a:p>
-          <a:p xmlns:a="http://schemas.openxmlformats.org/drawingml/2006/main">
-            <a:r>
-              <a:t>Durchführung: Hausherr, Verwalter, fünf Vertreter der Einstellungszeiten. Alle Einladungen, Auszahlung, Murren und Antwort nach dem vollständigen Text spielen. Fünf Vertreter stehen für Gruppen; der Text nennt keine Gesamtzahl. Besprechung erst nach dem Schluss.</a:t>
-            </a:r>
-          </a:p>
-          <a:p xmlns:a="http://schemas.openxmlformats.org/drawingml/2006/main">
-            <a:r>
-              <a:t>Beobachtung: Was wurde den Ersten versprochen, wie änderte fremder Lohn ihre Erwartung?</a:t>
-            </a:r>
-          </a:p>
-          <a:p xmlns:a="http://schemas.openxmlformats.org/drawingml/2006/main">
-            <a:r>
-              <a:t>Orientierung: Jeder Vertreter bekommt einen gleichen Spielstein. Der vereinbarte Lohn des Ersten wurde nicht gekürzt. Der Letzte bekam gleich viel. Keine Versöhnung oder Strafe hinzuerfinden.</a:t>
-            </a:r>
-          </a:p>
-          <a:p xmlns:a="http://schemas.openxmlformats.org/drawingml/2006/main">
-            <a:r>
-              <a:t>Rhythmus: 3 Minuten fünf Einladungen; 2 Minuten Auszahlung; 2 Minuten Murren, Antwort und Schluss.</a:t>
-            </a:r>
-          </a:p>
-          <a:p xmlns:a="http://schemas.openxmlformats.org/drawingml/2006/main">
-            <a:r>
-              <a:t/>
-            </a:r>
-          </a:p>
-          <a:p xmlns:a="http://schemas.openxmlformats.org/drawingml/2006/main">
-            <a:r>
-              <a:t>Vorbereitung</a:t>
-            </a:r>
-          </a:p>
-          <a:p xmlns:a="http://schemas.openxmlformats.org/drawingml/2006/main">
-            <a:r>
-              <a:t>1. Zwölf Folien und Moderationsnotizen öffnen. Ganzes Matthäus 20,1–16 vorbereiten. Sofort nach dem Lesen spielen, danach besprechen.</a:t>
-            </a:r>
-          </a:p>
-          <a:p xmlns:a="http://schemas.openxmlformats.org/drawingml/2006/main">
-            <a:r>
-              <a:t>2. Seiten 1–2 pro Gruppe, 3–4 pro Paar, 5 pro Viererteam, 6 pro Person drucken. Schreibfelder auf Seiten 3 und 5 nicht zerschneiden. Alle Karten illustriert; Graustufen möglich.</a:t>
-            </a:r>
-          </a:p>
-          <a:p xmlns:a="http://schemas.openxmlformats.org/drawingml/2006/main">
-            <a:r>
-              <a:t>3. Fünf gleiche Spielsteine oder Knöpfe: jeder ein Denar. Requisiten, keine Teilnehmerbelohnung. Sieben Rollen auswählen; Lehrkraft liest Erzählung und Christi Schlussworte.</a:t>
-            </a:r>
-          </a:p>
-          <a:p xmlns:a="http://schemas.openxmlformats.org/drawingml/2006/main">
-            <a:r>
-              <a:t>4. Paare und Viererteams bilden. Bei kleinerem Team liest einer zwei Informationen. Neue Bedingung über fünf Minuten bis Phase 9 zurückhalten. Ersten Plan nicht löschen.</a:t>
-            </a:r>
-          </a:p>
-          <a:p xmlns:a="http://schemas.openxmlformats.org/drawingml/2006/main">
-            <a:r>
-              <a:t>5. Stifte und gegebenenfalls Werkstattmaterial vorbereiten. Persönliches Blatt bleibt beim Jugendlichen; erfundene Fälle zulässig.</a:t>
-            </a:r>
-          </a:p>
-          <a:p xmlns:a="http://schemas.openxmlformats.org/drawingml/2006/main">
-            <a:r>
-              <a:t>Hinweise</a:t>
-            </a:r>
-          </a:p>
-          <a:p xmlns:a="http://schemas.openxmlformats.org/drawingml/2006/main">
-            <a:r>
-              <a:t>1. Im Gleichnis bekommt der Letzte gleich viel wie der Erste. Titel beschreibt Vergleichsgefühl. Nicht zwei Münzen gegen eine erzählen. Jeder einen Denar; Zusage an Erste erfüllt.</a:t>
-            </a:r>
-          </a:p>
-          <a:p xmlns:a="http://schemas.openxmlformats.org/drawingml/2006/main">
-            <a:r>
-              <a:t>2. Fünf Einladungszeiten, Auszahlung von den Letzten an erhalten. Sieben Rollen sind Bühnenwahl, fünf Vertreter sind Gruppen, keine Evangelien-Gesamtzahl. Niemand stellte die Letzten ein; nicht faul nennen.</a:t>
-            </a:r>
-          </a:p>
-          <a:p xmlns:a="http://schemas.openxmlformats.org/drawingml/2006/main">
-            <a:r>
-              <a:t>3. Anfang vom Himmelreich bestimmt Bedeutung. Gottes Barmherzigkeit nicht als Lohn für Überlegenheit beanspruchen. Theophylakt sieht Möglichkeit, auch spät durch Umkehr ins Reich zu kommen. Nicht folgern, gute Taten aufzuschieben: Eingeladene arbeiten. Quelle: https://azbyka.ru/otechnik/Feofilakt_Bolgarskij/tolkovanie-na-evangelie-ot-matfeja/20.</a:t>
-            </a:r>
-          </a:p>
-          <a:p xmlns:a="http://schemas.openxmlformats.org/drawingml/2006/main">
-            <a:r>
-              <a:t>4. Keine universelle Lohn-, Noten- oder Wettbewerbsregel. Im Alltag Zusage, Regeln und wirklichen Bedarf prüfen. Ruhige Bitte um Korrektur und gute Haltung zu anderen vereinbar.</a:t>
-            </a:r>
-          </a:p>
-          <a:p xmlns:a="http://schemas.openxmlformats.org/drawingml/2006/main">
-            <a:r>
-              <a:t>5. Reihenfolge Seite 3: 2,4,1,3 von links oben. Seite 4: Zusage gebrochen 1,6; Hilfe/Geschenk 2,3; Nachfragen 4,5. Anderer Kontext kann Schluss ändern.</a:t>
-            </a:r>
-          </a:p>
-          <a:p xmlns:a="http://schemas.openxmlformats.org/drawingml/2006/main">
-            <a:r>
-              <a:t>6. Erster Plan: Saschas Termin steht noch aus. Zweiter: fünf statt zehn Minuten, Zusage gebrochen. Nicht jede Bitte Neid nennen. Zeit klären; Geschenk bleibt.</a:t>
-            </a:r>
-          </a:p>
-          <a:p xmlns:a="http://schemas.openxmlformats.org/drawingml/2006/main">
-            <a:r>
-              <a:t>7. Vergleich kann echtes Bedürfnis zeigen. Es benennen, nicht „undankbar“ oder „schlechter“ urteilen. Fremder Erfolg bestimmt meinen Wert vor Gott nicht. Dank und Bitte zusammen.</a:t>
-            </a:r>
-          </a:p>
-          <a:p xmlns:a="http://schemas.openxmlformats.org/drawingml/2006/main">
-            <a:r>
-              <a:t>8. Keine sofortige Freude oder öffentliche Neidbeichte verlangen. Freundlichen Satz und Tat anbieten, auch wenn Gefühl bleibt. Gebet eigens verfasst, stilles Zuhören möglich. Bei Fragen zu Umkehr und Beichte Gespräch mit Priester anbieten.</a:t>
+              <a:t>3. Verschiedene Arbeitszeit und ein Denar — 7 Minuten.</a:t>
+            </a:r>
+          </a:p>
+          <a:p xmlns:a="http://schemas.openxmlformats.org/drawingml/2006/main">
+            <a:r>
+              <a:t/>
+            </a:r>
+          </a:p>
+          <a:p xmlns:a="http://schemas.openxmlformats.org/drawingml/2006/main">
+            <a:r>
+              <a:t>Worte: Wir spielen den ganzen Tag und Abend. Jeder Vertreter bekommt einen gleichen Spielstein. Die Ersten erwarteten mehr, doch der Hausherr erfüllte die Vereinbarung.</a:t>
+            </a:r>
+          </a:p>
+          <a:p xmlns:a="http://schemas.openxmlformats.org/drawingml/2006/main">
+            <a:r>
+              <a:t/>
+            </a:r>
+          </a:p>
+          <a:p xmlns:a="http://schemas.openxmlformats.org/drawingml/2006/main">
+            <a:r>
+              <a:t>Durchführung: Sieben Rollen: Hausherr, Verwalter und fünf Vertreter der Einstellungszeiten. Leitung liest Erzähler und Christi Schluss. Alle Einladungen und Auszahlung von den Letzten an bewahren. Kein erfundenes Ende.</a:t>
+            </a:r>
+          </a:p>
+          <a:p xmlns:a="http://schemas.openxmlformats.org/drawingml/2006/main">
+            <a:r>
+              <a:t/>
+            </a:r>
+          </a:p>
+          <a:p xmlns:a="http://schemas.openxmlformats.org/drawingml/2006/main">
+            <a:r>
+              <a:t>Frage: Wann erwarten die Ersten mehr?</a:t>
+            </a:r>
+          </a:p>
+          <a:p xmlns:a="http://schemas.openxmlformats.org/drawingml/2006/main">
+            <a:r>
+              <a:t/>
+            </a:r>
+          </a:p>
+          <a:p xmlns:a="http://schemas.openxmlformats.org/drawingml/2006/main">
+            <a:r>
+              <a:t>Orientierung: Nach der Auszahlung an die Letzten. Sie murren wegen der Gleichstellung. Ihr versprochener Denar wurde nicht gekürzt.</a:t>
+            </a:r>
+          </a:p>
+          <a:p xmlns:a="http://schemas.openxmlformats.org/drawingml/2006/main">
+            <a:r>
+              <a:t/>
+            </a:r>
+          </a:p>
+          <a:p xmlns:a="http://schemas.openxmlformats.org/drawingml/2006/main">
+            <a:r>
+              <a:t>Rhythmus: 3+2+2 Minuten in der Reihenfolge der Schritte.</a:t>
+            </a:r>
+          </a:p>
+          <a:p xmlns:a="http://schemas.openxmlformats.org/drawingml/2006/main">
+            <a:r>
+              <a:t/>
+            </a:r>
+          </a:p>
+          <a:p xmlns:a="http://schemas.openxmlformats.org/drawingml/2006/main">
+            <a:r>
+              <a:t>Vorbereitung: Vollständiges Matthäus 20,1–16, fünf gleiche Spielsteine und sieben Rollen. Fünf Vertreter stehen für Gruppen, Gesamtzahl nicht zählen. Lesung, sofort Rollenspiel, erst dann Gespräch. Seiten 3–4 für Paare, 5 für Viererteams, 6 persönlich. Ersten Plan behalten.</a:t>
+            </a:r>
+          </a:p>
+          <a:p xmlns:a="http://schemas.openxmlformats.org/drawingml/2006/main">
+            <a:r>
+              <a:t/>
+            </a:r>
+          </a:p>
+          <a:p xmlns:a="http://schemas.openxmlformats.org/drawingml/2006/main">
+            <a:r>
+              <a:t>Sinn: Jeder bekommt einen Denar. Erste arbeiteten länger, Letzte eine Stunde. Vereinbarung erfüllt, Murren wegen Gleichstellung. Der Letzte bekam nicht mehr. Reich der Himmel: Gottes Güte zu spät Gekommenen richtet sich nicht nach einem Anspruch auf Vorrang. Arbeit bleibt wichtig: Eingeladene gehen arbeiten. Umkehr nicht aufschieben.</a:t>
+            </a:r>
+          </a:p>
+          <a:p xmlns:a="http://schemas.openxmlformats.org/drawingml/2006/main">
+            <a:r>
+              <a:t/>
+            </a:r>
+          </a:p>
+          <a:p xmlns:a="http://schemas.openxmlformats.org/drawingml/2006/main">
+            <a:r>
+              <a:t>Theophylakt verbindet das Gleichnis mit Aufnahme spät Umkehrender. Quelle: https://azbyka.ru/otechnik/Feofilakt_Bolgarskij/tolkovanie-na-evangelie-ot-matfeja/20</a:t>
+            </a:r>
+          </a:p>
+          <a:p xmlns:a="http://schemas.openxmlformats.org/drawingml/2006/main">
+            <a:r>
+              <a:t/>
+            </a:r>
+          </a:p>
+          <a:p xmlns:a="http://schemas.openxmlformats.org/drawingml/2006/main">
+            <a:r>
+              <a:t>Keine universelle Lohn-, Noten- oder Wettbewerbsregel. Stundenlohn muss nach Vertrag gezahlt werden, keine Ausbeutung. Im Gleichnis lautet der Grund: Niemand hat uns eingestellt. Mischas Grund gehört nur zum erfundenen Beispiel. Neue Information verändert keine Portionen und führt keine gebrochene Zusage ein.</a:t>
+            </a:r>
+          </a:p>
+          <a:p xmlns:a="http://schemas.openxmlformats.org/drawingml/2006/main">
+            <a:r>
+              <a:t/>
+            </a:r>
+          </a:p>
+          <a:p xmlns:a="http://schemas.openxmlformats.org/drawingml/2006/main">
+            <a:r>
+              <a:t>Schlüssel: Vereinbarung, neue Einladungen, Auszahlung, Murren und Antwort. Fälle: gemeinsame Gabe 1–3; Regel verletzt 4–5; nachfragen 6. Zuerst Hauptfälle behandeln.</a:t>
+            </a:r>
+          </a:p>
+          <a:p xmlns:a="http://schemas.openxmlformats.org/drawingml/2006/main">
+            <a:r>
+              <a:t/>
+            </a:r>
+          </a:p>
+          <a:p xmlns:a="http://schemas.openxmlformats.org/drawingml/2006/main">
+            <a:r>
+              <a:t>Keine sofortige Freude und keine öffentlichen Bekenntnisse verlangen. Persönliches Blatt bleibt beim Jugendlichen, Gebet freiwillig und eigens verfasst. Aufrichtige Umkehr anderer nicht beurteilen. Persönliche Fragen können mit einem Priester besprochen werden.</a:t>
+            </a:r>
+          </a:p>
+          <a:p xmlns:a="http://schemas.openxmlformats.org/drawingml/2006/main">
+            <a:r>
+              <a:t/>
             </a:r>
           </a:p>
           <a:p xmlns:a="http://schemas.openxmlformats.org/drawingml/2006/main">
@@ -1793,112 +1863,7 @@
           </a:p>
           <a:p xmlns:a="http://schemas.openxmlformats.org/drawingml/2006/main">
             <a:r>
-              <a:t>Hausherr</a:t>
-            </a:r>
-          </a:p>
-          <a:p xmlns:a="http://schemas.openxmlformats.org/drawingml/2006/main">
-            <a:r>
-              <a:t>Rufe früh am Morgen, zur dritten, sechsten, neunten und elften Stunde. Abends Auszahlung von den Letzten an anordnen. Erstem nach Versen 13–15 antworten. Vollständige Worte im Lehrerheft.</a:t>
-            </a:r>
-          </a:p>
-          <a:p xmlns:a="http://schemas.openxmlformats.org/drawingml/2006/main">
-            <a:r>
-              <a:t/>
-            </a:r>
-          </a:p>
-          <a:p xmlns:a="http://schemas.openxmlformats.org/drawingml/2006/main">
-            <a:r>
-              <a:t>Verwalter</a:t>
-            </a:r>
-          </a:p>
-          <a:p xmlns:a="http://schemas.openxmlformats.org/drawingml/2006/main">
-            <a:r>
-              <a:t>Abends Vertreter rufen: elfte, neunte, sechste, dritte Stunde, früher Morgen. Jedem gleichen Spielstein als Denar geben.</a:t>
-            </a:r>
-          </a:p>
-          <a:p xmlns:a="http://schemas.openxmlformats.org/drawingml/2006/main">
-            <a:r>
-              <a:t/>
-            </a:r>
-          </a:p>
-          <a:p xmlns:a="http://schemas.openxmlformats.org/drawingml/2006/main">
-            <a:r>
-              <a:t>Früher Morgen</a:t>
-            </a:r>
-          </a:p>
-          <a:p xmlns:a="http://schemas.openxmlformats.org/drawingml/2006/main">
-            <a:r>
-              <a:t>Einen Denar für den Tag vereinbaren, zuerst arbeiten. Bei Auszahlung mehr erwarten, aber einen bekommen. Murren nach Vers 12 sprechen.</a:t>
-            </a:r>
-          </a:p>
-          <a:p xmlns:a="http://schemas.openxmlformats.org/drawingml/2006/main">
-            <a:r>
-              <a:t/>
-            </a:r>
-          </a:p>
-          <a:p xmlns:a="http://schemas.openxmlformats.org/drawingml/2006/main">
-            <a:r>
-              <a:t>Dritte Stunde</a:t>
-            </a:r>
-          </a:p>
-          <a:p xmlns:a="http://schemas.openxmlformats.org/drawingml/2006/main">
-            <a:r>
-              <a:t>Nach Einladung um dritte Stunde beginnen. Abends als Vorletzter einen Spielstein bekommen.</a:t>
-            </a:r>
-          </a:p>
-          <a:p xmlns:a="http://schemas.openxmlformats.org/drawingml/2006/main">
-            <a:r>
-              <a:t/>
-            </a:r>
-          </a:p>
-          <a:p xmlns:a="http://schemas.openxmlformats.org/drawingml/2006/main">
-            <a:r>
-              <a:t>Sechste Stunde</a:t>
-            </a:r>
-          </a:p>
-          <a:p xmlns:a="http://schemas.openxmlformats.org/drawingml/2006/main">
-            <a:r>
-              <a:t>Nach Einladung um sechste Stunde beginnen. Bei Auszahlung als Dritter einen Spielstein bekommen.</a:t>
-            </a:r>
-          </a:p>
-          <a:p xmlns:a="http://schemas.openxmlformats.org/drawingml/2006/main">
-            <a:r>
-              <a:t/>
-            </a:r>
-          </a:p>
-          <a:p xmlns:a="http://schemas.openxmlformats.org/drawingml/2006/main">
-            <a:r>
-              <a:t>Neunte Stunde</a:t>
-            </a:r>
-          </a:p>
-          <a:p xmlns:a="http://schemas.openxmlformats.org/drawingml/2006/main">
-            <a:r>
-              <a:t>Nach Einladung um neunte Stunde beginnen. Bei Auszahlung als Zweiter einen Spielstein bekommen.</a:t>
-            </a:r>
-          </a:p>
-          <a:p xmlns:a="http://schemas.openxmlformats.org/drawingml/2006/main">
-            <a:r>
-              <a:t/>
-            </a:r>
-          </a:p>
-          <a:p xmlns:a="http://schemas.openxmlformats.org/drawingml/2006/main">
-            <a:r>
-              <a:t>Elfte Stunde</a:t>
-            </a:r>
-          </a:p>
-          <a:p xmlns:a="http://schemas.openxmlformats.org/drawingml/2006/main">
-            <a:r>
-              <a:t>Auf Frage antworten: „Niemand hat uns eingestellt“. Im Weinberg arbeiten. Bei Auszahlung als Erster einen Spielstein bekommen.</a:t>
-            </a:r>
-          </a:p>
-          <a:p xmlns:a="http://schemas.openxmlformats.org/drawingml/2006/main">
-            <a:r>
-              <a:t/>
-            </a:r>
-          </a:p>
-          <a:p xmlns:a="http://schemas.openxmlformats.org/drawingml/2006/main">
-            <a:r>
-              <a:t>Quelle: vorhandener zweisprachiger Unterricht auf lessons.atapin.de; vorhandene Illustrationen unverändert.</a:t>
+              <a:t>Quelle: https://bible.by/syn/40/20/</a:t>
             </a:r>
           </a:p>
         </p:txBody>
@@ -1968,122 +1933,132 @@
           <a:lstStyle xmlns:a="http://schemas.openxmlformats.org/drawingml/2006/main"/>
           <a:p xmlns:a="http://schemas.openxmlformats.org/drawingml/2006/main">
             <a:r>
-              <a:t>4. Zusage und Erwartung — 3 Minuten.</a:t>
-            </a:r>
-          </a:p>
-          <a:p xmlns:a="http://schemas.openxmlformats.org/drawingml/2006/main">
-            <a:r>
-              <a:t>Worte: Der Letzte bekam nicht mehr Münzen: jeder einen Denar. Die Ersten arbeiteten länger. Was wurde versprochen, was erhielten sie, was erwarteten sie nach dem fremden Lohn?</a:t>
-            </a:r>
-          </a:p>
-          <a:p xmlns:a="http://schemas.openxmlformats.org/drawingml/2006/main">
-            <a:r>
-              <a:t>Durchführung: Zwei Antworten mit Versbeleg hören; Verse 13–15 lesen. Den Anfang „Himmelreich“ erklären: Gottes Barmherzigkeit lässt sich nicht als Überlegenheit über andere beanspruchen.</a:t>
-            </a:r>
-          </a:p>
-          <a:p xmlns:a="http://schemas.openxmlformats.org/drawingml/2006/main">
-            <a:r>
-              <a:t>Frage: Änderte sich die Zusage des Hausherrn oder die Erwartung des Ersten?</a:t>
-            </a:r>
-          </a:p>
-          <a:p xmlns:a="http://schemas.openxmlformats.org/drawingml/2006/main">
-            <a:r>
-              <a:t>Orientierung: Die Zusage wurde erfüllt. Die Ersten dachten nun, mehr zu bekommen. Der Hausherr ist zu den Letzten gütig. Gottes Barmherzigkeit annehmen, ohne über Gutes für andere zu murren.</a:t>
-            </a:r>
-          </a:p>
-          <a:p xmlns:a="http://schemas.openxmlformats.org/drawingml/2006/main">
-            <a:r>
-              <a:t>Rhythmus: 1 Minute Antworten; 1 Minute Verse; 1 Minute Bedeutung.</a:t>
-            </a:r>
-          </a:p>
-          <a:p xmlns:a="http://schemas.openxmlformats.org/drawingml/2006/main">
-            <a:r>
-              <a:t/>
-            </a:r>
-          </a:p>
-          <a:p xmlns:a="http://schemas.openxmlformats.org/drawingml/2006/main">
-            <a:r>
-              <a:t>Vorbereitung</a:t>
-            </a:r>
-          </a:p>
-          <a:p xmlns:a="http://schemas.openxmlformats.org/drawingml/2006/main">
-            <a:r>
-              <a:t>1. Zwölf Folien und Moderationsnotizen öffnen. Ganzes Matthäus 20,1–16 vorbereiten. Sofort nach dem Lesen spielen, danach besprechen.</a:t>
-            </a:r>
-          </a:p>
-          <a:p xmlns:a="http://schemas.openxmlformats.org/drawingml/2006/main">
-            <a:r>
-              <a:t>2. Seiten 1–2 pro Gruppe, 3–4 pro Paar, 5 pro Viererteam, 6 pro Person drucken. Schreibfelder auf Seiten 3 und 5 nicht zerschneiden. Alle Karten illustriert; Graustufen möglich.</a:t>
-            </a:r>
-          </a:p>
-          <a:p xmlns:a="http://schemas.openxmlformats.org/drawingml/2006/main">
-            <a:r>
-              <a:t>3. Fünf gleiche Spielsteine oder Knöpfe: jeder ein Denar. Requisiten, keine Teilnehmerbelohnung. Sieben Rollen auswählen; Lehrkraft liest Erzählung und Christi Schlussworte.</a:t>
-            </a:r>
-          </a:p>
-          <a:p xmlns:a="http://schemas.openxmlformats.org/drawingml/2006/main">
-            <a:r>
-              <a:t>4. Paare und Viererteams bilden. Bei kleinerem Team liest einer zwei Informationen. Neue Bedingung über fünf Minuten bis Phase 9 zurückhalten. Ersten Plan nicht löschen.</a:t>
-            </a:r>
-          </a:p>
-          <a:p xmlns:a="http://schemas.openxmlformats.org/drawingml/2006/main">
-            <a:r>
-              <a:t>5. Stifte und gegebenenfalls Werkstattmaterial vorbereiten. Persönliches Blatt bleibt beim Jugendlichen; erfundene Fälle zulässig.</a:t>
-            </a:r>
-          </a:p>
-          <a:p xmlns:a="http://schemas.openxmlformats.org/drawingml/2006/main">
-            <a:r>
-              <a:t>Hinweise</a:t>
-            </a:r>
-          </a:p>
-          <a:p xmlns:a="http://schemas.openxmlformats.org/drawingml/2006/main">
-            <a:r>
-              <a:t>1. Im Gleichnis bekommt der Letzte gleich viel wie der Erste. Titel beschreibt Vergleichsgefühl. Nicht zwei Münzen gegen eine erzählen. Jeder einen Denar; Zusage an Erste erfüllt.</a:t>
-            </a:r>
-          </a:p>
-          <a:p xmlns:a="http://schemas.openxmlformats.org/drawingml/2006/main">
-            <a:r>
-              <a:t>2. Fünf Einladungszeiten, Auszahlung von den Letzten an erhalten. Sieben Rollen sind Bühnenwahl, fünf Vertreter sind Gruppen, keine Evangelien-Gesamtzahl. Niemand stellte die Letzten ein; nicht faul nennen.</a:t>
-            </a:r>
-          </a:p>
-          <a:p xmlns:a="http://schemas.openxmlformats.org/drawingml/2006/main">
-            <a:r>
-              <a:t>3. Anfang vom Himmelreich bestimmt Bedeutung. Gottes Barmherzigkeit nicht als Lohn für Überlegenheit beanspruchen. Theophylakt sieht Möglichkeit, auch spät durch Umkehr ins Reich zu kommen. Nicht folgern, gute Taten aufzuschieben: Eingeladene arbeiten. Quelle: https://azbyka.ru/otechnik/Feofilakt_Bolgarskij/tolkovanie-na-evangelie-ot-matfeja/20.</a:t>
-            </a:r>
-          </a:p>
-          <a:p xmlns:a="http://schemas.openxmlformats.org/drawingml/2006/main">
-            <a:r>
-              <a:t>4. Keine universelle Lohn-, Noten- oder Wettbewerbsregel. Im Alltag Zusage, Regeln und wirklichen Bedarf prüfen. Ruhige Bitte um Korrektur und gute Haltung zu anderen vereinbar.</a:t>
-            </a:r>
-          </a:p>
-          <a:p xmlns:a="http://schemas.openxmlformats.org/drawingml/2006/main">
-            <a:r>
-              <a:t>5. Reihenfolge Seite 3: 2,4,1,3 von links oben. Seite 4: Zusage gebrochen 1,6; Hilfe/Geschenk 2,3; Nachfragen 4,5. Anderer Kontext kann Schluss ändern.</a:t>
-            </a:r>
-          </a:p>
-          <a:p xmlns:a="http://schemas.openxmlformats.org/drawingml/2006/main">
-            <a:r>
-              <a:t>6. Erster Plan: Saschas Termin steht noch aus. Zweiter: fünf statt zehn Minuten, Zusage gebrochen. Nicht jede Bitte Neid nennen. Zeit klären; Geschenk bleibt.</a:t>
-            </a:r>
-          </a:p>
-          <a:p xmlns:a="http://schemas.openxmlformats.org/drawingml/2006/main">
-            <a:r>
-              <a:t>7. Vergleich kann echtes Bedürfnis zeigen. Es benennen, nicht „undankbar“ oder „schlechter“ urteilen. Fremder Erfolg bestimmt meinen Wert vor Gott nicht. Dank und Bitte zusammen.</a:t>
-            </a:r>
-          </a:p>
-          <a:p xmlns:a="http://schemas.openxmlformats.org/drawingml/2006/main">
-            <a:r>
-              <a:t>8. Keine sofortige Freude oder öffentliche Neidbeichte verlangen. Freundlichen Satz und Tat anbieten, auch wenn Gefühl bleibt. Gebet eigens verfasst, stilles Zuhören möglich. Bei Fragen zu Umkehr und Beichte Gespräch mit Priester anbieten.</a:t>
-            </a:r>
-          </a:p>
-          <a:p xmlns:a="http://schemas.openxmlformats.org/drawingml/2006/main">
-            <a:r>
-              <a:t/>
-            </a:r>
-          </a:p>
-          <a:p xmlns:a="http://schemas.openxmlformats.org/drawingml/2006/main">
-            <a:r>
-              <a:t>Quelle: vorhandener zweisprachiger Unterricht auf lessons.atapin.de; vorhandene Illustrationen unverändert.</a:t>
+              <a:t>4. Was löste das Murren aus — 3 Minuten.</a:t>
+            </a:r>
+          </a:p>
+          <a:p xmlns:a="http://schemas.openxmlformats.org/drawingml/2006/main">
+            <a:r>
+              <a:t/>
+            </a:r>
+          </a:p>
+          <a:p xmlns:a="http://schemas.openxmlformats.org/drawingml/2006/main">
+            <a:r>
+              <a:t>Worte: Lest Verse 10 und 12–15 nochmals. Die Ersten nennen Last und Hitze des Tages und sagen: Du hast sie uns gleichgestellt. Der Hausherr erinnert an Vereinbarung und Güte.</a:t>
+            </a:r>
+          </a:p>
+          <a:p xmlns:a="http://schemas.openxmlformats.org/drawingml/2006/main">
+            <a:r>
+              <a:t/>
+            </a:r>
+          </a:p>
+          <a:p xmlns:a="http://schemas.openxmlformats.org/drawingml/2006/main">
+            <a:r>
+              <a:t>Durchführung: Zwei Personen finden gleichen Lohn und verschiedene Arbeit. Dann Vers 1 lesen: Reich der Himmel. Text und eigene Vermutungen unterscheiden.</a:t>
+            </a:r>
+          </a:p>
+          <a:p xmlns:a="http://schemas.openxmlformats.org/drawingml/2006/main">
+            <a:r>
+              <a:t/>
+            </a:r>
+          </a:p>
+          <a:p xmlns:a="http://schemas.openxmlformats.org/drawingml/2006/main">
+            <a:r>
+              <a:t>Frage: Fehlt versprochener Lohn oder lehnen sie die gleiche Gabe ab?</a:t>
+            </a:r>
+          </a:p>
+          <a:p xmlns:a="http://schemas.openxmlformats.org/drawingml/2006/main">
+            <a:r>
+              <a:t/>
+            </a:r>
+          </a:p>
+          <a:p xmlns:a="http://schemas.openxmlformats.org/drawingml/2006/main">
+            <a:r>
+              <a:t>Orientierung: Sie bekamen alles Versprochene. Sie ärgern sich über gleichen Lohn für die Letzten. Christus zeigt Gottes Güte: Barmherzigkeit für spät Gekommene nimmt den Ersten nichts weg und richtet sich nicht nach unserem Anspruch auf Vorrang.</a:t>
+            </a:r>
+          </a:p>
+          <a:p xmlns:a="http://schemas.openxmlformats.org/drawingml/2006/main">
+            <a:r>
+              <a:t/>
+            </a:r>
+          </a:p>
+          <a:p xmlns:a="http://schemas.openxmlformats.org/drawingml/2006/main">
+            <a:r>
+              <a:t>Rhythmus: 1+1+1 Minuten in der Reihenfolge der Schritte.</a:t>
+            </a:r>
+          </a:p>
+          <a:p xmlns:a="http://schemas.openxmlformats.org/drawingml/2006/main">
+            <a:r>
+              <a:t/>
+            </a:r>
+          </a:p>
+          <a:p xmlns:a="http://schemas.openxmlformats.org/drawingml/2006/main">
+            <a:r>
+              <a:t>Vorbereitung: Vollständiges Matthäus 20,1–16, fünf gleiche Spielsteine und sieben Rollen. Fünf Vertreter stehen für Gruppen, Gesamtzahl nicht zählen. Lesung, sofort Rollenspiel, erst dann Gespräch. Seiten 3–4 für Paare, 5 für Viererteams, 6 persönlich. Ersten Plan behalten.</a:t>
+            </a:r>
+          </a:p>
+          <a:p xmlns:a="http://schemas.openxmlformats.org/drawingml/2006/main">
+            <a:r>
+              <a:t/>
+            </a:r>
+          </a:p>
+          <a:p xmlns:a="http://schemas.openxmlformats.org/drawingml/2006/main">
+            <a:r>
+              <a:t>Sinn: Jeder bekommt einen Denar. Erste arbeiteten länger, Letzte eine Stunde. Vereinbarung erfüllt, Murren wegen Gleichstellung. Der Letzte bekam nicht mehr. Reich der Himmel: Gottes Güte zu spät Gekommenen richtet sich nicht nach einem Anspruch auf Vorrang. Arbeit bleibt wichtig: Eingeladene gehen arbeiten. Umkehr nicht aufschieben.</a:t>
+            </a:r>
+          </a:p>
+          <a:p xmlns:a="http://schemas.openxmlformats.org/drawingml/2006/main">
+            <a:r>
+              <a:t/>
+            </a:r>
+          </a:p>
+          <a:p xmlns:a="http://schemas.openxmlformats.org/drawingml/2006/main">
+            <a:r>
+              <a:t>Theophylakt verbindet das Gleichnis mit Aufnahme spät Umkehrender. Quelle: https://azbyka.ru/otechnik/Feofilakt_Bolgarskij/tolkovanie-na-evangelie-ot-matfeja/20</a:t>
+            </a:r>
+          </a:p>
+          <a:p xmlns:a="http://schemas.openxmlformats.org/drawingml/2006/main">
+            <a:r>
+              <a:t/>
+            </a:r>
+          </a:p>
+          <a:p xmlns:a="http://schemas.openxmlformats.org/drawingml/2006/main">
+            <a:r>
+              <a:t>Keine universelle Lohn-, Noten- oder Wettbewerbsregel. Stundenlohn muss nach Vertrag gezahlt werden, keine Ausbeutung. Im Gleichnis lautet der Grund: Niemand hat uns eingestellt. Mischas Grund gehört nur zum erfundenen Beispiel. Neue Information verändert keine Portionen und führt keine gebrochene Zusage ein.</a:t>
+            </a:r>
+          </a:p>
+          <a:p xmlns:a="http://schemas.openxmlformats.org/drawingml/2006/main">
+            <a:r>
+              <a:t/>
+            </a:r>
+          </a:p>
+          <a:p xmlns:a="http://schemas.openxmlformats.org/drawingml/2006/main">
+            <a:r>
+              <a:t>Schlüssel: Vereinbarung, neue Einladungen, Auszahlung, Murren und Antwort. Fälle: gemeinsame Gabe 1–3; Regel verletzt 4–5; nachfragen 6. Zuerst Hauptfälle behandeln.</a:t>
+            </a:r>
+          </a:p>
+          <a:p xmlns:a="http://schemas.openxmlformats.org/drawingml/2006/main">
+            <a:r>
+              <a:t/>
+            </a:r>
+          </a:p>
+          <a:p xmlns:a="http://schemas.openxmlformats.org/drawingml/2006/main">
+            <a:r>
+              <a:t>Keine sofortige Freude und keine öffentlichen Bekenntnisse verlangen. Persönliches Blatt bleibt beim Jugendlichen, Gebet freiwillig und eigens verfasst. Aufrichtige Umkehr anderer nicht beurteilen. Persönliche Fragen können mit einem Priester besprochen werden.</a:t>
+            </a:r>
+          </a:p>
+          <a:p xmlns:a="http://schemas.openxmlformats.org/drawingml/2006/main">
+            <a:r>
+              <a:t/>
+            </a:r>
+          </a:p>
+          <a:p xmlns:a="http://schemas.openxmlformats.org/drawingml/2006/main">
+            <a:r>
+              <a:t/>
+            </a:r>
+          </a:p>
+          <a:p xmlns:a="http://schemas.openxmlformats.org/drawingml/2006/main">
+            <a:r>
+              <a:t>Quelle: https://bible.by/syn/40/20/</a:t>
             </a:r>
           </a:p>
         </p:txBody>
@@ -2153,182 +2128,132 @@
           <a:lstStyle xmlns:a="http://schemas.openxmlformats.org/drawingml/2006/main"/>
           <a:p xmlns:a="http://schemas.openxmlformats.org/drawingml/2006/main">
             <a:r>
-              <a:t>5. Die Reihenfolge der Ereignisse — 4 Minuten.</a:t>
-            </a:r>
-          </a:p>
-          <a:p xmlns:a="http://schemas.openxmlformats.org/drawingml/2006/main">
-            <a:r>
-              <a:t>Worte: Vier Karten legen. An jeder Stelle Fakt und Erwartung benennen. Warum „Niemand hat uns eingestellt“ merken?</a:t>
-            </a:r>
-          </a:p>
-          <a:p xmlns:a="http://schemas.openxmlformats.org/drawingml/2006/main">
-            <a:r>
-              <a:t>Durchführung: Paare bekommen gemischte Karten. Reihenfolge legen; in zwei Feldern ursprüngliche Zusage und neue Erwartung festhalten. Ein Paar erklärt das Ende.</a:t>
-            </a:r>
-          </a:p>
-          <a:p xmlns:a="http://schemas.openxmlformats.org/drawingml/2006/main">
-            <a:r>
-              <a:t>Frage: Können wir die späten Arbeiter nach diesem Text faul nennen?</a:t>
-            </a:r>
-          </a:p>
-          <a:p xmlns:a="http://schemas.openxmlformats.org/drawingml/2006/main">
-            <a:r>
-              <a:t>Orientierung: Sie erklären, dass niemand sie einstellte. Keine erfundenen Gründe. Reihenfolge: Vereinbarung am Morgen; neue Einladungen; Auszahlung von den Letzten an; Murren und Antwort.</a:t>
-            </a:r>
-          </a:p>
-          <a:p xmlns:a="http://schemas.openxmlformats.org/drawingml/2006/main">
-            <a:r>
-              <a:t>Rhythmus: 2 Minuten Ordnung; 1 Minute Schreiben; 1 Minute Erklärung.</a:t>
-            </a:r>
-          </a:p>
-          <a:p xmlns:a="http://schemas.openxmlformats.org/drawingml/2006/main">
-            <a:r>
-              <a:t/>
-            </a:r>
-          </a:p>
-          <a:p xmlns:a="http://schemas.openxmlformats.org/drawingml/2006/main">
-            <a:r>
-              <a:t>Vorbereitung</a:t>
-            </a:r>
-          </a:p>
-          <a:p xmlns:a="http://schemas.openxmlformats.org/drawingml/2006/main">
-            <a:r>
-              <a:t>1. Zwölf Folien und Moderationsnotizen öffnen. Ganzes Matthäus 20,1–16 vorbereiten. Sofort nach dem Lesen spielen, danach besprechen.</a:t>
-            </a:r>
-          </a:p>
-          <a:p xmlns:a="http://schemas.openxmlformats.org/drawingml/2006/main">
-            <a:r>
-              <a:t>2. Seiten 1–2 pro Gruppe, 3–4 pro Paar, 5 pro Viererteam, 6 pro Person drucken. Schreibfelder auf Seiten 3 und 5 nicht zerschneiden. Alle Karten illustriert; Graustufen möglich.</a:t>
-            </a:r>
-          </a:p>
-          <a:p xmlns:a="http://schemas.openxmlformats.org/drawingml/2006/main">
-            <a:r>
-              <a:t>3. Fünf gleiche Spielsteine oder Knöpfe: jeder ein Denar. Requisiten, keine Teilnehmerbelohnung. Sieben Rollen auswählen; Lehrkraft liest Erzählung und Christi Schlussworte.</a:t>
-            </a:r>
-          </a:p>
-          <a:p xmlns:a="http://schemas.openxmlformats.org/drawingml/2006/main">
-            <a:r>
-              <a:t>4. Paare und Viererteams bilden. Bei kleinerem Team liest einer zwei Informationen. Neue Bedingung über fünf Minuten bis Phase 9 zurückhalten. Ersten Plan nicht löschen.</a:t>
-            </a:r>
-          </a:p>
-          <a:p xmlns:a="http://schemas.openxmlformats.org/drawingml/2006/main">
-            <a:r>
-              <a:t>5. Stifte und gegebenenfalls Werkstattmaterial vorbereiten. Persönliches Blatt bleibt beim Jugendlichen; erfundene Fälle zulässig.</a:t>
-            </a:r>
-          </a:p>
-          <a:p xmlns:a="http://schemas.openxmlformats.org/drawingml/2006/main">
-            <a:r>
-              <a:t>Hinweise</a:t>
-            </a:r>
-          </a:p>
-          <a:p xmlns:a="http://schemas.openxmlformats.org/drawingml/2006/main">
-            <a:r>
-              <a:t>1. Im Gleichnis bekommt der Letzte gleich viel wie der Erste. Titel beschreibt Vergleichsgefühl. Nicht zwei Münzen gegen eine erzählen. Jeder einen Denar; Zusage an Erste erfüllt.</a:t>
-            </a:r>
-          </a:p>
-          <a:p xmlns:a="http://schemas.openxmlformats.org/drawingml/2006/main">
-            <a:r>
-              <a:t>2. Fünf Einladungszeiten, Auszahlung von den Letzten an erhalten. Sieben Rollen sind Bühnenwahl, fünf Vertreter sind Gruppen, keine Evangelien-Gesamtzahl. Niemand stellte die Letzten ein; nicht faul nennen.</a:t>
-            </a:r>
-          </a:p>
-          <a:p xmlns:a="http://schemas.openxmlformats.org/drawingml/2006/main">
-            <a:r>
-              <a:t>3. Anfang vom Himmelreich bestimmt Bedeutung. Gottes Barmherzigkeit nicht als Lohn für Überlegenheit beanspruchen. Theophylakt sieht Möglichkeit, auch spät durch Umkehr ins Reich zu kommen. Nicht folgern, gute Taten aufzuschieben: Eingeladene arbeiten. Quelle: https://azbyka.ru/otechnik/Feofilakt_Bolgarskij/tolkovanie-na-evangelie-ot-matfeja/20.</a:t>
-            </a:r>
-          </a:p>
-          <a:p xmlns:a="http://schemas.openxmlformats.org/drawingml/2006/main">
-            <a:r>
-              <a:t>4. Keine universelle Lohn-, Noten- oder Wettbewerbsregel. Im Alltag Zusage, Regeln und wirklichen Bedarf prüfen. Ruhige Bitte um Korrektur und gute Haltung zu anderen vereinbar.</a:t>
-            </a:r>
-          </a:p>
-          <a:p xmlns:a="http://schemas.openxmlformats.org/drawingml/2006/main">
-            <a:r>
-              <a:t>5. Reihenfolge Seite 3: 2,4,1,3 von links oben. Seite 4: Zusage gebrochen 1,6; Hilfe/Geschenk 2,3; Nachfragen 4,5. Anderer Kontext kann Schluss ändern.</a:t>
-            </a:r>
-          </a:p>
-          <a:p xmlns:a="http://schemas.openxmlformats.org/drawingml/2006/main">
-            <a:r>
-              <a:t>6. Erster Plan: Saschas Termin steht noch aus. Zweiter: fünf statt zehn Minuten, Zusage gebrochen. Nicht jede Bitte Neid nennen. Zeit klären; Geschenk bleibt.</a:t>
-            </a:r>
-          </a:p>
-          <a:p xmlns:a="http://schemas.openxmlformats.org/drawingml/2006/main">
-            <a:r>
-              <a:t>7. Vergleich kann echtes Bedürfnis zeigen. Es benennen, nicht „undankbar“ oder „schlechter“ urteilen. Fremder Erfolg bestimmt meinen Wert vor Gott nicht. Dank und Bitte zusammen.</a:t>
-            </a:r>
-          </a:p>
-          <a:p xmlns:a="http://schemas.openxmlformats.org/drawingml/2006/main">
-            <a:r>
-              <a:t>8. Keine sofortige Freude oder öffentliche Neidbeichte verlangen. Freundlichen Satz und Tat anbieten, auch wenn Gefühl bleibt. Gebet eigens verfasst, stilles Zuhören möglich. Bei Fragen zu Umkehr und Beichte Gespräch mit Priester anbieten.</a:t>
-            </a:r>
-          </a:p>
-          <a:p xmlns:a="http://schemas.openxmlformats.org/drawingml/2006/main">
-            <a:r>
-              <a:t/>
-            </a:r>
-          </a:p>
-          <a:p xmlns:a="http://schemas.openxmlformats.org/drawingml/2006/main">
-            <a:r>
-              <a:t>Auszahlung von den Letzten an</a:t>
-            </a:r>
-          </a:p>
-          <a:p xmlns:a="http://schemas.openxmlformats.org/drawingml/2006/main">
-            <a:r>
-              <a:t>Abends beginnt Verwalter bei den Letzten. Späte bekommen einen Denar; Erste denken, mehr zu erhalten.</a:t>
-            </a:r>
-          </a:p>
-          <a:p xmlns:a="http://schemas.openxmlformats.org/drawingml/2006/main">
-            <a:r>
-              <a:t/>
-            </a:r>
-          </a:p>
-          <a:p xmlns:a="http://schemas.openxmlformats.org/drawingml/2006/main">
-            <a:r>
-              <a:t>Vereinbarung am Morgen</a:t>
-            </a:r>
-          </a:p>
-          <a:p xmlns:a="http://schemas.openxmlformats.org/drawingml/2006/main">
-            <a:r>
-              <a:t>Früh am Morgen vereinbart Hausherr mit Arbeitern einen Denar für den Tag. Sie gehen in den Weinberg.</a:t>
-            </a:r>
-          </a:p>
-          <a:p xmlns:a="http://schemas.openxmlformats.org/drawingml/2006/main">
-            <a:r>
-              <a:t/>
-            </a:r>
-          </a:p>
-          <a:p xmlns:a="http://schemas.openxmlformats.org/drawingml/2006/main">
-            <a:r>
-              <a:t>Murren und Antwort</a:t>
-            </a:r>
-          </a:p>
-          <a:p xmlns:a="http://schemas.openxmlformats.org/drawingml/2006/main">
-            <a:r>
-              <a:t>Erste bekommen ebenfalls einen Denar und murren. Hausherr erinnert an Vereinbarung und spricht von Güte. Letzte werden Erste.</a:t>
-            </a:r>
-          </a:p>
-          <a:p xmlns:a="http://schemas.openxmlformats.org/drawingml/2006/main">
-            <a:r>
-              <a:t/>
-            </a:r>
-          </a:p>
-          <a:p xmlns:a="http://schemas.openxmlformats.org/drawingml/2006/main">
-            <a:r>
-              <a:t>Neue Einladungen</a:t>
-            </a:r>
-          </a:p>
-          <a:p xmlns:a="http://schemas.openxmlformats.org/drawingml/2006/main">
-            <a:r>
-              <a:t>Hausherr ruft dritte, sechste, neunte, elfte Stunde. Letzte sagen: „Niemand hat uns eingestellt“.</a:t>
-            </a:r>
-          </a:p>
-          <a:p xmlns:a="http://schemas.openxmlformats.org/drawingml/2006/main">
-            <a:r>
-              <a:t/>
-            </a:r>
-          </a:p>
-          <a:p xmlns:a="http://schemas.openxmlformats.org/drawingml/2006/main">
-            <a:r>
-              <a:t>Quelle: vorhandener zweisprachiger Unterricht auf lessons.atapin.de; vorhandene Illustrationen unverändert.</a:t>
+              <a:t>5. Vereinbarung und neue Erwartung — 4 Minuten.</a:t>
+            </a:r>
+          </a:p>
+          <a:p xmlns:a="http://schemas.openxmlformats.org/drawingml/2006/main">
+            <a:r>
+              <a:t/>
+            </a:r>
+          </a:p>
+          <a:p xmlns:a="http://schemas.openxmlformats.org/drawingml/2006/main">
+            <a:r>
+              <a:t>Worte: Vier Ereignisse ordnen. Versprochen: ein Denar. Erhalten: ein Denar. Nach fremder Auszahlung erwartet: mehr. Was änderte sich?</a:t>
+            </a:r>
+          </a:p>
+          <a:p xmlns:a="http://schemas.openxmlformats.org/drawingml/2006/main">
+            <a:r>
+              <a:t/>
+            </a:r>
+          </a:p>
+          <a:p xmlns:a="http://schemas.openxmlformats.org/drawingml/2006/main">
+            <a:r>
+              <a:t>Durchführung: Paare ordnen gemischte Karten und füllen zwei Felder aus. Ein Paar erklärt den Übergang zur neuen Erwartung.</a:t>
+            </a:r>
+          </a:p>
+          <a:p xmlns:a="http://schemas.openxmlformats.org/drawingml/2006/main">
+            <a:r>
+              <a:t/>
+            </a:r>
+          </a:p>
+          <a:p xmlns:a="http://schemas.openxmlformats.org/drawingml/2006/main">
+            <a:r>
+              <a:t>Frage: Wer änderte die Erwartung, wer die Vereinbarung?</a:t>
+            </a:r>
+          </a:p>
+          <a:p xmlns:a="http://schemas.openxmlformats.org/drawingml/2006/main">
+            <a:r>
+              <a:t/>
+            </a:r>
+          </a:p>
+          <a:p xmlns:a="http://schemas.openxmlformats.org/drawingml/2006/main">
+            <a:r>
+              <a:t>Orientierung: Die Ersten änderten ihre Erwartung. Der Hausherr änderte die Vereinbarung nicht. Die Letzten sagten: Niemand hat uns eingestellt. Keine Faulheit unterstellen.</a:t>
+            </a:r>
+          </a:p>
+          <a:p xmlns:a="http://schemas.openxmlformats.org/drawingml/2006/main">
+            <a:r>
+              <a:t/>
+            </a:r>
+          </a:p>
+          <a:p xmlns:a="http://schemas.openxmlformats.org/drawingml/2006/main">
+            <a:r>
+              <a:t>Rhythmus: 2+1+1 Minuten in der Reihenfolge der Schritte.</a:t>
+            </a:r>
+          </a:p>
+          <a:p xmlns:a="http://schemas.openxmlformats.org/drawingml/2006/main">
+            <a:r>
+              <a:t/>
+            </a:r>
+          </a:p>
+          <a:p xmlns:a="http://schemas.openxmlformats.org/drawingml/2006/main">
+            <a:r>
+              <a:t>Vorbereitung: Vollständiges Matthäus 20,1–16, fünf gleiche Spielsteine und sieben Rollen. Fünf Vertreter stehen für Gruppen, Gesamtzahl nicht zählen. Lesung, sofort Rollenspiel, erst dann Gespräch. Seiten 3–4 für Paare, 5 für Viererteams, 6 persönlich. Ersten Plan behalten.</a:t>
+            </a:r>
+          </a:p>
+          <a:p xmlns:a="http://schemas.openxmlformats.org/drawingml/2006/main">
+            <a:r>
+              <a:t/>
+            </a:r>
+          </a:p>
+          <a:p xmlns:a="http://schemas.openxmlformats.org/drawingml/2006/main">
+            <a:r>
+              <a:t>Sinn: Jeder bekommt einen Denar. Erste arbeiteten länger, Letzte eine Stunde. Vereinbarung erfüllt, Murren wegen Gleichstellung. Der Letzte bekam nicht mehr. Reich der Himmel: Gottes Güte zu spät Gekommenen richtet sich nicht nach einem Anspruch auf Vorrang. Arbeit bleibt wichtig: Eingeladene gehen arbeiten. Umkehr nicht aufschieben.</a:t>
+            </a:r>
+          </a:p>
+          <a:p xmlns:a="http://schemas.openxmlformats.org/drawingml/2006/main">
+            <a:r>
+              <a:t/>
+            </a:r>
+          </a:p>
+          <a:p xmlns:a="http://schemas.openxmlformats.org/drawingml/2006/main">
+            <a:r>
+              <a:t>Theophylakt verbindet das Gleichnis mit Aufnahme spät Umkehrender. Quelle: https://azbyka.ru/otechnik/Feofilakt_Bolgarskij/tolkovanie-na-evangelie-ot-matfeja/20</a:t>
+            </a:r>
+          </a:p>
+          <a:p xmlns:a="http://schemas.openxmlformats.org/drawingml/2006/main">
+            <a:r>
+              <a:t/>
+            </a:r>
+          </a:p>
+          <a:p xmlns:a="http://schemas.openxmlformats.org/drawingml/2006/main">
+            <a:r>
+              <a:t>Keine universelle Lohn-, Noten- oder Wettbewerbsregel. Stundenlohn muss nach Vertrag gezahlt werden, keine Ausbeutung. Im Gleichnis lautet der Grund: Niemand hat uns eingestellt. Mischas Grund gehört nur zum erfundenen Beispiel. Neue Information verändert keine Portionen und führt keine gebrochene Zusage ein.</a:t>
+            </a:r>
+          </a:p>
+          <a:p xmlns:a="http://schemas.openxmlformats.org/drawingml/2006/main">
+            <a:r>
+              <a:t/>
+            </a:r>
+          </a:p>
+          <a:p xmlns:a="http://schemas.openxmlformats.org/drawingml/2006/main">
+            <a:r>
+              <a:t>Schlüssel: Vereinbarung, neue Einladungen, Auszahlung, Murren und Antwort. Fälle: gemeinsame Gabe 1–3; Regel verletzt 4–5; nachfragen 6. Zuerst Hauptfälle behandeln.</a:t>
+            </a:r>
+          </a:p>
+          <a:p xmlns:a="http://schemas.openxmlformats.org/drawingml/2006/main">
+            <a:r>
+              <a:t/>
+            </a:r>
+          </a:p>
+          <a:p xmlns:a="http://schemas.openxmlformats.org/drawingml/2006/main">
+            <a:r>
+              <a:t>Keine sofortige Freude und keine öffentlichen Bekenntnisse verlangen. Persönliches Blatt bleibt beim Jugendlichen, Gebet freiwillig und eigens verfasst. Aufrichtige Umkehr anderer nicht beurteilen. Persönliche Fragen können mit einem Priester besprochen werden.</a:t>
+            </a:r>
+          </a:p>
+          <a:p xmlns:a="http://schemas.openxmlformats.org/drawingml/2006/main">
+            <a:r>
+              <a:t/>
+            </a:r>
+          </a:p>
+          <a:p xmlns:a="http://schemas.openxmlformats.org/drawingml/2006/main">
+            <a:r>
+              <a:t/>
+            </a:r>
+          </a:p>
+          <a:p xmlns:a="http://schemas.openxmlformats.org/drawingml/2006/main">
+            <a:r>
+              <a:t>Quelle: https://bible.by/syn/40/20/</a:t>
             </a:r>
           </a:p>
         </p:txBody>
@@ -2398,212 +2323,132 @@
           <a:lstStyle xmlns:a="http://schemas.openxmlformats.org/drawingml/2006/main"/>
           <a:p xmlns:a="http://schemas.openxmlformats.org/drawingml/2006/main">
             <a:r>
-              <a:t>6. Großzügigkeit oder gebrochene Zusage — 4 Minuten.</a:t>
-            </a:r>
-          </a:p>
-          <a:p xmlns:a="http://schemas.openxmlformats.org/drawingml/2006/main">
-            <a:r>
-              <a:t>Worte: Nicht jeder Unterschied bedeutet Unrecht. Eine gebrochene Zusage ruhig klären. Sechs Fälle nach „Zusage gebrochen“, „Hilfe oder Geschenk“, „Nachfragen nötig“ ordnen.</a:t>
-            </a:r>
-          </a:p>
-          <a:p xmlns:a="http://schemas.openxmlformats.org/drawingml/2006/main">
-            <a:r>
-              <a:t>Durchführung: Bedingungen lesen, Gruppe wählen, wenigstens einen Fall erklären. Bei fehlenden Informationen eine notwendige Frage nennen.</a:t>
-            </a:r>
-          </a:p>
-          <a:p xmlns:a="http://schemas.openxmlformats.org/drawingml/2006/main">
-            <a:r>
-              <a:t>Frage: Wie „Ich bekam das Versprochene nicht“ von „Ein anderer bekam etwas Gutes“ unterscheiden?</a:t>
-            </a:r>
-          </a:p>
-          <a:p xmlns:a="http://schemas.openxmlformats.org/drawingml/2006/main">
-            <a:r>
-              <a:t>Orientierung: Konkrete Vereinbarung und eigenes Ergebnis prüfen. Fremde Hilfe oder Geschenk allein beweisen kein Unrecht gegen mich. Erfüllung einer gebrochenen Zusage ohne Angriff auf andere verlangen.</a:t>
-            </a:r>
-          </a:p>
-          <a:p xmlns:a="http://schemas.openxmlformats.org/drawingml/2006/main">
-            <a:r>
-              <a:t>Rhythmus: 2 Minuten Sortieren; 2 Minuten zwei Erklärungen.</a:t>
-            </a:r>
-          </a:p>
-          <a:p xmlns:a="http://schemas.openxmlformats.org/drawingml/2006/main">
-            <a:r>
-              <a:t/>
-            </a:r>
-          </a:p>
-          <a:p xmlns:a="http://schemas.openxmlformats.org/drawingml/2006/main">
-            <a:r>
-              <a:t>Vorbereitung</a:t>
-            </a:r>
-          </a:p>
-          <a:p xmlns:a="http://schemas.openxmlformats.org/drawingml/2006/main">
-            <a:r>
-              <a:t>1. Zwölf Folien und Moderationsnotizen öffnen. Ganzes Matthäus 20,1–16 vorbereiten. Sofort nach dem Lesen spielen, danach besprechen.</a:t>
-            </a:r>
-          </a:p>
-          <a:p xmlns:a="http://schemas.openxmlformats.org/drawingml/2006/main">
-            <a:r>
-              <a:t>2. Seiten 1–2 pro Gruppe, 3–4 pro Paar, 5 pro Viererteam, 6 pro Person drucken. Schreibfelder auf Seiten 3 und 5 nicht zerschneiden. Alle Karten illustriert; Graustufen möglich.</a:t>
-            </a:r>
-          </a:p>
-          <a:p xmlns:a="http://schemas.openxmlformats.org/drawingml/2006/main">
-            <a:r>
-              <a:t>3. Fünf gleiche Spielsteine oder Knöpfe: jeder ein Denar. Requisiten, keine Teilnehmerbelohnung. Sieben Rollen auswählen; Lehrkraft liest Erzählung und Christi Schlussworte.</a:t>
-            </a:r>
-          </a:p>
-          <a:p xmlns:a="http://schemas.openxmlformats.org/drawingml/2006/main">
-            <a:r>
-              <a:t>4. Paare und Viererteams bilden. Bei kleinerem Team liest einer zwei Informationen. Neue Bedingung über fünf Minuten bis Phase 9 zurückhalten. Ersten Plan nicht löschen.</a:t>
-            </a:r>
-          </a:p>
-          <a:p xmlns:a="http://schemas.openxmlformats.org/drawingml/2006/main">
-            <a:r>
-              <a:t>5. Stifte und gegebenenfalls Werkstattmaterial vorbereiten. Persönliches Blatt bleibt beim Jugendlichen; erfundene Fälle zulässig.</a:t>
-            </a:r>
-          </a:p>
-          <a:p xmlns:a="http://schemas.openxmlformats.org/drawingml/2006/main">
-            <a:r>
-              <a:t>Hinweise</a:t>
-            </a:r>
-          </a:p>
-          <a:p xmlns:a="http://schemas.openxmlformats.org/drawingml/2006/main">
-            <a:r>
-              <a:t>1. Im Gleichnis bekommt der Letzte gleich viel wie der Erste. Titel beschreibt Vergleichsgefühl. Nicht zwei Münzen gegen eine erzählen. Jeder einen Denar; Zusage an Erste erfüllt.</a:t>
-            </a:r>
-          </a:p>
-          <a:p xmlns:a="http://schemas.openxmlformats.org/drawingml/2006/main">
-            <a:r>
-              <a:t>2. Fünf Einladungszeiten, Auszahlung von den Letzten an erhalten. Sieben Rollen sind Bühnenwahl, fünf Vertreter sind Gruppen, keine Evangelien-Gesamtzahl. Niemand stellte die Letzten ein; nicht faul nennen.</a:t>
-            </a:r>
-          </a:p>
-          <a:p xmlns:a="http://schemas.openxmlformats.org/drawingml/2006/main">
-            <a:r>
-              <a:t>3. Anfang vom Himmelreich bestimmt Bedeutung. Gottes Barmherzigkeit nicht als Lohn für Überlegenheit beanspruchen. Theophylakt sieht Möglichkeit, auch spät durch Umkehr ins Reich zu kommen. Nicht folgern, gute Taten aufzuschieben: Eingeladene arbeiten. Quelle: https://azbyka.ru/otechnik/Feofilakt_Bolgarskij/tolkovanie-na-evangelie-ot-matfeja/20.</a:t>
-            </a:r>
-          </a:p>
-          <a:p xmlns:a="http://schemas.openxmlformats.org/drawingml/2006/main">
-            <a:r>
-              <a:t>4. Keine universelle Lohn-, Noten- oder Wettbewerbsregel. Im Alltag Zusage, Regeln und wirklichen Bedarf prüfen. Ruhige Bitte um Korrektur und gute Haltung zu anderen vereinbar.</a:t>
-            </a:r>
-          </a:p>
-          <a:p xmlns:a="http://schemas.openxmlformats.org/drawingml/2006/main">
-            <a:r>
-              <a:t>5. Reihenfolge Seite 3: 2,4,1,3 von links oben. Seite 4: Zusage gebrochen 1,6; Hilfe/Geschenk 2,3; Nachfragen 4,5. Anderer Kontext kann Schluss ändern.</a:t>
-            </a:r>
-          </a:p>
-          <a:p xmlns:a="http://schemas.openxmlformats.org/drawingml/2006/main">
-            <a:r>
-              <a:t>6. Erster Plan: Saschas Termin steht noch aus. Zweiter: fünf statt zehn Minuten, Zusage gebrochen. Nicht jede Bitte Neid nennen. Zeit klären; Geschenk bleibt.</a:t>
-            </a:r>
-          </a:p>
-          <a:p xmlns:a="http://schemas.openxmlformats.org/drawingml/2006/main">
-            <a:r>
-              <a:t>7. Vergleich kann echtes Bedürfnis zeigen. Es benennen, nicht „undankbar“ oder „schlechter“ urteilen. Fremder Erfolg bestimmt meinen Wert vor Gott nicht. Dank und Bitte zusammen.</a:t>
-            </a:r>
-          </a:p>
-          <a:p xmlns:a="http://schemas.openxmlformats.org/drawingml/2006/main">
-            <a:r>
-              <a:t>8. Keine sofortige Freude oder öffentliche Neidbeichte verlangen. Freundlichen Satz und Tat anbieten, auch wenn Gefühl bleibt. Gebet eigens verfasst, stilles Zuhören möglich. Bei Fragen zu Umkehr und Beichte Gespräch mit Priester anbieten.</a:t>
-            </a:r>
-          </a:p>
-          <a:p xmlns:a="http://schemas.openxmlformats.org/drawingml/2006/main">
-            <a:r>
-              <a:t/>
-            </a:r>
-          </a:p>
-          <a:p xmlns:a="http://schemas.openxmlformats.org/drawingml/2006/main">
-            <a:r>
-              <a:t>Versprochene Minuten</a:t>
-            </a:r>
-          </a:p>
-          <a:p xmlns:a="http://schemas.openxmlformats.org/drawingml/2006/main">
-            <a:r>
-              <a:t>Lehrkraft versprach dir zehn Minuten Rückmeldung, gab fünf und beendete Unterricht. Ein anderer bekam zehn. Was wurde verletzt, worum bitten?</a:t>
-            </a:r>
-          </a:p>
-          <a:p xmlns:a="http://schemas.openxmlformats.org/drawingml/2006/main">
-            <a:r>
-              <a:t/>
-            </a:r>
-          </a:p>
-          <a:p xmlns:a="http://schemas.openxmlformats.org/drawingml/2006/main">
-            <a:r>
-              <a:t>Hilfe für den Neuen</a:t>
-            </a:r>
-          </a:p>
-          <a:p xmlns:a="http://schemas.openxmlformats.org/drawingml/2006/main">
-            <a:r>
-              <a:t>Jeder bekam versprochenes Material und Zeit. Danach hilft Pädagoge zusätzlich dem Neuen. Deine Hilfe wurde nicht gekürzt. Warum fremde Hilfe nicht beenden?</a:t>
-            </a:r>
-          </a:p>
-          <a:p xmlns:a="http://schemas.openxmlformats.org/drawingml/2006/main">
-            <a:r>
-              <a:t/>
-            </a:r>
-          </a:p>
-          <a:p xmlns:a="http://schemas.openxmlformats.org/drawingml/2006/main">
-            <a:r>
-              <a:t>Neue Schuhe</a:t>
-            </a:r>
-          </a:p>
-          <a:p xmlns:a="http://schemas.openxmlformats.org/drawingml/2006/main">
-            <a:r>
-              <a:t>Bruder bekam Schuhe, weil alte zu klein. Deine passen und sind heil. Gleichzeitiger Kauf nicht versprochen. Eigenen Wunsch ohne „Er wird mehr geliebt“ äußern.</a:t>
-            </a:r>
-          </a:p>
-          <a:p xmlns:a="http://schemas.openxmlformats.org/drawingml/2006/main">
-            <a:r>
-              <a:t/>
-            </a:r>
-          </a:p>
-          <a:p xmlns:a="http://schemas.openxmlformats.org/drawingml/2006/main">
-            <a:r>
-              <a:t>Neuer Malkasten</a:t>
-            </a:r>
-          </a:p>
-          <a:p xmlns:a="http://schemas.openxmlformats.org/drawingml/2006/main">
-            <a:r>
-              <a:t>Freund bekam Farben. Du siehst Geschenk, weißt aber nicht von wem, warum, mit welchen Vereinbarungen. Welchen Fakt vor Schluss klären?</a:t>
-            </a:r>
-          </a:p>
-          <a:p xmlns:a="http://schemas.openxmlformats.org/drawingml/2006/main">
-            <a:r>
-              <a:t/>
-            </a:r>
-          </a:p>
-          <a:p xmlns:a="http://schemas.openxmlformats.org/drawingml/2006/main">
-            <a:r>
-              <a:t>Die Arbeit des anderen</a:t>
-            </a:r>
-          </a:p>
-          <a:p xmlns:a="http://schemas.openxmlformats.org/drawingml/2006/main">
-            <a:r>
-              <a:t>Freund bekam Lob für Bild. Du keinen Kommentar, weißt aber nicht, ob Lehrkraft dein Bild bereits ansah. Wie ruhig um Rückmeldung bitten?</a:t>
-            </a:r>
-          </a:p>
-          <a:p xmlns:a="http://schemas.openxmlformats.org/drawingml/2006/main">
-            <a:r>
-              <a:t/>
-            </a:r>
-          </a:p>
-          <a:p xmlns:a="http://schemas.openxmlformats.org/drawingml/2006/main">
-            <a:r>
-              <a:t>Material fehlt</a:t>
-            </a:r>
-          </a:p>
-          <a:p xmlns:a="http://schemas.openxmlformats.org/drawingml/2006/main">
-            <a:r>
-              <a:t>Jedem brauchbarer Basiskasten versprochen. Du bekamst trockene Farben und sollst damit arbeiten, anderer brauchbare. Zusage einfordern, ohne fremden Kasten zu beschädigen.</a:t>
-            </a:r>
-          </a:p>
-          <a:p xmlns:a="http://schemas.openxmlformats.org/drawingml/2006/main">
-            <a:r>
-              <a:t/>
-            </a:r>
-          </a:p>
-          <a:p xmlns:a="http://schemas.openxmlformats.org/drawingml/2006/main">
-            <a:r>
-              <a:t>Quelle: vorhandener zweisprachiger Unterricht auf lessons.atapin.de; vorhandene Illustrationen unverändert.</a:t>
+              <a:t>6. Gleiche Gabe oder verletzte Regel — 4 Minuten.</a:t>
+            </a:r>
+          </a:p>
+          <a:p xmlns:a="http://schemas.openxmlformats.org/drawingml/2006/main">
+            <a:r>
+              <a:t/>
+            </a:r>
+          </a:p>
+          <a:p xmlns:a="http://schemas.openxmlformats.org/drawingml/2006/main">
+            <a:r>
+              <a:t>Worte: Prüft jeden Fall: gemeinsame Gabe oder Bezahlung nach vorher vereinbarter Regel? Unser Hauptfall ist gleiche Gabe bei verschieden langer Teilnahme.</a:t>
+            </a:r>
+          </a:p>
+          <a:p xmlns:a="http://schemas.openxmlformats.org/drawingml/2006/main">
+            <a:r>
+              <a:t/>
+            </a:r>
+          </a:p>
+          <a:p xmlns:a="http://schemas.openxmlformats.org/drawingml/2006/main">
+            <a:r>
+              <a:t>Durchführung: Sechs Karten sortieren: Gemeinsame Gabe, Regel verletzt, Nachfragen nötig. Zuerst zwei Fälle gleicher Gabe erklären. Verletzungen dienen zur Abgrenzung gegen falsche Lohn- oder Notenregeln.</a:t>
+            </a:r>
+          </a:p>
+          <a:p xmlns:a="http://schemas.openxmlformats.org/drawingml/2006/main">
+            <a:r>
+              <a:t/>
+            </a:r>
+          </a:p>
+          <a:p xmlns:a="http://schemas.openxmlformats.org/drawingml/2006/main">
+            <a:r>
+              <a:t>Frage: Wann ärgert gleiche Gabe trotz erfüllter Zusage?</a:t>
+            </a:r>
+          </a:p>
+          <a:p xmlns:a="http://schemas.openxmlformats.org/drawingml/2006/main">
+            <a:r>
+              <a:t/>
+            </a:r>
+          </a:p>
+          <a:p xmlns:a="http://schemas.openxmlformats.org/drawingml/2006/main">
+            <a:r>
+              <a:t>Orientierung: Ein langjähriger Teilnehmer kann Vorrang verlangen. Das ähnelt dem Murren. Wenn Stundenlohn versprochen, aber nicht gezahlt wurde, muss der Fehler korrigiert werden. Das Gleichnis erlaubt keinen Betrug und keine Ausbeutung.</a:t>
+            </a:r>
+          </a:p>
+          <a:p xmlns:a="http://schemas.openxmlformats.org/drawingml/2006/main">
+            <a:r>
+              <a:t/>
+            </a:r>
+          </a:p>
+          <a:p xmlns:a="http://schemas.openxmlformats.org/drawingml/2006/main">
+            <a:r>
+              <a:t>Rhythmus: 2+2 Minuten in der Reihenfolge der Schritte.</a:t>
+            </a:r>
+          </a:p>
+          <a:p xmlns:a="http://schemas.openxmlformats.org/drawingml/2006/main">
+            <a:r>
+              <a:t/>
+            </a:r>
+          </a:p>
+          <a:p xmlns:a="http://schemas.openxmlformats.org/drawingml/2006/main">
+            <a:r>
+              <a:t>Vorbereitung: Vollständiges Matthäus 20,1–16, fünf gleiche Spielsteine und sieben Rollen. Fünf Vertreter stehen für Gruppen, Gesamtzahl nicht zählen. Lesung, sofort Rollenspiel, erst dann Gespräch. Seiten 3–4 für Paare, 5 für Viererteams, 6 persönlich. Ersten Plan behalten.</a:t>
+            </a:r>
+          </a:p>
+          <a:p xmlns:a="http://schemas.openxmlformats.org/drawingml/2006/main">
+            <a:r>
+              <a:t/>
+            </a:r>
+          </a:p>
+          <a:p xmlns:a="http://schemas.openxmlformats.org/drawingml/2006/main">
+            <a:r>
+              <a:t>Sinn: Jeder bekommt einen Denar. Erste arbeiteten länger, Letzte eine Stunde. Vereinbarung erfüllt, Murren wegen Gleichstellung. Der Letzte bekam nicht mehr. Reich der Himmel: Gottes Güte zu spät Gekommenen richtet sich nicht nach einem Anspruch auf Vorrang. Arbeit bleibt wichtig: Eingeladene gehen arbeiten. Umkehr nicht aufschieben.</a:t>
+            </a:r>
+          </a:p>
+          <a:p xmlns:a="http://schemas.openxmlformats.org/drawingml/2006/main">
+            <a:r>
+              <a:t/>
+            </a:r>
+          </a:p>
+          <a:p xmlns:a="http://schemas.openxmlformats.org/drawingml/2006/main">
+            <a:r>
+              <a:t>Theophylakt verbindet das Gleichnis mit Aufnahme spät Umkehrender. Quelle: https://azbyka.ru/otechnik/Feofilakt_Bolgarskij/tolkovanie-na-evangelie-ot-matfeja/20</a:t>
+            </a:r>
+          </a:p>
+          <a:p xmlns:a="http://schemas.openxmlformats.org/drawingml/2006/main">
+            <a:r>
+              <a:t/>
+            </a:r>
+          </a:p>
+          <a:p xmlns:a="http://schemas.openxmlformats.org/drawingml/2006/main">
+            <a:r>
+              <a:t>Keine universelle Lohn-, Noten- oder Wettbewerbsregel. Stundenlohn muss nach Vertrag gezahlt werden, keine Ausbeutung. Im Gleichnis lautet der Grund: Niemand hat uns eingestellt. Mischas Grund gehört nur zum erfundenen Beispiel. Neue Information verändert keine Portionen und führt keine gebrochene Zusage ein.</a:t>
+            </a:r>
+          </a:p>
+          <a:p xmlns:a="http://schemas.openxmlformats.org/drawingml/2006/main">
+            <a:r>
+              <a:t/>
+            </a:r>
+          </a:p>
+          <a:p xmlns:a="http://schemas.openxmlformats.org/drawingml/2006/main">
+            <a:r>
+              <a:t>Schlüssel: Vereinbarung, neue Einladungen, Auszahlung, Murren und Antwort. Fälle: gemeinsame Gabe 1–3; Regel verletzt 4–5; nachfragen 6. Zuerst Hauptfälle behandeln.</a:t>
+            </a:r>
+          </a:p>
+          <a:p xmlns:a="http://schemas.openxmlformats.org/drawingml/2006/main">
+            <a:r>
+              <a:t/>
+            </a:r>
+          </a:p>
+          <a:p xmlns:a="http://schemas.openxmlformats.org/drawingml/2006/main">
+            <a:r>
+              <a:t>Keine sofortige Freude und keine öffentlichen Bekenntnisse verlangen. Persönliches Blatt bleibt beim Jugendlichen, Gebet freiwillig und eigens verfasst. Aufrichtige Umkehr anderer nicht beurteilen. Persönliche Fragen können mit einem Priester besprochen werden.</a:t>
+            </a:r>
+          </a:p>
+          <a:p xmlns:a="http://schemas.openxmlformats.org/drawingml/2006/main">
+            <a:r>
+              <a:t/>
+            </a:r>
+          </a:p>
+          <a:p xmlns:a="http://schemas.openxmlformats.org/drawingml/2006/main">
+            <a:r>
+              <a:t/>
+            </a:r>
+          </a:p>
+          <a:p xmlns:a="http://schemas.openxmlformats.org/drawingml/2006/main">
+            <a:r>
+              <a:t>Quelle: https://bible.by/syn/40/20/</a:t>
             </a:r>
           </a:p>
         </p:txBody>
@@ -2673,122 +2518,132 @@
           <a:lstStyle xmlns:a="http://schemas.openxmlformats.org/drawingml/2006/main"/>
           <a:p xmlns:a="http://schemas.openxmlformats.org/drawingml/2006/main">
             <a:r>
-              <a:t>7. Ein Gespräch ohne Vorwurf — 4 Minuten.</a:t>
-            </a:r>
-          </a:p>
-          <a:p xmlns:a="http://schemas.openxmlformats.org/drawingml/2006/main">
-            <a:r>
-              <a:t>Worte: Statt „Er wird mehr geliebt“ mein Bedürfnis nennen. Gebrochene Zusage benennen; über Geschenk für einen Freund freuen und separat um das Eigene bitten.</a:t>
-            </a:r>
-          </a:p>
-          <a:p xmlns:a="http://schemas.openxmlformats.org/drawingml/2006/main">
-            <a:r>
-              <a:t>Durchführung: Zwei Fälle von Seite 4 wählen. Einer antwortet dem vergleichenden Jugendlichen; dann Rollen wechseln. Zuhörer wiederholt verstandene Bitte, Glückwunsch oder Faktenfrage.</a:t>
-            </a:r>
-          </a:p>
-          <a:p xmlns:a="http://schemas.openxmlformats.org/drawingml/2006/main">
-            <a:r>
-              <a:t>Frage: Wie um Nötiges bitten, ohne fremdes Geschenk wegzunehmen?</a:t>
-            </a:r>
-          </a:p>
-          <a:p xmlns:a="http://schemas.openxmlformats.org/drawingml/2006/main">
-            <a:r>
-              <a:t>Orientierung: „Ich brauche brauchbare Farben. Können wir besprechen, wie ich sie bekomme?“ Oder „Wir vereinbarten zehn Minuten, ich bekam fünf. Wann können wir fertig werden?“ Fremdes Geschenk bleibt.</a:t>
-            </a:r>
-          </a:p>
-          <a:p xmlns:a="http://schemas.openxmlformats.org/drawingml/2006/main">
-            <a:r>
-              <a:t>Rhythmus: 2 Minuten erste Übung; 2 Minuten Rollenwechsel.</a:t>
-            </a:r>
-          </a:p>
-          <a:p xmlns:a="http://schemas.openxmlformats.org/drawingml/2006/main">
-            <a:r>
-              <a:t/>
-            </a:r>
-          </a:p>
-          <a:p xmlns:a="http://schemas.openxmlformats.org/drawingml/2006/main">
-            <a:r>
-              <a:t>Vorbereitung</a:t>
-            </a:r>
-          </a:p>
-          <a:p xmlns:a="http://schemas.openxmlformats.org/drawingml/2006/main">
-            <a:r>
-              <a:t>1. Zwölf Folien und Moderationsnotizen öffnen. Ganzes Matthäus 20,1–16 vorbereiten. Sofort nach dem Lesen spielen, danach besprechen.</a:t>
-            </a:r>
-          </a:p>
-          <a:p xmlns:a="http://schemas.openxmlformats.org/drawingml/2006/main">
-            <a:r>
-              <a:t>2. Seiten 1–2 pro Gruppe, 3–4 pro Paar, 5 pro Viererteam, 6 pro Person drucken. Schreibfelder auf Seiten 3 und 5 nicht zerschneiden. Alle Karten illustriert; Graustufen möglich.</a:t>
-            </a:r>
-          </a:p>
-          <a:p xmlns:a="http://schemas.openxmlformats.org/drawingml/2006/main">
-            <a:r>
-              <a:t>3. Fünf gleiche Spielsteine oder Knöpfe: jeder ein Denar. Requisiten, keine Teilnehmerbelohnung. Sieben Rollen auswählen; Lehrkraft liest Erzählung und Christi Schlussworte.</a:t>
-            </a:r>
-          </a:p>
-          <a:p xmlns:a="http://schemas.openxmlformats.org/drawingml/2006/main">
-            <a:r>
-              <a:t>4. Paare und Viererteams bilden. Bei kleinerem Team liest einer zwei Informationen. Neue Bedingung über fünf Minuten bis Phase 9 zurückhalten. Ersten Plan nicht löschen.</a:t>
-            </a:r>
-          </a:p>
-          <a:p xmlns:a="http://schemas.openxmlformats.org/drawingml/2006/main">
-            <a:r>
-              <a:t>5. Stifte und gegebenenfalls Werkstattmaterial vorbereiten. Persönliches Blatt bleibt beim Jugendlichen; erfundene Fälle zulässig.</a:t>
-            </a:r>
-          </a:p>
-          <a:p xmlns:a="http://schemas.openxmlformats.org/drawingml/2006/main">
-            <a:r>
-              <a:t>Hinweise</a:t>
-            </a:r>
-          </a:p>
-          <a:p xmlns:a="http://schemas.openxmlformats.org/drawingml/2006/main">
-            <a:r>
-              <a:t>1. Im Gleichnis bekommt der Letzte gleich viel wie der Erste. Titel beschreibt Vergleichsgefühl. Nicht zwei Münzen gegen eine erzählen. Jeder einen Denar; Zusage an Erste erfüllt.</a:t>
-            </a:r>
-          </a:p>
-          <a:p xmlns:a="http://schemas.openxmlformats.org/drawingml/2006/main">
-            <a:r>
-              <a:t>2. Fünf Einladungszeiten, Auszahlung von den Letzten an erhalten. Sieben Rollen sind Bühnenwahl, fünf Vertreter sind Gruppen, keine Evangelien-Gesamtzahl. Niemand stellte die Letzten ein; nicht faul nennen.</a:t>
-            </a:r>
-          </a:p>
-          <a:p xmlns:a="http://schemas.openxmlformats.org/drawingml/2006/main">
-            <a:r>
-              <a:t>3. Anfang vom Himmelreich bestimmt Bedeutung. Gottes Barmherzigkeit nicht als Lohn für Überlegenheit beanspruchen. Theophylakt sieht Möglichkeit, auch spät durch Umkehr ins Reich zu kommen. Nicht folgern, gute Taten aufzuschieben: Eingeladene arbeiten. Quelle: https://azbyka.ru/otechnik/Feofilakt_Bolgarskij/tolkovanie-na-evangelie-ot-matfeja/20.</a:t>
-            </a:r>
-          </a:p>
-          <a:p xmlns:a="http://schemas.openxmlformats.org/drawingml/2006/main">
-            <a:r>
-              <a:t>4. Keine universelle Lohn-, Noten- oder Wettbewerbsregel. Im Alltag Zusage, Regeln und wirklichen Bedarf prüfen. Ruhige Bitte um Korrektur und gute Haltung zu anderen vereinbar.</a:t>
-            </a:r>
-          </a:p>
-          <a:p xmlns:a="http://schemas.openxmlformats.org/drawingml/2006/main">
-            <a:r>
-              <a:t>5. Reihenfolge Seite 3: 2,4,1,3 von links oben. Seite 4: Zusage gebrochen 1,6; Hilfe/Geschenk 2,3; Nachfragen 4,5. Anderer Kontext kann Schluss ändern.</a:t>
-            </a:r>
-          </a:p>
-          <a:p xmlns:a="http://schemas.openxmlformats.org/drawingml/2006/main">
-            <a:r>
-              <a:t>6. Erster Plan: Saschas Termin steht noch aus. Zweiter: fünf statt zehn Minuten, Zusage gebrochen. Nicht jede Bitte Neid nennen. Zeit klären; Geschenk bleibt.</a:t>
-            </a:r>
-          </a:p>
-          <a:p xmlns:a="http://schemas.openxmlformats.org/drawingml/2006/main">
-            <a:r>
-              <a:t>7. Vergleich kann echtes Bedürfnis zeigen. Es benennen, nicht „undankbar“ oder „schlechter“ urteilen. Fremder Erfolg bestimmt meinen Wert vor Gott nicht. Dank und Bitte zusammen.</a:t>
-            </a:r>
-          </a:p>
-          <a:p xmlns:a="http://schemas.openxmlformats.org/drawingml/2006/main">
-            <a:r>
-              <a:t>8. Keine sofortige Freude oder öffentliche Neidbeichte verlangen. Freundlichen Satz und Tat anbieten, auch wenn Gefühl bleibt. Gebet eigens verfasst, stilles Zuhören möglich. Bei Fragen zu Umkehr und Beichte Gespräch mit Priester anbieten.</a:t>
-            </a:r>
-          </a:p>
-          <a:p xmlns:a="http://schemas.openxmlformats.org/drawingml/2006/main">
-            <a:r>
-              <a:t/>
-            </a:r>
-          </a:p>
-          <a:p xmlns:a="http://schemas.openxmlformats.org/drawingml/2006/main">
-            <a:r>
-              <a:t>Quelle: vorhandener zweisprachiger Unterricht auf lessons.atapin.de; vorhandene Illustrationen unverändert.</a:t>
+              <a:t>7. Die Worte des ersten Arbeiters — 4 Minuten.</a:t>
+            </a:r>
+          </a:p>
+          <a:p xmlns:a="http://schemas.openxmlformats.org/drawingml/2006/main">
+            <a:r>
+              <a:t/>
+            </a:r>
+          </a:p>
+          <a:p xmlns:a="http://schemas.openxmlformats.org/drawingml/2006/main">
+            <a:r>
+              <a:t>Worte: Der Erste sagt: Ich habe länger gearbeitet. Warum bekam er genauso viel? Eine Person sagt dies, die andere antwortet mit Vereinbarung und Güte.</a:t>
+            </a:r>
+          </a:p>
+          <a:p xmlns:a="http://schemas.openxmlformats.org/drawingml/2006/main">
+            <a:r>
+              <a:t/>
+            </a:r>
+          </a:p>
+          <a:p xmlns:a="http://schemas.openxmlformats.org/drawingml/2006/main">
+            <a:r>
+              <a:t>Durchführung: Verse 13–15 nutzen. Dann Rollen wechseln. Die tatsächliche Arbeit des Ersten anerkennen und den Letzten nicht erniedrigen.</a:t>
+            </a:r>
+          </a:p>
+          <a:p xmlns:a="http://schemas.openxmlformats.org/drawingml/2006/main">
+            <a:r>
+              <a:t/>
+            </a:r>
+          </a:p>
+          <a:p xmlns:a="http://schemas.openxmlformats.org/drawingml/2006/main">
+            <a:r>
+              <a:t>Frage: Wie Arbeit anerkennen und Güte zum Letzten bewahren?</a:t>
+            </a:r>
+          </a:p>
+          <a:p xmlns:a="http://schemas.openxmlformats.org/drawingml/2006/main">
+            <a:r>
+              <a:t/>
+            </a:r>
+          </a:p>
+          <a:p xmlns:a="http://schemas.openxmlformats.org/drawingml/2006/main">
+            <a:r>
+              <a:t>Orientierung: Du hast tatsächlich länger gearbeitet und den versprochenen Denar bekommen. Der Hausherr wollte dem Letzten genauso viel geben. Seine Güte macht deine Arbeit nicht wertlos. Dies ist unsere Erklärung, kein erfundenes Ende des Gleichnisses.</a:t>
+            </a:r>
+          </a:p>
+          <a:p xmlns:a="http://schemas.openxmlformats.org/drawingml/2006/main">
+            <a:r>
+              <a:t/>
+            </a:r>
+          </a:p>
+          <a:p xmlns:a="http://schemas.openxmlformats.org/drawingml/2006/main">
+            <a:r>
+              <a:t>Rhythmus: 2+2 Minuten in der Reihenfolge der Schritte.</a:t>
+            </a:r>
+          </a:p>
+          <a:p xmlns:a="http://schemas.openxmlformats.org/drawingml/2006/main">
+            <a:r>
+              <a:t/>
+            </a:r>
+          </a:p>
+          <a:p xmlns:a="http://schemas.openxmlformats.org/drawingml/2006/main">
+            <a:r>
+              <a:t>Vorbereitung: Vollständiges Matthäus 20,1–16, fünf gleiche Spielsteine und sieben Rollen. Fünf Vertreter stehen für Gruppen, Gesamtzahl nicht zählen. Lesung, sofort Rollenspiel, erst dann Gespräch. Seiten 3–4 für Paare, 5 für Viererteams, 6 persönlich. Ersten Plan behalten.</a:t>
+            </a:r>
+          </a:p>
+          <a:p xmlns:a="http://schemas.openxmlformats.org/drawingml/2006/main">
+            <a:r>
+              <a:t/>
+            </a:r>
+          </a:p>
+          <a:p xmlns:a="http://schemas.openxmlformats.org/drawingml/2006/main">
+            <a:r>
+              <a:t>Sinn: Jeder bekommt einen Denar. Erste arbeiteten länger, Letzte eine Stunde. Vereinbarung erfüllt, Murren wegen Gleichstellung. Der Letzte bekam nicht mehr. Reich der Himmel: Gottes Güte zu spät Gekommenen richtet sich nicht nach einem Anspruch auf Vorrang. Arbeit bleibt wichtig: Eingeladene gehen arbeiten. Umkehr nicht aufschieben.</a:t>
+            </a:r>
+          </a:p>
+          <a:p xmlns:a="http://schemas.openxmlformats.org/drawingml/2006/main">
+            <a:r>
+              <a:t/>
+            </a:r>
+          </a:p>
+          <a:p xmlns:a="http://schemas.openxmlformats.org/drawingml/2006/main">
+            <a:r>
+              <a:t>Theophylakt verbindet das Gleichnis mit Aufnahme spät Umkehrender. Quelle: https://azbyka.ru/otechnik/Feofilakt_Bolgarskij/tolkovanie-na-evangelie-ot-matfeja/20</a:t>
+            </a:r>
+          </a:p>
+          <a:p xmlns:a="http://schemas.openxmlformats.org/drawingml/2006/main">
+            <a:r>
+              <a:t/>
+            </a:r>
+          </a:p>
+          <a:p xmlns:a="http://schemas.openxmlformats.org/drawingml/2006/main">
+            <a:r>
+              <a:t>Keine universelle Lohn-, Noten- oder Wettbewerbsregel. Stundenlohn muss nach Vertrag gezahlt werden, keine Ausbeutung. Im Gleichnis lautet der Grund: Niemand hat uns eingestellt. Mischas Grund gehört nur zum erfundenen Beispiel. Neue Information verändert keine Portionen und führt keine gebrochene Zusage ein.</a:t>
+            </a:r>
+          </a:p>
+          <a:p xmlns:a="http://schemas.openxmlformats.org/drawingml/2006/main">
+            <a:r>
+              <a:t/>
+            </a:r>
+          </a:p>
+          <a:p xmlns:a="http://schemas.openxmlformats.org/drawingml/2006/main">
+            <a:r>
+              <a:t>Schlüssel: Vereinbarung, neue Einladungen, Auszahlung, Murren und Antwort. Fälle: gemeinsame Gabe 1–3; Regel verletzt 4–5; nachfragen 6. Zuerst Hauptfälle behandeln.</a:t>
+            </a:r>
+          </a:p>
+          <a:p xmlns:a="http://schemas.openxmlformats.org/drawingml/2006/main">
+            <a:r>
+              <a:t/>
+            </a:r>
+          </a:p>
+          <a:p xmlns:a="http://schemas.openxmlformats.org/drawingml/2006/main">
+            <a:r>
+              <a:t>Keine sofortige Freude und keine öffentlichen Bekenntnisse verlangen. Persönliches Blatt bleibt beim Jugendlichen, Gebet freiwillig und eigens verfasst. Aufrichtige Umkehr anderer nicht beurteilen. Persönliche Fragen können mit einem Priester besprochen werden.</a:t>
+            </a:r>
+          </a:p>
+          <a:p xmlns:a="http://schemas.openxmlformats.org/drawingml/2006/main">
+            <a:r>
+              <a:t/>
+            </a:r>
+          </a:p>
+          <a:p xmlns:a="http://schemas.openxmlformats.org/drawingml/2006/main">
+            <a:r>
+              <a:t/>
+            </a:r>
+          </a:p>
+          <a:p xmlns:a="http://schemas.openxmlformats.org/drawingml/2006/main">
+            <a:r>
+              <a:t>Quelle: https://bible.by/syn/40/20/</a:t>
             </a:r>
           </a:p>
         </p:txBody>
@@ -2858,182 +2713,132 @@
           <a:lstStyle xmlns:a="http://schemas.openxmlformats.org/drawingml/2006/main"/>
           <a:p xmlns:a="http://schemas.openxmlformats.org/drawingml/2006/main">
             <a:r>
-              <a:t>8. Ein neuer Malkasten für den Neuen — 6 Minuten.</a:t>
-            </a:r>
-          </a:p>
-          <a:p xmlns:a="http://schemas.openxmlformats.org/drawingml/2006/main">
-            <a:r>
-              <a:t>Worte: Mischa bekam in der Werkstatt einen neuen Malkasten, Sascha einen gewöhnlichen. Sascha: „Dann werde ich weniger geschätzt“. Jeder hat eine Information. Alle hören, ersten Plan erstellen.</a:t>
-            </a:r>
-          </a:p>
-          <a:p xmlns:a="http://schemas.openxmlformats.org/drawingml/2006/main">
-            <a:r>
-              <a:t>Durchführung: Vierergruppen lesen getrennte Informationen auf Seite 5. Bekanntes, Unbekanntes, Frage an Lehrkraft und gute Tat schreiben. Vertreter stellt Plan vor. Neue Bedingung bleibt bei der Lehrkraft.</a:t>
-            </a:r>
-          </a:p>
-          <a:p xmlns:a="http://schemas.openxmlformats.org/drawingml/2006/main">
-            <a:r>
-              <a:t>Frage: Welche Informationen verhindern den voreiligen Schluss „Er wird mehr geliebt“?</a:t>
-            </a:r>
-          </a:p>
-          <a:p xmlns:a="http://schemas.openxmlformats.org/drawingml/2006/main">
-            <a:r>
-              <a:t>Orientierung: Brauchbarer Basiskasten und zehn Minuten Rückmeldung jedem versprochen. Saschas Kasten ist brauchbar, sein Termin steht noch aus. Ein Freiwilliger schenkte Mischa separat einen neuen. Eigene Zeit noch erhalten; Reihenfolge klären.</a:t>
-            </a:r>
-          </a:p>
-          <a:p xmlns:a="http://schemas.openxmlformats.org/drawingml/2006/main">
-            <a:r>
-              <a:t>Rhythmus: 1 Minute Informationen; 3 Minuten erster Plan; 2 Minuten Bericht und Klärung.</a:t>
-            </a:r>
-          </a:p>
-          <a:p xmlns:a="http://schemas.openxmlformats.org/drawingml/2006/main">
-            <a:r>
-              <a:t/>
-            </a:r>
-          </a:p>
-          <a:p xmlns:a="http://schemas.openxmlformats.org/drawingml/2006/main">
-            <a:r>
-              <a:t>Vorbereitung</a:t>
-            </a:r>
-          </a:p>
-          <a:p xmlns:a="http://schemas.openxmlformats.org/drawingml/2006/main">
-            <a:r>
-              <a:t>1. Zwölf Folien und Moderationsnotizen öffnen. Ganzes Matthäus 20,1–16 vorbereiten. Sofort nach dem Lesen spielen, danach besprechen.</a:t>
-            </a:r>
-          </a:p>
-          <a:p xmlns:a="http://schemas.openxmlformats.org/drawingml/2006/main">
-            <a:r>
-              <a:t>2. Seiten 1–2 pro Gruppe, 3–4 pro Paar, 5 pro Viererteam, 6 pro Person drucken. Schreibfelder auf Seiten 3 und 5 nicht zerschneiden. Alle Karten illustriert; Graustufen möglich.</a:t>
-            </a:r>
-          </a:p>
-          <a:p xmlns:a="http://schemas.openxmlformats.org/drawingml/2006/main">
-            <a:r>
-              <a:t>3. Fünf gleiche Spielsteine oder Knöpfe: jeder ein Denar. Requisiten, keine Teilnehmerbelohnung. Sieben Rollen auswählen; Lehrkraft liest Erzählung und Christi Schlussworte.</a:t>
-            </a:r>
-          </a:p>
-          <a:p xmlns:a="http://schemas.openxmlformats.org/drawingml/2006/main">
-            <a:r>
-              <a:t>4. Paare und Viererteams bilden. Bei kleinerem Team liest einer zwei Informationen. Neue Bedingung über fünf Minuten bis Phase 9 zurückhalten. Ersten Plan nicht löschen.</a:t>
-            </a:r>
-          </a:p>
-          <a:p xmlns:a="http://schemas.openxmlformats.org/drawingml/2006/main">
-            <a:r>
-              <a:t>5. Stifte und gegebenenfalls Werkstattmaterial vorbereiten. Persönliches Blatt bleibt beim Jugendlichen; erfundene Fälle zulässig.</a:t>
-            </a:r>
-          </a:p>
-          <a:p xmlns:a="http://schemas.openxmlformats.org/drawingml/2006/main">
-            <a:r>
-              <a:t>Hinweise</a:t>
-            </a:r>
-          </a:p>
-          <a:p xmlns:a="http://schemas.openxmlformats.org/drawingml/2006/main">
-            <a:r>
-              <a:t>1. Im Gleichnis bekommt der Letzte gleich viel wie der Erste. Titel beschreibt Vergleichsgefühl. Nicht zwei Münzen gegen eine erzählen. Jeder einen Denar; Zusage an Erste erfüllt.</a:t>
-            </a:r>
-          </a:p>
-          <a:p xmlns:a="http://schemas.openxmlformats.org/drawingml/2006/main">
-            <a:r>
-              <a:t>2. Fünf Einladungszeiten, Auszahlung von den Letzten an erhalten. Sieben Rollen sind Bühnenwahl, fünf Vertreter sind Gruppen, keine Evangelien-Gesamtzahl. Niemand stellte die Letzten ein; nicht faul nennen.</a:t>
-            </a:r>
-          </a:p>
-          <a:p xmlns:a="http://schemas.openxmlformats.org/drawingml/2006/main">
-            <a:r>
-              <a:t>3. Anfang vom Himmelreich bestimmt Bedeutung. Gottes Barmherzigkeit nicht als Lohn für Überlegenheit beanspruchen. Theophylakt sieht Möglichkeit, auch spät durch Umkehr ins Reich zu kommen. Nicht folgern, gute Taten aufzuschieben: Eingeladene arbeiten. Quelle: https://azbyka.ru/otechnik/Feofilakt_Bolgarskij/tolkovanie-na-evangelie-ot-matfeja/20.</a:t>
-            </a:r>
-          </a:p>
-          <a:p xmlns:a="http://schemas.openxmlformats.org/drawingml/2006/main">
-            <a:r>
-              <a:t>4. Keine universelle Lohn-, Noten- oder Wettbewerbsregel. Im Alltag Zusage, Regeln und wirklichen Bedarf prüfen. Ruhige Bitte um Korrektur und gute Haltung zu anderen vereinbar.</a:t>
-            </a:r>
-          </a:p>
-          <a:p xmlns:a="http://schemas.openxmlformats.org/drawingml/2006/main">
-            <a:r>
-              <a:t>5. Reihenfolge Seite 3: 2,4,1,3 von links oben. Seite 4: Zusage gebrochen 1,6; Hilfe/Geschenk 2,3; Nachfragen 4,5. Anderer Kontext kann Schluss ändern.</a:t>
-            </a:r>
-          </a:p>
-          <a:p xmlns:a="http://schemas.openxmlformats.org/drawingml/2006/main">
-            <a:r>
-              <a:t>6. Erster Plan: Saschas Termin steht noch aus. Zweiter: fünf statt zehn Minuten, Zusage gebrochen. Nicht jede Bitte Neid nennen. Zeit klären; Geschenk bleibt.</a:t>
-            </a:r>
-          </a:p>
-          <a:p xmlns:a="http://schemas.openxmlformats.org/drawingml/2006/main">
-            <a:r>
-              <a:t>7. Vergleich kann echtes Bedürfnis zeigen. Es benennen, nicht „undankbar“ oder „schlechter“ urteilen. Fremder Erfolg bestimmt meinen Wert vor Gott nicht. Dank und Bitte zusammen.</a:t>
-            </a:r>
-          </a:p>
-          <a:p xmlns:a="http://schemas.openxmlformats.org/drawingml/2006/main">
-            <a:r>
-              <a:t>8. Keine sofortige Freude oder öffentliche Neidbeichte verlangen. Freundlichen Satz und Tat anbieten, auch wenn Gefühl bleibt. Gebet eigens verfasst, stilles Zuhören möglich. Bei Fragen zu Umkehr und Beichte Gespräch mit Priester anbieten.</a:t>
-            </a:r>
-          </a:p>
-          <a:p xmlns:a="http://schemas.openxmlformats.org/drawingml/2006/main">
-            <a:r>
-              <a:t/>
-            </a:r>
-          </a:p>
-          <a:p xmlns:a="http://schemas.openxmlformats.org/drawingml/2006/main">
-            <a:r>
-              <a:t>1. Gemeinsame Zusage</a:t>
-            </a:r>
-          </a:p>
-          <a:p xmlns:a="http://schemas.openxmlformats.org/drawingml/2006/main">
-            <a:r>
-              <a:t>In Werkstatt versprach Lehrkraft jedem brauchbaren Basismalkasten und zehn Minuten Rückmeldung bis Unterrichtsende.</a:t>
-            </a:r>
-          </a:p>
-          <a:p xmlns:a="http://schemas.openxmlformats.org/drawingml/2006/main">
-            <a:r>
-              <a:t/>
-            </a:r>
-          </a:p>
-          <a:p xmlns:a="http://schemas.openxmlformats.org/drawingml/2006/main">
-            <a:r>
-              <a:t>2. Was Sascha hat</a:t>
-            </a:r>
-          </a:p>
-          <a:p xmlns:a="http://schemas.openxmlformats.org/drawingml/2006/main">
-            <a:r>
-              <a:t>Sascha hat brauchbaren gewöhnlichen Kasten. Sein Zehn-Minuten-Termin steht noch aus, Lehrkraft hielt Platz frei. Neuer Kasten bei Mischa weckt „Ich werde weniger geschätzt“. Zeit noch erhalten.</a:t>
-            </a:r>
-          </a:p>
-          <a:p xmlns:a="http://schemas.openxmlformats.org/drawingml/2006/main">
-            <a:r>
-              <a:t/>
-            </a:r>
-          </a:p>
-          <a:p xmlns:a="http://schemas.openxmlformats.org/drawingml/2006/main">
-            <a:r>
-              <a:t>3. Woher das Geschenk kam</a:t>
-            </a:r>
-          </a:p>
-          <a:p xmlns:a="http://schemas.openxmlformats.org/drawingml/2006/main">
-            <a:r>
-              <a:t>Mischa kam erstmals in Werkstatt. Seine Farben sind trocken. Ein Freiwilliger schenkte ihm separat seinen neuen Kasten, ohne anderen Material wegzunehmen.</a:t>
-            </a:r>
-          </a:p>
-          <a:p xmlns:a="http://schemas.openxmlformats.org/drawingml/2006/main">
-            <a:r>
-              <a:t/>
-            </a:r>
-          </a:p>
-          <a:p xmlns:a="http://schemas.openxmlformats.org/drawingml/2006/main">
-            <a:r>
-              <a:t>4. Was man tun kann</a:t>
-            </a:r>
-          </a:p>
-          <a:p xmlns:a="http://schemas.openxmlformats.org/drawingml/2006/main">
-            <a:r>
-              <a:t>Saschas Termin klären, eigenes Bild weiter malen, Mischa beim Ankommen helfen. Fremdes Geschenk bestimmt Saschas Wert nicht. Für gebrochene Zusage braucht es konkrete Fakten.</a:t>
-            </a:r>
-          </a:p>
-          <a:p xmlns:a="http://schemas.openxmlformats.org/drawingml/2006/main">
-            <a:r>
-              <a:t/>
-            </a:r>
-          </a:p>
-          <a:p xmlns:a="http://schemas.openxmlformats.org/drawingml/2006/main">
-            <a:r>
-              <a:t>Quelle: vorhandener zweisprachiger Unterricht auf lessons.atapin.de; vorhandene Illustrationen unverändert.</a:t>
+              <a:t>8. Ein Tisch für alle — 6 Minuten.</a:t>
+            </a:r>
+          </a:p>
+          <a:p xmlns:a="http://schemas.openxmlformats.org/drawingml/2006/main">
+            <a:r>
+              <a:t/>
+            </a:r>
+          </a:p>
+          <a:p xmlns:a="http://schemas.openxmlformats.org/drawingml/2006/main">
+            <a:r>
+              <a:t>Worte: Nach einer freiwilligen Werkstatt sind alle zum Essen eingeladen. Sascha half seit dem Morgen, Mischa erst am Ende. Jeder bekommt ein gleiches vollständiges Abendessen. Sascha verlangt eine kleinere Portion für Mischa. Hört vier Informationen und antwortet.</a:t>
+            </a:r>
+          </a:p>
+          <a:p xmlns:a="http://schemas.openxmlformats.org/drawingml/2006/main">
+            <a:r>
+              <a:t/>
+            </a:r>
+          </a:p>
+          <a:p xmlns:a="http://schemas.openxmlformats.org/drawingml/2006/main">
+            <a:r>
+              <a:t>Durchführung: Viererteam mit getrennten Informationen. Gemeinsame Gabe, Teilnahmezeit, Zusage und Antwort aufschreiben. Kein Stundenpreis. Neue Information bleibt zunächst bei der Leitung.</a:t>
+            </a:r>
+          </a:p>
+          <a:p xmlns:a="http://schemas.openxmlformats.org/drawingml/2006/main">
+            <a:r>
+              <a:t/>
+            </a:r>
+          </a:p>
+          <a:p xmlns:a="http://schemas.openxmlformats.org/drawingml/2006/main">
+            <a:r>
+              <a:t>Frage: Wie passt der Fall zum gleichen Lohn im Gleichnis?</a:t>
+            </a:r>
+          </a:p>
+          <a:p xmlns:a="http://schemas.openxmlformats.org/drawingml/2006/main">
+            <a:r>
+              <a:t/>
+            </a:r>
+          </a:p>
+          <a:p xmlns:a="http://schemas.openxmlformats.org/drawingml/2006/main">
+            <a:r>
+              <a:t>Orientierung: Das Essen ist eine vorher angekündigte Gabe für alle, kein Stundenlohn. Sascha bekam die vollständige Portion. Seine Arbeit kann anerkannt werden, ohne Mischas Portion zu kürzen. Grund für späte Ankunft unbekannt.</a:t>
+            </a:r>
+          </a:p>
+          <a:p xmlns:a="http://schemas.openxmlformats.org/drawingml/2006/main">
+            <a:r>
+              <a:t/>
+            </a:r>
+          </a:p>
+          <a:p xmlns:a="http://schemas.openxmlformats.org/drawingml/2006/main">
+            <a:r>
+              <a:t>Rhythmus: 1+3+2 Minuten in der Reihenfolge der Schritte.</a:t>
+            </a:r>
+          </a:p>
+          <a:p xmlns:a="http://schemas.openxmlformats.org/drawingml/2006/main">
+            <a:r>
+              <a:t/>
+            </a:r>
+          </a:p>
+          <a:p xmlns:a="http://schemas.openxmlformats.org/drawingml/2006/main">
+            <a:r>
+              <a:t>Vorbereitung: Vollständiges Matthäus 20,1–16, fünf gleiche Spielsteine und sieben Rollen. Fünf Vertreter stehen für Gruppen, Gesamtzahl nicht zählen. Lesung, sofort Rollenspiel, erst dann Gespräch. Seiten 3–4 für Paare, 5 für Viererteams, 6 persönlich. Ersten Plan behalten.</a:t>
+            </a:r>
+          </a:p>
+          <a:p xmlns:a="http://schemas.openxmlformats.org/drawingml/2006/main">
+            <a:r>
+              <a:t/>
+            </a:r>
+          </a:p>
+          <a:p xmlns:a="http://schemas.openxmlformats.org/drawingml/2006/main">
+            <a:r>
+              <a:t>Sinn: Jeder bekommt einen Denar. Erste arbeiteten länger, Letzte eine Stunde. Vereinbarung erfüllt, Murren wegen Gleichstellung. Der Letzte bekam nicht mehr. Reich der Himmel: Gottes Güte zu spät Gekommenen richtet sich nicht nach einem Anspruch auf Vorrang. Arbeit bleibt wichtig: Eingeladene gehen arbeiten. Umkehr nicht aufschieben.</a:t>
+            </a:r>
+          </a:p>
+          <a:p xmlns:a="http://schemas.openxmlformats.org/drawingml/2006/main">
+            <a:r>
+              <a:t/>
+            </a:r>
+          </a:p>
+          <a:p xmlns:a="http://schemas.openxmlformats.org/drawingml/2006/main">
+            <a:r>
+              <a:t>Theophylakt verbindet das Gleichnis mit Aufnahme spät Umkehrender. Quelle: https://azbyka.ru/otechnik/Feofilakt_Bolgarskij/tolkovanie-na-evangelie-ot-matfeja/20</a:t>
+            </a:r>
+          </a:p>
+          <a:p xmlns:a="http://schemas.openxmlformats.org/drawingml/2006/main">
+            <a:r>
+              <a:t/>
+            </a:r>
+          </a:p>
+          <a:p xmlns:a="http://schemas.openxmlformats.org/drawingml/2006/main">
+            <a:r>
+              <a:t>Keine universelle Lohn-, Noten- oder Wettbewerbsregel. Stundenlohn muss nach Vertrag gezahlt werden, keine Ausbeutung. Im Gleichnis lautet der Grund: Niemand hat uns eingestellt. Mischas Grund gehört nur zum erfundenen Beispiel. Neue Information verändert keine Portionen und führt keine gebrochene Zusage ein.</a:t>
+            </a:r>
+          </a:p>
+          <a:p xmlns:a="http://schemas.openxmlformats.org/drawingml/2006/main">
+            <a:r>
+              <a:t/>
+            </a:r>
+          </a:p>
+          <a:p xmlns:a="http://schemas.openxmlformats.org/drawingml/2006/main">
+            <a:r>
+              <a:t>Schlüssel: Vereinbarung, neue Einladungen, Auszahlung, Murren und Antwort. Fälle: gemeinsame Gabe 1–3; Regel verletzt 4–5; nachfragen 6. Zuerst Hauptfälle behandeln.</a:t>
+            </a:r>
+          </a:p>
+          <a:p xmlns:a="http://schemas.openxmlformats.org/drawingml/2006/main">
+            <a:r>
+              <a:t/>
+            </a:r>
+          </a:p>
+          <a:p xmlns:a="http://schemas.openxmlformats.org/drawingml/2006/main">
+            <a:r>
+              <a:t>Keine sofortige Freude und keine öffentlichen Bekenntnisse verlangen. Persönliches Blatt bleibt beim Jugendlichen, Gebet freiwillig und eigens verfasst. Aufrichtige Umkehr anderer nicht beurteilen. Persönliche Fragen können mit einem Priester besprochen werden.</a:t>
+            </a:r>
+          </a:p>
+          <a:p xmlns:a="http://schemas.openxmlformats.org/drawingml/2006/main">
+            <a:r>
+              <a:t/>
+            </a:r>
+          </a:p>
+          <a:p xmlns:a="http://schemas.openxmlformats.org/drawingml/2006/main">
+            <a:r>
+              <a:t/>
+            </a:r>
+          </a:p>
+          <a:p xmlns:a="http://schemas.openxmlformats.org/drawingml/2006/main">
+            <a:r>
+              <a:t>Quelle: https://bible.by/syn/40/20/</a:t>
             </a:r>
           </a:p>
         </p:txBody>
@@ -3103,122 +2908,132 @@
           <a:lstStyle xmlns:a="http://schemas.openxmlformats.org/drawingml/2006/main"/>
           <a:p xmlns:a="http://schemas.openxmlformats.org/drawingml/2006/main">
             <a:r>
-              <a:t>9. Wenn die Zusage nicht erfüllt wurde — 3 Minuten.</a:t>
-            </a:r>
-          </a:p>
-          <a:p xmlns:a="http://schemas.openxmlformats.org/drawingml/2006/main">
-            <a:r>
-              <a:t>Worte: Neue Bedingung: Am Ende bekam Sascha nur fünf statt zehn Minuten Rückmeldung. Lehrkraft sagte: Für heute ist Schluss. Muss er schweigend dulden? Muss Mischa sein Geschenk verlieren?</a:t>
-            </a:r>
-          </a:p>
-          <a:p xmlns:a="http://schemas.openxmlformats.org/drawingml/2006/main">
-            <a:r>
-              <a:t>Durchführung: Ersten Plan behalten; zweiten im letzten Feld ergänzen. Konkrete gebrochene Zusage liegt jetzt vor. Ruhige Bitte um fehlende Zeit formulieren, Mischas Geschenk lassen.</a:t>
-            </a:r>
-          </a:p>
-          <a:p xmlns:a="http://schemas.openxmlformats.org/drawingml/2006/main">
-            <a:r>
-              <a:t>Frage: Wie verändert der neue Fakt den Plan?</a:t>
-            </a:r>
-          </a:p>
-          <a:p xmlns:a="http://schemas.openxmlformats.org/drawingml/2006/main">
-            <a:r>
-              <a:t>Orientierung: „Wir hatten zehn Minuten vereinbart. Ich bekam fünf. Wann bekomme ich die übrigen fünf?“ Die berechtigte Bitte nicht bloß als Neid abtun; fremde Farben nicht wegnehmen.</a:t>
-            </a:r>
-          </a:p>
-          <a:p xmlns:a="http://schemas.openxmlformats.org/drawingml/2006/main">
-            <a:r>
-              <a:t>Rhythmus: 2 Minuten neuer Plan; 1 Minute zwei Antworten.</a:t>
-            </a:r>
-          </a:p>
-          <a:p xmlns:a="http://schemas.openxmlformats.org/drawingml/2006/main">
-            <a:r>
-              <a:t/>
-            </a:r>
-          </a:p>
-          <a:p xmlns:a="http://schemas.openxmlformats.org/drawingml/2006/main">
-            <a:r>
-              <a:t>Vorbereitung</a:t>
-            </a:r>
-          </a:p>
-          <a:p xmlns:a="http://schemas.openxmlformats.org/drawingml/2006/main">
-            <a:r>
-              <a:t>1. Zwölf Folien und Moderationsnotizen öffnen. Ganzes Matthäus 20,1–16 vorbereiten. Sofort nach dem Lesen spielen, danach besprechen.</a:t>
-            </a:r>
-          </a:p>
-          <a:p xmlns:a="http://schemas.openxmlformats.org/drawingml/2006/main">
-            <a:r>
-              <a:t>2. Seiten 1–2 pro Gruppe, 3–4 pro Paar, 5 pro Viererteam, 6 pro Person drucken. Schreibfelder auf Seiten 3 und 5 nicht zerschneiden. Alle Karten illustriert; Graustufen möglich.</a:t>
-            </a:r>
-          </a:p>
-          <a:p xmlns:a="http://schemas.openxmlformats.org/drawingml/2006/main">
-            <a:r>
-              <a:t>3. Fünf gleiche Spielsteine oder Knöpfe: jeder ein Denar. Requisiten, keine Teilnehmerbelohnung. Sieben Rollen auswählen; Lehrkraft liest Erzählung und Christi Schlussworte.</a:t>
-            </a:r>
-          </a:p>
-          <a:p xmlns:a="http://schemas.openxmlformats.org/drawingml/2006/main">
-            <a:r>
-              <a:t>4. Paare und Viererteams bilden. Bei kleinerem Team liest einer zwei Informationen. Neue Bedingung über fünf Minuten bis Phase 9 zurückhalten. Ersten Plan nicht löschen.</a:t>
-            </a:r>
-          </a:p>
-          <a:p xmlns:a="http://schemas.openxmlformats.org/drawingml/2006/main">
-            <a:r>
-              <a:t>5. Stifte und gegebenenfalls Werkstattmaterial vorbereiten. Persönliches Blatt bleibt beim Jugendlichen; erfundene Fälle zulässig.</a:t>
-            </a:r>
-          </a:p>
-          <a:p xmlns:a="http://schemas.openxmlformats.org/drawingml/2006/main">
-            <a:r>
-              <a:t>Hinweise</a:t>
-            </a:r>
-          </a:p>
-          <a:p xmlns:a="http://schemas.openxmlformats.org/drawingml/2006/main">
-            <a:r>
-              <a:t>1. Im Gleichnis bekommt der Letzte gleich viel wie der Erste. Titel beschreibt Vergleichsgefühl. Nicht zwei Münzen gegen eine erzählen. Jeder einen Denar; Zusage an Erste erfüllt.</a:t>
-            </a:r>
-          </a:p>
-          <a:p xmlns:a="http://schemas.openxmlformats.org/drawingml/2006/main">
-            <a:r>
-              <a:t>2. Fünf Einladungszeiten, Auszahlung von den Letzten an erhalten. Sieben Rollen sind Bühnenwahl, fünf Vertreter sind Gruppen, keine Evangelien-Gesamtzahl. Niemand stellte die Letzten ein; nicht faul nennen.</a:t>
-            </a:r>
-          </a:p>
-          <a:p xmlns:a="http://schemas.openxmlformats.org/drawingml/2006/main">
-            <a:r>
-              <a:t>3. Anfang vom Himmelreich bestimmt Bedeutung. Gottes Barmherzigkeit nicht als Lohn für Überlegenheit beanspruchen. Theophylakt sieht Möglichkeit, auch spät durch Umkehr ins Reich zu kommen. Nicht folgern, gute Taten aufzuschieben: Eingeladene arbeiten. Quelle: https://azbyka.ru/otechnik/Feofilakt_Bolgarskij/tolkovanie-na-evangelie-ot-matfeja/20.</a:t>
-            </a:r>
-          </a:p>
-          <a:p xmlns:a="http://schemas.openxmlformats.org/drawingml/2006/main">
-            <a:r>
-              <a:t>4. Keine universelle Lohn-, Noten- oder Wettbewerbsregel. Im Alltag Zusage, Regeln und wirklichen Bedarf prüfen. Ruhige Bitte um Korrektur und gute Haltung zu anderen vereinbar.</a:t>
-            </a:r>
-          </a:p>
-          <a:p xmlns:a="http://schemas.openxmlformats.org/drawingml/2006/main">
-            <a:r>
-              <a:t>5. Reihenfolge Seite 3: 2,4,1,3 von links oben. Seite 4: Zusage gebrochen 1,6; Hilfe/Geschenk 2,3; Nachfragen 4,5. Anderer Kontext kann Schluss ändern.</a:t>
-            </a:r>
-          </a:p>
-          <a:p xmlns:a="http://schemas.openxmlformats.org/drawingml/2006/main">
-            <a:r>
-              <a:t>6. Erster Plan: Saschas Termin steht noch aus. Zweiter: fünf statt zehn Minuten, Zusage gebrochen. Nicht jede Bitte Neid nennen. Zeit klären; Geschenk bleibt.</a:t>
-            </a:r>
-          </a:p>
-          <a:p xmlns:a="http://schemas.openxmlformats.org/drawingml/2006/main">
-            <a:r>
-              <a:t>7. Vergleich kann echtes Bedürfnis zeigen. Es benennen, nicht „undankbar“ oder „schlechter“ urteilen. Fremder Erfolg bestimmt meinen Wert vor Gott nicht. Dank und Bitte zusammen.</a:t>
-            </a:r>
-          </a:p>
-          <a:p xmlns:a="http://schemas.openxmlformats.org/drawingml/2006/main">
-            <a:r>
-              <a:t>8. Keine sofortige Freude oder öffentliche Neidbeichte verlangen. Freundlichen Satz und Tat anbieten, auch wenn Gefühl bleibt. Gebet eigens verfasst, stilles Zuhören möglich. Bei Fragen zu Umkehr und Beichte Gespräch mit Priester anbieten.</a:t>
-            </a:r>
-          </a:p>
-          <a:p xmlns:a="http://schemas.openxmlformats.org/drawingml/2006/main">
-            <a:r>
-              <a:t/>
-            </a:r>
-          </a:p>
-          <a:p xmlns:a="http://schemas.openxmlformats.org/drawingml/2006/main">
-            <a:r>
-              <a:t>Quelle: vorhandener zweisprachiger Unterricht auf lessons.atapin.de; vorhandene Illustrationen unverändert.</a:t>
+              <a:t>9. Auch der Letzte ist eingeladen — 3 Minuten.</a:t>
+            </a:r>
+          </a:p>
+          <a:p xmlns:a="http://schemas.openxmlformats.org/drawingml/2006/main">
+            <a:r>
+              <a:t/>
+            </a:r>
+          </a:p>
+          <a:p xmlns:a="http://schemas.openxmlformats.org/drawingml/2006/main">
+            <a:r>
+              <a:t>Worte: Neue Information: Mischa begleitete vorher seine Großmutter, die schlecht gehen kann. Er kam spät und half sofort. Die Portionen bleiben gleich. Wie antwortet ihr jetzt?</a:t>
+            </a:r>
+          </a:p>
+          <a:p xmlns:a="http://schemas.openxmlformats.org/drawingml/2006/main">
+            <a:r>
+              <a:t/>
+            </a:r>
+          </a:p>
+          <a:p xmlns:a="http://schemas.openxmlformats.org/drawingml/2006/main">
+            <a:r>
+              <a:t>Durchführung: Erste Antwort behalten. Zweite ergänzen: Welche Vermutung musste geändert werden, was bleibt gleich? Keine gebrochene Zusage einführen.</a:t>
+            </a:r>
+          </a:p>
+          <a:p xmlns:a="http://schemas.openxmlformats.org/drawingml/2006/main">
+            <a:r>
+              <a:t/>
+            </a:r>
+          </a:p>
+          <a:p xmlns:a="http://schemas.openxmlformats.org/drawingml/2006/main">
+            <a:r>
+              <a:t>Frage: Braucht die Güte erst eine Rechtfertigung für den Letzten?</a:t>
+            </a:r>
+          </a:p>
+          <a:p xmlns:a="http://schemas.openxmlformats.org/drawingml/2006/main">
+            <a:r>
+              <a:t/>
+            </a:r>
+          </a:p>
+          <a:p xmlns:a="http://schemas.openxmlformats.org/drawingml/2006/main">
+            <a:r>
+              <a:t>Orientierung: Die Information schützt vor vorschnellem Urteil. Die gemeinsame Gabe verlangt aber keine Rechtfertigung: Einladung und volle Portion galten allen. Im Gleichnis heißt es: Niemand hat uns eingestellt. Mischas Grund gehört nur zum erfundenen Beispiel.</a:t>
+            </a:r>
+          </a:p>
+          <a:p xmlns:a="http://schemas.openxmlformats.org/drawingml/2006/main">
+            <a:r>
+              <a:t/>
+            </a:r>
+          </a:p>
+          <a:p xmlns:a="http://schemas.openxmlformats.org/drawingml/2006/main">
+            <a:r>
+              <a:t>Rhythmus: 2+1 Minuten in der Reihenfolge der Schritte.</a:t>
+            </a:r>
+          </a:p>
+          <a:p xmlns:a="http://schemas.openxmlformats.org/drawingml/2006/main">
+            <a:r>
+              <a:t/>
+            </a:r>
+          </a:p>
+          <a:p xmlns:a="http://schemas.openxmlformats.org/drawingml/2006/main">
+            <a:r>
+              <a:t>Vorbereitung: Vollständiges Matthäus 20,1–16, fünf gleiche Spielsteine und sieben Rollen. Fünf Vertreter stehen für Gruppen, Gesamtzahl nicht zählen. Lesung, sofort Rollenspiel, erst dann Gespräch. Seiten 3–4 für Paare, 5 für Viererteams, 6 persönlich. Ersten Plan behalten.</a:t>
+            </a:r>
+          </a:p>
+          <a:p xmlns:a="http://schemas.openxmlformats.org/drawingml/2006/main">
+            <a:r>
+              <a:t/>
+            </a:r>
+          </a:p>
+          <a:p xmlns:a="http://schemas.openxmlformats.org/drawingml/2006/main">
+            <a:r>
+              <a:t>Sinn: Jeder bekommt einen Denar. Erste arbeiteten länger, Letzte eine Stunde. Vereinbarung erfüllt, Murren wegen Gleichstellung. Der Letzte bekam nicht mehr. Reich der Himmel: Gottes Güte zu spät Gekommenen richtet sich nicht nach einem Anspruch auf Vorrang. Arbeit bleibt wichtig: Eingeladene gehen arbeiten. Umkehr nicht aufschieben.</a:t>
+            </a:r>
+          </a:p>
+          <a:p xmlns:a="http://schemas.openxmlformats.org/drawingml/2006/main">
+            <a:r>
+              <a:t/>
+            </a:r>
+          </a:p>
+          <a:p xmlns:a="http://schemas.openxmlformats.org/drawingml/2006/main">
+            <a:r>
+              <a:t>Theophylakt verbindet das Gleichnis mit Aufnahme spät Umkehrender. Quelle: https://azbyka.ru/otechnik/Feofilakt_Bolgarskij/tolkovanie-na-evangelie-ot-matfeja/20</a:t>
+            </a:r>
+          </a:p>
+          <a:p xmlns:a="http://schemas.openxmlformats.org/drawingml/2006/main">
+            <a:r>
+              <a:t/>
+            </a:r>
+          </a:p>
+          <a:p xmlns:a="http://schemas.openxmlformats.org/drawingml/2006/main">
+            <a:r>
+              <a:t>Keine universelle Lohn-, Noten- oder Wettbewerbsregel. Stundenlohn muss nach Vertrag gezahlt werden, keine Ausbeutung. Im Gleichnis lautet der Grund: Niemand hat uns eingestellt. Mischas Grund gehört nur zum erfundenen Beispiel. Neue Information verändert keine Portionen und führt keine gebrochene Zusage ein.</a:t>
+            </a:r>
+          </a:p>
+          <a:p xmlns:a="http://schemas.openxmlformats.org/drawingml/2006/main">
+            <a:r>
+              <a:t/>
+            </a:r>
+          </a:p>
+          <a:p xmlns:a="http://schemas.openxmlformats.org/drawingml/2006/main">
+            <a:r>
+              <a:t>Schlüssel: Vereinbarung, neue Einladungen, Auszahlung, Murren und Antwort. Fälle: gemeinsame Gabe 1–3; Regel verletzt 4–5; nachfragen 6. Zuerst Hauptfälle behandeln.</a:t>
+            </a:r>
+          </a:p>
+          <a:p xmlns:a="http://schemas.openxmlformats.org/drawingml/2006/main">
+            <a:r>
+              <a:t/>
+            </a:r>
+          </a:p>
+          <a:p xmlns:a="http://schemas.openxmlformats.org/drawingml/2006/main">
+            <a:r>
+              <a:t>Keine sofortige Freude und keine öffentlichen Bekenntnisse verlangen. Persönliches Blatt bleibt beim Jugendlichen, Gebet freiwillig und eigens verfasst. Aufrichtige Umkehr anderer nicht beurteilen. Persönliche Fragen können mit einem Priester besprochen werden.</a:t>
+            </a:r>
+          </a:p>
+          <a:p xmlns:a="http://schemas.openxmlformats.org/drawingml/2006/main">
+            <a:r>
+              <a:t/>
+            </a:r>
+          </a:p>
+          <a:p xmlns:a="http://schemas.openxmlformats.org/drawingml/2006/main">
+            <a:r>
+              <a:t/>
+            </a:r>
+          </a:p>
+          <a:p xmlns:a="http://schemas.openxmlformats.org/drawingml/2006/main">
+            <a:r>
+              <a:t>Quelle: https://bible.by/syn/40/20/</a:t>
             </a:r>
           </a:p>
         </p:txBody>
@@ -3286,7 +3101,7 @@
   </p:cSld>
   <p:clrMap bg1="lt1" tx1="dk1" bg2="lt2" tx2="dk2" accent1="accent1" accent2="accent2" accent3="accent3" accent4="accent4" accent5="accent5" accent6="accent6" hlink="hlink" folHlink="folHlink"/>
   <p:sldLayoutIdLst>
-    <p:sldLayoutId xmlns:r="http://schemas.openxmlformats.org/officeDocument/2006/relationships" id="2147483649" r:id="Rfd1289f658e8487d"/>
+    <p:sldLayoutId xmlns:r="http://schemas.openxmlformats.org/officeDocument/2006/relationships" id="2147483649" r:id="R6b059c5e1e914631"/>
   </p:sldLayoutIdLst>
   <p:txStyles>
     <p:titleStyle>
@@ -3819,7 +3634,7 @@
     <p:bg>
       <p:bgPr>
         <a:solidFill xmlns:a="http://schemas.openxmlformats.org/drawingml/2006/main">
-          <a:srgbClr val="FFF9ED"/>
+          <a:srgbClr val="FFFDF7"/>
         </a:solidFill>
       </p:bgPr>
     </p:bg>
@@ -3837,7 +3652,7 @@
           <p:cNvPr id="6" name="">
             <a:extLst xmlns:a="http://schemas.openxmlformats.org/drawingml/2006/main">
               <a:ext uri="{FF2B5EF4-FFF2-40B4-BE49-F238E27FC236}">
-                <a16:creationId xmlns:a16="http://schemas.microsoft.com/office/drawing/2014/main" id="{CDE57AB4-794D-4CF4-9CB6-149CD6BCDE48}"/>
+                <a16:creationId xmlns:a16="http://schemas.microsoft.com/office/drawing/2014/main" id="{0551289A-1109-445F-924A-98AF24CCAFE7}"/>
               </a:ext>
             </a:extLst>
           </p:cNvPr>
@@ -3848,8 +3663,8 @@
         </p:nvSpPr>
         <p:spPr>
           <a:xfrm xmlns:a="http://schemas.openxmlformats.org/drawingml/2006/main">
-            <a:off x="523875" y="333375"/>
-            <a:ext cx="11144250" cy="1028700"/>
+            <a:off x="523875" y="285750"/>
+            <a:ext cx="11144250" cy="1066800"/>
           </a:xfrm>
           <a:prstGeom xmlns:a="http://schemas.openxmlformats.org/drawingml/2006/main" prst="rect">
             <a:avLst/>
@@ -3866,9 +3681,9 @@
           <a:lstStyle xmlns:a="http://schemas.openxmlformats.org/drawingml/2006/main"/>
           <a:p xmlns:a="http://schemas.openxmlformats.org/drawingml/2006/main">
             <a:pPr>
-              <a:defRPr sz="3000" b="1">
-                <a:solidFill>
-                  <a:srgbClr val="50351F"/>
+              <a:defRPr sz="3300" b="1">
+                <a:solidFill>
+                  <a:srgbClr val="29251F"/>
                 </a:solidFill>
                 <a:latin typeface="Arial"/>
                 <a:ea typeface="Arial"/>
@@ -3876,15 +3691,15 @@
               </a:defRPr>
             </a:pPr>
             <a:r>
-              <a:rPr sz="3000" b="1">
-                <a:solidFill>
-                  <a:srgbClr val="50351F"/>
+              <a:rPr sz="3300" b="1">
+                <a:solidFill>
+                  <a:srgbClr val="29251F"/>
                 </a:solidFill>
                 <a:latin typeface="Arial"/>
                 <a:ea typeface="Arial"/>
                 <a:cs typeface="Arial"/>
               </a:rPr>
-              <a:t>Warum bekommt er mehr als ich?</a:t>
+              <a:t>Warum bekommt er genauso viel wie ich?</a:t>
             </a:r>
           </a:p>
         </p:txBody>
@@ -3894,7 +3709,7 @@
           <p:cNvPr id="2" name="">
             <a:extLst xmlns:a="http://schemas.openxmlformats.org/drawingml/2006/main">
               <a:ext uri="{FF2B5EF4-FFF2-40B4-BE49-F238E27FC236}">
-                <a16:creationId xmlns:a16="http://schemas.microsoft.com/office/drawing/2014/main" id="{537AA466-9E20-41D4-B897-C5152CA9DE37}"/>
+                <a16:creationId xmlns:a16="http://schemas.microsoft.com/office/drawing/2014/main" id="{D9190BF8-697E-4935-BB2B-43383BE1EC8C}"/>
               </a:ext>
             </a:extLst>
           </p:cNvPr>
@@ -3905,8 +3720,8 @@
         </p:nvSpPr>
         <p:spPr>
           <a:xfrm xmlns:a="http://schemas.openxmlformats.org/drawingml/2006/main">
-            <a:off x="523875" y="1476375"/>
-            <a:ext cx="5524500" cy="4429125"/>
+            <a:off x="523875" y="1676400"/>
+            <a:ext cx="5524500" cy="4000500"/>
           </a:xfrm>
           <a:prstGeom xmlns:a="http://schemas.openxmlformats.org/drawingml/2006/main" prst="rect">
             <a:avLst/>
@@ -3923,9 +3738,9 @@
           <a:lstStyle xmlns:a="http://schemas.openxmlformats.org/drawingml/2006/main"/>
           <a:p xmlns:a="http://schemas.openxmlformats.org/drawingml/2006/main">
             <a:pPr>
-              <a:defRPr sz="2250" b="0">
-                <a:solidFill>
-                  <a:srgbClr val="50351F"/>
+              <a:defRPr sz="2400" b="0">
+                <a:solidFill>
+                  <a:srgbClr val="29251F"/>
                 </a:solidFill>
                 <a:latin typeface="Arial"/>
                 <a:ea typeface="Arial"/>
@@ -3933,22 +3748,22 @@
               </a:defRPr>
             </a:pPr>
             <a:r>
-              <a:rPr sz="2250" b="0">
-                <a:solidFill>
-                  <a:srgbClr val="50351F"/>
+              <a:rPr sz="2400" b="0">
+                <a:solidFill>
+                  <a:srgbClr val="29251F"/>
                 </a:solidFill>
                 <a:latin typeface="Arial"/>
                 <a:ea typeface="Arial"/>
                 <a:cs typeface="Arial"/>
               </a:rPr>
-              <a:t>Gerechtigkeit</a:t>
+              <a:t>Verschiedene Arbeitszeit</a:t>
             </a:r>
           </a:p>
           <a:p xmlns:a="http://schemas.openxmlformats.org/drawingml/2006/main">
             <a:pPr>
-              <a:defRPr sz="2250" b="0">
-                <a:solidFill>
-                  <a:srgbClr val="50351F"/>
+              <a:defRPr sz="2400" b="0">
+                <a:solidFill>
+                  <a:srgbClr val="29251F"/>
                 </a:solidFill>
                 <a:latin typeface="Arial"/>
                 <a:ea typeface="Arial"/>
@@ -3956,22 +3771,22 @@
               </a:defRPr>
             </a:pPr>
             <a:r>
-              <a:rPr sz="2250" b="0">
-                <a:solidFill>
-                  <a:srgbClr val="50351F"/>
+              <a:rPr sz="2400" b="0">
+                <a:solidFill>
+                  <a:srgbClr val="29251F"/>
                 </a:solidFill>
                 <a:latin typeface="Arial"/>
                 <a:ea typeface="Arial"/>
                 <a:cs typeface="Arial"/>
               </a:rPr>
-              <a:t>und Großzügigkeit</a:t>
+              <a:t>Gleicher Lohn</a:t>
             </a:r>
           </a:p>
           <a:p xmlns:a="http://schemas.openxmlformats.org/drawingml/2006/main">
             <a:pPr>
-              <a:defRPr sz="2250" b="0">
-                <a:solidFill>
-                  <a:srgbClr val="50351F"/>
+              <a:defRPr sz="2400" b="0">
+                <a:solidFill>
+                  <a:srgbClr val="29251F"/>
                 </a:solidFill>
                 <a:latin typeface="Arial"/>
                 <a:ea typeface="Arial"/>
@@ -3979,61 +3794,15 @@
               </a:defRPr>
             </a:pPr>
             <a:r>
-              <a:rPr sz="2250" b="0">
-                <a:solidFill>
-                  <a:srgbClr val="50351F"/>
+              <a:rPr sz="2400" b="0">
+                <a:solidFill>
+                  <a:srgbClr val="29251F"/>
                 </a:solidFill>
                 <a:latin typeface="Arial"/>
                 <a:ea typeface="Arial"/>
                 <a:cs typeface="Arial"/>
               </a:rPr>
-              <a:t>Sich mit anderen</a:t>
-            </a:r>
-          </a:p>
-          <a:p xmlns:a="http://schemas.openxmlformats.org/drawingml/2006/main">
-            <a:pPr>
-              <a:defRPr sz="2250" b="0">
-                <a:solidFill>
-                  <a:srgbClr val="50351F"/>
-                </a:solidFill>
-                <a:latin typeface="Arial"/>
-                <a:ea typeface="Arial"/>
-                <a:cs typeface="Arial"/>
-              </a:defRPr>
-            </a:pPr>
-            <a:r>
-              <a:rPr sz="2250" b="0">
-                <a:solidFill>
-                  <a:srgbClr val="50351F"/>
-                </a:solidFill>
-                <a:latin typeface="Arial"/>
-                <a:ea typeface="Arial"/>
-                <a:cs typeface="Arial"/>
-              </a:rPr>
-              <a:t>vergleichen</a:t>
-            </a:r>
-          </a:p>
-          <a:p xmlns:a="http://schemas.openxmlformats.org/drawingml/2006/main">
-            <a:pPr>
-              <a:defRPr sz="2250" b="0">
-                <a:solidFill>
-                  <a:srgbClr val="50351F"/>
-                </a:solidFill>
-                <a:latin typeface="Arial"/>
-                <a:ea typeface="Arial"/>
-                <a:cs typeface="Arial"/>
-              </a:defRPr>
-            </a:pPr>
-            <a:r>
-              <a:rPr sz="2250" b="0">
-                <a:solidFill>
-                  <a:srgbClr val="50351F"/>
-                </a:solidFill>
-                <a:latin typeface="Arial"/>
-                <a:ea typeface="Arial"/>
-                <a:cs typeface="Arial"/>
-              </a:rPr>
-              <a:t>12–15 Jahre · 45 Minuten</a:t>
+              <a:t>Matthäus 20,1–16</a:t>
             </a:r>
           </a:p>
         </p:txBody>
@@ -4047,13 +3816,13 @@
           <p:nvPr/>
         </p:nvPicPr>
         <p:blipFill>
-          <a:blip xmlns:r="http://schemas.openxmlformats.org/officeDocument/2006/relationships" xmlns:a="http://schemas.openxmlformats.org/drawingml/2006/main" r:embed="Rbee57f27349943dc"/>
+          <a:blip xmlns:r="http://schemas.openxmlformats.org/officeDocument/2006/relationships" xmlns:a="http://schemas.openxmlformats.org/drawingml/2006/main" r:embed="Rd5391d583b6c45ba"/>
           <a:stretch xmlns:a="http://schemas.openxmlformats.org/drawingml/2006/main"/>
         </p:blipFill>
         <p:spPr>
           <a:xfrm xmlns:a="http://schemas.openxmlformats.org/drawingml/2006/main">
-            <a:off x="6381750" y="2156520"/>
-            <a:ext cx="5286375" cy="2973586"/>
+            <a:off x="6381750" y="2155190"/>
+            <a:ext cx="5238750" cy="2947670"/>
           </a:xfrm>
           <a:prstGeom xmlns:a="http://schemas.openxmlformats.org/drawingml/2006/main" prst="rect">
             <a:avLst/>
@@ -4065,7 +3834,7 @@
           <p:cNvPr id="4" name="">
             <a:extLst xmlns:a="http://schemas.openxmlformats.org/drawingml/2006/main">
               <a:ext uri="{FF2B5EF4-FFF2-40B4-BE49-F238E27FC236}">
-                <a16:creationId xmlns:a16="http://schemas.microsoft.com/office/drawing/2014/main" id="{0034EAEB-2123-458F-A7F2-8F3BACD7AF7C}"/>
+                <a16:creationId xmlns:a16="http://schemas.microsoft.com/office/drawing/2014/main" id="{6250852B-696F-4BE5-8734-B4C7E19E627C}"/>
               </a:ext>
             </a:extLst>
           </p:cNvPr>
@@ -4076,8 +3845,8 @@
         </p:nvSpPr>
         <p:spPr>
           <a:xfrm xmlns:a="http://schemas.openxmlformats.org/drawingml/2006/main">
-            <a:off x="523875" y="6067425"/>
-            <a:ext cx="9525000" cy="285750"/>
+            <a:off x="523875" y="6143625"/>
+            <a:ext cx="9144000" cy="285750"/>
           </a:xfrm>
           <a:prstGeom xmlns:a="http://schemas.openxmlformats.org/drawingml/2006/main" prst="rect">
             <a:avLst/>
@@ -4096,7 +3865,7 @@
             <a:pPr>
               <a:defRPr sz="1350" b="0">
                 <a:solidFill>
-                  <a:srgbClr val="7D6048"/>
+                  <a:srgbClr val="29251F"/>
                 </a:solidFill>
                 <a:latin typeface="Arial"/>
                 <a:ea typeface="Arial"/>
@@ -4106,7 +3875,7 @@
             <a:r>
               <a:rPr sz="1350" b="0">
                 <a:solidFill>
-                  <a:srgbClr val="7D6048"/>
+                  <a:srgbClr val="29251F"/>
                 </a:solidFill>
                 <a:latin typeface="Arial"/>
                 <a:ea typeface="Arial"/>
@@ -4122,7 +3891,7 @@
           <p:cNvPr id="5" name="">
             <a:extLst xmlns:a="http://schemas.openxmlformats.org/drawingml/2006/main">
               <a:ext uri="{FF2B5EF4-FFF2-40B4-BE49-F238E27FC236}">
-                <a16:creationId xmlns:a16="http://schemas.microsoft.com/office/drawing/2014/main" id="{A0B311F2-049B-422E-9E04-50C9A11FC1C1}"/>
+                <a16:creationId xmlns:a16="http://schemas.microsoft.com/office/drawing/2014/main" id="{F2CB5B9A-FCAB-43EB-AB83-C3F6181A6CE7}"/>
               </a:ext>
             </a:extLst>
           </p:cNvPr>
@@ -4133,8 +3902,8 @@
         </p:nvSpPr>
         <p:spPr>
           <a:xfrm xmlns:a="http://schemas.openxmlformats.org/drawingml/2006/main">
-            <a:off x="10810875" y="6315075"/>
-            <a:ext cx="952500" cy="257175"/>
+            <a:off x="10668000" y="6191250"/>
+            <a:ext cx="1047750" cy="285750"/>
           </a:xfrm>
           <a:prstGeom xmlns:a="http://schemas.openxmlformats.org/drawingml/2006/main" prst="rect">
             <a:avLst/>
@@ -4151,9 +3920,9 @@
           <a:lstStyle xmlns:a="http://schemas.openxmlformats.org/drawingml/2006/main"/>
           <a:p xmlns:a="http://schemas.openxmlformats.org/drawingml/2006/main">
             <a:pPr>
-              <a:defRPr sz="1200" b="0">
-                <a:solidFill>
-                  <a:srgbClr val="7D6048"/>
+              <a:defRPr sz="1275" b="0">
+                <a:solidFill>
+                  <a:srgbClr val="29251F"/>
                 </a:solidFill>
                 <a:latin typeface="Arial"/>
                 <a:ea typeface="Arial"/>
@@ -4161,9 +3930,9 @@
               </a:defRPr>
             </a:pPr>
             <a:r>
-              <a:rPr sz="1200" b="0">
-                <a:solidFill>
-                  <a:srgbClr val="7D6048"/>
+              <a:rPr sz="1275" b="0">
+                <a:solidFill>
+                  <a:srgbClr val="29251F"/>
                 </a:solidFill>
                 <a:latin typeface="Arial"/>
                 <a:ea typeface="Arial"/>
@@ -4177,7 +3946,7 @@
     </p:spTree>
     <p:extLst>
       <p:ext uri="{BB962C8B-B14F-4D97-AF65-F5344CB8AC3E}">
-        <p14:creationId xmlns:p14="http://schemas.microsoft.com/office/powerpoint/2010/main" val="273354410"/>
+        <p14:creationId xmlns:p14="http://schemas.microsoft.com/office/powerpoint/2010/main" val="1901186984"/>
       </p:ext>
     </p:extLst>
   </p:cSld>
@@ -4190,7 +3959,7 @@
     <p:bg>
       <p:bgPr>
         <a:solidFill xmlns:a="http://schemas.openxmlformats.org/drawingml/2006/main">
-          <a:srgbClr val="FFF9ED"/>
+          <a:srgbClr val="FFFDF7"/>
         </a:solidFill>
       </p:bgPr>
     </p:bg>
@@ -4205,10 +3974,10 @@
       </p:grpSpPr>
       <p:sp>
         <p:nvSpPr>
-          <p:cNvPr id="5" name="">
+          <p:cNvPr id="6" name="">
             <a:extLst xmlns:a="http://schemas.openxmlformats.org/drawingml/2006/main">
               <a:ext uri="{FF2B5EF4-FFF2-40B4-BE49-F238E27FC236}">
-                <a16:creationId xmlns:a16="http://schemas.microsoft.com/office/drawing/2014/main" id="{0C73D67F-E314-4A20-913A-F33F39262298}"/>
+                <a16:creationId xmlns:a16="http://schemas.microsoft.com/office/drawing/2014/main" id="{A49049EE-9D6A-43A5-8F27-CDCA5FE8E26A}"/>
               </a:ext>
             </a:extLst>
           </p:cNvPr>
@@ -4219,8 +3988,8 @@
         </p:nvSpPr>
         <p:spPr>
           <a:xfrm xmlns:a="http://schemas.openxmlformats.org/drawingml/2006/main">
-            <a:off x="523875" y="333375"/>
-            <a:ext cx="11144250" cy="1028700"/>
+            <a:off x="523875" y="285750"/>
+            <a:ext cx="11144250" cy="1066800"/>
           </a:xfrm>
           <a:prstGeom xmlns:a="http://schemas.openxmlformats.org/drawingml/2006/main" prst="rect">
             <a:avLst/>
@@ -4237,9 +4006,9 @@
           <a:lstStyle xmlns:a="http://schemas.openxmlformats.org/drawingml/2006/main"/>
           <a:p xmlns:a="http://schemas.openxmlformats.org/drawingml/2006/main">
             <a:pPr>
-              <a:defRPr sz="3000" b="1">
-                <a:solidFill>
-                  <a:srgbClr val="50351F"/>
+              <a:defRPr sz="3300" b="1">
+                <a:solidFill>
+                  <a:srgbClr val="29251F"/>
                 </a:solidFill>
                 <a:latin typeface="Arial"/>
                 <a:ea typeface="Arial"/>
@@ -4247,15 +4016,15 @@
               </a:defRPr>
             </a:pPr>
             <a:r>
-              <a:rPr sz="3000" b="1">
-                <a:solidFill>
-                  <a:srgbClr val="50351F"/>
+              <a:rPr sz="3300" b="1">
+                <a:solidFill>
+                  <a:srgbClr val="29251F"/>
                 </a:solidFill>
                 <a:latin typeface="Arial"/>
                 <a:ea typeface="Arial"/>
                 <a:cs typeface="Arial"/>
               </a:rPr>
-              <a:t>Meine Bitte und die Freude des anderen</a:t>
+              <a:t>Antwort ohne Anspruch auf Vorrang</a:t>
             </a:r>
           </a:p>
         </p:txBody>
@@ -4265,7 +4034,7 @@
           <p:cNvPr id="2" name="">
             <a:extLst xmlns:a="http://schemas.openxmlformats.org/drawingml/2006/main">
               <a:ext uri="{FF2B5EF4-FFF2-40B4-BE49-F238E27FC236}">
-                <a16:creationId xmlns:a16="http://schemas.microsoft.com/office/drawing/2014/main" id="{1C675A7D-EF2F-4A1E-B4EE-8446BF28258D}"/>
+                <a16:creationId xmlns:a16="http://schemas.microsoft.com/office/drawing/2014/main" id="{B53FF58D-9870-49C8-AA52-D373011A4F87}"/>
               </a:ext>
             </a:extLst>
           </p:cNvPr>
@@ -4276,8 +4045,8 @@
         </p:nvSpPr>
         <p:spPr>
           <a:xfrm xmlns:a="http://schemas.openxmlformats.org/drawingml/2006/main">
-            <a:off x="523875" y="1476375"/>
-            <a:ext cx="5524500" cy="4429125"/>
+            <a:off x="523875" y="1676400"/>
+            <a:ext cx="5524500" cy="4000500"/>
           </a:xfrm>
           <a:prstGeom xmlns:a="http://schemas.openxmlformats.org/drawingml/2006/main" prst="rect">
             <a:avLst/>
@@ -4294,9 +4063,9 @@
           <a:lstStyle xmlns:a="http://schemas.openxmlformats.org/drawingml/2006/main"/>
           <a:p xmlns:a="http://schemas.openxmlformats.org/drawingml/2006/main">
             <a:pPr>
-              <a:defRPr sz="2250" b="0">
-                <a:solidFill>
-                  <a:srgbClr val="50351F"/>
+              <a:defRPr sz="2400" b="0">
+                <a:solidFill>
+                  <a:srgbClr val="29251F"/>
                 </a:solidFill>
                 <a:latin typeface="Arial"/>
                 <a:ea typeface="Arial"/>
@@ -4304,22 +4073,22 @@
               </a:defRPr>
             </a:pPr>
             <a:r>
-              <a:rPr sz="2250" b="0">
-                <a:solidFill>
-                  <a:srgbClr val="50351F"/>
+              <a:rPr sz="2400" b="0">
+                <a:solidFill>
+                  <a:srgbClr val="29251F"/>
                 </a:solidFill>
                 <a:latin typeface="Arial"/>
                 <a:ea typeface="Arial"/>
                 <a:cs typeface="Arial"/>
               </a:rPr>
-              <a:t>„Wir hatten zehn Minuten vereinbart. Ich bekam fünf. Wann können wir fertig werden?“</a:t>
+              <a:t>Saschas Arbeit anerkennen</a:t>
             </a:r>
           </a:p>
           <a:p xmlns:a="http://schemas.openxmlformats.org/drawingml/2006/main">
             <a:pPr>
-              <a:defRPr sz="2250" b="0">
-                <a:solidFill>
-                  <a:srgbClr val="50351F"/>
+              <a:defRPr sz="2400" b="0">
+                <a:solidFill>
+                  <a:srgbClr val="29251F"/>
                 </a:solidFill>
                 <a:latin typeface="Arial"/>
                 <a:ea typeface="Arial"/>
@@ -4327,22 +4096,22 @@
               </a:defRPr>
             </a:pPr>
             <a:r>
-              <a:rPr sz="2250" b="0">
-                <a:solidFill>
-                  <a:srgbClr val="50351F"/>
+              <a:rPr sz="2400" b="0">
+                <a:solidFill>
+                  <a:srgbClr val="29251F"/>
                 </a:solidFill>
                 <a:latin typeface="Arial"/>
                 <a:ea typeface="Arial"/>
                 <a:cs typeface="Arial"/>
               </a:rPr>
-              <a:t>Meine Bitte an die Lehrkraft.</a:t>
+              <a:t>Mischas volle Portion bewahren</a:t>
             </a:r>
           </a:p>
           <a:p xmlns:a="http://schemas.openxmlformats.org/drawingml/2006/main">
             <a:pPr>
-              <a:defRPr sz="2250" b="0">
-                <a:solidFill>
-                  <a:srgbClr val="50351F"/>
+              <a:defRPr sz="2400" b="0">
+                <a:solidFill>
+                  <a:srgbClr val="29251F"/>
                 </a:solidFill>
                 <a:latin typeface="Arial"/>
                 <a:ea typeface="Arial"/>
@@ -4350,81 +4119,35 @@
               </a:defRPr>
             </a:pPr>
             <a:r>
-              <a:rPr sz="2250" b="0">
-                <a:solidFill>
-                  <a:srgbClr val="50351F"/>
+              <a:rPr sz="2400" b="0">
+                <a:solidFill>
+                  <a:srgbClr val="29251F"/>
                 </a:solidFill>
                 <a:latin typeface="Arial"/>
                 <a:ea typeface="Arial"/>
                 <a:cs typeface="Arial"/>
               </a:rPr>
-              <a:t>Mein freundliches Wort zum Freund.</a:t>
-            </a:r>
-          </a:p>
-          <a:p xmlns:a="http://schemas.openxmlformats.org/drawingml/2006/main">
-            <a:pPr>
-              <a:defRPr sz="2250" b="0">
-                <a:solidFill>
-                  <a:srgbClr val="50351F"/>
-                </a:solidFill>
-                <a:latin typeface="Arial"/>
-                <a:ea typeface="Arial"/>
-                <a:cs typeface="Arial"/>
-              </a:defRPr>
-            </a:pPr>
-            <a:r>
-              <a:rPr sz="2250" b="0">
-                <a:solidFill>
-                  <a:srgbClr val="50351F"/>
-                </a:solidFill>
-                <a:latin typeface="Arial"/>
-                <a:ea typeface="Arial"/>
-                <a:cs typeface="Arial"/>
-              </a:rPr>
-              <a:t>Meine Hilfe.</a:t>
-            </a:r>
-          </a:p>
-          <a:p xmlns:a="http://schemas.openxmlformats.org/drawingml/2006/main">
-            <a:pPr>
-              <a:defRPr sz="2250" b="0">
-                <a:solidFill>
-                  <a:srgbClr val="50351F"/>
-                </a:solidFill>
-                <a:latin typeface="Arial"/>
-                <a:ea typeface="Arial"/>
-                <a:cs typeface="Arial"/>
-              </a:defRPr>
-            </a:pPr>
-            <a:r>
-              <a:rPr sz="2250" b="0">
-                <a:solidFill>
-                  <a:srgbClr val="50351F"/>
-                </a:solidFill>
-                <a:latin typeface="Arial"/>
-                <a:ea typeface="Arial"/>
-                <a:cs typeface="Arial"/>
-              </a:rPr>
-              <a:t>Bitte um Gerechtigkeit und freundliche Haltung sind vereinbar.</a:t>
+              <a:t>Ihn an den Tisch einladen</a:t>
             </a:r>
           </a:p>
         </p:txBody>
       </p:sp>
       <p:pic>
         <p:nvPicPr>
-          <p:cNvPr id="7" name=""/>
+          <p:cNvPr id="8" name=""/>
           <p:cNvPicPr>
             <a:picLocks xmlns:a="http://schemas.openxmlformats.org/drawingml/2006/main" noChangeAspect="1"/>
           </p:cNvPicPr>
           <p:nvPr/>
         </p:nvPicPr>
         <p:blipFill>
-          <a:blip xmlns:r="http://schemas.openxmlformats.org/officeDocument/2006/relationships" xmlns:a="http://schemas.openxmlformats.org/drawingml/2006/main" r:embed="R35d3e374b0914535"/>
+          <a:blip xmlns:r="http://schemas.openxmlformats.org/officeDocument/2006/relationships" xmlns:a="http://schemas.openxmlformats.org/drawingml/2006/main" r:embed="R46b92eaed4174637"/>
           <a:stretch xmlns:a="http://schemas.openxmlformats.org/drawingml/2006/main"/>
         </p:blipFill>
         <p:spPr>
           <a:xfrm xmlns:a="http://schemas.openxmlformats.org/drawingml/2006/main">
-            <a:off x="6381750" y="2156520"/>
-            <a:ext cx="5286375" cy="2973586"/>
+            <a:off x="6381750" y="2155190"/>
+            <a:ext cx="5238750" cy="2947670"/>
           </a:xfrm>
           <a:prstGeom xmlns:a="http://schemas.openxmlformats.org/drawingml/2006/main" prst="rect">
             <a:avLst/>
@@ -4436,7 +4159,7 @@
           <p:cNvPr id="4" name="">
             <a:extLst xmlns:a="http://schemas.openxmlformats.org/drawingml/2006/main">
               <a:ext uri="{FF2B5EF4-FFF2-40B4-BE49-F238E27FC236}">
-                <a16:creationId xmlns:a16="http://schemas.microsoft.com/office/drawing/2014/main" id="{8F45F52B-9B12-4937-B94B-5156FD1C74D3}"/>
+                <a16:creationId xmlns:a16="http://schemas.microsoft.com/office/drawing/2014/main" id="{D53BD786-54E2-4934-8573-2A68EC0FFBF2}"/>
               </a:ext>
             </a:extLst>
           </p:cNvPr>
@@ -4447,8 +4170,8 @@
         </p:nvSpPr>
         <p:spPr>
           <a:xfrm xmlns:a="http://schemas.openxmlformats.org/drawingml/2006/main">
-            <a:off x="10810875" y="6315075"/>
-            <a:ext cx="952500" cy="257175"/>
+            <a:off x="523875" y="6143625"/>
+            <a:ext cx="9144000" cy="285750"/>
           </a:xfrm>
           <a:prstGeom xmlns:a="http://schemas.openxmlformats.org/drawingml/2006/main" prst="rect">
             <a:avLst/>
@@ -4465,9 +4188,9 @@
           <a:lstStyle xmlns:a="http://schemas.openxmlformats.org/drawingml/2006/main"/>
           <a:p xmlns:a="http://schemas.openxmlformats.org/drawingml/2006/main">
             <a:pPr>
-              <a:defRPr sz="1200" b="0">
-                <a:solidFill>
-                  <a:srgbClr val="7D6048"/>
+              <a:defRPr sz="1350" b="0">
+                <a:solidFill>
+                  <a:srgbClr val="29251F"/>
                 </a:solidFill>
                 <a:latin typeface="Arial"/>
                 <a:ea typeface="Arial"/>
@@ -4475,54 +4198,25 @@
               </a:defRPr>
             </a:pPr>
             <a:r>
-              <a:rPr sz="1200" b="0">
-                <a:solidFill>
-                  <a:srgbClr val="7D6048"/>
+              <a:rPr sz="1350" b="0">
+                <a:solidFill>
+                  <a:srgbClr val="29251F"/>
                 </a:solidFill>
                 <a:latin typeface="Arial"/>
                 <a:ea typeface="Arial"/>
                 <a:cs typeface="Arial"/>
               </a:rPr>
-              <a:t>10 / 12</a:t>
+              <a:t>Matthäus 20,1–16</a:t>
             </a:r>
           </a:p>
         </p:txBody>
       </p:sp>
-    </p:spTree>
-    <p:extLst>
-      <p:ext uri="{BB962C8B-B14F-4D97-AF65-F5344CB8AC3E}">
-        <p14:creationId xmlns:p14="http://schemas.microsoft.com/office/powerpoint/2010/main" val="687848440"/>
-      </p:ext>
-    </p:extLst>
-  </p:cSld>
-</p:sld>
-</file>
-
-<file path=ppt/slides/slide11.xml><?xml version="1.0" encoding="utf-8"?>
-<p:sld xmlns:p="http://schemas.openxmlformats.org/presentationml/2006/main">
-  <p:cSld>
-    <p:bg>
-      <p:bgPr>
-        <a:solidFill xmlns:a="http://schemas.openxmlformats.org/drawingml/2006/main">
-          <a:srgbClr val="FFF9ED"/>
-        </a:solidFill>
-      </p:bgPr>
-    </p:bg>
-    <p:spTree>
-      <p:nvGrpSpPr>
-        <p:cNvPr id="1" name=""/>
-        <p:cNvGrpSpPr/>
-        <p:nvPr/>
-      </p:nvGrpSpPr>
-      <p:grpSpPr>
-        <a:xfrm xmlns:a="http://schemas.openxmlformats.org/drawingml/2006/main"/>
-      </p:grpSpPr>
       <p:sp>
         <p:nvSpPr>
           <p:cNvPr id="5" name="">
             <a:extLst xmlns:a="http://schemas.openxmlformats.org/drawingml/2006/main">
               <a:ext uri="{FF2B5EF4-FFF2-40B4-BE49-F238E27FC236}">
-                <a16:creationId xmlns:a16="http://schemas.microsoft.com/office/drawing/2014/main" id="{D163EDCC-BCE6-4D0E-977D-B432CBD7A56B}"/>
+                <a16:creationId xmlns:a16="http://schemas.microsoft.com/office/drawing/2014/main" id="{FE7C810C-F109-491C-8905-034249E3451F}"/>
               </a:ext>
             </a:extLst>
           </p:cNvPr>
@@ -4533,8 +4227,8 @@
         </p:nvSpPr>
         <p:spPr>
           <a:xfrm xmlns:a="http://schemas.openxmlformats.org/drawingml/2006/main">
-            <a:off x="523875" y="333375"/>
-            <a:ext cx="11144250" cy="1028700"/>
+            <a:off x="10668000" y="6191250"/>
+            <a:ext cx="1047750" cy="285750"/>
           </a:xfrm>
           <a:prstGeom xmlns:a="http://schemas.openxmlformats.org/drawingml/2006/main" prst="rect">
             <a:avLst/>
@@ -4551,9 +4245,9 @@
           <a:lstStyle xmlns:a="http://schemas.openxmlformats.org/drawingml/2006/main"/>
           <a:p xmlns:a="http://schemas.openxmlformats.org/drawingml/2006/main">
             <a:pPr>
-              <a:defRPr sz="3000" b="1">
-                <a:solidFill>
-                  <a:srgbClr val="50351F"/>
+              <a:defRPr sz="1275" b="0">
+                <a:solidFill>
+                  <a:srgbClr val="29251F"/>
                 </a:solidFill>
                 <a:latin typeface="Arial"/>
                 <a:ea typeface="Arial"/>
@@ -4561,25 +4255,54 @@
               </a:defRPr>
             </a:pPr>
             <a:r>
-              <a:rPr sz="3000" b="1">
-                <a:solidFill>
-                  <a:srgbClr val="50351F"/>
+              <a:rPr sz="1275" b="0">
+                <a:solidFill>
+                  <a:srgbClr val="29251F"/>
                 </a:solidFill>
                 <a:latin typeface="Arial"/>
                 <a:ea typeface="Arial"/>
                 <a:cs typeface="Arial"/>
               </a:rPr>
-              <a:t>Mein nächster Schritt</a:t>
+              <a:t>10 / 12</a:t>
             </a:r>
           </a:p>
         </p:txBody>
       </p:sp>
-      <p:sp>
-        <p:nvSpPr>
-          <p:cNvPr id="2" name="">
+    </p:spTree>
+    <p:extLst>
+      <p:ext uri="{BB962C8B-B14F-4D97-AF65-F5344CB8AC3E}">
+        <p14:creationId xmlns:p14="http://schemas.microsoft.com/office/powerpoint/2010/main" val="273788260"/>
+      </p:ext>
+    </p:extLst>
+  </p:cSld>
+</p:sld>
+</file>
+
+<file path=ppt/slides/slide11.xml><?xml version="1.0" encoding="utf-8"?>
+<p:sld xmlns:p="http://schemas.openxmlformats.org/presentationml/2006/main">
+  <p:cSld>
+    <p:bg>
+      <p:bgPr>
+        <a:solidFill xmlns:a="http://schemas.openxmlformats.org/drawingml/2006/main">
+          <a:srgbClr val="FFFDF7"/>
+        </a:solidFill>
+      </p:bgPr>
+    </p:bg>
+    <p:spTree>
+      <p:nvGrpSpPr>
+        <p:cNvPr id="1" name=""/>
+        <p:cNvGrpSpPr/>
+        <p:nvPr/>
+      </p:nvGrpSpPr>
+      <p:grpSpPr>
+        <a:xfrm xmlns:a="http://schemas.openxmlformats.org/drawingml/2006/main"/>
+      </p:grpSpPr>
+      <p:sp>
+        <p:nvSpPr>
+          <p:cNvPr id="6" name="">
             <a:extLst xmlns:a="http://schemas.openxmlformats.org/drawingml/2006/main">
               <a:ext uri="{FF2B5EF4-FFF2-40B4-BE49-F238E27FC236}">
-                <a16:creationId xmlns:a16="http://schemas.microsoft.com/office/drawing/2014/main" id="{D83B2037-B791-421B-A4C9-73AF41129AF0}"/>
+                <a16:creationId xmlns:a16="http://schemas.microsoft.com/office/drawing/2014/main" id="{F95B414E-3E5E-4FDB-9009-2F91851CD8F6}"/>
               </a:ext>
             </a:extLst>
           </p:cNvPr>
@@ -4590,8 +4313,8 @@
         </p:nvSpPr>
         <p:spPr>
           <a:xfrm xmlns:a="http://schemas.openxmlformats.org/drawingml/2006/main">
-            <a:off x="523875" y="1476375"/>
-            <a:ext cx="5524500" cy="4429125"/>
+            <a:off x="523875" y="285750"/>
+            <a:ext cx="11144250" cy="1066800"/>
           </a:xfrm>
           <a:prstGeom xmlns:a="http://schemas.openxmlformats.org/drawingml/2006/main" prst="rect">
             <a:avLst/>
@@ -4608,9 +4331,9 @@
           <a:lstStyle xmlns:a="http://schemas.openxmlformats.org/drawingml/2006/main"/>
           <a:p xmlns:a="http://schemas.openxmlformats.org/drawingml/2006/main">
             <a:pPr>
-              <a:defRPr sz="2250" b="0">
-                <a:solidFill>
-                  <a:srgbClr val="50351F"/>
+              <a:defRPr sz="3300" b="1">
+                <a:solidFill>
+                  <a:srgbClr val="29251F"/>
                 </a:solidFill>
                 <a:latin typeface="Arial"/>
                 <a:ea typeface="Arial"/>
@@ -4618,185 +4341,25 @@
               </a:defRPr>
             </a:pPr>
             <a:r>
-              <a:rPr sz="2250" b="0">
-                <a:solidFill>
-                  <a:srgbClr val="50351F"/>
+              <a:rPr sz="3300" b="1">
+                <a:solidFill>
+                  <a:srgbClr val="29251F"/>
                 </a:solidFill>
                 <a:latin typeface="Arial"/>
                 <a:ea typeface="Arial"/>
                 <a:cs typeface="Arial"/>
               </a:rPr>
-              <a:t>Mein Gefühl und Bedürfnis.</a:t>
-            </a:r>
-          </a:p>
-          <a:p xmlns:a="http://schemas.openxmlformats.org/drawingml/2006/main">
-            <a:pPr>
-              <a:defRPr sz="2250" b="0">
-                <a:solidFill>
-                  <a:srgbClr val="50351F"/>
-                </a:solidFill>
-                <a:latin typeface="Arial"/>
-                <a:ea typeface="Arial"/>
-                <a:cs typeface="Arial"/>
-              </a:defRPr>
-            </a:pPr>
-            <a:r>
-              <a:rPr sz="2250" b="0">
-                <a:solidFill>
-                  <a:srgbClr val="50351F"/>
-                </a:solidFill>
-                <a:latin typeface="Arial"/>
-                <a:ea typeface="Arial"/>
-                <a:cs typeface="Arial"/>
-              </a:rPr>
-              <a:t>Zusage und Ergebnis.</a:t>
-            </a:r>
-          </a:p>
-          <a:p xmlns:a="http://schemas.openxmlformats.org/drawingml/2006/main">
-            <a:pPr>
-              <a:defRPr sz="2250" b="0">
-                <a:solidFill>
-                  <a:srgbClr val="50351F"/>
-                </a:solidFill>
-                <a:latin typeface="Arial"/>
-                <a:ea typeface="Arial"/>
-                <a:cs typeface="Arial"/>
-              </a:defRPr>
-            </a:pPr>
-            <a:r>
-              <a:rPr sz="2250" b="0">
-                <a:solidFill>
-                  <a:srgbClr val="50351F"/>
-                </a:solidFill>
-                <a:latin typeface="Arial"/>
-                <a:ea typeface="Arial"/>
-                <a:cs typeface="Arial"/>
-              </a:rPr>
-              <a:t>Gutes für andere und Unbekanntes.</a:t>
-            </a:r>
-          </a:p>
-          <a:p xmlns:a="http://schemas.openxmlformats.org/drawingml/2006/main">
-            <a:pPr>
-              <a:defRPr sz="2250" b="0">
-                <a:solidFill>
-                  <a:srgbClr val="50351F"/>
-                </a:solidFill>
-                <a:latin typeface="Arial"/>
-                <a:ea typeface="Arial"/>
-                <a:cs typeface="Arial"/>
-              </a:defRPr>
-            </a:pPr>
-            <a:r>
-              <a:rPr sz="2250" b="0">
-                <a:solidFill>
-                  <a:srgbClr val="50351F"/>
-                </a:solidFill>
-                <a:latin typeface="Arial"/>
-                <a:ea typeface="Arial"/>
-                <a:cs typeface="Arial"/>
-              </a:rPr>
-              <a:t>Ruhige Bitte.</a:t>
-            </a:r>
-          </a:p>
-          <a:p xmlns:a="http://schemas.openxmlformats.org/drawingml/2006/main">
-            <a:pPr>
-              <a:defRPr sz="2250" b="0">
-                <a:solidFill>
-                  <a:srgbClr val="50351F"/>
-                </a:solidFill>
-                <a:latin typeface="Arial"/>
-                <a:ea typeface="Arial"/>
-                <a:cs typeface="Arial"/>
-              </a:defRPr>
-            </a:pPr>
-            <a:r>
-              <a:rPr sz="2250" b="0">
-                <a:solidFill>
-                  <a:srgbClr val="50351F"/>
-                </a:solidFill>
-                <a:latin typeface="Arial"/>
-                <a:ea typeface="Arial"/>
-                <a:cs typeface="Arial"/>
-              </a:rPr>
-              <a:t>Dankbarkeit.</a:t>
-            </a:r>
-          </a:p>
-          <a:p xmlns:a="http://schemas.openxmlformats.org/drawingml/2006/main">
-            <a:pPr>
-              <a:defRPr sz="2250" b="0">
-                <a:solidFill>
-                  <a:srgbClr val="50351F"/>
-                </a:solidFill>
-                <a:latin typeface="Arial"/>
-                <a:ea typeface="Arial"/>
-                <a:cs typeface="Arial"/>
-              </a:defRPr>
-            </a:pPr>
-            <a:r>
-              <a:rPr sz="2250" b="0">
-                <a:solidFill>
-                  <a:srgbClr val="50351F"/>
-                </a:solidFill>
-                <a:latin typeface="Arial"/>
-                <a:ea typeface="Arial"/>
-                <a:cs typeface="Arial"/>
-              </a:rPr>
-              <a:t>Gute Tat und Zeitpunkt.</a:t>
-            </a:r>
-          </a:p>
-          <a:p xmlns:a="http://schemas.openxmlformats.org/drawingml/2006/main">
-            <a:pPr>
-              <a:defRPr sz="2250" b="0">
-                <a:solidFill>
-                  <a:srgbClr val="50351F"/>
-                </a:solidFill>
-                <a:latin typeface="Arial"/>
-                <a:ea typeface="Arial"/>
-                <a:cs typeface="Arial"/>
-              </a:defRPr>
-            </a:pPr>
-            <a:r>
-              <a:rPr sz="2250" b="0">
-                <a:solidFill>
-                  <a:srgbClr val="50351F"/>
-                </a:solidFill>
-                <a:latin typeface="Arial"/>
-                <a:ea typeface="Arial"/>
-                <a:cs typeface="Arial"/>
-              </a:rPr>
-              <a:t>Herr Jesus Christus, vergib meinen Neid und mein Murren.</a:t>
+              <a:t>Meine Antwort auf Barmherzigkeit</a:t>
             </a:r>
           </a:p>
         </p:txBody>
       </p:sp>
-      <p:pic>
-        <p:nvPicPr>
-          <p:cNvPr id="7" name=""/>
-          <p:cNvPicPr>
-            <a:picLocks xmlns:a="http://schemas.openxmlformats.org/drawingml/2006/main" noChangeAspect="1"/>
-          </p:cNvPicPr>
-          <p:nvPr/>
-        </p:nvPicPr>
-        <p:blipFill>
-          <a:blip xmlns:r="http://schemas.openxmlformats.org/officeDocument/2006/relationships" xmlns:a="http://schemas.openxmlformats.org/drawingml/2006/main" r:embed="Ra4aea51595634b7e"/>
-          <a:stretch xmlns:a="http://schemas.openxmlformats.org/drawingml/2006/main"/>
-        </p:blipFill>
-        <p:spPr>
-          <a:xfrm xmlns:a="http://schemas.openxmlformats.org/drawingml/2006/main">
-            <a:off x="6381750" y="2156520"/>
-            <a:ext cx="5286375" cy="2973586"/>
-          </a:xfrm>
-          <a:prstGeom xmlns:a="http://schemas.openxmlformats.org/drawingml/2006/main" prst="rect">
-            <a:avLst/>
-          </a:prstGeom>
-        </p:spPr>
-      </p:pic>
-      <p:sp>
-        <p:nvSpPr>
-          <p:cNvPr id="4" name="">
+      <p:sp>
+        <p:nvSpPr>
+          <p:cNvPr id="2" name="">
             <a:extLst xmlns:a="http://schemas.openxmlformats.org/drawingml/2006/main">
               <a:ext uri="{FF2B5EF4-FFF2-40B4-BE49-F238E27FC236}">
-                <a16:creationId xmlns:a16="http://schemas.microsoft.com/office/drawing/2014/main" id="{E1E9B31D-ECF0-4FFC-B011-62F94AA826EA}"/>
+                <a16:creationId xmlns:a16="http://schemas.microsoft.com/office/drawing/2014/main" id="{A8683081-D532-42F3-96AC-4969A4EA972D}"/>
               </a:ext>
             </a:extLst>
           </p:cNvPr>
@@ -4807,8 +4370,8 @@
         </p:nvSpPr>
         <p:spPr>
           <a:xfrm xmlns:a="http://schemas.openxmlformats.org/drawingml/2006/main">
-            <a:off x="10810875" y="6315075"/>
-            <a:ext cx="952500" cy="257175"/>
+            <a:off x="523875" y="1676400"/>
+            <a:ext cx="5524500" cy="4000500"/>
           </a:xfrm>
           <a:prstGeom xmlns:a="http://schemas.openxmlformats.org/drawingml/2006/main" prst="rect">
             <a:avLst/>
@@ -4825,9 +4388,9 @@
           <a:lstStyle xmlns:a="http://schemas.openxmlformats.org/drawingml/2006/main"/>
           <a:p xmlns:a="http://schemas.openxmlformats.org/drawingml/2006/main">
             <a:pPr>
-              <a:defRPr sz="1200" b="0">
-                <a:solidFill>
-                  <a:srgbClr val="7D6048"/>
+              <a:defRPr sz="2400" b="0">
+                <a:solidFill>
+                  <a:srgbClr val="29251F"/>
                 </a:solidFill>
                 <a:latin typeface="Arial"/>
                 <a:ea typeface="Arial"/>
@@ -4835,54 +4398,93 @@
               </a:defRPr>
             </a:pPr>
             <a:r>
-              <a:rPr sz="1200" b="0">
-                <a:solidFill>
-                  <a:srgbClr val="7D6048"/>
+              <a:rPr sz="2400" b="0">
+                <a:solidFill>
+                  <a:srgbClr val="29251F"/>
                 </a:solidFill>
                 <a:latin typeface="Arial"/>
                 <a:ea typeface="Arial"/>
                 <a:cs typeface="Arial"/>
               </a:rPr>
-              <a:t>11 / 12</a:t>
+              <a:t>Was bekam ich?</a:t>
+            </a:r>
+          </a:p>
+          <a:p xmlns:a="http://schemas.openxmlformats.org/drawingml/2006/main">
+            <a:pPr>
+              <a:defRPr sz="2400" b="0">
+                <a:solidFill>
+                  <a:srgbClr val="29251F"/>
+                </a:solidFill>
+                <a:latin typeface="Arial"/>
+                <a:ea typeface="Arial"/>
+                <a:cs typeface="Arial"/>
+              </a:defRPr>
+            </a:pPr>
+            <a:r>
+              <a:rPr sz="2400" b="0">
+                <a:solidFill>
+                  <a:srgbClr val="29251F"/>
+                </a:solidFill>
+                <a:latin typeface="Arial"/>
+                <a:ea typeface="Arial"/>
+                <a:cs typeface="Arial"/>
+              </a:rPr>
+              <a:t>Was erwartete ich?</a:t>
+            </a:r>
+          </a:p>
+          <a:p xmlns:a="http://schemas.openxmlformats.org/drawingml/2006/main">
+            <a:pPr>
+              <a:defRPr sz="2400" b="0">
+                <a:solidFill>
+                  <a:srgbClr val="29251F"/>
+                </a:solidFill>
+                <a:latin typeface="Arial"/>
+                <a:ea typeface="Arial"/>
+                <a:cs typeface="Arial"/>
+              </a:defRPr>
+            </a:pPr>
+            <a:r>
+              <a:rPr sz="2400" b="0">
+                <a:solidFill>
+                  <a:srgbClr val="29251F"/>
+                </a:solidFill>
+                <a:latin typeface="Arial"/>
+                <a:ea typeface="Arial"/>
+                <a:cs typeface="Arial"/>
+              </a:rPr>
+              <a:t>Wie antworte ich auf Güte?</a:t>
             </a:r>
           </a:p>
         </p:txBody>
       </p:sp>
-    </p:spTree>
-    <p:extLst>
-      <p:ext uri="{BB962C8B-B14F-4D97-AF65-F5344CB8AC3E}">
-        <p14:creationId xmlns:p14="http://schemas.microsoft.com/office/powerpoint/2010/main" val="598581308"/>
-      </p:ext>
-    </p:extLst>
-  </p:cSld>
-</p:sld>
-</file>
-
-<file path=ppt/slides/slide12.xml><?xml version="1.0" encoding="utf-8"?>
-<p:sld xmlns:p="http://schemas.openxmlformats.org/presentationml/2006/main">
-  <p:cSld>
-    <p:bg>
-      <p:bgPr>
-        <a:solidFill xmlns:a="http://schemas.openxmlformats.org/drawingml/2006/main">
-          <a:srgbClr val="FFF9ED"/>
-        </a:solidFill>
-      </p:bgPr>
-    </p:bg>
-    <p:spTree>
-      <p:nvGrpSpPr>
-        <p:cNvPr id="1" name=""/>
-        <p:cNvGrpSpPr/>
-        <p:nvPr/>
-      </p:nvGrpSpPr>
-      <p:grpSpPr>
-        <a:xfrm xmlns:a="http://schemas.openxmlformats.org/drawingml/2006/main"/>
-      </p:grpSpPr>
-      <p:sp>
-        <p:nvSpPr>
-          <p:cNvPr id="5" name="">
+      <p:pic>
+        <p:nvPicPr>
+          <p:cNvPr id="8" name=""/>
+          <p:cNvPicPr>
+            <a:picLocks xmlns:a="http://schemas.openxmlformats.org/drawingml/2006/main" noChangeAspect="1"/>
+          </p:cNvPicPr>
+          <p:nvPr/>
+        </p:nvPicPr>
+        <p:blipFill>
+          <a:blip xmlns:r="http://schemas.openxmlformats.org/officeDocument/2006/relationships" xmlns:a="http://schemas.openxmlformats.org/drawingml/2006/main" r:embed="R092a5283265e418d"/>
+          <a:stretch xmlns:a="http://schemas.openxmlformats.org/drawingml/2006/main"/>
+        </p:blipFill>
+        <p:spPr>
+          <a:xfrm xmlns:a="http://schemas.openxmlformats.org/drawingml/2006/main">
+            <a:off x="6381750" y="2155190"/>
+            <a:ext cx="5238750" cy="2947670"/>
+          </a:xfrm>
+          <a:prstGeom xmlns:a="http://schemas.openxmlformats.org/drawingml/2006/main" prst="rect">
+            <a:avLst/>
+          </a:prstGeom>
+        </p:spPr>
+      </p:pic>
+      <p:sp>
+        <p:nvSpPr>
+          <p:cNvPr id="4" name="">
             <a:extLst xmlns:a="http://schemas.openxmlformats.org/drawingml/2006/main">
               <a:ext uri="{FF2B5EF4-FFF2-40B4-BE49-F238E27FC236}">
-                <a16:creationId xmlns:a16="http://schemas.microsoft.com/office/drawing/2014/main" id="{67E42BA0-5E13-4AF6-8800-0D288A67EB6B}"/>
+                <a16:creationId xmlns:a16="http://schemas.microsoft.com/office/drawing/2014/main" id="{BF61A4E8-AC0F-4B2E-8DA6-01DC33F989E3}"/>
               </a:ext>
             </a:extLst>
           </p:cNvPr>
@@ -4893,8 +4495,8 @@
         </p:nvSpPr>
         <p:spPr>
           <a:xfrm xmlns:a="http://schemas.openxmlformats.org/drawingml/2006/main">
-            <a:off x="523875" y="333375"/>
-            <a:ext cx="11144250" cy="1028700"/>
+            <a:off x="523875" y="6143625"/>
+            <a:ext cx="9144000" cy="285750"/>
           </a:xfrm>
           <a:prstGeom xmlns:a="http://schemas.openxmlformats.org/drawingml/2006/main" prst="rect">
             <a:avLst/>
@@ -4911,9 +4513,9 @@
           <a:lstStyle xmlns:a="http://schemas.openxmlformats.org/drawingml/2006/main"/>
           <a:p xmlns:a="http://schemas.openxmlformats.org/drawingml/2006/main">
             <a:pPr>
-              <a:defRPr sz="3000" b="1">
-                <a:solidFill>
-                  <a:srgbClr val="50351F"/>
+              <a:defRPr sz="1350" b="0">
+                <a:solidFill>
+                  <a:srgbClr val="29251F"/>
                 </a:solidFill>
                 <a:latin typeface="Arial"/>
                 <a:ea typeface="Arial"/>
@@ -4921,25 +4523,25 @@
               </a:defRPr>
             </a:pPr>
             <a:r>
-              <a:rPr sz="3000" b="1">
-                <a:solidFill>
-                  <a:srgbClr val="50351F"/>
+              <a:rPr sz="1350" b="0">
+                <a:solidFill>
+                  <a:srgbClr val="29251F"/>
                 </a:solidFill>
                 <a:latin typeface="Arial"/>
                 <a:ea typeface="Arial"/>
                 <a:cs typeface="Arial"/>
               </a:rPr>
-              <a:t>Barmherzigkeit und mein Wert</a:t>
+              <a:t>Matthäus 20,1–16</a:t>
             </a:r>
           </a:p>
         </p:txBody>
       </p:sp>
       <p:sp>
         <p:nvSpPr>
-          <p:cNvPr id="2" name="">
+          <p:cNvPr id="5" name="">
             <a:extLst xmlns:a="http://schemas.openxmlformats.org/drawingml/2006/main">
               <a:ext uri="{FF2B5EF4-FFF2-40B4-BE49-F238E27FC236}">
-                <a16:creationId xmlns:a16="http://schemas.microsoft.com/office/drawing/2014/main" id="{7B8D0EAD-EE26-4B12-BC9A-565A65204757}"/>
+                <a16:creationId xmlns:a16="http://schemas.microsoft.com/office/drawing/2014/main" id="{8AF8137D-56B1-47B7-BB8E-D47283C8E856}"/>
               </a:ext>
             </a:extLst>
           </p:cNvPr>
@@ -4950,8 +4552,8 @@
         </p:nvSpPr>
         <p:spPr>
           <a:xfrm xmlns:a="http://schemas.openxmlformats.org/drawingml/2006/main">
-            <a:off x="523875" y="1476375"/>
-            <a:ext cx="5524500" cy="4429125"/>
+            <a:off x="10668000" y="6191250"/>
+            <a:ext cx="1047750" cy="285750"/>
           </a:xfrm>
           <a:prstGeom xmlns:a="http://schemas.openxmlformats.org/drawingml/2006/main" prst="rect">
             <a:avLst/>
@@ -4968,9 +4570,9 @@
           <a:lstStyle xmlns:a="http://schemas.openxmlformats.org/drawingml/2006/main"/>
           <a:p xmlns:a="http://schemas.openxmlformats.org/drawingml/2006/main">
             <a:pPr>
-              <a:defRPr sz="2250" b="0">
-                <a:solidFill>
-                  <a:srgbClr val="50351F"/>
+              <a:defRPr sz="1275" b="0">
+                <a:solidFill>
+                  <a:srgbClr val="29251F"/>
                 </a:solidFill>
                 <a:latin typeface="Arial"/>
                 <a:ea typeface="Arial"/>
@@ -4978,116 +4580,54 @@
               </a:defRPr>
             </a:pPr>
             <a:r>
-              <a:rPr sz="2250" b="0">
-                <a:solidFill>
-                  <a:srgbClr val="50351F"/>
+              <a:rPr sz="1275" b="0">
+                <a:solidFill>
+                  <a:srgbClr val="29251F"/>
                 </a:solidFill>
                 <a:latin typeface="Arial"/>
                 <a:ea typeface="Arial"/>
                 <a:cs typeface="Arial"/>
               </a:rPr>
-              <a:t>„Der erste Arbeiter bekam…“</a:t>
-            </a:r>
-          </a:p>
-          <a:p xmlns:a="http://schemas.openxmlformats.org/drawingml/2006/main">
-            <a:pPr>
-              <a:defRPr sz="2250" b="0">
-                <a:solidFill>
-                  <a:srgbClr val="50351F"/>
-                </a:solidFill>
-                <a:latin typeface="Arial"/>
-                <a:ea typeface="Arial"/>
-                <a:cs typeface="Arial"/>
-              </a:defRPr>
-            </a:pPr>
-            <a:r>
-              <a:rPr sz="2250" b="0">
-                <a:solidFill>
-                  <a:srgbClr val="50351F"/>
-                </a:solidFill>
-                <a:latin typeface="Arial"/>
-                <a:ea typeface="Arial"/>
-                <a:cs typeface="Arial"/>
-              </a:rPr>
-              <a:t>„Wenn einem anderen geholfen wurde, kann ich…“</a:t>
-            </a:r>
-          </a:p>
-          <a:p xmlns:a="http://schemas.openxmlformats.org/drawingml/2006/main">
-            <a:pPr>
-              <a:defRPr sz="2250" b="0">
-                <a:solidFill>
-                  <a:srgbClr val="50351F"/>
-                </a:solidFill>
-                <a:latin typeface="Arial"/>
-                <a:ea typeface="Arial"/>
-                <a:cs typeface="Arial"/>
-              </a:defRPr>
-            </a:pPr>
-            <a:r>
-              <a:rPr sz="2250" b="0">
-                <a:solidFill>
-                  <a:srgbClr val="50351F"/>
-                </a:solidFill>
-                <a:latin typeface="Arial"/>
-                <a:ea typeface="Arial"/>
-                <a:cs typeface="Arial"/>
-              </a:rPr>
-              <a:t>Nenne deinen nächsten Schritt.</a:t>
-            </a:r>
-          </a:p>
-          <a:p xmlns:a="http://schemas.openxmlformats.org/drawingml/2006/main">
-            <a:pPr>
-              <a:defRPr sz="2250" b="0">
-                <a:solidFill>
-                  <a:srgbClr val="50351F"/>
-                </a:solidFill>
-                <a:latin typeface="Arial"/>
-                <a:ea typeface="Arial"/>
-                <a:cs typeface="Arial"/>
-              </a:defRPr>
-            </a:pPr>
-            <a:r>
-              <a:rPr sz="2250" b="0">
-                <a:solidFill>
-                  <a:srgbClr val="50351F"/>
-                </a:solidFill>
-                <a:latin typeface="Arial"/>
-                <a:ea typeface="Arial"/>
-                <a:cs typeface="Arial"/>
-              </a:rPr>
-              <a:t>Gottes Barmherzigkeit gibt auch spät Gekommenen einen Platz.</a:t>
+              <a:t>11 / 12</a:t>
             </a:r>
           </a:p>
         </p:txBody>
       </p:sp>
-      <p:pic>
-        <p:nvPicPr>
-          <p:cNvPr id="7" name=""/>
-          <p:cNvPicPr>
-            <a:picLocks xmlns:a="http://schemas.openxmlformats.org/drawingml/2006/main" noChangeAspect="1"/>
-          </p:cNvPicPr>
-          <p:nvPr/>
-        </p:nvPicPr>
-        <p:blipFill>
-          <a:blip xmlns:r="http://schemas.openxmlformats.org/officeDocument/2006/relationships" xmlns:a="http://schemas.openxmlformats.org/drawingml/2006/main" r:embed="R453683969b0341e9"/>
-          <a:stretch xmlns:a="http://schemas.openxmlformats.org/drawingml/2006/main"/>
-        </p:blipFill>
-        <p:spPr>
-          <a:xfrm xmlns:a="http://schemas.openxmlformats.org/drawingml/2006/main">
-            <a:off x="6381750" y="2156520"/>
-            <a:ext cx="5286375" cy="2973586"/>
-          </a:xfrm>
-          <a:prstGeom xmlns:a="http://schemas.openxmlformats.org/drawingml/2006/main" prst="rect">
-            <a:avLst/>
-          </a:prstGeom>
-        </p:spPr>
-      </p:pic>
-      <p:sp>
-        <p:nvSpPr>
-          <p:cNvPr id="4" name="">
+    </p:spTree>
+    <p:extLst>
+      <p:ext uri="{BB962C8B-B14F-4D97-AF65-F5344CB8AC3E}">
+        <p14:creationId xmlns:p14="http://schemas.microsoft.com/office/powerpoint/2010/main" val="738081309"/>
+      </p:ext>
+    </p:extLst>
+  </p:cSld>
+</p:sld>
+</file>
+
+<file path=ppt/slides/slide12.xml><?xml version="1.0" encoding="utf-8"?>
+<p:sld xmlns:p="http://schemas.openxmlformats.org/presentationml/2006/main">
+  <p:cSld>
+    <p:bg>
+      <p:bgPr>
+        <a:solidFill xmlns:a="http://schemas.openxmlformats.org/drawingml/2006/main">
+          <a:srgbClr val="FFFDF7"/>
+        </a:solidFill>
+      </p:bgPr>
+    </p:bg>
+    <p:spTree>
+      <p:nvGrpSpPr>
+        <p:cNvPr id="1" name=""/>
+        <p:cNvGrpSpPr/>
+        <p:nvPr/>
+      </p:nvGrpSpPr>
+      <p:grpSpPr>
+        <a:xfrm xmlns:a="http://schemas.openxmlformats.org/drawingml/2006/main"/>
+      </p:grpSpPr>
+      <p:sp>
+        <p:nvSpPr>
+          <p:cNvPr id="6" name="">
             <a:extLst xmlns:a="http://schemas.openxmlformats.org/drawingml/2006/main">
               <a:ext uri="{FF2B5EF4-FFF2-40B4-BE49-F238E27FC236}">
-                <a16:creationId xmlns:a16="http://schemas.microsoft.com/office/drawing/2014/main" id="{A5D60FC3-8CF3-4420-BAC6-D401FB9010E2}"/>
+                <a16:creationId xmlns:a16="http://schemas.microsoft.com/office/drawing/2014/main" id="{BF470A4A-2F11-4BA1-8034-524ACB2EBF42}"/>
               </a:ext>
             </a:extLst>
           </p:cNvPr>
@@ -5098,8 +4638,8 @@
         </p:nvSpPr>
         <p:spPr>
           <a:xfrm xmlns:a="http://schemas.openxmlformats.org/drawingml/2006/main">
-            <a:off x="10810875" y="6315075"/>
-            <a:ext cx="952500" cy="257175"/>
+            <a:off x="523875" y="285750"/>
+            <a:ext cx="11144250" cy="1066800"/>
           </a:xfrm>
           <a:prstGeom xmlns:a="http://schemas.openxmlformats.org/drawingml/2006/main" prst="rect">
             <a:avLst/>
@@ -5116,9 +4656,9 @@
           <a:lstStyle xmlns:a="http://schemas.openxmlformats.org/drawingml/2006/main"/>
           <a:p xmlns:a="http://schemas.openxmlformats.org/drawingml/2006/main">
             <a:pPr>
-              <a:defRPr sz="1200" b="0">
-                <a:solidFill>
-                  <a:srgbClr val="7D6048"/>
+              <a:defRPr sz="3300" b="1">
+                <a:solidFill>
+                  <a:srgbClr val="29251F"/>
                 </a:solidFill>
                 <a:latin typeface="Arial"/>
                 <a:ea typeface="Arial"/>
@@ -5126,54 +4666,25 @@
               </a:defRPr>
             </a:pPr>
             <a:r>
-              <a:rPr sz="1200" b="0">
-                <a:solidFill>
-                  <a:srgbClr val="7D6048"/>
+              <a:rPr sz="3300" b="1">
+                <a:solidFill>
+                  <a:srgbClr val="29251F"/>
                 </a:solidFill>
                 <a:latin typeface="Arial"/>
                 <a:ea typeface="Arial"/>
                 <a:cs typeface="Arial"/>
               </a:rPr>
-              <a:t>12 / 12</a:t>
+              <a:t>Die Großzügigkeit des Hausherrn</a:t>
             </a:r>
           </a:p>
         </p:txBody>
       </p:sp>
-    </p:spTree>
-    <p:extLst>
-      <p:ext uri="{BB962C8B-B14F-4D97-AF65-F5344CB8AC3E}">
-        <p14:creationId xmlns:p14="http://schemas.microsoft.com/office/powerpoint/2010/main" val="41366290"/>
-      </p:ext>
-    </p:extLst>
-  </p:cSld>
-</p:sld>
-</file>
-
-<file path=ppt/slides/slide2.xml><?xml version="1.0" encoding="utf-8"?>
-<p:sld xmlns:p="http://schemas.openxmlformats.org/presentationml/2006/main">
-  <p:cSld>
-    <p:bg>
-      <p:bgPr>
-        <a:solidFill xmlns:a="http://schemas.openxmlformats.org/drawingml/2006/main">
-          <a:srgbClr val="FFF9ED"/>
-        </a:solidFill>
-      </p:bgPr>
-    </p:bg>
-    <p:spTree>
-      <p:nvGrpSpPr>
-        <p:cNvPr id="1" name=""/>
-        <p:cNvGrpSpPr/>
-        <p:nvPr/>
-      </p:nvGrpSpPr>
-      <p:grpSpPr>
-        <a:xfrm xmlns:a="http://schemas.openxmlformats.org/drawingml/2006/main"/>
-      </p:grpSpPr>
-      <p:sp>
-        <p:nvSpPr>
-          <p:cNvPr id="5" name="">
+      <p:sp>
+        <p:nvSpPr>
+          <p:cNvPr id="2" name="">
             <a:extLst xmlns:a="http://schemas.openxmlformats.org/drawingml/2006/main">
               <a:ext uri="{FF2B5EF4-FFF2-40B4-BE49-F238E27FC236}">
-                <a16:creationId xmlns:a16="http://schemas.microsoft.com/office/drawing/2014/main" id="{143152DC-EEB8-48A0-A8D6-88900F511321}"/>
+                <a16:creationId xmlns:a16="http://schemas.microsoft.com/office/drawing/2014/main" id="{AA63FF1F-01CE-4064-B19D-278F3BB9BBC0}"/>
               </a:ext>
             </a:extLst>
           </p:cNvPr>
@@ -5184,8 +4695,8 @@
         </p:nvSpPr>
         <p:spPr>
           <a:xfrm xmlns:a="http://schemas.openxmlformats.org/drawingml/2006/main">
-            <a:off x="523875" y="333375"/>
-            <a:ext cx="11144250" cy="1028700"/>
+            <a:off x="523875" y="1676400"/>
+            <a:ext cx="5524500" cy="4000500"/>
           </a:xfrm>
           <a:prstGeom xmlns:a="http://schemas.openxmlformats.org/drawingml/2006/main" prst="rect">
             <a:avLst/>
@@ -5202,9 +4713,9 @@
           <a:lstStyle xmlns:a="http://schemas.openxmlformats.org/drawingml/2006/main"/>
           <a:p xmlns:a="http://schemas.openxmlformats.org/drawingml/2006/main">
             <a:pPr>
-              <a:defRPr sz="3000" b="1">
-                <a:solidFill>
-                  <a:srgbClr val="50351F"/>
+              <a:defRPr sz="2400" b="0">
+                <a:solidFill>
+                  <a:srgbClr val="29251F"/>
                 </a:solidFill>
                 <a:latin typeface="Arial"/>
                 <a:ea typeface="Arial"/>
@@ -5212,25 +4723,116 @@
               </a:defRPr>
             </a:pPr>
             <a:r>
-              <a:rPr sz="3000" b="1">
-                <a:solidFill>
-                  <a:srgbClr val="50351F"/>
+              <a:rPr sz="2400" b="0">
+                <a:solidFill>
+                  <a:srgbClr val="29251F"/>
                 </a:solidFill>
                 <a:latin typeface="Arial"/>
                 <a:ea typeface="Arial"/>
                 <a:cs typeface="Arial"/>
               </a:rPr>
-              <a:t>Die Arbeiter im Weinberg</a:t>
+              <a:t>Bei verschiedener Arbeitszeit</a:t>
+            </a:r>
+          </a:p>
+          <a:p xmlns:a="http://schemas.openxmlformats.org/drawingml/2006/main">
+            <a:pPr>
+              <a:defRPr sz="2400" b="0">
+                <a:solidFill>
+                  <a:srgbClr val="29251F"/>
+                </a:solidFill>
+                <a:latin typeface="Arial"/>
+                <a:ea typeface="Arial"/>
+                <a:cs typeface="Arial"/>
+              </a:defRPr>
+            </a:pPr>
+            <a:r>
+              <a:rPr sz="2400" b="0">
+                <a:solidFill>
+                  <a:srgbClr val="29251F"/>
+                </a:solidFill>
+                <a:latin typeface="Arial"/>
+                <a:ea typeface="Arial"/>
+                <a:cs typeface="Arial"/>
+              </a:rPr>
+              <a:t>bekamen alle …</a:t>
+            </a:r>
+          </a:p>
+          <a:p xmlns:a="http://schemas.openxmlformats.org/drawingml/2006/main">
+            <a:pPr>
+              <a:defRPr sz="2400" b="0">
+                <a:solidFill>
+                  <a:srgbClr val="29251F"/>
+                </a:solidFill>
+                <a:latin typeface="Arial"/>
+                <a:ea typeface="Arial"/>
+                <a:cs typeface="Arial"/>
+              </a:defRPr>
+            </a:pPr>
+            <a:r>
+              <a:rPr sz="2400" b="0">
+                <a:solidFill>
+                  <a:srgbClr val="29251F"/>
+                </a:solidFill>
+                <a:latin typeface="Arial"/>
+                <a:ea typeface="Arial"/>
+                <a:cs typeface="Arial"/>
+              </a:rPr>
+              <a:t>Die Güte des Hausherrn</a:t>
+            </a:r>
+          </a:p>
+          <a:p xmlns:a="http://schemas.openxmlformats.org/drawingml/2006/main">
+            <a:pPr>
+              <a:defRPr sz="2400" b="0">
+                <a:solidFill>
+                  <a:srgbClr val="29251F"/>
+                </a:solidFill>
+                <a:latin typeface="Arial"/>
+                <a:ea typeface="Arial"/>
+                <a:cs typeface="Arial"/>
+              </a:defRPr>
+            </a:pPr>
+            <a:r>
+              <a:rPr sz="2400" b="0">
+                <a:solidFill>
+                  <a:srgbClr val="29251F"/>
+                </a:solidFill>
+                <a:latin typeface="Arial"/>
+                <a:ea typeface="Arial"/>
+                <a:cs typeface="Arial"/>
+              </a:rPr>
+              <a:t>lehrt mich …</a:t>
             </a:r>
           </a:p>
         </p:txBody>
       </p:sp>
-      <p:sp>
-        <p:nvSpPr>
-          <p:cNvPr id="2" name="">
+      <p:pic>
+        <p:nvPicPr>
+          <p:cNvPr id="8" name=""/>
+          <p:cNvPicPr>
+            <a:picLocks xmlns:a="http://schemas.openxmlformats.org/drawingml/2006/main" noChangeAspect="1"/>
+          </p:cNvPicPr>
+          <p:nvPr/>
+        </p:nvPicPr>
+        <p:blipFill>
+          <a:blip xmlns:r="http://schemas.openxmlformats.org/officeDocument/2006/relationships" xmlns:a="http://schemas.openxmlformats.org/drawingml/2006/main" r:embed="R8b9cae2f257a4b2a"/>
+          <a:stretch xmlns:a="http://schemas.openxmlformats.org/drawingml/2006/main"/>
+        </p:blipFill>
+        <p:spPr>
+          <a:xfrm xmlns:a="http://schemas.openxmlformats.org/drawingml/2006/main">
+            <a:off x="6381750" y="2155190"/>
+            <a:ext cx="5238750" cy="2947670"/>
+          </a:xfrm>
+          <a:prstGeom xmlns:a="http://schemas.openxmlformats.org/drawingml/2006/main" prst="rect">
+            <a:avLst/>
+          </a:prstGeom>
+        </p:spPr>
+      </p:pic>
+      <p:sp>
+        <p:nvSpPr>
+          <p:cNvPr id="4" name="">
             <a:extLst xmlns:a="http://schemas.openxmlformats.org/drawingml/2006/main">
               <a:ext uri="{FF2B5EF4-FFF2-40B4-BE49-F238E27FC236}">
-                <a16:creationId xmlns:a16="http://schemas.microsoft.com/office/drawing/2014/main" id="{3E2720FA-9F2F-4146-9D54-7BED0F8188B1}"/>
+                <a16:creationId xmlns:a16="http://schemas.microsoft.com/office/drawing/2014/main" id="{FC62D9C5-D0C6-44A7-BA06-28C51BDE5DE8}"/>
               </a:ext>
             </a:extLst>
           </p:cNvPr>
@@ -5241,8 +4843,8 @@
         </p:nvSpPr>
         <p:spPr>
           <a:xfrm xmlns:a="http://schemas.openxmlformats.org/drawingml/2006/main">
-            <a:off x="523875" y="1476375"/>
-            <a:ext cx="5524500" cy="4429125"/>
+            <a:off x="523875" y="6143625"/>
+            <a:ext cx="9144000" cy="285750"/>
           </a:xfrm>
           <a:prstGeom xmlns:a="http://schemas.openxmlformats.org/drawingml/2006/main" prst="rect">
             <a:avLst/>
@@ -5259,9 +4861,9 @@
           <a:lstStyle xmlns:a="http://schemas.openxmlformats.org/drawingml/2006/main"/>
           <a:p xmlns:a="http://schemas.openxmlformats.org/drawingml/2006/main">
             <a:pPr>
-              <a:defRPr sz="2250" b="0">
-                <a:solidFill>
-                  <a:srgbClr val="50351F"/>
+              <a:defRPr sz="1350" b="0">
+                <a:solidFill>
+                  <a:srgbClr val="29251F"/>
                 </a:solidFill>
                 <a:latin typeface="Arial"/>
                 <a:ea typeface="Arial"/>
@@ -5269,208 +4871,25 @@
               </a:defRPr>
             </a:pPr>
             <a:r>
-              <a:rPr sz="2250" b="0">
-                <a:solidFill>
-                  <a:srgbClr val="50351F"/>
+              <a:rPr sz="1350" b="0">
+                <a:solidFill>
+                  <a:srgbClr val="29251F"/>
                 </a:solidFill>
                 <a:latin typeface="Arial"/>
                 <a:ea typeface="Arial"/>
                 <a:cs typeface="Arial"/>
               </a:rPr>
-              <a:t>Matthäus 20,1–16.</a:t>
-            </a:r>
-          </a:p>
-          <a:p xmlns:a="http://schemas.openxmlformats.org/drawingml/2006/main">
-            <a:pPr>
-              <a:defRPr sz="2250" b="0">
-                <a:solidFill>
-                  <a:srgbClr val="50351F"/>
-                </a:solidFill>
-                <a:latin typeface="Arial"/>
-                <a:ea typeface="Arial"/>
-                <a:cs typeface="Arial"/>
-              </a:defRPr>
-            </a:pPr>
-            <a:r>
-              <a:rPr sz="2250" b="0">
-                <a:solidFill>
-                  <a:srgbClr val="50351F"/>
-                </a:solidFill>
-                <a:latin typeface="Arial"/>
-                <a:ea typeface="Arial"/>
-                <a:cs typeface="Arial"/>
-              </a:rPr>
-              <a:t>Früh am Morgen.</a:t>
-            </a:r>
-          </a:p>
-          <a:p xmlns:a="http://schemas.openxmlformats.org/drawingml/2006/main">
-            <a:pPr>
-              <a:defRPr sz="2250" b="0">
-                <a:solidFill>
-                  <a:srgbClr val="50351F"/>
-                </a:solidFill>
-                <a:latin typeface="Arial"/>
-                <a:ea typeface="Arial"/>
-                <a:cs typeface="Arial"/>
-              </a:defRPr>
-            </a:pPr>
-            <a:r>
-              <a:rPr sz="2250" b="0">
-                <a:solidFill>
-                  <a:srgbClr val="50351F"/>
-                </a:solidFill>
-                <a:latin typeface="Arial"/>
-                <a:ea typeface="Arial"/>
-                <a:cs typeface="Arial"/>
-              </a:rPr>
-              <a:t>Dritte Stunde.</a:t>
-            </a:r>
-          </a:p>
-          <a:p xmlns:a="http://schemas.openxmlformats.org/drawingml/2006/main">
-            <a:pPr>
-              <a:defRPr sz="2250" b="0">
-                <a:solidFill>
-                  <a:srgbClr val="50351F"/>
-                </a:solidFill>
-                <a:latin typeface="Arial"/>
-                <a:ea typeface="Arial"/>
-                <a:cs typeface="Arial"/>
-              </a:defRPr>
-            </a:pPr>
-            <a:r>
-              <a:rPr sz="2250" b="0">
-                <a:solidFill>
-                  <a:srgbClr val="50351F"/>
-                </a:solidFill>
-                <a:latin typeface="Arial"/>
-                <a:ea typeface="Arial"/>
-                <a:cs typeface="Arial"/>
-              </a:rPr>
-              <a:t>Sechste Stunde.</a:t>
-            </a:r>
-          </a:p>
-          <a:p xmlns:a="http://schemas.openxmlformats.org/drawingml/2006/main">
-            <a:pPr>
-              <a:defRPr sz="2250" b="0">
-                <a:solidFill>
-                  <a:srgbClr val="50351F"/>
-                </a:solidFill>
-                <a:latin typeface="Arial"/>
-                <a:ea typeface="Arial"/>
-                <a:cs typeface="Arial"/>
-              </a:defRPr>
-            </a:pPr>
-            <a:r>
-              <a:rPr sz="2250" b="0">
-                <a:solidFill>
-                  <a:srgbClr val="50351F"/>
-                </a:solidFill>
-                <a:latin typeface="Arial"/>
-                <a:ea typeface="Arial"/>
-                <a:cs typeface="Arial"/>
-              </a:rPr>
-              <a:t>Neunte Stunde.</a:t>
-            </a:r>
-          </a:p>
-          <a:p xmlns:a="http://schemas.openxmlformats.org/drawingml/2006/main">
-            <a:pPr>
-              <a:defRPr sz="2250" b="0">
-                <a:solidFill>
-                  <a:srgbClr val="50351F"/>
-                </a:solidFill>
-                <a:latin typeface="Arial"/>
-                <a:ea typeface="Arial"/>
-                <a:cs typeface="Arial"/>
-              </a:defRPr>
-            </a:pPr>
-            <a:r>
-              <a:rPr sz="2250" b="0">
-                <a:solidFill>
-                  <a:srgbClr val="50351F"/>
-                </a:solidFill>
-                <a:latin typeface="Arial"/>
-                <a:ea typeface="Arial"/>
-                <a:cs typeface="Arial"/>
-              </a:rPr>
-              <a:t>Elfte Stunde.</a:t>
-            </a:r>
-          </a:p>
-          <a:p xmlns:a="http://schemas.openxmlformats.org/drawingml/2006/main">
-            <a:pPr>
-              <a:defRPr sz="2250" b="0">
-                <a:solidFill>
-                  <a:srgbClr val="50351F"/>
-                </a:solidFill>
-                <a:latin typeface="Arial"/>
-                <a:ea typeface="Arial"/>
-                <a:cs typeface="Arial"/>
-              </a:defRPr>
-            </a:pPr>
-            <a:r>
-              <a:rPr sz="2250" b="0">
-                <a:solidFill>
-                  <a:srgbClr val="50351F"/>
-                </a:solidFill>
-                <a:latin typeface="Arial"/>
-                <a:ea typeface="Arial"/>
-                <a:cs typeface="Arial"/>
-              </a:rPr>
-              <a:t>Wir lesen das ganze Gleichnis.</a:t>
-            </a:r>
-          </a:p>
-          <a:p xmlns:a="http://schemas.openxmlformats.org/drawingml/2006/main">
-            <a:pPr>
-              <a:defRPr sz="2250" b="0">
-                <a:solidFill>
-                  <a:srgbClr val="50351F"/>
-                </a:solidFill>
-                <a:latin typeface="Arial"/>
-                <a:ea typeface="Arial"/>
-                <a:cs typeface="Arial"/>
-              </a:defRPr>
-            </a:pPr>
-            <a:r>
-              <a:rPr sz="2250" b="0">
-                <a:solidFill>
-                  <a:srgbClr val="50351F"/>
-                </a:solidFill>
-                <a:latin typeface="Arial"/>
-                <a:ea typeface="Arial"/>
-                <a:cs typeface="Arial"/>
-              </a:rPr>
-              <a:t>Sofort nach allen sechzehn Versen folgt das Rollenspiel.</a:t>
+              <a:t>Matthäus 20,1–16</a:t>
             </a:r>
           </a:p>
         </p:txBody>
       </p:sp>
-      <p:pic>
-        <p:nvPicPr>
-          <p:cNvPr id="7" name=""/>
-          <p:cNvPicPr>
-            <a:picLocks xmlns:a="http://schemas.openxmlformats.org/drawingml/2006/main" noChangeAspect="1"/>
-          </p:cNvPicPr>
-          <p:nvPr/>
-        </p:nvPicPr>
-        <p:blipFill>
-          <a:blip xmlns:r="http://schemas.openxmlformats.org/officeDocument/2006/relationships" xmlns:a="http://schemas.openxmlformats.org/drawingml/2006/main" r:embed="Ra11d823fa21e4401"/>
-          <a:stretch xmlns:a="http://schemas.openxmlformats.org/drawingml/2006/main"/>
-        </p:blipFill>
-        <p:spPr>
-          <a:xfrm xmlns:a="http://schemas.openxmlformats.org/drawingml/2006/main">
-            <a:off x="6381750" y="2156520"/>
-            <a:ext cx="5286375" cy="2973586"/>
-          </a:xfrm>
-          <a:prstGeom xmlns:a="http://schemas.openxmlformats.org/drawingml/2006/main" prst="rect">
-            <a:avLst/>
-          </a:prstGeom>
-        </p:spPr>
-      </p:pic>
-      <p:sp>
-        <p:nvSpPr>
-          <p:cNvPr id="4" name="">
+      <p:sp>
+        <p:nvSpPr>
+          <p:cNvPr id="5" name="">
             <a:extLst xmlns:a="http://schemas.openxmlformats.org/drawingml/2006/main">
               <a:ext uri="{FF2B5EF4-FFF2-40B4-BE49-F238E27FC236}">
-                <a16:creationId xmlns:a16="http://schemas.microsoft.com/office/drawing/2014/main" id="{D45AA32F-4DF3-4FF0-AF49-92AF6F7D6D1E}"/>
+                <a16:creationId xmlns:a16="http://schemas.microsoft.com/office/drawing/2014/main" id="{297EDB7B-8540-42E0-AAA7-D74D6D319EBF}"/>
               </a:ext>
             </a:extLst>
           </p:cNvPr>
@@ -5481,8 +4900,8 @@
         </p:nvSpPr>
         <p:spPr>
           <a:xfrm xmlns:a="http://schemas.openxmlformats.org/drawingml/2006/main">
-            <a:off x="10810875" y="6315075"/>
-            <a:ext cx="952500" cy="257175"/>
+            <a:off x="10668000" y="6191250"/>
+            <a:ext cx="1047750" cy="285750"/>
           </a:xfrm>
           <a:prstGeom xmlns:a="http://schemas.openxmlformats.org/drawingml/2006/main" prst="rect">
             <a:avLst/>
@@ -5499,9 +4918,9 @@
           <a:lstStyle xmlns:a="http://schemas.openxmlformats.org/drawingml/2006/main"/>
           <a:p xmlns:a="http://schemas.openxmlformats.org/drawingml/2006/main">
             <a:pPr>
-              <a:defRPr sz="1200" b="0">
-                <a:solidFill>
-                  <a:srgbClr val="7D6048"/>
+              <a:defRPr sz="1275" b="0">
+                <a:solidFill>
+                  <a:srgbClr val="29251F"/>
                 </a:solidFill>
                 <a:latin typeface="Arial"/>
                 <a:ea typeface="Arial"/>
@@ -5509,15 +4928,15 @@
               </a:defRPr>
             </a:pPr>
             <a:r>
-              <a:rPr sz="1200" b="0">
-                <a:solidFill>
-                  <a:srgbClr val="7D6048"/>
+              <a:rPr sz="1275" b="0">
+                <a:solidFill>
+                  <a:srgbClr val="29251F"/>
                 </a:solidFill>
                 <a:latin typeface="Arial"/>
                 <a:ea typeface="Arial"/>
                 <a:cs typeface="Arial"/>
               </a:rPr>
-              <a:t>2 / 12</a:t>
+              <a:t>12 / 12</a:t>
             </a:r>
           </a:p>
         </p:txBody>
@@ -5525,20 +4944,20 @@
     </p:spTree>
     <p:extLst>
       <p:ext uri="{BB962C8B-B14F-4D97-AF65-F5344CB8AC3E}">
-        <p14:creationId xmlns:p14="http://schemas.microsoft.com/office/powerpoint/2010/main" val="1050270415"/>
+        <p14:creationId xmlns:p14="http://schemas.microsoft.com/office/powerpoint/2010/main" val="1663745200"/>
       </p:ext>
     </p:extLst>
   </p:cSld>
 </p:sld>
 </file>
 
-<file path=ppt/slides/slide3.xml><?xml version="1.0" encoding="utf-8"?>
+<file path=ppt/slides/slide2.xml><?xml version="1.0" encoding="utf-8"?>
 <p:sld xmlns:p="http://schemas.openxmlformats.org/presentationml/2006/main">
   <p:cSld>
     <p:bg>
       <p:bgPr>
         <a:solidFill xmlns:a="http://schemas.openxmlformats.org/drawingml/2006/main">
-          <a:srgbClr val="FFF9ED"/>
+          <a:srgbClr val="FFFDF7"/>
         </a:solidFill>
       </p:bgPr>
     </p:bg>
@@ -5553,10 +4972,10 @@
       </p:grpSpPr>
       <p:sp>
         <p:nvSpPr>
-          <p:cNvPr id="5" name="">
+          <p:cNvPr id="6" name="">
             <a:extLst xmlns:a="http://schemas.openxmlformats.org/drawingml/2006/main">
               <a:ext uri="{FF2B5EF4-FFF2-40B4-BE49-F238E27FC236}">
-                <a16:creationId xmlns:a16="http://schemas.microsoft.com/office/drawing/2014/main" id="{360DAAEB-5292-4B0F-B33D-96680B28A616}"/>
+                <a16:creationId xmlns:a16="http://schemas.microsoft.com/office/drawing/2014/main" id="{8510827A-00F1-4F62-A8FE-E4018FEF05FF}"/>
               </a:ext>
             </a:extLst>
           </p:cNvPr>
@@ -5567,8 +4986,8 @@
         </p:nvSpPr>
         <p:spPr>
           <a:xfrm xmlns:a="http://schemas.openxmlformats.org/drawingml/2006/main">
-            <a:off x="523875" y="333375"/>
-            <a:ext cx="11144250" cy="1028700"/>
+            <a:off x="523875" y="285750"/>
+            <a:ext cx="11144250" cy="1066800"/>
           </a:xfrm>
           <a:prstGeom xmlns:a="http://schemas.openxmlformats.org/drawingml/2006/main" prst="rect">
             <a:avLst/>
@@ -5585,9 +5004,9 @@
           <a:lstStyle xmlns:a="http://schemas.openxmlformats.org/drawingml/2006/main"/>
           <a:p xmlns:a="http://schemas.openxmlformats.org/drawingml/2006/main">
             <a:pPr>
-              <a:defRPr sz="3000" b="1">
-                <a:solidFill>
-                  <a:srgbClr val="50351F"/>
+              <a:defRPr sz="3300" b="1">
+                <a:solidFill>
+                  <a:srgbClr val="29251F"/>
                 </a:solidFill>
                 <a:latin typeface="Arial"/>
                 <a:ea typeface="Arial"/>
@@ -5595,15 +5014,15 @@
               </a:defRPr>
             </a:pPr>
             <a:r>
-              <a:rPr sz="3000" b="1">
-                <a:solidFill>
-                  <a:srgbClr val="50351F"/>
+              <a:rPr sz="3300" b="1">
+                <a:solidFill>
+                  <a:srgbClr val="29251F"/>
                 </a:solidFill>
                 <a:latin typeface="Arial"/>
                 <a:ea typeface="Arial"/>
                 <a:cs typeface="Arial"/>
               </a:rPr>
-              <a:t>Ein Denar für jeden</a:t>
+              <a:t>Die Arbeiter im Weinberg</a:t>
             </a:r>
           </a:p>
         </p:txBody>
@@ -5613,7 +5032,7 @@
           <p:cNvPr id="2" name="">
             <a:extLst xmlns:a="http://schemas.openxmlformats.org/drawingml/2006/main">
               <a:ext uri="{FF2B5EF4-FFF2-40B4-BE49-F238E27FC236}">
-                <a16:creationId xmlns:a16="http://schemas.microsoft.com/office/drawing/2014/main" id="{124E227C-A732-4A69-BFEE-38D306C1713E}"/>
+                <a16:creationId xmlns:a16="http://schemas.microsoft.com/office/drawing/2014/main" id="{E45D3F10-D63D-49A6-9998-D3CA7459FD41}"/>
               </a:ext>
             </a:extLst>
           </p:cNvPr>
@@ -5624,8 +5043,8 @@
         </p:nvSpPr>
         <p:spPr>
           <a:xfrm xmlns:a="http://schemas.openxmlformats.org/drawingml/2006/main">
-            <a:off x="523875" y="1476375"/>
-            <a:ext cx="5524500" cy="4429125"/>
+            <a:off x="523875" y="1676400"/>
+            <a:ext cx="5524500" cy="4000500"/>
           </a:xfrm>
           <a:prstGeom xmlns:a="http://schemas.openxmlformats.org/drawingml/2006/main" prst="rect">
             <a:avLst/>
@@ -5642,9 +5061,9 @@
           <a:lstStyle xmlns:a="http://schemas.openxmlformats.org/drawingml/2006/main"/>
           <a:p xmlns:a="http://schemas.openxmlformats.org/drawingml/2006/main">
             <a:pPr>
-              <a:defRPr sz="2250" b="0">
-                <a:solidFill>
-                  <a:srgbClr val="50351F"/>
+              <a:defRPr sz="2400" b="0">
+                <a:solidFill>
+                  <a:srgbClr val="29251F"/>
                 </a:solidFill>
                 <a:latin typeface="Arial"/>
                 <a:ea typeface="Arial"/>
@@ -5652,22 +5071,22 @@
               </a:defRPr>
             </a:pPr>
             <a:r>
-              <a:rPr sz="2250" b="0">
-                <a:solidFill>
-                  <a:srgbClr val="50351F"/>
+              <a:rPr sz="2400" b="0">
+                <a:solidFill>
+                  <a:srgbClr val="29251F"/>
                 </a:solidFill>
                 <a:latin typeface="Arial"/>
                 <a:ea typeface="Arial"/>
                 <a:cs typeface="Arial"/>
               </a:rPr>
-              <a:t>Fünf Einladungen.</a:t>
+              <a:t>Fünf Einladungen</a:t>
             </a:r>
           </a:p>
           <a:p xmlns:a="http://schemas.openxmlformats.org/drawingml/2006/main">
             <a:pPr>
-              <a:defRPr sz="2250" b="0">
-                <a:solidFill>
-                  <a:srgbClr val="50351F"/>
+              <a:defRPr sz="2400" b="0">
+                <a:solidFill>
+                  <a:srgbClr val="29251F"/>
                 </a:solidFill>
                 <a:latin typeface="Arial"/>
                 <a:ea typeface="Arial"/>
@@ -5675,22 +5094,22 @@
               </a:defRPr>
             </a:pPr>
             <a:r>
-              <a:rPr sz="2250" b="0">
-                <a:solidFill>
-                  <a:srgbClr val="50351F"/>
+              <a:rPr sz="2400" b="0">
+                <a:solidFill>
+                  <a:srgbClr val="29251F"/>
                 </a:solidFill>
                 <a:latin typeface="Arial"/>
                 <a:ea typeface="Arial"/>
                 <a:cs typeface="Arial"/>
               </a:rPr>
-              <a:t>Auszahlung von den Letzten an.</a:t>
+              <a:t>Vereinbarung am Morgen</a:t>
             </a:r>
           </a:p>
           <a:p xmlns:a="http://schemas.openxmlformats.org/drawingml/2006/main">
             <a:pPr>
-              <a:defRPr sz="2250" b="0">
-                <a:solidFill>
-                  <a:srgbClr val="50351F"/>
+              <a:defRPr sz="2400" b="0">
+                <a:solidFill>
+                  <a:srgbClr val="29251F"/>
                 </a:solidFill>
                 <a:latin typeface="Arial"/>
                 <a:ea typeface="Arial"/>
@@ -5698,22 +5117,22 @@
               </a:defRPr>
             </a:pPr>
             <a:r>
-              <a:rPr sz="2250" b="0">
-                <a:solidFill>
-                  <a:srgbClr val="50351F"/>
+              <a:rPr sz="2400" b="0">
+                <a:solidFill>
+                  <a:srgbClr val="29251F"/>
                 </a:solidFill>
                 <a:latin typeface="Arial"/>
                 <a:ea typeface="Arial"/>
                 <a:cs typeface="Arial"/>
               </a:rPr>
-              <a:t>Ein Denar für jeden.</a:t>
+              <a:t>Auszahlung von den Letzten an</a:t>
             </a:r>
           </a:p>
           <a:p xmlns:a="http://schemas.openxmlformats.org/drawingml/2006/main">
             <a:pPr>
-              <a:defRPr sz="2250" b="0">
-                <a:solidFill>
-                  <a:srgbClr val="50351F"/>
+              <a:defRPr sz="2400" b="0">
+                <a:solidFill>
+                  <a:srgbClr val="29251F"/>
                 </a:solidFill>
                 <a:latin typeface="Arial"/>
                 <a:ea typeface="Arial"/>
@@ -5721,81 +5140,35 @@
               </a:defRPr>
             </a:pPr>
             <a:r>
-              <a:rPr sz="2250" b="0">
-                <a:solidFill>
-                  <a:srgbClr val="50351F"/>
+              <a:rPr sz="2400" b="0">
+                <a:solidFill>
+                  <a:srgbClr val="29251F"/>
                 </a:solidFill>
                 <a:latin typeface="Arial"/>
                 <a:ea typeface="Arial"/>
                 <a:cs typeface="Arial"/>
               </a:rPr>
-              <a:t>Die Ersten erwarten mehr.</a:t>
-            </a:r>
-          </a:p>
-          <a:p xmlns:a="http://schemas.openxmlformats.org/drawingml/2006/main">
-            <a:pPr>
-              <a:defRPr sz="2250" b="0">
-                <a:solidFill>
-                  <a:srgbClr val="50351F"/>
-                </a:solidFill>
-                <a:latin typeface="Arial"/>
-                <a:ea typeface="Arial"/>
-                <a:cs typeface="Arial"/>
-              </a:defRPr>
-            </a:pPr>
-            <a:r>
-              <a:rPr sz="2250" b="0">
-                <a:solidFill>
-                  <a:srgbClr val="50351F"/>
-                </a:solidFill>
-                <a:latin typeface="Arial"/>
-                <a:ea typeface="Arial"/>
-                <a:cs typeface="Arial"/>
-              </a:rPr>
-              <a:t>Die Antwort des Hausherrn.</a:t>
-            </a:r>
-          </a:p>
-          <a:p xmlns:a="http://schemas.openxmlformats.org/drawingml/2006/main">
-            <a:pPr>
-              <a:defRPr sz="2250" b="0">
-                <a:solidFill>
-                  <a:srgbClr val="50351F"/>
-                </a:solidFill>
-                <a:latin typeface="Arial"/>
-                <a:ea typeface="Arial"/>
-                <a:cs typeface="Arial"/>
-              </a:defRPr>
-            </a:pPr>
-            <a:r>
-              <a:rPr sz="2250" b="0">
-                <a:solidFill>
-                  <a:srgbClr val="50351F"/>
-                </a:solidFill>
-                <a:latin typeface="Arial"/>
-                <a:ea typeface="Arial"/>
-                <a:cs typeface="Arial"/>
-              </a:rPr>
-              <a:t>Sieben Rollen. Besprechung nach dem Ende.</a:t>
+              <a:t>Lesung, dann Rollenspiel</a:t>
             </a:r>
           </a:p>
         </p:txBody>
       </p:sp>
       <p:pic>
         <p:nvPicPr>
-          <p:cNvPr id="7" name=""/>
+          <p:cNvPr id="8" name=""/>
           <p:cNvPicPr>
             <a:picLocks xmlns:a="http://schemas.openxmlformats.org/drawingml/2006/main" noChangeAspect="1"/>
           </p:cNvPicPr>
           <p:nvPr/>
         </p:nvPicPr>
         <p:blipFill>
-          <a:blip xmlns:r="http://schemas.openxmlformats.org/officeDocument/2006/relationships" xmlns:a="http://schemas.openxmlformats.org/drawingml/2006/main" r:embed="Re9823cb1e9b44924"/>
+          <a:blip xmlns:r="http://schemas.openxmlformats.org/officeDocument/2006/relationships" xmlns:a="http://schemas.openxmlformats.org/drawingml/2006/main" r:embed="Rc9a97a0a56514884"/>
           <a:stretch xmlns:a="http://schemas.openxmlformats.org/drawingml/2006/main"/>
         </p:blipFill>
         <p:spPr>
           <a:xfrm xmlns:a="http://schemas.openxmlformats.org/drawingml/2006/main">
-            <a:off x="6381750" y="2156520"/>
-            <a:ext cx="5286375" cy="2973586"/>
+            <a:off x="6381750" y="2155190"/>
+            <a:ext cx="5238750" cy="2947670"/>
           </a:xfrm>
           <a:prstGeom xmlns:a="http://schemas.openxmlformats.org/drawingml/2006/main" prst="rect">
             <a:avLst/>
@@ -5807,7 +5180,7 @@
           <p:cNvPr id="4" name="">
             <a:extLst xmlns:a="http://schemas.openxmlformats.org/drawingml/2006/main">
               <a:ext uri="{FF2B5EF4-FFF2-40B4-BE49-F238E27FC236}">
-                <a16:creationId xmlns:a16="http://schemas.microsoft.com/office/drawing/2014/main" id="{19FA5F1C-25B0-4108-AC79-CBB0E0F6F30C}"/>
+                <a16:creationId xmlns:a16="http://schemas.microsoft.com/office/drawing/2014/main" id="{95149B50-970E-4738-8042-9E27CBCDF538}"/>
               </a:ext>
             </a:extLst>
           </p:cNvPr>
@@ -5818,8 +5191,8 @@
         </p:nvSpPr>
         <p:spPr>
           <a:xfrm xmlns:a="http://schemas.openxmlformats.org/drawingml/2006/main">
-            <a:off x="10810875" y="6315075"/>
-            <a:ext cx="952500" cy="257175"/>
+            <a:off x="523875" y="6143625"/>
+            <a:ext cx="9144000" cy="285750"/>
           </a:xfrm>
           <a:prstGeom xmlns:a="http://schemas.openxmlformats.org/drawingml/2006/main" prst="rect">
             <a:avLst/>
@@ -5836,9 +5209,9 @@
           <a:lstStyle xmlns:a="http://schemas.openxmlformats.org/drawingml/2006/main"/>
           <a:p xmlns:a="http://schemas.openxmlformats.org/drawingml/2006/main">
             <a:pPr>
-              <a:defRPr sz="1200" b="0">
-                <a:solidFill>
-                  <a:srgbClr val="7D6048"/>
+              <a:defRPr sz="1350" b="0">
+                <a:solidFill>
+                  <a:srgbClr val="29251F"/>
                 </a:solidFill>
                 <a:latin typeface="Arial"/>
                 <a:ea typeface="Arial"/>
@@ -5846,54 +5219,25 @@
               </a:defRPr>
             </a:pPr>
             <a:r>
-              <a:rPr sz="1200" b="0">
-                <a:solidFill>
-                  <a:srgbClr val="7D6048"/>
+              <a:rPr sz="1350" b="0">
+                <a:solidFill>
+                  <a:srgbClr val="29251F"/>
                 </a:solidFill>
                 <a:latin typeface="Arial"/>
                 <a:ea typeface="Arial"/>
                 <a:cs typeface="Arial"/>
               </a:rPr>
-              <a:t>3 / 12</a:t>
+              <a:t>Matthäus 20,1–16</a:t>
             </a:r>
           </a:p>
         </p:txBody>
       </p:sp>
-    </p:spTree>
-    <p:extLst>
-      <p:ext uri="{BB962C8B-B14F-4D97-AF65-F5344CB8AC3E}">
-        <p14:creationId xmlns:p14="http://schemas.microsoft.com/office/powerpoint/2010/main" val="1726861455"/>
-      </p:ext>
-    </p:extLst>
-  </p:cSld>
-</p:sld>
-</file>
-
-<file path=ppt/slides/slide4.xml><?xml version="1.0" encoding="utf-8"?>
-<p:sld xmlns:p="http://schemas.openxmlformats.org/presentationml/2006/main">
-  <p:cSld>
-    <p:bg>
-      <p:bgPr>
-        <a:solidFill xmlns:a="http://schemas.openxmlformats.org/drawingml/2006/main">
-          <a:srgbClr val="FFF9ED"/>
-        </a:solidFill>
-      </p:bgPr>
-    </p:bg>
-    <p:spTree>
-      <p:nvGrpSpPr>
-        <p:cNvPr id="1" name=""/>
-        <p:cNvGrpSpPr/>
-        <p:nvPr/>
-      </p:nvGrpSpPr>
-      <p:grpSpPr>
-        <a:xfrm xmlns:a="http://schemas.openxmlformats.org/drawingml/2006/main"/>
-      </p:grpSpPr>
       <p:sp>
         <p:nvSpPr>
           <p:cNvPr id="5" name="">
             <a:extLst xmlns:a="http://schemas.openxmlformats.org/drawingml/2006/main">
               <a:ext uri="{FF2B5EF4-FFF2-40B4-BE49-F238E27FC236}">
-                <a16:creationId xmlns:a16="http://schemas.microsoft.com/office/drawing/2014/main" id="{C32A0151-915C-4E14-B7E9-D1AA64FC988B}"/>
+                <a16:creationId xmlns:a16="http://schemas.microsoft.com/office/drawing/2014/main" id="{EAD0828B-48EF-4990-B7EE-6498C5BB9A6F}"/>
               </a:ext>
             </a:extLst>
           </p:cNvPr>
@@ -5904,8 +5248,8 @@
         </p:nvSpPr>
         <p:spPr>
           <a:xfrm xmlns:a="http://schemas.openxmlformats.org/drawingml/2006/main">
-            <a:off x="523875" y="333375"/>
-            <a:ext cx="11144250" cy="1028700"/>
+            <a:off x="10668000" y="6191250"/>
+            <a:ext cx="1047750" cy="285750"/>
           </a:xfrm>
           <a:prstGeom xmlns:a="http://schemas.openxmlformats.org/drawingml/2006/main" prst="rect">
             <a:avLst/>
@@ -5922,9 +5266,9 @@
           <a:lstStyle xmlns:a="http://schemas.openxmlformats.org/drawingml/2006/main"/>
           <a:p xmlns:a="http://schemas.openxmlformats.org/drawingml/2006/main">
             <a:pPr>
-              <a:defRPr sz="3000" b="1">
-                <a:solidFill>
-                  <a:srgbClr val="50351F"/>
+              <a:defRPr sz="1275" b="0">
+                <a:solidFill>
+                  <a:srgbClr val="29251F"/>
                 </a:solidFill>
                 <a:latin typeface="Arial"/>
                 <a:ea typeface="Arial"/>
@@ -5932,25 +5276,54 @@
               </a:defRPr>
             </a:pPr>
             <a:r>
-              <a:rPr sz="3000" b="1">
-                <a:solidFill>
-                  <a:srgbClr val="50351F"/>
+              <a:rPr sz="1275" b="0">
+                <a:solidFill>
+                  <a:srgbClr val="29251F"/>
                 </a:solidFill>
                 <a:latin typeface="Arial"/>
                 <a:ea typeface="Arial"/>
                 <a:cs typeface="Arial"/>
               </a:rPr>
-              <a:t>Zusage und Erwartung</a:t>
+              <a:t>2 / 12</a:t>
             </a:r>
           </a:p>
         </p:txBody>
       </p:sp>
-      <p:sp>
-        <p:nvSpPr>
-          <p:cNvPr id="2" name="">
+    </p:spTree>
+    <p:extLst>
+      <p:ext uri="{BB962C8B-B14F-4D97-AF65-F5344CB8AC3E}">
+        <p14:creationId xmlns:p14="http://schemas.microsoft.com/office/powerpoint/2010/main" val="206247800"/>
+      </p:ext>
+    </p:extLst>
+  </p:cSld>
+</p:sld>
+</file>
+
+<file path=ppt/slides/slide3.xml><?xml version="1.0" encoding="utf-8"?>
+<p:sld xmlns:p="http://schemas.openxmlformats.org/presentationml/2006/main">
+  <p:cSld>
+    <p:bg>
+      <p:bgPr>
+        <a:solidFill xmlns:a="http://schemas.openxmlformats.org/drawingml/2006/main">
+          <a:srgbClr val="FFFDF7"/>
+        </a:solidFill>
+      </p:bgPr>
+    </p:bg>
+    <p:spTree>
+      <p:nvGrpSpPr>
+        <p:cNvPr id="1" name=""/>
+        <p:cNvGrpSpPr/>
+        <p:nvPr/>
+      </p:nvGrpSpPr>
+      <p:grpSpPr>
+        <a:xfrm xmlns:a="http://schemas.openxmlformats.org/drawingml/2006/main"/>
+      </p:grpSpPr>
+      <p:sp>
+        <p:nvSpPr>
+          <p:cNvPr id="6" name="">
             <a:extLst xmlns:a="http://schemas.openxmlformats.org/drawingml/2006/main">
               <a:ext uri="{FF2B5EF4-FFF2-40B4-BE49-F238E27FC236}">
-                <a16:creationId xmlns:a16="http://schemas.microsoft.com/office/drawing/2014/main" id="{2A56FDFB-1294-4901-AACD-531ED828ED58}"/>
+                <a16:creationId xmlns:a16="http://schemas.microsoft.com/office/drawing/2014/main" id="{D38E6B56-6344-4586-BEC4-26218D47D8CE}"/>
               </a:ext>
             </a:extLst>
           </p:cNvPr>
@@ -5961,8 +5334,8 @@
         </p:nvSpPr>
         <p:spPr>
           <a:xfrm xmlns:a="http://schemas.openxmlformats.org/drawingml/2006/main">
-            <a:off x="523875" y="1476375"/>
-            <a:ext cx="5524500" cy="4429125"/>
+            <a:off x="523875" y="285750"/>
+            <a:ext cx="11144250" cy="1066800"/>
           </a:xfrm>
           <a:prstGeom xmlns:a="http://schemas.openxmlformats.org/drawingml/2006/main" prst="rect">
             <a:avLst/>
@@ -5979,9 +5352,9 @@
           <a:lstStyle xmlns:a="http://schemas.openxmlformats.org/drawingml/2006/main"/>
           <a:p xmlns:a="http://schemas.openxmlformats.org/drawingml/2006/main">
             <a:pPr>
-              <a:defRPr sz="2250" b="0">
-                <a:solidFill>
-                  <a:srgbClr val="50351F"/>
+              <a:defRPr sz="3300" b="1">
+                <a:solidFill>
+                  <a:srgbClr val="29251F"/>
                 </a:solidFill>
                 <a:latin typeface="Arial"/>
                 <a:ea typeface="Arial"/>
@@ -5989,185 +5362,25 @@
               </a:defRPr>
             </a:pPr>
             <a:r>
-              <a:rPr sz="2250" b="0">
-                <a:solidFill>
-                  <a:srgbClr val="50351F"/>
+              <a:rPr sz="3300" b="1">
+                <a:solidFill>
+                  <a:srgbClr val="29251F"/>
                 </a:solidFill>
                 <a:latin typeface="Arial"/>
                 <a:ea typeface="Arial"/>
                 <a:cs typeface="Arial"/>
               </a:rPr>
-              <a:t>Was wurde mir versprochen?</a:t>
-            </a:r>
-          </a:p>
-          <a:p xmlns:a="http://schemas.openxmlformats.org/drawingml/2006/main">
-            <a:pPr>
-              <a:defRPr sz="2250" b="0">
-                <a:solidFill>
-                  <a:srgbClr val="50351F"/>
-                </a:solidFill>
-                <a:latin typeface="Arial"/>
-                <a:ea typeface="Arial"/>
-                <a:cs typeface="Arial"/>
-              </a:defRPr>
-            </a:pPr>
-            <a:r>
-              <a:rPr sz="2250" b="0">
-                <a:solidFill>
-                  <a:srgbClr val="50351F"/>
-                </a:solidFill>
-                <a:latin typeface="Arial"/>
-                <a:ea typeface="Arial"/>
-                <a:cs typeface="Arial"/>
-              </a:rPr>
-              <a:t>Was habe ich bekommen?</a:t>
-            </a:r>
-          </a:p>
-          <a:p xmlns:a="http://schemas.openxmlformats.org/drawingml/2006/main">
-            <a:pPr>
-              <a:defRPr sz="2250" b="0">
-                <a:solidFill>
-                  <a:srgbClr val="50351F"/>
-                </a:solidFill>
-                <a:latin typeface="Arial"/>
-                <a:ea typeface="Arial"/>
-                <a:cs typeface="Arial"/>
-              </a:defRPr>
-            </a:pPr>
-            <a:r>
-              <a:rPr sz="2250" b="0">
-                <a:solidFill>
-                  <a:srgbClr val="50351F"/>
-                </a:solidFill>
-                <a:latin typeface="Arial"/>
-                <a:ea typeface="Arial"/>
-                <a:cs typeface="Arial"/>
-              </a:rPr>
-              <a:t>Was begann ich zu erwarten?</a:t>
-            </a:r>
-          </a:p>
-          <a:p xmlns:a="http://schemas.openxmlformats.org/drawingml/2006/main">
-            <a:pPr>
-              <a:defRPr sz="2250" b="0">
-                <a:solidFill>
-                  <a:srgbClr val="50351F"/>
-                </a:solidFill>
-                <a:latin typeface="Arial"/>
-                <a:ea typeface="Arial"/>
-                <a:cs typeface="Arial"/>
-              </a:defRPr>
-            </a:pPr>
-            <a:r>
-              <a:rPr sz="2250" b="0">
-                <a:solidFill>
-                  <a:srgbClr val="50351F"/>
-                </a:solidFill>
-                <a:latin typeface="Arial"/>
-                <a:ea typeface="Arial"/>
-                <a:cs typeface="Arial"/>
-              </a:rPr>
-              <a:t>„Ich tue dir kein Unrecht“.</a:t>
-            </a:r>
-          </a:p>
-          <a:p xmlns:a="http://schemas.openxmlformats.org/drawingml/2006/main">
-            <a:pPr>
-              <a:defRPr sz="2250" b="0">
-                <a:solidFill>
-                  <a:srgbClr val="50351F"/>
-                </a:solidFill>
-                <a:latin typeface="Arial"/>
-                <a:ea typeface="Arial"/>
-                <a:cs typeface="Arial"/>
-              </a:defRPr>
-            </a:pPr>
-            <a:r>
-              <a:rPr sz="2250" b="0">
-                <a:solidFill>
-                  <a:srgbClr val="50351F"/>
-                </a:solidFill>
-                <a:latin typeface="Arial"/>
-                <a:ea typeface="Arial"/>
-                <a:cs typeface="Arial"/>
-              </a:rPr>
-              <a:t>„Ich bin gütig“.</a:t>
-            </a:r>
-          </a:p>
-          <a:p xmlns:a="http://schemas.openxmlformats.org/drawingml/2006/main">
-            <a:pPr>
-              <a:defRPr sz="2250" b="0">
-                <a:solidFill>
-                  <a:srgbClr val="50351F"/>
-                </a:solidFill>
-                <a:latin typeface="Arial"/>
-                <a:ea typeface="Arial"/>
-                <a:cs typeface="Arial"/>
-              </a:defRPr>
-            </a:pPr>
-            <a:r>
-              <a:rPr sz="2250" b="0">
-                <a:solidFill>
-                  <a:srgbClr val="50351F"/>
-                </a:solidFill>
-                <a:latin typeface="Arial"/>
-                <a:ea typeface="Arial"/>
-                <a:cs typeface="Arial"/>
-              </a:rPr>
-              <a:t>Matthäus 20,13.15.</a:t>
-            </a:r>
-          </a:p>
-          <a:p xmlns:a="http://schemas.openxmlformats.org/drawingml/2006/main">
-            <a:pPr>
-              <a:defRPr sz="2250" b="0">
-                <a:solidFill>
-                  <a:srgbClr val="50351F"/>
-                </a:solidFill>
-                <a:latin typeface="Arial"/>
-                <a:ea typeface="Arial"/>
-                <a:cs typeface="Arial"/>
-              </a:defRPr>
-            </a:pPr>
-            <a:r>
-              <a:rPr sz="2250" b="0">
-                <a:solidFill>
-                  <a:srgbClr val="50351F"/>
-                </a:solidFill>
-                <a:latin typeface="Arial"/>
-                <a:ea typeface="Arial"/>
-                <a:cs typeface="Arial"/>
-              </a:rPr>
-              <a:t>Der Hausherr erfüllte die Vereinbarung und zeigte Großzügigkeit.</a:t>
+              <a:t>Verschiedene Arbeitszeit und ein Denar</a:t>
             </a:r>
           </a:p>
         </p:txBody>
       </p:sp>
-      <p:pic>
-        <p:nvPicPr>
-          <p:cNvPr id="7" name=""/>
-          <p:cNvPicPr>
-            <a:picLocks xmlns:a="http://schemas.openxmlformats.org/drawingml/2006/main" noChangeAspect="1"/>
-          </p:cNvPicPr>
-          <p:nvPr/>
-        </p:nvPicPr>
-        <p:blipFill>
-          <a:blip xmlns:r="http://schemas.openxmlformats.org/officeDocument/2006/relationships" xmlns:a="http://schemas.openxmlformats.org/drawingml/2006/main" r:embed="R300df652f0074fea"/>
-          <a:stretch xmlns:a="http://schemas.openxmlformats.org/drawingml/2006/main"/>
-        </p:blipFill>
-        <p:spPr>
-          <a:xfrm xmlns:a="http://schemas.openxmlformats.org/drawingml/2006/main">
-            <a:off x="6381750" y="2156520"/>
-            <a:ext cx="5286375" cy="2973586"/>
-          </a:xfrm>
-          <a:prstGeom xmlns:a="http://schemas.openxmlformats.org/drawingml/2006/main" prst="rect">
-            <a:avLst/>
-          </a:prstGeom>
-        </p:spPr>
-      </p:pic>
-      <p:sp>
-        <p:nvSpPr>
-          <p:cNvPr id="4" name="">
+      <p:sp>
+        <p:nvSpPr>
+          <p:cNvPr id="2" name="">
             <a:extLst xmlns:a="http://schemas.openxmlformats.org/drawingml/2006/main">
               <a:ext uri="{FF2B5EF4-FFF2-40B4-BE49-F238E27FC236}">
-                <a16:creationId xmlns:a16="http://schemas.microsoft.com/office/drawing/2014/main" id="{DF097B0D-2316-4D33-BC9F-C7819404BD12}"/>
+                <a16:creationId xmlns:a16="http://schemas.microsoft.com/office/drawing/2014/main" id="{A2B1C842-DC98-43A5-A69B-CF638E28ED45}"/>
               </a:ext>
             </a:extLst>
           </p:cNvPr>
@@ -6178,8 +5391,8 @@
         </p:nvSpPr>
         <p:spPr>
           <a:xfrm xmlns:a="http://schemas.openxmlformats.org/drawingml/2006/main">
-            <a:off x="10810875" y="6315075"/>
-            <a:ext cx="952500" cy="257175"/>
+            <a:off x="523875" y="1676400"/>
+            <a:ext cx="5524500" cy="4000500"/>
           </a:xfrm>
           <a:prstGeom xmlns:a="http://schemas.openxmlformats.org/drawingml/2006/main" prst="rect">
             <a:avLst/>
@@ -6196,9 +5409,9 @@
           <a:lstStyle xmlns:a="http://schemas.openxmlformats.org/drawingml/2006/main"/>
           <a:p xmlns:a="http://schemas.openxmlformats.org/drawingml/2006/main">
             <a:pPr>
-              <a:defRPr sz="1200" b="0">
-                <a:solidFill>
-                  <a:srgbClr val="7D6048"/>
+              <a:defRPr sz="2400" b="0">
+                <a:solidFill>
+                  <a:srgbClr val="29251F"/>
                 </a:solidFill>
                 <a:latin typeface="Arial"/>
                 <a:ea typeface="Arial"/>
@@ -6206,54 +5419,93 @@
               </a:defRPr>
             </a:pPr>
             <a:r>
-              <a:rPr sz="1200" b="0">
-                <a:solidFill>
-                  <a:srgbClr val="7D6048"/>
+              <a:rPr sz="2400" b="0">
+                <a:solidFill>
+                  <a:srgbClr val="29251F"/>
                 </a:solidFill>
                 <a:latin typeface="Arial"/>
                 <a:ea typeface="Arial"/>
                 <a:cs typeface="Arial"/>
               </a:rPr>
-              <a:t>4 / 12</a:t>
+              <a:t>Der Erste arbeitete den ganzen Tag</a:t>
+            </a:r>
+          </a:p>
+          <a:p xmlns:a="http://schemas.openxmlformats.org/drawingml/2006/main">
+            <a:pPr>
+              <a:defRPr sz="2400" b="0">
+                <a:solidFill>
+                  <a:srgbClr val="29251F"/>
+                </a:solidFill>
+                <a:latin typeface="Arial"/>
+                <a:ea typeface="Arial"/>
+                <a:cs typeface="Arial"/>
+              </a:defRPr>
+            </a:pPr>
+            <a:r>
+              <a:rPr sz="2400" b="0">
+                <a:solidFill>
+                  <a:srgbClr val="29251F"/>
+                </a:solidFill>
+                <a:latin typeface="Arial"/>
+                <a:ea typeface="Arial"/>
+                <a:cs typeface="Arial"/>
+              </a:rPr>
+              <a:t>Der Letzte arbeitete eine Stunde</a:t>
+            </a:r>
+          </a:p>
+          <a:p xmlns:a="http://schemas.openxmlformats.org/drawingml/2006/main">
+            <a:pPr>
+              <a:defRPr sz="2400" b="0">
+                <a:solidFill>
+                  <a:srgbClr val="29251F"/>
+                </a:solidFill>
+                <a:latin typeface="Arial"/>
+                <a:ea typeface="Arial"/>
+                <a:cs typeface="Arial"/>
+              </a:defRPr>
+            </a:pPr>
+            <a:r>
+              <a:rPr sz="2400" b="0">
+                <a:solidFill>
+                  <a:srgbClr val="29251F"/>
+                </a:solidFill>
+                <a:latin typeface="Arial"/>
+                <a:ea typeface="Arial"/>
+                <a:cs typeface="Arial"/>
+              </a:rPr>
+              <a:t>Ein Denar für jeden</a:t>
             </a:r>
           </a:p>
         </p:txBody>
       </p:sp>
-    </p:spTree>
-    <p:extLst>
-      <p:ext uri="{BB962C8B-B14F-4D97-AF65-F5344CB8AC3E}">
-        <p14:creationId xmlns:p14="http://schemas.microsoft.com/office/powerpoint/2010/main" val="859870934"/>
-      </p:ext>
-    </p:extLst>
-  </p:cSld>
-</p:sld>
-</file>
-
-<file path=ppt/slides/slide5.xml><?xml version="1.0" encoding="utf-8"?>
-<p:sld xmlns:p="http://schemas.openxmlformats.org/presentationml/2006/main">
-  <p:cSld>
-    <p:bg>
-      <p:bgPr>
-        <a:solidFill xmlns:a="http://schemas.openxmlformats.org/drawingml/2006/main">
-          <a:srgbClr val="FFF9ED"/>
-        </a:solidFill>
-      </p:bgPr>
-    </p:bg>
-    <p:spTree>
-      <p:nvGrpSpPr>
-        <p:cNvPr id="1" name=""/>
-        <p:cNvGrpSpPr/>
-        <p:nvPr/>
-      </p:nvGrpSpPr>
-      <p:grpSpPr>
-        <a:xfrm xmlns:a="http://schemas.openxmlformats.org/drawingml/2006/main"/>
-      </p:grpSpPr>
-      <p:sp>
-        <p:nvSpPr>
-          <p:cNvPr id="5" name="">
+      <p:pic>
+        <p:nvPicPr>
+          <p:cNvPr id="8" name=""/>
+          <p:cNvPicPr>
+            <a:picLocks xmlns:a="http://schemas.openxmlformats.org/drawingml/2006/main" noChangeAspect="1"/>
+          </p:cNvPicPr>
+          <p:nvPr/>
+        </p:nvPicPr>
+        <p:blipFill>
+          <a:blip xmlns:r="http://schemas.openxmlformats.org/officeDocument/2006/relationships" xmlns:a="http://schemas.openxmlformats.org/drawingml/2006/main" r:embed="R6696866797ab4ea3"/>
+          <a:stretch xmlns:a="http://schemas.openxmlformats.org/drawingml/2006/main"/>
+        </p:blipFill>
+        <p:spPr>
+          <a:xfrm xmlns:a="http://schemas.openxmlformats.org/drawingml/2006/main">
+            <a:off x="6381750" y="2155190"/>
+            <a:ext cx="5238750" cy="2947670"/>
+          </a:xfrm>
+          <a:prstGeom xmlns:a="http://schemas.openxmlformats.org/drawingml/2006/main" prst="rect">
+            <a:avLst/>
+          </a:prstGeom>
+        </p:spPr>
+      </p:pic>
+      <p:sp>
+        <p:nvSpPr>
+          <p:cNvPr id="4" name="">
             <a:extLst xmlns:a="http://schemas.openxmlformats.org/drawingml/2006/main">
               <a:ext uri="{FF2B5EF4-FFF2-40B4-BE49-F238E27FC236}">
-                <a16:creationId xmlns:a16="http://schemas.microsoft.com/office/drawing/2014/main" id="{69FB9CB1-1459-4152-9335-55CC0AD28842}"/>
+                <a16:creationId xmlns:a16="http://schemas.microsoft.com/office/drawing/2014/main" id="{33F7DF68-245F-4930-A122-A8FAB99D23E5}"/>
               </a:ext>
             </a:extLst>
           </p:cNvPr>
@@ -6264,8 +5516,8 @@
         </p:nvSpPr>
         <p:spPr>
           <a:xfrm xmlns:a="http://schemas.openxmlformats.org/drawingml/2006/main">
-            <a:off x="523875" y="333375"/>
-            <a:ext cx="11144250" cy="1028700"/>
+            <a:off x="523875" y="6143625"/>
+            <a:ext cx="9144000" cy="285750"/>
           </a:xfrm>
           <a:prstGeom xmlns:a="http://schemas.openxmlformats.org/drawingml/2006/main" prst="rect">
             <a:avLst/>
@@ -6282,9 +5534,9 @@
           <a:lstStyle xmlns:a="http://schemas.openxmlformats.org/drawingml/2006/main"/>
           <a:p xmlns:a="http://schemas.openxmlformats.org/drawingml/2006/main">
             <a:pPr>
-              <a:defRPr sz="3000" b="1">
-                <a:solidFill>
-                  <a:srgbClr val="50351F"/>
+              <a:defRPr sz="1350" b="0">
+                <a:solidFill>
+                  <a:srgbClr val="29251F"/>
                 </a:solidFill>
                 <a:latin typeface="Arial"/>
                 <a:ea typeface="Arial"/>
@@ -6292,25 +5544,25 @@
               </a:defRPr>
             </a:pPr>
             <a:r>
-              <a:rPr sz="3000" b="1">
-                <a:solidFill>
-                  <a:srgbClr val="50351F"/>
+              <a:rPr sz="1350" b="0">
+                <a:solidFill>
+                  <a:srgbClr val="29251F"/>
                 </a:solidFill>
                 <a:latin typeface="Arial"/>
                 <a:ea typeface="Arial"/>
                 <a:cs typeface="Arial"/>
               </a:rPr>
-              <a:t>Die Reihenfolge der Ereignisse</a:t>
+              <a:t>Matthäus 20,1–16</a:t>
             </a:r>
           </a:p>
         </p:txBody>
       </p:sp>
       <p:sp>
         <p:nvSpPr>
-          <p:cNvPr id="2" name="">
+          <p:cNvPr id="5" name="">
             <a:extLst xmlns:a="http://schemas.openxmlformats.org/drawingml/2006/main">
               <a:ext uri="{FF2B5EF4-FFF2-40B4-BE49-F238E27FC236}">
-                <a16:creationId xmlns:a16="http://schemas.microsoft.com/office/drawing/2014/main" id="{CDEAC5B9-E11E-42BE-89C3-9D0EEA0F7439}"/>
+                <a16:creationId xmlns:a16="http://schemas.microsoft.com/office/drawing/2014/main" id="{1D9E5195-5210-455A-ACB9-073B10D2DF0E}"/>
               </a:ext>
             </a:extLst>
           </p:cNvPr>
@@ -6321,8 +5573,8 @@
         </p:nvSpPr>
         <p:spPr>
           <a:xfrm xmlns:a="http://schemas.openxmlformats.org/drawingml/2006/main">
-            <a:off x="523875" y="1476375"/>
-            <a:ext cx="5524500" cy="4429125"/>
+            <a:off x="10668000" y="6191250"/>
+            <a:ext cx="1047750" cy="285750"/>
           </a:xfrm>
           <a:prstGeom xmlns:a="http://schemas.openxmlformats.org/drawingml/2006/main" prst="rect">
             <a:avLst/>
@@ -6339,9 +5591,9 @@
           <a:lstStyle xmlns:a="http://schemas.openxmlformats.org/drawingml/2006/main"/>
           <a:p xmlns:a="http://schemas.openxmlformats.org/drawingml/2006/main">
             <a:pPr>
-              <a:defRPr sz="2250" b="0">
-                <a:solidFill>
-                  <a:srgbClr val="50351F"/>
+              <a:defRPr sz="1275" b="0">
+                <a:solidFill>
+                  <a:srgbClr val="29251F"/>
                 </a:solidFill>
                 <a:latin typeface="Arial"/>
                 <a:ea typeface="Arial"/>
@@ -6349,185 +5601,54 @@
               </a:defRPr>
             </a:pPr>
             <a:r>
-              <a:rPr sz="2250" b="0">
-                <a:solidFill>
-                  <a:srgbClr val="50351F"/>
+              <a:rPr sz="1275" b="0">
+                <a:solidFill>
+                  <a:srgbClr val="29251F"/>
                 </a:solidFill>
                 <a:latin typeface="Arial"/>
                 <a:ea typeface="Arial"/>
                 <a:cs typeface="Arial"/>
               </a:rPr>
-              <a:t>Vereinbarung am Morgen.</a:t>
-            </a:r>
-          </a:p>
-          <a:p xmlns:a="http://schemas.openxmlformats.org/drawingml/2006/main">
-            <a:pPr>
-              <a:defRPr sz="2250" b="0">
-                <a:solidFill>
-                  <a:srgbClr val="50351F"/>
-                </a:solidFill>
-                <a:latin typeface="Arial"/>
-                <a:ea typeface="Arial"/>
-                <a:cs typeface="Arial"/>
-              </a:defRPr>
-            </a:pPr>
-            <a:r>
-              <a:rPr sz="2250" b="0">
-                <a:solidFill>
-                  <a:srgbClr val="50351F"/>
-                </a:solidFill>
-                <a:latin typeface="Arial"/>
-                <a:ea typeface="Arial"/>
-                <a:cs typeface="Arial"/>
-              </a:rPr>
-              <a:t>Neue Einladungen.</a:t>
-            </a:r>
-          </a:p>
-          <a:p xmlns:a="http://schemas.openxmlformats.org/drawingml/2006/main">
-            <a:pPr>
-              <a:defRPr sz="2250" b="0">
-                <a:solidFill>
-                  <a:srgbClr val="50351F"/>
-                </a:solidFill>
-                <a:latin typeface="Arial"/>
-                <a:ea typeface="Arial"/>
-                <a:cs typeface="Arial"/>
-              </a:defRPr>
-            </a:pPr>
-            <a:r>
-              <a:rPr sz="2250" b="0">
-                <a:solidFill>
-                  <a:srgbClr val="50351F"/>
-                </a:solidFill>
-                <a:latin typeface="Arial"/>
-                <a:ea typeface="Arial"/>
-                <a:cs typeface="Arial"/>
-              </a:rPr>
-              <a:t>Auszahlung von den Letzten an.</a:t>
-            </a:r>
-          </a:p>
-          <a:p xmlns:a="http://schemas.openxmlformats.org/drawingml/2006/main">
-            <a:pPr>
-              <a:defRPr sz="2250" b="0">
-                <a:solidFill>
-                  <a:srgbClr val="50351F"/>
-                </a:solidFill>
-                <a:latin typeface="Arial"/>
-                <a:ea typeface="Arial"/>
-                <a:cs typeface="Arial"/>
-              </a:defRPr>
-            </a:pPr>
-            <a:r>
-              <a:rPr sz="2250" b="0">
-                <a:solidFill>
-                  <a:srgbClr val="50351F"/>
-                </a:solidFill>
-                <a:latin typeface="Arial"/>
-                <a:ea typeface="Arial"/>
-                <a:cs typeface="Arial"/>
-              </a:rPr>
-              <a:t>Murren und Antwort.</a:t>
-            </a:r>
-          </a:p>
-          <a:p xmlns:a="http://schemas.openxmlformats.org/drawingml/2006/main">
-            <a:pPr>
-              <a:defRPr sz="2250" b="0">
-                <a:solidFill>
-                  <a:srgbClr val="50351F"/>
-                </a:solidFill>
-                <a:latin typeface="Arial"/>
-                <a:ea typeface="Arial"/>
-                <a:cs typeface="Arial"/>
-              </a:defRPr>
-            </a:pPr>
-            <a:r>
-              <a:rPr sz="2250" b="0">
-                <a:solidFill>
-                  <a:srgbClr val="50351F"/>
-                </a:solidFill>
-                <a:latin typeface="Arial"/>
-                <a:ea typeface="Arial"/>
-                <a:cs typeface="Arial"/>
-              </a:rPr>
-              <a:t>„Niemand hat uns eingestellt“.</a:t>
-            </a:r>
-          </a:p>
-          <a:p xmlns:a="http://schemas.openxmlformats.org/drawingml/2006/main">
-            <a:pPr>
-              <a:defRPr sz="2250" b="0">
-                <a:solidFill>
-                  <a:srgbClr val="50351F"/>
-                </a:solidFill>
-                <a:latin typeface="Arial"/>
-                <a:ea typeface="Arial"/>
-                <a:cs typeface="Arial"/>
-              </a:defRPr>
-            </a:pPr>
-            <a:r>
-              <a:rPr sz="2250" b="0">
-                <a:solidFill>
-                  <a:srgbClr val="50351F"/>
-                </a:solidFill>
-                <a:latin typeface="Arial"/>
-                <a:ea typeface="Arial"/>
-                <a:cs typeface="Arial"/>
-              </a:rPr>
-              <a:t>Wo entstand eine Erwartung?</a:t>
-            </a:r>
-          </a:p>
-          <a:p xmlns:a="http://schemas.openxmlformats.org/drawingml/2006/main">
-            <a:pPr>
-              <a:defRPr sz="2250" b="0">
-                <a:solidFill>
-                  <a:srgbClr val="50351F"/>
-                </a:solidFill>
-                <a:latin typeface="Arial"/>
-                <a:ea typeface="Arial"/>
-                <a:cs typeface="Arial"/>
-              </a:defRPr>
-            </a:pPr>
-            <a:r>
-              <a:rPr sz="2250" b="0">
-                <a:solidFill>
-                  <a:srgbClr val="50351F"/>
-                </a:solidFill>
-                <a:latin typeface="Arial"/>
-                <a:ea typeface="Arial"/>
-                <a:cs typeface="Arial"/>
-              </a:rPr>
-              <a:t>Vier Karten und zwei Schreibfelder.</a:t>
+              <a:t>3 / 12</a:t>
             </a:r>
           </a:p>
         </p:txBody>
       </p:sp>
-      <p:pic>
-        <p:nvPicPr>
-          <p:cNvPr id="7" name=""/>
-          <p:cNvPicPr>
-            <a:picLocks xmlns:a="http://schemas.openxmlformats.org/drawingml/2006/main" noChangeAspect="1"/>
-          </p:cNvPicPr>
-          <p:nvPr/>
-        </p:nvPicPr>
-        <p:blipFill>
-          <a:blip xmlns:r="http://schemas.openxmlformats.org/officeDocument/2006/relationships" xmlns:a="http://schemas.openxmlformats.org/drawingml/2006/main" r:embed="R3dbb5c3972034aa2"/>
-          <a:stretch xmlns:a="http://schemas.openxmlformats.org/drawingml/2006/main"/>
-        </p:blipFill>
-        <p:spPr>
-          <a:xfrm xmlns:a="http://schemas.openxmlformats.org/drawingml/2006/main">
-            <a:off x="6381750" y="2156520"/>
-            <a:ext cx="5286375" cy="2973586"/>
-          </a:xfrm>
-          <a:prstGeom xmlns:a="http://schemas.openxmlformats.org/drawingml/2006/main" prst="rect">
-            <a:avLst/>
-          </a:prstGeom>
-        </p:spPr>
-      </p:pic>
-      <p:sp>
-        <p:nvSpPr>
-          <p:cNvPr id="4" name="">
+    </p:spTree>
+    <p:extLst>
+      <p:ext uri="{BB962C8B-B14F-4D97-AF65-F5344CB8AC3E}">
+        <p14:creationId xmlns:p14="http://schemas.microsoft.com/office/powerpoint/2010/main" val="910404246"/>
+      </p:ext>
+    </p:extLst>
+  </p:cSld>
+</p:sld>
+</file>
+
+<file path=ppt/slides/slide4.xml><?xml version="1.0" encoding="utf-8"?>
+<p:sld xmlns:p="http://schemas.openxmlformats.org/presentationml/2006/main">
+  <p:cSld>
+    <p:bg>
+      <p:bgPr>
+        <a:solidFill xmlns:a="http://schemas.openxmlformats.org/drawingml/2006/main">
+          <a:srgbClr val="FFFDF7"/>
+        </a:solidFill>
+      </p:bgPr>
+    </p:bg>
+    <p:spTree>
+      <p:nvGrpSpPr>
+        <p:cNvPr id="1" name=""/>
+        <p:cNvGrpSpPr/>
+        <p:nvPr/>
+      </p:nvGrpSpPr>
+      <p:grpSpPr>
+        <a:xfrm xmlns:a="http://schemas.openxmlformats.org/drawingml/2006/main"/>
+      </p:grpSpPr>
+      <p:sp>
+        <p:nvSpPr>
+          <p:cNvPr id="6" name="">
             <a:extLst xmlns:a="http://schemas.openxmlformats.org/drawingml/2006/main">
               <a:ext uri="{FF2B5EF4-FFF2-40B4-BE49-F238E27FC236}">
-                <a16:creationId xmlns:a16="http://schemas.microsoft.com/office/drawing/2014/main" id="{7F5CA17B-8AC7-4DE7-837C-7EC10A804793}"/>
+                <a16:creationId xmlns:a16="http://schemas.microsoft.com/office/drawing/2014/main" id="{03EBEDD3-2AE4-491F-9D87-DDC681DE9537}"/>
               </a:ext>
             </a:extLst>
           </p:cNvPr>
@@ -6538,8 +5659,8 @@
         </p:nvSpPr>
         <p:spPr>
           <a:xfrm xmlns:a="http://schemas.openxmlformats.org/drawingml/2006/main">
-            <a:off x="10810875" y="6315075"/>
-            <a:ext cx="952500" cy="257175"/>
+            <a:off x="523875" y="285750"/>
+            <a:ext cx="11144250" cy="1066800"/>
           </a:xfrm>
           <a:prstGeom xmlns:a="http://schemas.openxmlformats.org/drawingml/2006/main" prst="rect">
             <a:avLst/>
@@ -6556,9 +5677,9 @@
           <a:lstStyle xmlns:a="http://schemas.openxmlformats.org/drawingml/2006/main"/>
           <a:p xmlns:a="http://schemas.openxmlformats.org/drawingml/2006/main">
             <a:pPr>
-              <a:defRPr sz="1200" b="0">
-                <a:solidFill>
-                  <a:srgbClr val="7D6048"/>
+              <a:defRPr sz="3300" b="1">
+                <a:solidFill>
+                  <a:srgbClr val="29251F"/>
                 </a:solidFill>
                 <a:latin typeface="Arial"/>
                 <a:ea typeface="Arial"/>
@@ -6566,54 +5687,25 @@
               </a:defRPr>
             </a:pPr>
             <a:r>
-              <a:rPr sz="1200" b="0">
-                <a:solidFill>
-                  <a:srgbClr val="7D6048"/>
+              <a:rPr sz="3300" b="1">
+                <a:solidFill>
+                  <a:srgbClr val="29251F"/>
                 </a:solidFill>
                 <a:latin typeface="Arial"/>
                 <a:ea typeface="Arial"/>
                 <a:cs typeface="Arial"/>
               </a:rPr>
-              <a:t>5 / 12</a:t>
+              <a:t>Was löste das Murren aus</a:t>
             </a:r>
           </a:p>
         </p:txBody>
       </p:sp>
-    </p:spTree>
-    <p:extLst>
-      <p:ext uri="{BB962C8B-B14F-4D97-AF65-F5344CB8AC3E}">
-        <p14:creationId xmlns:p14="http://schemas.microsoft.com/office/powerpoint/2010/main" val="1680357986"/>
-      </p:ext>
-    </p:extLst>
-  </p:cSld>
-</p:sld>
-</file>
-
-<file path=ppt/slides/slide6.xml><?xml version="1.0" encoding="utf-8"?>
-<p:sld xmlns:p="http://schemas.openxmlformats.org/presentationml/2006/main">
-  <p:cSld>
-    <p:bg>
-      <p:bgPr>
-        <a:solidFill xmlns:a="http://schemas.openxmlformats.org/drawingml/2006/main">
-          <a:srgbClr val="FFF9ED"/>
-        </a:solidFill>
-      </p:bgPr>
-    </p:bg>
-    <p:spTree>
-      <p:nvGrpSpPr>
-        <p:cNvPr id="1" name=""/>
-        <p:cNvGrpSpPr/>
-        <p:nvPr/>
-      </p:nvGrpSpPr>
-      <p:grpSpPr>
-        <a:xfrm xmlns:a="http://schemas.openxmlformats.org/drawingml/2006/main"/>
-      </p:grpSpPr>
-      <p:sp>
-        <p:nvSpPr>
-          <p:cNvPr id="5" name="">
+      <p:sp>
+        <p:nvSpPr>
+          <p:cNvPr id="2" name="">
             <a:extLst xmlns:a="http://schemas.openxmlformats.org/drawingml/2006/main">
               <a:ext uri="{FF2B5EF4-FFF2-40B4-BE49-F238E27FC236}">
-                <a16:creationId xmlns:a16="http://schemas.microsoft.com/office/drawing/2014/main" id="{C04FAD62-C64F-42A2-8AE0-BB171D07AC60}"/>
+                <a16:creationId xmlns:a16="http://schemas.microsoft.com/office/drawing/2014/main" id="{6CCF0CF2-BDE2-4740-8217-F6032A748582}"/>
               </a:ext>
             </a:extLst>
           </p:cNvPr>
@@ -6624,8 +5716,8 @@
         </p:nvSpPr>
         <p:spPr>
           <a:xfrm xmlns:a="http://schemas.openxmlformats.org/drawingml/2006/main">
-            <a:off x="523875" y="333375"/>
-            <a:ext cx="11144250" cy="1028700"/>
+            <a:off x="523875" y="1676400"/>
+            <a:ext cx="5524500" cy="4000500"/>
           </a:xfrm>
           <a:prstGeom xmlns:a="http://schemas.openxmlformats.org/drawingml/2006/main" prst="rect">
             <a:avLst/>
@@ -6642,9 +5734,9 @@
           <a:lstStyle xmlns:a="http://schemas.openxmlformats.org/drawingml/2006/main"/>
           <a:p xmlns:a="http://schemas.openxmlformats.org/drawingml/2006/main">
             <a:pPr>
-              <a:defRPr sz="3000" b="1">
-                <a:solidFill>
-                  <a:srgbClr val="50351F"/>
+              <a:defRPr sz="2400" b="0">
+                <a:solidFill>
+                  <a:srgbClr val="29251F"/>
                 </a:solidFill>
                 <a:latin typeface="Arial"/>
                 <a:ea typeface="Arial"/>
@@ -6652,25 +5744,93 @@
               </a:defRPr>
             </a:pPr>
             <a:r>
-              <a:rPr sz="3000" b="1">
-                <a:solidFill>
-                  <a:srgbClr val="50351F"/>
+              <a:rPr sz="2400" b="0">
+                <a:solidFill>
+                  <a:srgbClr val="29251F"/>
                 </a:solidFill>
                 <a:latin typeface="Arial"/>
                 <a:ea typeface="Arial"/>
                 <a:cs typeface="Arial"/>
               </a:rPr>
-              <a:t>Großzügigkeit oder gebrochene Zusage</a:t>
+              <a:t>Du hast sie uns gleichgestellt</a:t>
+            </a:r>
+          </a:p>
+          <a:p xmlns:a="http://schemas.openxmlformats.org/drawingml/2006/main">
+            <a:pPr>
+              <a:defRPr sz="2400" b="0">
+                <a:solidFill>
+                  <a:srgbClr val="29251F"/>
+                </a:solidFill>
+                <a:latin typeface="Arial"/>
+                <a:ea typeface="Arial"/>
+                <a:cs typeface="Arial"/>
+              </a:defRPr>
+            </a:pPr>
+            <a:r>
+              <a:rPr sz="2400" b="0">
+                <a:solidFill>
+                  <a:srgbClr val="29251F"/>
+                </a:solidFill>
+                <a:latin typeface="Arial"/>
+                <a:ea typeface="Arial"/>
+                <a:cs typeface="Arial"/>
+              </a:rPr>
+              <a:t>Ich tue dir nicht unrecht</a:t>
+            </a:r>
+          </a:p>
+          <a:p xmlns:a="http://schemas.openxmlformats.org/drawingml/2006/main">
+            <a:pPr>
+              <a:defRPr sz="2400" b="0">
+                <a:solidFill>
+                  <a:srgbClr val="29251F"/>
+                </a:solidFill>
+                <a:latin typeface="Arial"/>
+                <a:ea typeface="Arial"/>
+                <a:cs typeface="Arial"/>
+              </a:defRPr>
+            </a:pPr>
+            <a:r>
+              <a:rPr sz="2400" b="0">
+                <a:solidFill>
+                  <a:srgbClr val="29251F"/>
+                </a:solidFill>
+                <a:latin typeface="Arial"/>
+                <a:ea typeface="Arial"/>
+                <a:cs typeface="Arial"/>
+              </a:rPr>
+              <a:t>Ich bin gütig</a:t>
             </a:r>
           </a:p>
         </p:txBody>
       </p:sp>
-      <p:sp>
-        <p:nvSpPr>
-          <p:cNvPr id="2" name="">
+      <p:pic>
+        <p:nvPicPr>
+          <p:cNvPr id="8" name=""/>
+          <p:cNvPicPr>
+            <a:picLocks xmlns:a="http://schemas.openxmlformats.org/drawingml/2006/main" noChangeAspect="1"/>
+          </p:cNvPicPr>
+          <p:nvPr/>
+        </p:nvPicPr>
+        <p:blipFill>
+          <a:blip xmlns:r="http://schemas.openxmlformats.org/officeDocument/2006/relationships" xmlns:a="http://schemas.openxmlformats.org/drawingml/2006/main" r:embed="R364321a55435433d"/>
+          <a:stretch xmlns:a="http://schemas.openxmlformats.org/drawingml/2006/main"/>
+        </p:blipFill>
+        <p:spPr>
+          <a:xfrm xmlns:a="http://schemas.openxmlformats.org/drawingml/2006/main">
+            <a:off x="6381750" y="2155190"/>
+            <a:ext cx="5238750" cy="2947670"/>
+          </a:xfrm>
+          <a:prstGeom xmlns:a="http://schemas.openxmlformats.org/drawingml/2006/main" prst="rect">
+            <a:avLst/>
+          </a:prstGeom>
+        </p:spPr>
+      </p:pic>
+      <p:sp>
+        <p:nvSpPr>
+          <p:cNvPr id="4" name="">
             <a:extLst xmlns:a="http://schemas.openxmlformats.org/drawingml/2006/main">
               <a:ext uri="{FF2B5EF4-FFF2-40B4-BE49-F238E27FC236}">
-                <a16:creationId xmlns:a16="http://schemas.microsoft.com/office/drawing/2014/main" id="{06595837-4C8B-4FA9-A82B-D23791A9F016}"/>
+                <a16:creationId xmlns:a16="http://schemas.microsoft.com/office/drawing/2014/main" id="{921FF552-568A-4F08-988F-44551DDF6BAC}"/>
               </a:ext>
             </a:extLst>
           </p:cNvPr>
@@ -6681,8 +5841,8 @@
         </p:nvSpPr>
         <p:spPr>
           <a:xfrm xmlns:a="http://schemas.openxmlformats.org/drawingml/2006/main">
-            <a:off x="523875" y="1476375"/>
-            <a:ext cx="5524500" cy="4429125"/>
+            <a:off x="523875" y="6143625"/>
+            <a:ext cx="9144000" cy="285750"/>
           </a:xfrm>
           <a:prstGeom xmlns:a="http://schemas.openxmlformats.org/drawingml/2006/main" prst="rect">
             <a:avLst/>
@@ -6699,9 +5859,9 @@
           <a:lstStyle xmlns:a="http://schemas.openxmlformats.org/drawingml/2006/main"/>
           <a:p xmlns:a="http://schemas.openxmlformats.org/drawingml/2006/main">
             <a:pPr>
-              <a:defRPr sz="2250" b="0">
-                <a:solidFill>
-                  <a:srgbClr val="50351F"/>
+              <a:defRPr sz="1350" b="0">
+                <a:solidFill>
+                  <a:srgbClr val="29251F"/>
                 </a:solidFill>
                 <a:latin typeface="Arial"/>
                 <a:ea typeface="Arial"/>
@@ -6709,162 +5869,25 @@
               </a:defRPr>
             </a:pPr>
             <a:r>
-              <a:rPr sz="2250" b="0">
-                <a:solidFill>
-                  <a:srgbClr val="50351F"/>
+              <a:rPr sz="1350" b="0">
+                <a:solidFill>
+                  <a:srgbClr val="29251F"/>
                 </a:solidFill>
                 <a:latin typeface="Arial"/>
                 <a:ea typeface="Arial"/>
                 <a:cs typeface="Arial"/>
               </a:rPr>
-              <a:t>Zusage gebrochen.</a:t>
-            </a:r>
-          </a:p>
-          <a:p xmlns:a="http://schemas.openxmlformats.org/drawingml/2006/main">
-            <a:pPr>
-              <a:defRPr sz="2250" b="0">
-                <a:solidFill>
-                  <a:srgbClr val="50351F"/>
-                </a:solidFill>
-                <a:latin typeface="Arial"/>
-                <a:ea typeface="Arial"/>
-                <a:cs typeface="Arial"/>
-              </a:defRPr>
-            </a:pPr>
-            <a:r>
-              <a:rPr sz="2250" b="0">
-                <a:solidFill>
-                  <a:srgbClr val="50351F"/>
-                </a:solidFill>
-                <a:latin typeface="Arial"/>
-                <a:ea typeface="Arial"/>
-                <a:cs typeface="Arial"/>
-              </a:rPr>
-              <a:t>Hilfe oder Geschenk.</a:t>
-            </a:r>
-          </a:p>
-          <a:p xmlns:a="http://schemas.openxmlformats.org/drawingml/2006/main">
-            <a:pPr>
-              <a:defRPr sz="2250" b="0">
-                <a:solidFill>
-                  <a:srgbClr val="50351F"/>
-                </a:solidFill>
-                <a:latin typeface="Arial"/>
-                <a:ea typeface="Arial"/>
-                <a:cs typeface="Arial"/>
-              </a:defRPr>
-            </a:pPr>
-            <a:r>
-              <a:rPr sz="2250" b="0">
-                <a:solidFill>
-                  <a:srgbClr val="50351F"/>
-                </a:solidFill>
-                <a:latin typeface="Arial"/>
-                <a:ea typeface="Arial"/>
-                <a:cs typeface="Arial"/>
-              </a:rPr>
-              <a:t>Nachfragen nötig.</a:t>
-            </a:r>
-          </a:p>
-          <a:p xmlns:a="http://schemas.openxmlformats.org/drawingml/2006/main">
-            <a:pPr>
-              <a:defRPr sz="2250" b="0">
-                <a:solidFill>
-                  <a:srgbClr val="50351F"/>
-                </a:solidFill>
-                <a:latin typeface="Arial"/>
-                <a:ea typeface="Arial"/>
-                <a:cs typeface="Arial"/>
-              </a:defRPr>
-            </a:pPr>
-            <a:r>
-              <a:rPr sz="2250" b="0">
-                <a:solidFill>
-                  <a:srgbClr val="50351F"/>
-                </a:solidFill>
-                <a:latin typeface="Arial"/>
-                <a:ea typeface="Arial"/>
-                <a:cs typeface="Arial"/>
-              </a:rPr>
-              <a:t>Sechs Fälle.</a:t>
-            </a:r>
-          </a:p>
-          <a:p xmlns:a="http://schemas.openxmlformats.org/drawingml/2006/main">
-            <a:pPr>
-              <a:defRPr sz="2250" b="0">
-                <a:solidFill>
-                  <a:srgbClr val="50351F"/>
-                </a:solidFill>
-                <a:latin typeface="Arial"/>
-                <a:ea typeface="Arial"/>
-                <a:cs typeface="Arial"/>
-              </a:defRPr>
-            </a:pPr>
-            <a:r>
-              <a:rPr sz="2250" b="0">
-                <a:solidFill>
-                  <a:srgbClr val="50351F"/>
-                </a:solidFill>
-                <a:latin typeface="Arial"/>
-                <a:ea typeface="Arial"/>
-                <a:cs typeface="Arial"/>
-              </a:rPr>
-              <a:t>Welche Bedingung verändert unseren Schluss?</a:t>
-            </a:r>
-          </a:p>
-          <a:p xmlns:a="http://schemas.openxmlformats.org/drawingml/2006/main">
-            <a:pPr>
-              <a:defRPr sz="2250" b="0">
-                <a:solidFill>
-                  <a:srgbClr val="50351F"/>
-                </a:solidFill>
-                <a:latin typeface="Arial"/>
-                <a:ea typeface="Arial"/>
-                <a:cs typeface="Arial"/>
-              </a:defRPr>
-            </a:pPr>
-            <a:r>
-              <a:rPr sz="2250" b="0">
-                <a:solidFill>
-                  <a:srgbClr val="50351F"/>
-                </a:solidFill>
-                <a:latin typeface="Arial"/>
-                <a:ea typeface="Arial"/>
-                <a:cs typeface="Arial"/>
-              </a:rPr>
-              <a:t>Hilfe für andere beweist für sich allein kein Unrecht.</a:t>
+              <a:t>Matthäus 20,1–16</a:t>
             </a:r>
           </a:p>
         </p:txBody>
       </p:sp>
-      <p:pic>
-        <p:nvPicPr>
-          <p:cNvPr id="7" name=""/>
-          <p:cNvPicPr>
-            <a:picLocks xmlns:a="http://schemas.openxmlformats.org/drawingml/2006/main" noChangeAspect="1"/>
-          </p:cNvPicPr>
-          <p:nvPr/>
-        </p:nvPicPr>
-        <p:blipFill>
-          <a:blip xmlns:r="http://schemas.openxmlformats.org/officeDocument/2006/relationships" xmlns:a="http://schemas.openxmlformats.org/drawingml/2006/main" r:embed="Rfe50481f75104202"/>
-          <a:stretch xmlns:a="http://schemas.openxmlformats.org/drawingml/2006/main"/>
-        </p:blipFill>
-        <p:spPr>
-          <a:xfrm xmlns:a="http://schemas.openxmlformats.org/drawingml/2006/main">
-            <a:off x="6381750" y="2156520"/>
-            <a:ext cx="5286375" cy="2973586"/>
-          </a:xfrm>
-          <a:prstGeom xmlns:a="http://schemas.openxmlformats.org/drawingml/2006/main" prst="rect">
-            <a:avLst/>
-          </a:prstGeom>
-        </p:spPr>
-      </p:pic>
-      <p:sp>
-        <p:nvSpPr>
-          <p:cNvPr id="4" name="">
+      <p:sp>
+        <p:nvSpPr>
+          <p:cNvPr id="5" name="">
             <a:extLst xmlns:a="http://schemas.openxmlformats.org/drawingml/2006/main">
               <a:ext uri="{FF2B5EF4-FFF2-40B4-BE49-F238E27FC236}">
-                <a16:creationId xmlns:a16="http://schemas.microsoft.com/office/drawing/2014/main" id="{8FE17E6E-87FA-46E3-9BFB-1D9A7DBAA816}"/>
+                <a16:creationId xmlns:a16="http://schemas.microsoft.com/office/drawing/2014/main" id="{A0C0E314-CC0D-4EA1-8DCC-5360A3102170}"/>
               </a:ext>
             </a:extLst>
           </p:cNvPr>
@@ -6875,8 +5898,8 @@
         </p:nvSpPr>
         <p:spPr>
           <a:xfrm xmlns:a="http://schemas.openxmlformats.org/drawingml/2006/main">
-            <a:off x="10810875" y="6315075"/>
-            <a:ext cx="952500" cy="257175"/>
+            <a:off x="10668000" y="6191250"/>
+            <a:ext cx="1047750" cy="285750"/>
           </a:xfrm>
           <a:prstGeom xmlns:a="http://schemas.openxmlformats.org/drawingml/2006/main" prst="rect">
             <a:avLst/>
@@ -6893,9 +5916,9 @@
           <a:lstStyle xmlns:a="http://schemas.openxmlformats.org/drawingml/2006/main"/>
           <a:p xmlns:a="http://schemas.openxmlformats.org/drawingml/2006/main">
             <a:pPr>
-              <a:defRPr sz="1200" b="0">
-                <a:solidFill>
-                  <a:srgbClr val="7D6048"/>
+              <a:defRPr sz="1275" b="0">
+                <a:solidFill>
+                  <a:srgbClr val="29251F"/>
                 </a:solidFill>
                 <a:latin typeface="Arial"/>
                 <a:ea typeface="Arial"/>
@@ -6903,15 +5926,15 @@
               </a:defRPr>
             </a:pPr>
             <a:r>
-              <a:rPr sz="1200" b="0">
-                <a:solidFill>
-                  <a:srgbClr val="7D6048"/>
+              <a:rPr sz="1275" b="0">
+                <a:solidFill>
+                  <a:srgbClr val="29251F"/>
                 </a:solidFill>
                 <a:latin typeface="Arial"/>
                 <a:ea typeface="Arial"/>
                 <a:cs typeface="Arial"/>
               </a:rPr>
-              <a:t>6 / 12</a:t>
+              <a:t>4 / 12</a:t>
             </a:r>
           </a:p>
         </p:txBody>
@@ -6919,20 +5942,20 @@
     </p:spTree>
     <p:extLst>
       <p:ext uri="{BB962C8B-B14F-4D97-AF65-F5344CB8AC3E}">
-        <p14:creationId xmlns:p14="http://schemas.microsoft.com/office/powerpoint/2010/main" val="1567604755"/>
+        <p14:creationId xmlns:p14="http://schemas.microsoft.com/office/powerpoint/2010/main" val="1672271359"/>
       </p:ext>
     </p:extLst>
   </p:cSld>
 </p:sld>
 </file>
 
-<file path=ppt/slides/slide7.xml><?xml version="1.0" encoding="utf-8"?>
+<file path=ppt/slides/slide5.xml><?xml version="1.0" encoding="utf-8"?>
 <p:sld xmlns:p="http://schemas.openxmlformats.org/presentationml/2006/main">
   <p:cSld>
     <p:bg>
       <p:bgPr>
         <a:solidFill xmlns:a="http://schemas.openxmlformats.org/drawingml/2006/main">
-          <a:srgbClr val="FFF9ED"/>
+          <a:srgbClr val="FFFDF7"/>
         </a:solidFill>
       </p:bgPr>
     </p:bg>
@@ -6947,10 +5970,10 @@
       </p:grpSpPr>
       <p:sp>
         <p:nvSpPr>
-          <p:cNvPr id="5" name="">
+          <p:cNvPr id="6" name="">
             <a:extLst xmlns:a="http://schemas.openxmlformats.org/drawingml/2006/main">
               <a:ext uri="{FF2B5EF4-FFF2-40B4-BE49-F238E27FC236}">
-                <a16:creationId xmlns:a16="http://schemas.microsoft.com/office/drawing/2014/main" id="{B95F3CEE-7CF8-4DC3-A914-8B55CAEFCD7F}"/>
+                <a16:creationId xmlns:a16="http://schemas.microsoft.com/office/drawing/2014/main" id="{3287A3C0-0211-4825-8114-43609BC50FFB}"/>
               </a:ext>
             </a:extLst>
           </p:cNvPr>
@@ -6961,8 +5984,8 @@
         </p:nvSpPr>
         <p:spPr>
           <a:xfrm xmlns:a="http://schemas.openxmlformats.org/drawingml/2006/main">
-            <a:off x="523875" y="333375"/>
-            <a:ext cx="11144250" cy="1028700"/>
+            <a:off x="523875" y="285750"/>
+            <a:ext cx="11144250" cy="1066800"/>
           </a:xfrm>
           <a:prstGeom xmlns:a="http://schemas.openxmlformats.org/drawingml/2006/main" prst="rect">
             <a:avLst/>
@@ -6979,9 +6002,9 @@
           <a:lstStyle xmlns:a="http://schemas.openxmlformats.org/drawingml/2006/main"/>
           <a:p xmlns:a="http://schemas.openxmlformats.org/drawingml/2006/main">
             <a:pPr>
-              <a:defRPr sz="3000" b="1">
-                <a:solidFill>
-                  <a:srgbClr val="50351F"/>
+              <a:defRPr sz="3300" b="1">
+                <a:solidFill>
+                  <a:srgbClr val="29251F"/>
                 </a:solidFill>
                 <a:latin typeface="Arial"/>
                 <a:ea typeface="Arial"/>
@@ -6989,15 +6012,15 @@
               </a:defRPr>
             </a:pPr>
             <a:r>
-              <a:rPr sz="3000" b="1">
-                <a:solidFill>
-                  <a:srgbClr val="50351F"/>
+              <a:rPr sz="3300" b="1">
+                <a:solidFill>
+                  <a:srgbClr val="29251F"/>
                 </a:solidFill>
                 <a:latin typeface="Arial"/>
                 <a:ea typeface="Arial"/>
                 <a:cs typeface="Arial"/>
               </a:rPr>
-              <a:t>Ein Gespräch ohne Vorwurf</a:t>
+              <a:t>Vereinbarung und neue Erwartung</a:t>
             </a:r>
           </a:p>
         </p:txBody>
@@ -7007,7 +6030,7 @@
           <p:cNvPr id="2" name="">
             <a:extLst xmlns:a="http://schemas.openxmlformats.org/drawingml/2006/main">
               <a:ext uri="{FF2B5EF4-FFF2-40B4-BE49-F238E27FC236}">
-                <a16:creationId xmlns:a16="http://schemas.microsoft.com/office/drawing/2014/main" id="{E8B53C5A-329A-46C9-AE7C-CE88F521CBAD}"/>
+                <a16:creationId xmlns:a16="http://schemas.microsoft.com/office/drawing/2014/main" id="{BCED4055-7A2A-45EB-9698-02065E9BE05D}"/>
               </a:ext>
             </a:extLst>
           </p:cNvPr>
@@ -7018,8 +6041,8 @@
         </p:nvSpPr>
         <p:spPr>
           <a:xfrm xmlns:a="http://schemas.openxmlformats.org/drawingml/2006/main">
-            <a:off x="523875" y="1476375"/>
-            <a:ext cx="5524500" cy="4429125"/>
+            <a:off x="523875" y="1676400"/>
+            <a:ext cx="5524500" cy="4000500"/>
           </a:xfrm>
           <a:prstGeom xmlns:a="http://schemas.openxmlformats.org/drawingml/2006/main" prst="rect">
             <a:avLst/>
@@ -7036,9 +6059,9 @@
           <a:lstStyle xmlns:a="http://schemas.openxmlformats.org/drawingml/2006/main"/>
           <a:p xmlns:a="http://schemas.openxmlformats.org/drawingml/2006/main">
             <a:pPr>
-              <a:defRPr sz="2250" b="0">
-                <a:solidFill>
-                  <a:srgbClr val="50351F"/>
+              <a:defRPr sz="2400" b="0">
+                <a:solidFill>
+                  <a:srgbClr val="29251F"/>
                 </a:solidFill>
                 <a:latin typeface="Arial"/>
                 <a:ea typeface="Arial"/>
@@ -7046,22 +6069,22 @@
               </a:defRPr>
             </a:pPr>
             <a:r>
-              <a:rPr sz="2250" b="0">
-                <a:solidFill>
-                  <a:srgbClr val="50351F"/>
+              <a:rPr sz="2400" b="0">
+                <a:solidFill>
+                  <a:srgbClr val="29251F"/>
                 </a:solidFill>
                 <a:latin typeface="Arial"/>
                 <a:ea typeface="Arial"/>
                 <a:cs typeface="Arial"/>
               </a:rPr>
-              <a:t>„Ich brauche…“</a:t>
+              <a:t>Versprochen: ein Denar</a:t>
             </a:r>
           </a:p>
           <a:p xmlns:a="http://schemas.openxmlformats.org/drawingml/2006/main">
             <a:pPr>
-              <a:defRPr sz="2250" b="0">
-                <a:solidFill>
-                  <a:srgbClr val="50351F"/>
+              <a:defRPr sz="2400" b="0">
+                <a:solidFill>
+                  <a:srgbClr val="29251F"/>
                 </a:solidFill>
                 <a:latin typeface="Arial"/>
                 <a:ea typeface="Arial"/>
@@ -7069,22 +6092,22 @@
               </a:defRPr>
             </a:pPr>
             <a:r>
-              <a:rPr sz="2250" b="0">
-                <a:solidFill>
-                  <a:srgbClr val="50351F"/>
+              <a:rPr sz="2400" b="0">
+                <a:solidFill>
+                  <a:srgbClr val="29251F"/>
                 </a:solidFill>
                 <a:latin typeface="Arial"/>
                 <a:ea typeface="Arial"/>
                 <a:cs typeface="Arial"/>
               </a:rPr>
-              <a:t>„Wir hatten vereinbart…“</a:t>
+              <a:t>Erhalten: ein Denar</a:t>
             </a:r>
           </a:p>
           <a:p xmlns:a="http://schemas.openxmlformats.org/drawingml/2006/main">
             <a:pPr>
-              <a:defRPr sz="2250" b="0">
-                <a:solidFill>
-                  <a:srgbClr val="50351F"/>
+              <a:defRPr sz="2400" b="0">
+                <a:solidFill>
+                  <a:srgbClr val="29251F"/>
                 </a:solidFill>
                 <a:latin typeface="Arial"/>
                 <a:ea typeface="Arial"/>
@@ -7092,81 +6115,35 @@
               </a:defRPr>
             </a:pPr>
             <a:r>
-              <a:rPr sz="2250" b="0">
-                <a:solidFill>
-                  <a:srgbClr val="50351F"/>
+              <a:rPr sz="2400" b="0">
+                <a:solidFill>
+                  <a:srgbClr val="29251F"/>
                 </a:solidFill>
                 <a:latin typeface="Arial"/>
                 <a:ea typeface="Arial"/>
                 <a:cs typeface="Arial"/>
               </a:rPr>
-              <a:t>„Darf ich nachfragen…“</a:t>
-            </a:r>
-          </a:p>
-          <a:p xmlns:a="http://schemas.openxmlformats.org/drawingml/2006/main">
-            <a:pPr>
-              <a:defRPr sz="2250" b="0">
-                <a:solidFill>
-                  <a:srgbClr val="50351F"/>
-                </a:solidFill>
-                <a:latin typeface="Arial"/>
-                <a:ea typeface="Arial"/>
-                <a:cs typeface="Arial"/>
-              </a:defRPr>
-            </a:pPr>
-            <a:r>
-              <a:rPr sz="2250" b="0">
-                <a:solidFill>
-                  <a:srgbClr val="50351F"/>
-                </a:solidFill>
-                <a:latin typeface="Arial"/>
-                <a:ea typeface="Arial"/>
-                <a:cs typeface="Arial"/>
-              </a:rPr>
-              <a:t>Der Partner wiederholt, wie er die Antwort verstanden hat.</a:t>
-            </a:r>
-          </a:p>
-          <a:p xmlns:a="http://schemas.openxmlformats.org/drawingml/2006/main">
-            <a:pPr>
-              <a:defRPr sz="2250" b="0">
-                <a:solidFill>
-                  <a:srgbClr val="50351F"/>
-                </a:solidFill>
-                <a:latin typeface="Arial"/>
-                <a:ea typeface="Arial"/>
-                <a:cs typeface="Arial"/>
-              </a:defRPr>
-            </a:pPr>
-            <a:r>
-              <a:rPr sz="2250" b="0">
-                <a:solidFill>
-                  <a:srgbClr val="50351F"/>
-                </a:solidFill>
-                <a:latin typeface="Arial"/>
-                <a:ea typeface="Arial"/>
-                <a:cs typeface="Arial"/>
-              </a:rPr>
-              <a:t>Mein Bedürfnis verlangt nicht, einem anderen sein Geschenk wegzunehmen.</a:t>
+              <a:t>Danach mehr erwartet</a:t>
             </a:r>
           </a:p>
         </p:txBody>
       </p:sp>
       <p:pic>
         <p:nvPicPr>
-          <p:cNvPr id="7" name=""/>
+          <p:cNvPr id="8" name=""/>
           <p:cNvPicPr>
             <a:picLocks xmlns:a="http://schemas.openxmlformats.org/drawingml/2006/main" noChangeAspect="1"/>
           </p:cNvPicPr>
           <p:nvPr/>
         </p:nvPicPr>
         <p:blipFill>
-          <a:blip xmlns:r="http://schemas.openxmlformats.org/officeDocument/2006/relationships" xmlns:a="http://schemas.openxmlformats.org/drawingml/2006/main" r:embed="R02c24916355e428d"/>
+          <a:blip xmlns:r="http://schemas.openxmlformats.org/officeDocument/2006/relationships" xmlns:a="http://schemas.openxmlformats.org/drawingml/2006/main" r:embed="R1545e6233dca4936"/>
           <a:stretch xmlns:a="http://schemas.openxmlformats.org/drawingml/2006/main"/>
         </p:blipFill>
         <p:spPr>
           <a:xfrm xmlns:a="http://schemas.openxmlformats.org/drawingml/2006/main">
-            <a:off x="6381750" y="2156520"/>
-            <a:ext cx="5286375" cy="2973586"/>
+            <a:off x="6381750" y="2155190"/>
+            <a:ext cx="5238750" cy="2947670"/>
           </a:xfrm>
           <a:prstGeom xmlns:a="http://schemas.openxmlformats.org/drawingml/2006/main" prst="rect">
             <a:avLst/>
@@ -7178,7 +6155,7 @@
           <p:cNvPr id="4" name="">
             <a:extLst xmlns:a="http://schemas.openxmlformats.org/drawingml/2006/main">
               <a:ext uri="{FF2B5EF4-FFF2-40B4-BE49-F238E27FC236}">
-                <a16:creationId xmlns:a16="http://schemas.microsoft.com/office/drawing/2014/main" id="{CDC45D19-2FE1-4327-839D-B4E9FBB5FE8A}"/>
+                <a16:creationId xmlns:a16="http://schemas.microsoft.com/office/drawing/2014/main" id="{9A8EDD58-BB67-498D-B1CB-A36C3811115D}"/>
               </a:ext>
             </a:extLst>
           </p:cNvPr>
@@ -7189,8 +6166,8 @@
         </p:nvSpPr>
         <p:spPr>
           <a:xfrm xmlns:a="http://schemas.openxmlformats.org/drawingml/2006/main">
-            <a:off x="10810875" y="6315075"/>
-            <a:ext cx="952500" cy="257175"/>
+            <a:off x="523875" y="6143625"/>
+            <a:ext cx="9144000" cy="285750"/>
           </a:xfrm>
           <a:prstGeom xmlns:a="http://schemas.openxmlformats.org/drawingml/2006/main" prst="rect">
             <a:avLst/>
@@ -7207,9 +6184,9 @@
           <a:lstStyle xmlns:a="http://schemas.openxmlformats.org/drawingml/2006/main"/>
           <a:p xmlns:a="http://schemas.openxmlformats.org/drawingml/2006/main">
             <a:pPr>
-              <a:defRPr sz="1200" b="0">
-                <a:solidFill>
-                  <a:srgbClr val="7D6048"/>
+              <a:defRPr sz="1350" b="0">
+                <a:solidFill>
+                  <a:srgbClr val="29251F"/>
                 </a:solidFill>
                 <a:latin typeface="Arial"/>
                 <a:ea typeface="Arial"/>
@@ -7217,54 +6194,25 @@
               </a:defRPr>
             </a:pPr>
             <a:r>
-              <a:rPr sz="1200" b="0">
-                <a:solidFill>
-                  <a:srgbClr val="7D6048"/>
+              <a:rPr sz="1350" b="0">
+                <a:solidFill>
+                  <a:srgbClr val="29251F"/>
                 </a:solidFill>
                 <a:latin typeface="Arial"/>
                 <a:ea typeface="Arial"/>
                 <a:cs typeface="Arial"/>
               </a:rPr>
-              <a:t>7 / 12</a:t>
+              <a:t>Matthäus 20,1–16</a:t>
             </a:r>
           </a:p>
         </p:txBody>
       </p:sp>
-    </p:spTree>
-    <p:extLst>
-      <p:ext uri="{BB962C8B-B14F-4D97-AF65-F5344CB8AC3E}">
-        <p14:creationId xmlns:p14="http://schemas.microsoft.com/office/powerpoint/2010/main" val="1441316824"/>
-      </p:ext>
-    </p:extLst>
-  </p:cSld>
-</p:sld>
-</file>
-
-<file path=ppt/slides/slide8.xml><?xml version="1.0" encoding="utf-8"?>
-<p:sld xmlns:p="http://schemas.openxmlformats.org/presentationml/2006/main">
-  <p:cSld>
-    <p:bg>
-      <p:bgPr>
-        <a:solidFill xmlns:a="http://schemas.openxmlformats.org/drawingml/2006/main">
-          <a:srgbClr val="FFF9ED"/>
-        </a:solidFill>
-      </p:bgPr>
-    </p:bg>
-    <p:spTree>
-      <p:nvGrpSpPr>
-        <p:cNvPr id="1" name=""/>
-        <p:cNvGrpSpPr/>
-        <p:nvPr/>
-      </p:nvGrpSpPr>
-      <p:grpSpPr>
-        <a:xfrm xmlns:a="http://schemas.openxmlformats.org/drawingml/2006/main"/>
-      </p:grpSpPr>
       <p:sp>
         <p:nvSpPr>
           <p:cNvPr id="5" name="">
             <a:extLst xmlns:a="http://schemas.openxmlformats.org/drawingml/2006/main">
               <a:ext uri="{FF2B5EF4-FFF2-40B4-BE49-F238E27FC236}">
-                <a16:creationId xmlns:a16="http://schemas.microsoft.com/office/drawing/2014/main" id="{B0884B78-045C-425F-A873-A131EE66503C}"/>
+                <a16:creationId xmlns:a16="http://schemas.microsoft.com/office/drawing/2014/main" id="{E17241A1-B000-4052-951C-2E5A2AAA218C}"/>
               </a:ext>
             </a:extLst>
           </p:cNvPr>
@@ -7275,8 +6223,8 @@
         </p:nvSpPr>
         <p:spPr>
           <a:xfrm xmlns:a="http://schemas.openxmlformats.org/drawingml/2006/main">
-            <a:off x="523875" y="333375"/>
-            <a:ext cx="11144250" cy="1028700"/>
+            <a:off x="10668000" y="6191250"/>
+            <a:ext cx="1047750" cy="285750"/>
           </a:xfrm>
           <a:prstGeom xmlns:a="http://schemas.openxmlformats.org/drawingml/2006/main" prst="rect">
             <a:avLst/>
@@ -7293,9 +6241,9 @@
           <a:lstStyle xmlns:a="http://schemas.openxmlformats.org/drawingml/2006/main"/>
           <a:p xmlns:a="http://schemas.openxmlformats.org/drawingml/2006/main">
             <a:pPr>
-              <a:defRPr sz="3000" b="1">
-                <a:solidFill>
-                  <a:srgbClr val="50351F"/>
+              <a:defRPr sz="1275" b="0">
+                <a:solidFill>
+                  <a:srgbClr val="29251F"/>
                 </a:solidFill>
                 <a:latin typeface="Arial"/>
                 <a:ea typeface="Arial"/>
@@ -7303,25 +6251,54 @@
               </a:defRPr>
             </a:pPr>
             <a:r>
-              <a:rPr sz="3000" b="1">
-                <a:solidFill>
-                  <a:srgbClr val="50351F"/>
+              <a:rPr sz="1275" b="0">
+                <a:solidFill>
+                  <a:srgbClr val="29251F"/>
                 </a:solidFill>
                 <a:latin typeface="Arial"/>
                 <a:ea typeface="Arial"/>
                 <a:cs typeface="Arial"/>
               </a:rPr>
-              <a:t>Ein neuer Malkasten für den Neuen</a:t>
+              <a:t>5 / 12</a:t>
             </a:r>
           </a:p>
         </p:txBody>
       </p:sp>
-      <p:sp>
-        <p:nvSpPr>
-          <p:cNvPr id="2" name="">
+    </p:spTree>
+    <p:extLst>
+      <p:ext uri="{BB962C8B-B14F-4D97-AF65-F5344CB8AC3E}">
+        <p14:creationId xmlns:p14="http://schemas.microsoft.com/office/powerpoint/2010/main" val="120929575"/>
+      </p:ext>
+    </p:extLst>
+  </p:cSld>
+</p:sld>
+</file>
+
+<file path=ppt/slides/slide6.xml><?xml version="1.0" encoding="utf-8"?>
+<p:sld xmlns:p="http://schemas.openxmlformats.org/presentationml/2006/main">
+  <p:cSld>
+    <p:bg>
+      <p:bgPr>
+        <a:solidFill xmlns:a="http://schemas.openxmlformats.org/drawingml/2006/main">
+          <a:srgbClr val="FFFDF7"/>
+        </a:solidFill>
+      </p:bgPr>
+    </p:bg>
+    <p:spTree>
+      <p:nvGrpSpPr>
+        <p:cNvPr id="1" name=""/>
+        <p:cNvGrpSpPr/>
+        <p:nvPr/>
+      </p:nvGrpSpPr>
+      <p:grpSpPr>
+        <a:xfrm xmlns:a="http://schemas.openxmlformats.org/drawingml/2006/main"/>
+      </p:grpSpPr>
+      <p:sp>
+        <p:nvSpPr>
+          <p:cNvPr id="6" name="">
             <a:extLst xmlns:a="http://schemas.openxmlformats.org/drawingml/2006/main">
               <a:ext uri="{FF2B5EF4-FFF2-40B4-BE49-F238E27FC236}">
-                <a16:creationId xmlns:a16="http://schemas.microsoft.com/office/drawing/2014/main" id="{0D788E35-0A7F-4BFE-A464-ADF8E971C70D}"/>
+                <a16:creationId xmlns:a16="http://schemas.microsoft.com/office/drawing/2014/main" id="{F0D79BF6-4045-4695-BF3E-335DCE1E43B4}"/>
               </a:ext>
             </a:extLst>
           </p:cNvPr>
@@ -7332,8 +6309,8 @@
         </p:nvSpPr>
         <p:spPr>
           <a:xfrm xmlns:a="http://schemas.openxmlformats.org/drawingml/2006/main">
-            <a:off x="523875" y="1476375"/>
-            <a:ext cx="5524500" cy="4429125"/>
+            <a:off x="523875" y="285750"/>
+            <a:ext cx="11144250" cy="1066800"/>
           </a:xfrm>
           <a:prstGeom xmlns:a="http://schemas.openxmlformats.org/drawingml/2006/main" prst="rect">
             <a:avLst/>
@@ -7350,9 +6327,9 @@
           <a:lstStyle xmlns:a="http://schemas.openxmlformats.org/drawingml/2006/main"/>
           <a:p xmlns:a="http://schemas.openxmlformats.org/drawingml/2006/main">
             <a:pPr>
-              <a:defRPr sz="2250" b="0">
-                <a:solidFill>
-                  <a:srgbClr val="50351F"/>
+              <a:defRPr sz="3300" b="1">
+                <a:solidFill>
+                  <a:srgbClr val="29251F"/>
                 </a:solidFill>
                 <a:latin typeface="Arial"/>
                 <a:ea typeface="Arial"/>
@@ -7360,185 +6337,25 @@
               </a:defRPr>
             </a:pPr>
             <a:r>
-              <a:rPr sz="2250" b="0">
-                <a:solidFill>
-                  <a:srgbClr val="50351F"/>
+              <a:rPr sz="3300" b="1">
+                <a:solidFill>
+                  <a:srgbClr val="29251F"/>
                 </a:solidFill>
                 <a:latin typeface="Arial"/>
                 <a:ea typeface="Arial"/>
                 <a:cs typeface="Arial"/>
               </a:rPr>
-              <a:t>Mischa hat einen neuen Malkasten.</a:t>
-            </a:r>
-          </a:p>
-          <a:p xmlns:a="http://schemas.openxmlformats.org/drawingml/2006/main">
-            <a:pPr>
-              <a:defRPr sz="2250" b="0">
-                <a:solidFill>
-                  <a:srgbClr val="50351F"/>
-                </a:solidFill>
-                <a:latin typeface="Arial"/>
-                <a:ea typeface="Arial"/>
-                <a:cs typeface="Arial"/>
-              </a:defRPr>
-            </a:pPr>
-            <a:r>
-              <a:rPr sz="2250" b="0">
-                <a:solidFill>
-                  <a:srgbClr val="50351F"/>
-                </a:solidFill>
-                <a:latin typeface="Arial"/>
-                <a:ea typeface="Arial"/>
-                <a:cs typeface="Arial"/>
-              </a:rPr>
-              <a:t>Sascha hat einen gewöhnlichen.</a:t>
-            </a:r>
-          </a:p>
-          <a:p xmlns:a="http://schemas.openxmlformats.org/drawingml/2006/main">
-            <a:pPr>
-              <a:defRPr sz="2250" b="0">
-                <a:solidFill>
-                  <a:srgbClr val="50351F"/>
-                </a:solidFill>
-                <a:latin typeface="Arial"/>
-                <a:ea typeface="Arial"/>
-                <a:cs typeface="Arial"/>
-              </a:defRPr>
-            </a:pPr>
-            <a:r>
-              <a:rPr sz="2250" b="0">
-                <a:solidFill>
-                  <a:srgbClr val="50351F"/>
-                </a:solidFill>
-                <a:latin typeface="Arial"/>
-                <a:ea typeface="Arial"/>
-                <a:cs typeface="Arial"/>
-              </a:rPr>
-              <a:t>Wer schenkte den Malkasten?</a:t>
-            </a:r>
-          </a:p>
-          <a:p xmlns:a="http://schemas.openxmlformats.org/drawingml/2006/main">
-            <a:pPr>
-              <a:defRPr sz="2250" b="0">
-                <a:solidFill>
-                  <a:srgbClr val="50351F"/>
-                </a:solidFill>
-                <a:latin typeface="Arial"/>
-                <a:ea typeface="Arial"/>
-                <a:cs typeface="Arial"/>
-              </a:defRPr>
-            </a:pPr>
-            <a:r>
-              <a:rPr sz="2250" b="0">
-                <a:solidFill>
-                  <a:srgbClr val="50351F"/>
-                </a:solidFill>
-                <a:latin typeface="Arial"/>
-                <a:ea typeface="Arial"/>
-                <a:cs typeface="Arial"/>
-              </a:rPr>
-              <a:t>Was wurde Sascha versprochen?</a:t>
-            </a:r>
-          </a:p>
-          <a:p xmlns:a="http://schemas.openxmlformats.org/drawingml/2006/main">
-            <a:pPr>
-              <a:defRPr sz="2250" b="0">
-                <a:solidFill>
-                  <a:srgbClr val="50351F"/>
-                </a:solidFill>
-                <a:latin typeface="Arial"/>
-                <a:ea typeface="Arial"/>
-                <a:cs typeface="Arial"/>
-              </a:defRPr>
-            </a:pPr>
-            <a:r>
-              <a:rPr sz="2250" b="0">
-                <a:solidFill>
-                  <a:srgbClr val="50351F"/>
-                </a:solidFill>
-                <a:latin typeface="Arial"/>
-                <a:ea typeface="Arial"/>
-                <a:cs typeface="Arial"/>
-              </a:rPr>
-              <a:t>Was steht noch aus?</a:t>
-            </a:r>
-          </a:p>
-          <a:p xmlns:a="http://schemas.openxmlformats.org/drawingml/2006/main">
-            <a:pPr>
-              <a:defRPr sz="2250" b="0">
-                <a:solidFill>
-                  <a:srgbClr val="50351F"/>
-                </a:solidFill>
-                <a:latin typeface="Arial"/>
-                <a:ea typeface="Arial"/>
-                <a:cs typeface="Arial"/>
-              </a:defRPr>
-            </a:pPr>
-            <a:r>
-              <a:rPr sz="2250" b="0">
-                <a:solidFill>
-                  <a:srgbClr val="50351F"/>
-                </a:solidFill>
-                <a:latin typeface="Arial"/>
-                <a:ea typeface="Arial"/>
-                <a:cs typeface="Arial"/>
-              </a:rPr>
-              <a:t>Hört alle vier Informationen.</a:t>
-            </a:r>
-          </a:p>
-          <a:p xmlns:a="http://schemas.openxmlformats.org/drawingml/2006/main">
-            <a:pPr>
-              <a:defRPr sz="2250" b="0">
-                <a:solidFill>
-                  <a:srgbClr val="50351F"/>
-                </a:solidFill>
-                <a:latin typeface="Arial"/>
-                <a:ea typeface="Arial"/>
-                <a:cs typeface="Arial"/>
-              </a:defRPr>
-            </a:pPr>
-            <a:r>
-              <a:rPr sz="2250" b="0">
-                <a:solidFill>
-                  <a:srgbClr val="50351F"/>
-                </a:solidFill>
-                <a:latin typeface="Arial"/>
-                <a:ea typeface="Arial"/>
-                <a:cs typeface="Arial"/>
-              </a:rPr>
-              <a:t>Erster Plan. Die neue Bedingung kommt später.</a:t>
+              <a:t>Gleiche Gabe oder verletzte Regel</a:t>
             </a:r>
           </a:p>
         </p:txBody>
       </p:sp>
-      <p:pic>
-        <p:nvPicPr>
-          <p:cNvPr id="7" name=""/>
-          <p:cNvPicPr>
-            <a:picLocks xmlns:a="http://schemas.openxmlformats.org/drawingml/2006/main" noChangeAspect="1"/>
-          </p:cNvPicPr>
-          <p:nvPr/>
-        </p:nvPicPr>
-        <p:blipFill>
-          <a:blip xmlns:r="http://schemas.openxmlformats.org/officeDocument/2006/relationships" xmlns:a="http://schemas.openxmlformats.org/drawingml/2006/main" r:embed="R6bb5c619b11f4bd9"/>
-          <a:stretch xmlns:a="http://schemas.openxmlformats.org/drawingml/2006/main"/>
-        </p:blipFill>
-        <p:spPr>
-          <a:xfrm xmlns:a="http://schemas.openxmlformats.org/drawingml/2006/main">
-            <a:off x="6381750" y="2156520"/>
-            <a:ext cx="5286375" cy="2973586"/>
-          </a:xfrm>
-          <a:prstGeom xmlns:a="http://schemas.openxmlformats.org/drawingml/2006/main" prst="rect">
-            <a:avLst/>
-          </a:prstGeom>
-        </p:spPr>
-      </p:pic>
-      <p:sp>
-        <p:nvSpPr>
-          <p:cNvPr id="4" name="">
+      <p:sp>
+        <p:nvSpPr>
+          <p:cNvPr id="2" name="">
             <a:extLst xmlns:a="http://schemas.openxmlformats.org/drawingml/2006/main">
               <a:ext uri="{FF2B5EF4-FFF2-40B4-BE49-F238E27FC236}">
-                <a16:creationId xmlns:a16="http://schemas.microsoft.com/office/drawing/2014/main" id="{654D92C4-34C0-4C66-A7C7-23AAFF864683}"/>
+                <a16:creationId xmlns:a16="http://schemas.microsoft.com/office/drawing/2014/main" id="{E04B005E-9512-4F1B-B593-19C1BCFC11DD}"/>
               </a:ext>
             </a:extLst>
           </p:cNvPr>
@@ -7549,8 +6366,8 @@
         </p:nvSpPr>
         <p:spPr>
           <a:xfrm xmlns:a="http://schemas.openxmlformats.org/drawingml/2006/main">
-            <a:off x="10810875" y="6315075"/>
-            <a:ext cx="952500" cy="257175"/>
+            <a:off x="523875" y="1676400"/>
+            <a:ext cx="5524500" cy="4000500"/>
           </a:xfrm>
           <a:prstGeom xmlns:a="http://schemas.openxmlformats.org/drawingml/2006/main" prst="rect">
             <a:avLst/>
@@ -7567,9 +6384,9 @@
           <a:lstStyle xmlns:a="http://schemas.openxmlformats.org/drawingml/2006/main"/>
           <a:p xmlns:a="http://schemas.openxmlformats.org/drawingml/2006/main">
             <a:pPr>
-              <a:defRPr sz="1200" b="0">
-                <a:solidFill>
-                  <a:srgbClr val="7D6048"/>
+              <a:defRPr sz="2400" b="0">
+                <a:solidFill>
+                  <a:srgbClr val="29251F"/>
                 </a:solidFill>
                 <a:latin typeface="Arial"/>
                 <a:ea typeface="Arial"/>
@@ -7577,54 +6394,116 @@
               </a:defRPr>
             </a:pPr>
             <a:r>
-              <a:rPr sz="1200" b="0">
-                <a:solidFill>
-                  <a:srgbClr val="7D6048"/>
+              <a:rPr sz="2400" b="0">
+                <a:solidFill>
+                  <a:srgbClr val="29251F"/>
                 </a:solidFill>
                 <a:latin typeface="Arial"/>
                 <a:ea typeface="Arial"/>
                 <a:cs typeface="Arial"/>
               </a:rPr>
-              <a:t>8 / 12</a:t>
+              <a:t>Gemeinsame Gabe</a:t>
+            </a:r>
+          </a:p>
+          <a:p xmlns:a="http://schemas.openxmlformats.org/drawingml/2006/main">
+            <a:pPr>
+              <a:defRPr sz="2400" b="0">
+                <a:solidFill>
+                  <a:srgbClr val="29251F"/>
+                </a:solidFill>
+                <a:latin typeface="Arial"/>
+                <a:ea typeface="Arial"/>
+                <a:cs typeface="Arial"/>
+              </a:defRPr>
+            </a:pPr>
+            <a:r>
+              <a:rPr sz="2400" b="0">
+                <a:solidFill>
+                  <a:srgbClr val="29251F"/>
+                </a:solidFill>
+                <a:latin typeface="Arial"/>
+                <a:ea typeface="Arial"/>
+                <a:cs typeface="Arial"/>
+              </a:rPr>
+              <a:t>Regel verletzt</a:t>
+            </a:r>
+          </a:p>
+          <a:p xmlns:a="http://schemas.openxmlformats.org/drawingml/2006/main">
+            <a:pPr>
+              <a:defRPr sz="2400" b="0">
+                <a:solidFill>
+                  <a:srgbClr val="29251F"/>
+                </a:solidFill>
+                <a:latin typeface="Arial"/>
+                <a:ea typeface="Arial"/>
+                <a:cs typeface="Arial"/>
+              </a:defRPr>
+            </a:pPr>
+            <a:r>
+              <a:rPr sz="2400" b="0">
+                <a:solidFill>
+                  <a:srgbClr val="29251F"/>
+                </a:solidFill>
+                <a:latin typeface="Arial"/>
+                <a:ea typeface="Arial"/>
+                <a:cs typeface="Arial"/>
+              </a:rPr>
+              <a:t>Nachfragen nötig</a:t>
+            </a:r>
+          </a:p>
+          <a:p xmlns:a="http://schemas.openxmlformats.org/drawingml/2006/main">
+            <a:pPr>
+              <a:defRPr sz="2400" b="0">
+                <a:solidFill>
+                  <a:srgbClr val="29251F"/>
+                </a:solidFill>
+                <a:latin typeface="Arial"/>
+                <a:ea typeface="Arial"/>
+                <a:cs typeface="Arial"/>
+              </a:defRPr>
+            </a:pPr>
+            <a:r>
+              <a:rPr sz="2400" b="0">
+                <a:solidFill>
+                  <a:srgbClr val="29251F"/>
+                </a:solidFill>
+                <a:latin typeface="Arial"/>
+                <a:ea typeface="Arial"/>
+                <a:cs typeface="Arial"/>
+              </a:rPr>
+              <a:t>Sechs Fälle</a:t>
             </a:r>
           </a:p>
         </p:txBody>
       </p:sp>
-    </p:spTree>
-    <p:extLst>
-      <p:ext uri="{BB962C8B-B14F-4D97-AF65-F5344CB8AC3E}">
-        <p14:creationId xmlns:p14="http://schemas.microsoft.com/office/powerpoint/2010/main" val="1095357587"/>
-      </p:ext>
-    </p:extLst>
-  </p:cSld>
-</p:sld>
-</file>
-
-<file path=ppt/slides/slide9.xml><?xml version="1.0" encoding="utf-8"?>
-<p:sld xmlns:p="http://schemas.openxmlformats.org/presentationml/2006/main">
-  <p:cSld>
-    <p:bg>
-      <p:bgPr>
-        <a:solidFill xmlns:a="http://schemas.openxmlformats.org/drawingml/2006/main">
-          <a:srgbClr val="FFF9ED"/>
-        </a:solidFill>
-      </p:bgPr>
-    </p:bg>
-    <p:spTree>
-      <p:nvGrpSpPr>
-        <p:cNvPr id="1" name=""/>
-        <p:cNvGrpSpPr/>
-        <p:nvPr/>
-      </p:nvGrpSpPr>
-      <p:grpSpPr>
-        <a:xfrm xmlns:a="http://schemas.openxmlformats.org/drawingml/2006/main"/>
-      </p:grpSpPr>
-      <p:sp>
-        <p:nvSpPr>
-          <p:cNvPr id="5" name="">
+      <p:pic>
+        <p:nvPicPr>
+          <p:cNvPr id="8" name=""/>
+          <p:cNvPicPr>
+            <a:picLocks xmlns:a="http://schemas.openxmlformats.org/drawingml/2006/main" noChangeAspect="1"/>
+          </p:cNvPicPr>
+          <p:nvPr/>
+        </p:nvPicPr>
+        <p:blipFill>
+          <a:blip xmlns:r="http://schemas.openxmlformats.org/officeDocument/2006/relationships" xmlns:a="http://schemas.openxmlformats.org/drawingml/2006/main" r:embed="R06ad526bde20478e"/>
+          <a:stretch xmlns:a="http://schemas.openxmlformats.org/drawingml/2006/main"/>
+        </p:blipFill>
+        <p:spPr>
+          <a:xfrm xmlns:a="http://schemas.openxmlformats.org/drawingml/2006/main">
+            <a:off x="6381750" y="2155190"/>
+            <a:ext cx="5238750" cy="2947670"/>
+          </a:xfrm>
+          <a:prstGeom xmlns:a="http://schemas.openxmlformats.org/drawingml/2006/main" prst="rect">
+            <a:avLst/>
+          </a:prstGeom>
+        </p:spPr>
+      </p:pic>
+      <p:sp>
+        <p:nvSpPr>
+          <p:cNvPr id="4" name="">
             <a:extLst xmlns:a="http://schemas.openxmlformats.org/drawingml/2006/main">
               <a:ext uri="{FF2B5EF4-FFF2-40B4-BE49-F238E27FC236}">
-                <a16:creationId xmlns:a16="http://schemas.microsoft.com/office/drawing/2014/main" id="{AB6B3CDD-F0AB-4ADE-9EF6-AFACBB900BB6}"/>
+                <a16:creationId xmlns:a16="http://schemas.microsoft.com/office/drawing/2014/main" id="{B8752BB5-59D6-4038-9861-C2118A7833D6}"/>
               </a:ext>
             </a:extLst>
           </p:cNvPr>
@@ -7635,8 +6514,8 @@
         </p:nvSpPr>
         <p:spPr>
           <a:xfrm xmlns:a="http://schemas.openxmlformats.org/drawingml/2006/main">
-            <a:off x="523875" y="333375"/>
-            <a:ext cx="11144250" cy="1028700"/>
+            <a:off x="523875" y="6143625"/>
+            <a:ext cx="9144000" cy="285750"/>
           </a:xfrm>
           <a:prstGeom xmlns:a="http://schemas.openxmlformats.org/drawingml/2006/main" prst="rect">
             <a:avLst/>
@@ -7653,9 +6532,9 @@
           <a:lstStyle xmlns:a="http://schemas.openxmlformats.org/drawingml/2006/main"/>
           <a:p xmlns:a="http://schemas.openxmlformats.org/drawingml/2006/main">
             <a:pPr>
-              <a:defRPr sz="3000" b="1">
-                <a:solidFill>
-                  <a:srgbClr val="50351F"/>
+              <a:defRPr sz="1350" b="0">
+                <a:solidFill>
+                  <a:srgbClr val="29251F"/>
                 </a:solidFill>
                 <a:latin typeface="Arial"/>
                 <a:ea typeface="Arial"/>
@@ -7663,25 +6542,25 @@
               </a:defRPr>
             </a:pPr>
             <a:r>
-              <a:rPr sz="3000" b="1">
-                <a:solidFill>
-                  <a:srgbClr val="50351F"/>
+              <a:rPr sz="1350" b="0">
+                <a:solidFill>
+                  <a:srgbClr val="29251F"/>
                 </a:solidFill>
                 <a:latin typeface="Arial"/>
                 <a:ea typeface="Arial"/>
                 <a:cs typeface="Arial"/>
               </a:rPr>
-              <a:t>Wenn die Zusage nicht erfüllt wurde</a:t>
+              <a:t>Matthäus 20,1–16</a:t>
             </a:r>
           </a:p>
         </p:txBody>
       </p:sp>
       <p:sp>
         <p:nvSpPr>
-          <p:cNvPr id="2" name="">
+          <p:cNvPr id="5" name="">
             <a:extLst xmlns:a="http://schemas.openxmlformats.org/drawingml/2006/main">
               <a:ext uri="{FF2B5EF4-FFF2-40B4-BE49-F238E27FC236}">
-                <a16:creationId xmlns:a16="http://schemas.microsoft.com/office/drawing/2014/main" id="{11B7D494-FBB1-42D9-B330-68E486E4127E}"/>
+                <a16:creationId xmlns:a16="http://schemas.microsoft.com/office/drawing/2014/main" id="{3640B63B-59D9-4B01-B56A-AFAFDE09356C}"/>
               </a:ext>
             </a:extLst>
           </p:cNvPr>
@@ -7692,8 +6571,8 @@
         </p:nvSpPr>
         <p:spPr>
           <a:xfrm xmlns:a="http://schemas.openxmlformats.org/drawingml/2006/main">
-            <a:off x="523875" y="1476375"/>
-            <a:ext cx="5524500" cy="4429125"/>
+            <a:off x="10668000" y="6191250"/>
+            <a:ext cx="1047750" cy="285750"/>
           </a:xfrm>
           <a:prstGeom xmlns:a="http://schemas.openxmlformats.org/drawingml/2006/main" prst="rect">
             <a:avLst/>
@@ -7710,9 +6589,9 @@
           <a:lstStyle xmlns:a="http://schemas.openxmlformats.org/drawingml/2006/main"/>
           <a:p xmlns:a="http://schemas.openxmlformats.org/drawingml/2006/main">
             <a:pPr>
-              <a:defRPr sz="2250" b="0">
-                <a:solidFill>
-                  <a:srgbClr val="50351F"/>
+              <a:defRPr sz="1275" b="0">
+                <a:solidFill>
+                  <a:srgbClr val="29251F"/>
                 </a:solidFill>
                 <a:latin typeface="Arial"/>
                 <a:ea typeface="Arial"/>
@@ -7720,162 +6599,54 @@
               </a:defRPr>
             </a:pPr>
             <a:r>
-              <a:rPr sz="2250" b="0">
-                <a:solidFill>
-                  <a:srgbClr val="50351F"/>
+              <a:rPr sz="1275" b="0">
+                <a:solidFill>
+                  <a:srgbClr val="29251F"/>
                 </a:solidFill>
                 <a:latin typeface="Arial"/>
                 <a:ea typeface="Arial"/>
                 <a:cs typeface="Arial"/>
               </a:rPr>
-              <a:t>Sascha wurden 10 Minuten versprochen.</a:t>
-            </a:r>
-          </a:p>
-          <a:p xmlns:a="http://schemas.openxmlformats.org/drawingml/2006/main">
-            <a:pPr>
-              <a:defRPr sz="2250" b="0">
-                <a:solidFill>
-                  <a:srgbClr val="50351F"/>
-                </a:solidFill>
-                <a:latin typeface="Arial"/>
-                <a:ea typeface="Arial"/>
-                <a:cs typeface="Arial"/>
-              </a:defRPr>
-            </a:pPr>
-            <a:r>
-              <a:rPr sz="2250" b="0">
-                <a:solidFill>
-                  <a:srgbClr val="50351F"/>
-                </a:solidFill>
-                <a:latin typeface="Arial"/>
-                <a:ea typeface="Arial"/>
-                <a:cs typeface="Arial"/>
-              </a:rPr>
-              <a:t>Er bekam nur 5.</a:t>
-            </a:r>
-          </a:p>
-          <a:p xmlns:a="http://schemas.openxmlformats.org/drawingml/2006/main">
-            <a:pPr>
-              <a:defRPr sz="2250" b="0">
-                <a:solidFill>
-                  <a:srgbClr val="50351F"/>
-                </a:solidFill>
-                <a:latin typeface="Arial"/>
-                <a:ea typeface="Arial"/>
-                <a:cs typeface="Arial"/>
-              </a:defRPr>
-            </a:pPr>
-            <a:r>
-              <a:rPr sz="2250" b="0">
-                <a:solidFill>
-                  <a:srgbClr val="50351F"/>
-                </a:solidFill>
-                <a:latin typeface="Arial"/>
-                <a:ea typeface="Arial"/>
-                <a:cs typeface="Arial"/>
-              </a:rPr>
-              <a:t>Der Unterricht ist vorbei.</a:t>
-            </a:r>
-          </a:p>
-          <a:p xmlns:a="http://schemas.openxmlformats.org/drawingml/2006/main">
-            <a:pPr>
-              <a:defRPr sz="2250" b="0">
-                <a:solidFill>
-                  <a:srgbClr val="50351F"/>
-                </a:solidFill>
-                <a:latin typeface="Arial"/>
-                <a:ea typeface="Arial"/>
-                <a:cs typeface="Arial"/>
-              </a:defRPr>
-            </a:pPr>
-            <a:r>
-              <a:rPr sz="2250" b="0">
-                <a:solidFill>
-                  <a:srgbClr val="50351F"/>
-                </a:solidFill>
-                <a:latin typeface="Arial"/>
-                <a:ea typeface="Arial"/>
-                <a:cs typeface="Arial"/>
-              </a:rPr>
-              <a:t>Wie um die übrigen 5 Minuten bitten?</a:t>
-            </a:r>
-          </a:p>
-          <a:p xmlns:a="http://schemas.openxmlformats.org/drawingml/2006/main">
-            <a:pPr>
-              <a:defRPr sz="2250" b="0">
-                <a:solidFill>
-                  <a:srgbClr val="50351F"/>
-                </a:solidFill>
-                <a:latin typeface="Arial"/>
-                <a:ea typeface="Arial"/>
-                <a:cs typeface="Arial"/>
-              </a:defRPr>
-            </a:pPr>
-            <a:r>
-              <a:rPr sz="2250" b="0">
-                <a:solidFill>
-                  <a:srgbClr val="50351F"/>
-                </a:solidFill>
-                <a:latin typeface="Arial"/>
-                <a:ea typeface="Arial"/>
-                <a:cs typeface="Arial"/>
-              </a:rPr>
-              <a:t>Muss man Mischa sein Geschenk wegnehmen?</a:t>
-            </a:r>
-          </a:p>
-          <a:p xmlns:a="http://schemas.openxmlformats.org/drawingml/2006/main">
-            <a:pPr>
-              <a:defRPr sz="2250" b="0">
-                <a:solidFill>
-                  <a:srgbClr val="50351F"/>
-                </a:solidFill>
-                <a:latin typeface="Arial"/>
-                <a:ea typeface="Arial"/>
-                <a:cs typeface="Arial"/>
-              </a:defRPr>
-            </a:pPr>
-            <a:r>
-              <a:rPr sz="2250" b="0">
-                <a:solidFill>
-                  <a:srgbClr val="50351F"/>
-                </a:solidFill>
-                <a:latin typeface="Arial"/>
-                <a:ea typeface="Arial"/>
-                <a:cs typeface="Arial"/>
-              </a:rPr>
-              <a:t>Ersten Plan behalten. Einen zweiten ergänzen.</a:t>
+              <a:t>6 / 12</a:t>
             </a:r>
           </a:p>
         </p:txBody>
       </p:sp>
-      <p:pic>
-        <p:nvPicPr>
-          <p:cNvPr id="7" name=""/>
-          <p:cNvPicPr>
-            <a:picLocks xmlns:a="http://schemas.openxmlformats.org/drawingml/2006/main" noChangeAspect="1"/>
-          </p:cNvPicPr>
-          <p:nvPr/>
-        </p:nvPicPr>
-        <p:blipFill>
-          <a:blip xmlns:r="http://schemas.openxmlformats.org/officeDocument/2006/relationships" xmlns:a="http://schemas.openxmlformats.org/drawingml/2006/main" r:embed="R5a20769f89034d36"/>
-          <a:stretch xmlns:a="http://schemas.openxmlformats.org/drawingml/2006/main"/>
-        </p:blipFill>
-        <p:spPr>
-          <a:xfrm xmlns:a="http://schemas.openxmlformats.org/drawingml/2006/main">
-            <a:off x="6381750" y="2156520"/>
-            <a:ext cx="5286375" cy="2973586"/>
-          </a:xfrm>
-          <a:prstGeom xmlns:a="http://schemas.openxmlformats.org/drawingml/2006/main" prst="rect">
-            <a:avLst/>
-          </a:prstGeom>
-        </p:spPr>
-      </p:pic>
-      <p:sp>
-        <p:nvSpPr>
-          <p:cNvPr id="4" name="">
+    </p:spTree>
+    <p:extLst>
+      <p:ext uri="{BB962C8B-B14F-4D97-AF65-F5344CB8AC3E}">
+        <p14:creationId xmlns:p14="http://schemas.microsoft.com/office/powerpoint/2010/main" val="890144674"/>
+      </p:ext>
+    </p:extLst>
+  </p:cSld>
+</p:sld>
+</file>
+
+<file path=ppt/slides/slide7.xml><?xml version="1.0" encoding="utf-8"?>
+<p:sld xmlns:p="http://schemas.openxmlformats.org/presentationml/2006/main">
+  <p:cSld>
+    <p:bg>
+      <p:bgPr>
+        <a:solidFill xmlns:a="http://schemas.openxmlformats.org/drawingml/2006/main">
+          <a:srgbClr val="FFFDF7"/>
+        </a:solidFill>
+      </p:bgPr>
+    </p:bg>
+    <p:spTree>
+      <p:nvGrpSpPr>
+        <p:cNvPr id="1" name=""/>
+        <p:cNvGrpSpPr/>
+        <p:nvPr/>
+      </p:nvGrpSpPr>
+      <p:grpSpPr>
+        <a:xfrm xmlns:a="http://schemas.openxmlformats.org/drawingml/2006/main"/>
+      </p:grpSpPr>
+      <p:sp>
+        <p:nvSpPr>
+          <p:cNvPr id="6" name="">
             <a:extLst xmlns:a="http://schemas.openxmlformats.org/drawingml/2006/main">
               <a:ext uri="{FF2B5EF4-FFF2-40B4-BE49-F238E27FC236}">
-                <a16:creationId xmlns:a16="http://schemas.microsoft.com/office/drawing/2014/main" id="{419849A9-F4D7-413A-9142-3200972FBC47}"/>
+                <a16:creationId xmlns:a16="http://schemas.microsoft.com/office/drawing/2014/main" id="{87EB5A5E-A73B-4574-A4D0-6252DDAF1B94}"/>
               </a:ext>
             </a:extLst>
           </p:cNvPr>
@@ -7886,8 +6657,8 @@
         </p:nvSpPr>
         <p:spPr>
           <a:xfrm xmlns:a="http://schemas.openxmlformats.org/drawingml/2006/main">
-            <a:off x="10810875" y="6315075"/>
-            <a:ext cx="952500" cy="257175"/>
+            <a:off x="523875" y="285750"/>
+            <a:ext cx="11144250" cy="1066800"/>
           </a:xfrm>
           <a:prstGeom xmlns:a="http://schemas.openxmlformats.org/drawingml/2006/main" prst="rect">
             <a:avLst/>
@@ -7904,9 +6675,9 @@
           <a:lstStyle xmlns:a="http://schemas.openxmlformats.org/drawingml/2006/main"/>
           <a:p xmlns:a="http://schemas.openxmlformats.org/drawingml/2006/main">
             <a:pPr>
-              <a:defRPr sz="1200" b="0">
-                <a:solidFill>
-                  <a:srgbClr val="7D6048"/>
+              <a:defRPr sz="3300" b="1">
+                <a:solidFill>
+                  <a:srgbClr val="29251F"/>
                 </a:solidFill>
                 <a:latin typeface="Arial"/>
                 <a:ea typeface="Arial"/>
@@ -7914,15 +6685,254 @@
               </a:defRPr>
             </a:pPr>
             <a:r>
-              <a:rPr sz="1200" b="0">
-                <a:solidFill>
-                  <a:srgbClr val="7D6048"/>
+              <a:rPr sz="3300" b="1">
+                <a:solidFill>
+                  <a:srgbClr val="29251F"/>
                 </a:solidFill>
                 <a:latin typeface="Arial"/>
                 <a:ea typeface="Arial"/>
                 <a:cs typeface="Arial"/>
               </a:rPr>
-              <a:t>9 / 12</a:t>
+              <a:t>Die Worte des ersten Arbeiters</a:t>
+            </a:r>
+          </a:p>
+        </p:txBody>
+      </p:sp>
+      <p:sp>
+        <p:nvSpPr>
+          <p:cNvPr id="2" name="">
+            <a:extLst xmlns:a="http://schemas.openxmlformats.org/drawingml/2006/main">
+              <a:ext uri="{FF2B5EF4-FFF2-40B4-BE49-F238E27FC236}">
+                <a16:creationId xmlns:a16="http://schemas.microsoft.com/office/drawing/2014/main" id="{2A61C284-826D-423F-9C2F-3092DF0FC95C}"/>
+              </a:ext>
+            </a:extLst>
+          </p:cNvPr>
+          <p:cNvSpPr>
+            <a:spLocks xmlns:a="http://schemas.openxmlformats.org/drawingml/2006/main" noGrp="1"/>
+          </p:cNvSpPr>
+          <p:nvPr/>
+        </p:nvSpPr>
+        <p:spPr>
+          <a:xfrm xmlns:a="http://schemas.openxmlformats.org/drawingml/2006/main">
+            <a:off x="523875" y="1676400"/>
+            <a:ext cx="5524500" cy="4000500"/>
+          </a:xfrm>
+          <a:prstGeom xmlns:a="http://schemas.openxmlformats.org/drawingml/2006/main" prst="rect">
+            <a:avLst/>
+          </a:prstGeom>
+          <a:noFill xmlns:a="http://schemas.openxmlformats.org/drawingml/2006/main"/>
+          <a:ln xmlns:a="http://schemas.openxmlformats.org/drawingml/2006/main" w="0">
+            <a:noFill/>
+          </a:ln>
+        </p:spPr>
+        <p:txBody>
+          <a:bodyPr xmlns:a="http://schemas.openxmlformats.org/drawingml/2006/main">
+            <a:noAutofit/>
+          </a:bodyPr>
+          <a:lstStyle xmlns:a="http://schemas.openxmlformats.org/drawingml/2006/main"/>
+          <a:p xmlns:a="http://schemas.openxmlformats.org/drawingml/2006/main">
+            <a:pPr>
+              <a:defRPr sz="2400" b="0">
+                <a:solidFill>
+                  <a:srgbClr val="29251F"/>
+                </a:solidFill>
+                <a:latin typeface="Arial"/>
+                <a:ea typeface="Arial"/>
+                <a:cs typeface="Arial"/>
+              </a:defRPr>
+            </a:pPr>
+            <a:r>
+              <a:rPr sz="2400" b="0">
+                <a:solidFill>
+                  <a:srgbClr val="29251F"/>
+                </a:solidFill>
+                <a:latin typeface="Arial"/>
+                <a:ea typeface="Arial"/>
+                <a:cs typeface="Arial"/>
+              </a:rPr>
+              <a:t>Ich arbeitete länger</a:t>
+            </a:r>
+          </a:p>
+          <a:p xmlns:a="http://schemas.openxmlformats.org/drawingml/2006/main">
+            <a:pPr>
+              <a:defRPr sz="2400" b="0">
+                <a:solidFill>
+                  <a:srgbClr val="29251F"/>
+                </a:solidFill>
+                <a:latin typeface="Arial"/>
+                <a:ea typeface="Arial"/>
+                <a:cs typeface="Arial"/>
+              </a:defRPr>
+            </a:pPr>
+            <a:r>
+              <a:rPr sz="2400" b="0">
+                <a:solidFill>
+                  <a:srgbClr val="29251F"/>
+                </a:solidFill>
+                <a:latin typeface="Arial"/>
+                <a:ea typeface="Arial"/>
+                <a:cs typeface="Arial"/>
+              </a:rPr>
+              <a:t>Er bekam genauso viel</a:t>
+            </a:r>
+          </a:p>
+          <a:p xmlns:a="http://schemas.openxmlformats.org/drawingml/2006/main">
+            <a:pPr>
+              <a:defRPr sz="2400" b="0">
+                <a:solidFill>
+                  <a:srgbClr val="29251F"/>
+                </a:solidFill>
+                <a:latin typeface="Arial"/>
+                <a:ea typeface="Arial"/>
+                <a:cs typeface="Arial"/>
+              </a:defRPr>
+            </a:pPr>
+            <a:r>
+              <a:rPr sz="2400" b="0">
+                <a:solidFill>
+                  <a:srgbClr val="29251F"/>
+                </a:solidFill>
+                <a:latin typeface="Arial"/>
+                <a:ea typeface="Arial"/>
+                <a:cs typeface="Arial"/>
+              </a:rPr>
+              <a:t>Was antwortete der Hausherr?</a:t>
+            </a:r>
+          </a:p>
+        </p:txBody>
+      </p:sp>
+      <p:pic>
+        <p:nvPicPr>
+          <p:cNvPr id="8" name=""/>
+          <p:cNvPicPr>
+            <a:picLocks xmlns:a="http://schemas.openxmlformats.org/drawingml/2006/main" noChangeAspect="1"/>
+          </p:cNvPicPr>
+          <p:nvPr/>
+        </p:nvPicPr>
+        <p:blipFill>
+          <a:blip xmlns:r="http://schemas.openxmlformats.org/officeDocument/2006/relationships" xmlns:a="http://schemas.openxmlformats.org/drawingml/2006/main" r:embed="Rf4c1f777f17a4c54"/>
+          <a:stretch xmlns:a="http://schemas.openxmlformats.org/drawingml/2006/main"/>
+        </p:blipFill>
+        <p:spPr>
+          <a:xfrm xmlns:a="http://schemas.openxmlformats.org/drawingml/2006/main">
+            <a:off x="6381750" y="2155190"/>
+            <a:ext cx="5238750" cy="2947670"/>
+          </a:xfrm>
+          <a:prstGeom xmlns:a="http://schemas.openxmlformats.org/drawingml/2006/main" prst="rect">
+            <a:avLst/>
+          </a:prstGeom>
+        </p:spPr>
+      </p:pic>
+      <p:sp>
+        <p:nvSpPr>
+          <p:cNvPr id="4" name="">
+            <a:extLst xmlns:a="http://schemas.openxmlformats.org/drawingml/2006/main">
+              <a:ext uri="{FF2B5EF4-FFF2-40B4-BE49-F238E27FC236}">
+                <a16:creationId xmlns:a16="http://schemas.microsoft.com/office/drawing/2014/main" id="{E817BBD6-75E7-4909-BACD-E497307D9716}"/>
+              </a:ext>
+            </a:extLst>
+          </p:cNvPr>
+          <p:cNvSpPr>
+            <a:spLocks xmlns:a="http://schemas.openxmlformats.org/drawingml/2006/main" noGrp="1"/>
+          </p:cNvSpPr>
+          <p:nvPr/>
+        </p:nvSpPr>
+        <p:spPr>
+          <a:xfrm xmlns:a="http://schemas.openxmlformats.org/drawingml/2006/main">
+            <a:off x="523875" y="6143625"/>
+            <a:ext cx="9144000" cy="285750"/>
+          </a:xfrm>
+          <a:prstGeom xmlns:a="http://schemas.openxmlformats.org/drawingml/2006/main" prst="rect">
+            <a:avLst/>
+          </a:prstGeom>
+          <a:noFill xmlns:a="http://schemas.openxmlformats.org/drawingml/2006/main"/>
+          <a:ln xmlns:a="http://schemas.openxmlformats.org/drawingml/2006/main" w="0">
+            <a:noFill/>
+          </a:ln>
+        </p:spPr>
+        <p:txBody>
+          <a:bodyPr xmlns:a="http://schemas.openxmlformats.org/drawingml/2006/main">
+            <a:noAutofit/>
+          </a:bodyPr>
+          <a:lstStyle xmlns:a="http://schemas.openxmlformats.org/drawingml/2006/main"/>
+          <a:p xmlns:a="http://schemas.openxmlformats.org/drawingml/2006/main">
+            <a:pPr>
+              <a:defRPr sz="1350" b="0">
+                <a:solidFill>
+                  <a:srgbClr val="29251F"/>
+                </a:solidFill>
+                <a:latin typeface="Arial"/>
+                <a:ea typeface="Arial"/>
+                <a:cs typeface="Arial"/>
+              </a:defRPr>
+            </a:pPr>
+            <a:r>
+              <a:rPr sz="1350" b="0">
+                <a:solidFill>
+                  <a:srgbClr val="29251F"/>
+                </a:solidFill>
+                <a:latin typeface="Arial"/>
+                <a:ea typeface="Arial"/>
+                <a:cs typeface="Arial"/>
+              </a:rPr>
+              <a:t>Matthäus 20,1–16</a:t>
+            </a:r>
+          </a:p>
+        </p:txBody>
+      </p:sp>
+      <p:sp>
+        <p:nvSpPr>
+          <p:cNvPr id="5" name="">
+            <a:extLst xmlns:a="http://schemas.openxmlformats.org/drawingml/2006/main">
+              <a:ext uri="{FF2B5EF4-FFF2-40B4-BE49-F238E27FC236}">
+                <a16:creationId xmlns:a16="http://schemas.microsoft.com/office/drawing/2014/main" id="{5193E42D-6EE4-460F-A094-130137DF31FA}"/>
+              </a:ext>
+            </a:extLst>
+          </p:cNvPr>
+          <p:cNvSpPr>
+            <a:spLocks xmlns:a="http://schemas.openxmlformats.org/drawingml/2006/main" noGrp="1"/>
+          </p:cNvSpPr>
+          <p:nvPr/>
+        </p:nvSpPr>
+        <p:spPr>
+          <a:xfrm xmlns:a="http://schemas.openxmlformats.org/drawingml/2006/main">
+            <a:off x="10668000" y="6191250"/>
+            <a:ext cx="1047750" cy="285750"/>
+          </a:xfrm>
+          <a:prstGeom xmlns:a="http://schemas.openxmlformats.org/drawingml/2006/main" prst="rect">
+            <a:avLst/>
+          </a:prstGeom>
+          <a:noFill xmlns:a="http://schemas.openxmlformats.org/drawingml/2006/main"/>
+          <a:ln xmlns:a="http://schemas.openxmlformats.org/drawingml/2006/main" w="0">
+            <a:noFill/>
+          </a:ln>
+        </p:spPr>
+        <p:txBody>
+          <a:bodyPr xmlns:a="http://schemas.openxmlformats.org/drawingml/2006/main">
+            <a:noAutofit/>
+          </a:bodyPr>
+          <a:lstStyle xmlns:a="http://schemas.openxmlformats.org/drawingml/2006/main"/>
+          <a:p xmlns:a="http://schemas.openxmlformats.org/drawingml/2006/main">
+            <a:pPr>
+              <a:defRPr sz="1275" b="0">
+                <a:solidFill>
+                  <a:srgbClr val="29251F"/>
+                </a:solidFill>
+                <a:latin typeface="Arial"/>
+                <a:ea typeface="Arial"/>
+                <a:cs typeface="Arial"/>
+              </a:defRPr>
+            </a:pPr>
+            <a:r>
+              <a:rPr sz="1275" b="0">
+                <a:solidFill>
+                  <a:srgbClr val="29251F"/>
+                </a:solidFill>
+                <a:latin typeface="Arial"/>
+                <a:ea typeface="Arial"/>
+                <a:cs typeface="Arial"/>
+              </a:rPr>
+              <a:t>7 / 12</a:t>
             </a:r>
           </a:p>
         </p:txBody>
@@ -7930,7 +6940,680 @@
     </p:spTree>
     <p:extLst>
       <p:ext uri="{BB962C8B-B14F-4D97-AF65-F5344CB8AC3E}">
-        <p14:creationId xmlns:p14="http://schemas.microsoft.com/office/powerpoint/2010/main" val="366472962"/>
+        <p14:creationId xmlns:p14="http://schemas.microsoft.com/office/powerpoint/2010/main" val="1310955255"/>
+      </p:ext>
+    </p:extLst>
+  </p:cSld>
+</p:sld>
+</file>
+
+<file path=ppt/slides/slide8.xml><?xml version="1.0" encoding="utf-8"?>
+<p:sld xmlns:p="http://schemas.openxmlformats.org/presentationml/2006/main">
+  <p:cSld>
+    <p:bg>
+      <p:bgPr>
+        <a:solidFill xmlns:a="http://schemas.openxmlformats.org/drawingml/2006/main">
+          <a:srgbClr val="FFFDF7"/>
+        </a:solidFill>
+      </p:bgPr>
+    </p:bg>
+    <p:spTree>
+      <p:nvGrpSpPr>
+        <p:cNvPr id="1" name=""/>
+        <p:cNvGrpSpPr/>
+        <p:nvPr/>
+      </p:nvGrpSpPr>
+      <p:grpSpPr>
+        <a:xfrm xmlns:a="http://schemas.openxmlformats.org/drawingml/2006/main"/>
+      </p:grpSpPr>
+      <p:sp>
+        <p:nvSpPr>
+          <p:cNvPr id="6" name="">
+            <a:extLst xmlns:a="http://schemas.openxmlformats.org/drawingml/2006/main">
+              <a:ext uri="{FF2B5EF4-FFF2-40B4-BE49-F238E27FC236}">
+                <a16:creationId xmlns:a16="http://schemas.microsoft.com/office/drawing/2014/main" id="{79F6A189-B78E-43B5-8AAF-601CAC2D4065}"/>
+              </a:ext>
+            </a:extLst>
+          </p:cNvPr>
+          <p:cNvSpPr>
+            <a:spLocks xmlns:a="http://schemas.openxmlformats.org/drawingml/2006/main" noGrp="1"/>
+          </p:cNvSpPr>
+          <p:nvPr/>
+        </p:nvSpPr>
+        <p:spPr>
+          <a:xfrm xmlns:a="http://schemas.openxmlformats.org/drawingml/2006/main">
+            <a:off x="523875" y="285750"/>
+            <a:ext cx="11144250" cy="1066800"/>
+          </a:xfrm>
+          <a:prstGeom xmlns:a="http://schemas.openxmlformats.org/drawingml/2006/main" prst="rect">
+            <a:avLst/>
+          </a:prstGeom>
+          <a:noFill xmlns:a="http://schemas.openxmlformats.org/drawingml/2006/main"/>
+          <a:ln xmlns:a="http://schemas.openxmlformats.org/drawingml/2006/main" w="0">
+            <a:noFill/>
+          </a:ln>
+        </p:spPr>
+        <p:txBody>
+          <a:bodyPr xmlns:a="http://schemas.openxmlformats.org/drawingml/2006/main">
+            <a:noAutofit/>
+          </a:bodyPr>
+          <a:lstStyle xmlns:a="http://schemas.openxmlformats.org/drawingml/2006/main"/>
+          <a:p xmlns:a="http://schemas.openxmlformats.org/drawingml/2006/main">
+            <a:pPr>
+              <a:defRPr sz="3300" b="1">
+                <a:solidFill>
+                  <a:srgbClr val="29251F"/>
+                </a:solidFill>
+                <a:latin typeface="Arial"/>
+                <a:ea typeface="Arial"/>
+                <a:cs typeface="Arial"/>
+              </a:defRPr>
+            </a:pPr>
+            <a:r>
+              <a:rPr sz="3300" b="1">
+                <a:solidFill>
+                  <a:srgbClr val="29251F"/>
+                </a:solidFill>
+                <a:latin typeface="Arial"/>
+                <a:ea typeface="Arial"/>
+                <a:cs typeface="Arial"/>
+              </a:rPr>
+              <a:t>Ein Tisch für alle</a:t>
+            </a:r>
+          </a:p>
+        </p:txBody>
+      </p:sp>
+      <p:sp>
+        <p:nvSpPr>
+          <p:cNvPr id="2" name="">
+            <a:extLst xmlns:a="http://schemas.openxmlformats.org/drawingml/2006/main">
+              <a:ext uri="{FF2B5EF4-FFF2-40B4-BE49-F238E27FC236}">
+                <a16:creationId xmlns:a16="http://schemas.microsoft.com/office/drawing/2014/main" id="{1C2946E0-E00D-4A0C-953A-B4133EA3611D}"/>
+              </a:ext>
+            </a:extLst>
+          </p:cNvPr>
+          <p:cNvSpPr>
+            <a:spLocks xmlns:a="http://schemas.openxmlformats.org/drawingml/2006/main" noGrp="1"/>
+          </p:cNvSpPr>
+          <p:nvPr/>
+        </p:nvSpPr>
+        <p:spPr>
+          <a:xfrm xmlns:a="http://schemas.openxmlformats.org/drawingml/2006/main">
+            <a:off x="523875" y="1676400"/>
+            <a:ext cx="5524500" cy="4000500"/>
+          </a:xfrm>
+          <a:prstGeom xmlns:a="http://schemas.openxmlformats.org/drawingml/2006/main" prst="rect">
+            <a:avLst/>
+          </a:prstGeom>
+          <a:noFill xmlns:a="http://schemas.openxmlformats.org/drawingml/2006/main"/>
+          <a:ln xmlns:a="http://schemas.openxmlformats.org/drawingml/2006/main" w="0">
+            <a:noFill/>
+          </a:ln>
+        </p:spPr>
+        <p:txBody>
+          <a:bodyPr xmlns:a="http://schemas.openxmlformats.org/drawingml/2006/main">
+            <a:noAutofit/>
+          </a:bodyPr>
+          <a:lstStyle xmlns:a="http://schemas.openxmlformats.org/drawingml/2006/main"/>
+          <a:p xmlns:a="http://schemas.openxmlformats.org/drawingml/2006/main">
+            <a:pPr>
+              <a:defRPr sz="2400" b="0">
+                <a:solidFill>
+                  <a:srgbClr val="29251F"/>
+                </a:solidFill>
+                <a:latin typeface="Arial"/>
+                <a:ea typeface="Arial"/>
+                <a:cs typeface="Arial"/>
+              </a:defRPr>
+            </a:pPr>
+            <a:r>
+              <a:rPr sz="2400" b="0">
+                <a:solidFill>
+                  <a:srgbClr val="29251F"/>
+                </a:solidFill>
+                <a:latin typeface="Arial"/>
+                <a:ea typeface="Arial"/>
+                <a:cs typeface="Arial"/>
+              </a:rPr>
+              <a:t>Sascha half seit dem Morgen</a:t>
+            </a:r>
+          </a:p>
+          <a:p xmlns:a="http://schemas.openxmlformats.org/drawingml/2006/main">
+            <a:pPr>
+              <a:defRPr sz="2400" b="0">
+                <a:solidFill>
+                  <a:srgbClr val="29251F"/>
+                </a:solidFill>
+                <a:latin typeface="Arial"/>
+                <a:ea typeface="Arial"/>
+                <a:cs typeface="Arial"/>
+              </a:defRPr>
+            </a:pPr>
+            <a:r>
+              <a:rPr sz="2400" b="0">
+                <a:solidFill>
+                  <a:srgbClr val="29251F"/>
+                </a:solidFill>
+                <a:latin typeface="Arial"/>
+                <a:ea typeface="Arial"/>
+                <a:cs typeface="Arial"/>
+              </a:rPr>
+              <a:t>Mischa kam am Ende</a:t>
+            </a:r>
+          </a:p>
+          <a:p xmlns:a="http://schemas.openxmlformats.org/drawingml/2006/main">
+            <a:pPr>
+              <a:defRPr sz="2400" b="0">
+                <a:solidFill>
+                  <a:srgbClr val="29251F"/>
+                </a:solidFill>
+                <a:latin typeface="Arial"/>
+                <a:ea typeface="Arial"/>
+                <a:cs typeface="Arial"/>
+              </a:defRPr>
+            </a:pPr>
+            <a:r>
+              <a:rPr sz="2400" b="0">
+                <a:solidFill>
+                  <a:srgbClr val="29251F"/>
+                </a:solidFill>
+                <a:latin typeface="Arial"/>
+                <a:ea typeface="Arial"/>
+                <a:cs typeface="Arial"/>
+              </a:rPr>
+              <a:t>Gleiches Essen für alle</a:t>
+            </a:r>
+          </a:p>
+          <a:p xmlns:a="http://schemas.openxmlformats.org/drawingml/2006/main">
+            <a:pPr>
+              <a:defRPr sz="2400" b="0">
+                <a:solidFill>
+                  <a:srgbClr val="29251F"/>
+                </a:solidFill>
+                <a:latin typeface="Arial"/>
+                <a:ea typeface="Arial"/>
+                <a:cs typeface="Arial"/>
+              </a:defRPr>
+            </a:pPr>
+            <a:r>
+              <a:rPr sz="2400" b="0">
+                <a:solidFill>
+                  <a:srgbClr val="29251F"/>
+                </a:solidFill>
+                <a:latin typeface="Arial"/>
+                <a:ea typeface="Arial"/>
+                <a:cs typeface="Arial"/>
+              </a:rPr>
+              <a:t>Vier Informationen</a:t>
+            </a:r>
+          </a:p>
+        </p:txBody>
+      </p:sp>
+      <p:pic>
+        <p:nvPicPr>
+          <p:cNvPr id="8" name=""/>
+          <p:cNvPicPr>
+            <a:picLocks xmlns:a="http://schemas.openxmlformats.org/drawingml/2006/main" noChangeAspect="1"/>
+          </p:cNvPicPr>
+          <p:nvPr/>
+        </p:nvPicPr>
+        <p:blipFill>
+          <a:blip xmlns:r="http://schemas.openxmlformats.org/officeDocument/2006/relationships" xmlns:a="http://schemas.openxmlformats.org/drawingml/2006/main" r:embed="R72a09382025345d9"/>
+          <a:stretch xmlns:a="http://schemas.openxmlformats.org/drawingml/2006/main"/>
+        </p:blipFill>
+        <p:spPr>
+          <a:xfrm xmlns:a="http://schemas.openxmlformats.org/drawingml/2006/main">
+            <a:off x="6381750" y="2155190"/>
+            <a:ext cx="5238750" cy="2947670"/>
+          </a:xfrm>
+          <a:prstGeom xmlns:a="http://schemas.openxmlformats.org/drawingml/2006/main" prst="rect">
+            <a:avLst/>
+          </a:prstGeom>
+        </p:spPr>
+      </p:pic>
+      <p:sp>
+        <p:nvSpPr>
+          <p:cNvPr id="4" name="">
+            <a:extLst xmlns:a="http://schemas.openxmlformats.org/drawingml/2006/main">
+              <a:ext uri="{FF2B5EF4-FFF2-40B4-BE49-F238E27FC236}">
+                <a16:creationId xmlns:a16="http://schemas.microsoft.com/office/drawing/2014/main" id="{B9E5CE42-4029-4BE1-A7E5-2295461DC482}"/>
+              </a:ext>
+            </a:extLst>
+          </p:cNvPr>
+          <p:cNvSpPr>
+            <a:spLocks xmlns:a="http://schemas.openxmlformats.org/drawingml/2006/main" noGrp="1"/>
+          </p:cNvSpPr>
+          <p:nvPr/>
+        </p:nvSpPr>
+        <p:spPr>
+          <a:xfrm xmlns:a="http://schemas.openxmlformats.org/drawingml/2006/main">
+            <a:off x="523875" y="6143625"/>
+            <a:ext cx="9144000" cy="285750"/>
+          </a:xfrm>
+          <a:prstGeom xmlns:a="http://schemas.openxmlformats.org/drawingml/2006/main" prst="rect">
+            <a:avLst/>
+          </a:prstGeom>
+          <a:noFill xmlns:a="http://schemas.openxmlformats.org/drawingml/2006/main"/>
+          <a:ln xmlns:a="http://schemas.openxmlformats.org/drawingml/2006/main" w="0">
+            <a:noFill/>
+          </a:ln>
+        </p:spPr>
+        <p:txBody>
+          <a:bodyPr xmlns:a="http://schemas.openxmlformats.org/drawingml/2006/main">
+            <a:noAutofit/>
+          </a:bodyPr>
+          <a:lstStyle xmlns:a="http://schemas.openxmlformats.org/drawingml/2006/main"/>
+          <a:p xmlns:a="http://schemas.openxmlformats.org/drawingml/2006/main">
+            <a:pPr>
+              <a:defRPr sz="1350" b="0">
+                <a:solidFill>
+                  <a:srgbClr val="29251F"/>
+                </a:solidFill>
+                <a:latin typeface="Arial"/>
+                <a:ea typeface="Arial"/>
+                <a:cs typeface="Arial"/>
+              </a:defRPr>
+            </a:pPr>
+            <a:r>
+              <a:rPr sz="1350" b="0">
+                <a:solidFill>
+                  <a:srgbClr val="29251F"/>
+                </a:solidFill>
+                <a:latin typeface="Arial"/>
+                <a:ea typeface="Arial"/>
+                <a:cs typeface="Arial"/>
+              </a:rPr>
+              <a:t>Matthäus 20,1–16</a:t>
+            </a:r>
+          </a:p>
+        </p:txBody>
+      </p:sp>
+      <p:sp>
+        <p:nvSpPr>
+          <p:cNvPr id="5" name="">
+            <a:extLst xmlns:a="http://schemas.openxmlformats.org/drawingml/2006/main">
+              <a:ext uri="{FF2B5EF4-FFF2-40B4-BE49-F238E27FC236}">
+                <a16:creationId xmlns:a16="http://schemas.microsoft.com/office/drawing/2014/main" id="{E215787B-D542-4AE9-AF85-8C40519915FF}"/>
+              </a:ext>
+            </a:extLst>
+          </p:cNvPr>
+          <p:cNvSpPr>
+            <a:spLocks xmlns:a="http://schemas.openxmlformats.org/drawingml/2006/main" noGrp="1"/>
+          </p:cNvSpPr>
+          <p:nvPr/>
+        </p:nvSpPr>
+        <p:spPr>
+          <a:xfrm xmlns:a="http://schemas.openxmlformats.org/drawingml/2006/main">
+            <a:off x="10668000" y="6191250"/>
+            <a:ext cx="1047750" cy="285750"/>
+          </a:xfrm>
+          <a:prstGeom xmlns:a="http://schemas.openxmlformats.org/drawingml/2006/main" prst="rect">
+            <a:avLst/>
+          </a:prstGeom>
+          <a:noFill xmlns:a="http://schemas.openxmlformats.org/drawingml/2006/main"/>
+          <a:ln xmlns:a="http://schemas.openxmlformats.org/drawingml/2006/main" w="0">
+            <a:noFill/>
+          </a:ln>
+        </p:spPr>
+        <p:txBody>
+          <a:bodyPr xmlns:a="http://schemas.openxmlformats.org/drawingml/2006/main">
+            <a:noAutofit/>
+          </a:bodyPr>
+          <a:lstStyle xmlns:a="http://schemas.openxmlformats.org/drawingml/2006/main"/>
+          <a:p xmlns:a="http://schemas.openxmlformats.org/drawingml/2006/main">
+            <a:pPr>
+              <a:defRPr sz="1275" b="0">
+                <a:solidFill>
+                  <a:srgbClr val="29251F"/>
+                </a:solidFill>
+                <a:latin typeface="Arial"/>
+                <a:ea typeface="Arial"/>
+                <a:cs typeface="Arial"/>
+              </a:defRPr>
+            </a:pPr>
+            <a:r>
+              <a:rPr sz="1275" b="0">
+                <a:solidFill>
+                  <a:srgbClr val="29251F"/>
+                </a:solidFill>
+                <a:latin typeface="Arial"/>
+                <a:ea typeface="Arial"/>
+                <a:cs typeface="Arial"/>
+              </a:rPr>
+              <a:t>8 / 12</a:t>
+            </a:r>
+          </a:p>
+        </p:txBody>
+      </p:sp>
+    </p:spTree>
+    <p:extLst>
+      <p:ext uri="{BB962C8B-B14F-4D97-AF65-F5344CB8AC3E}">
+        <p14:creationId xmlns:p14="http://schemas.microsoft.com/office/powerpoint/2010/main" val="377602523"/>
+      </p:ext>
+    </p:extLst>
+  </p:cSld>
+</p:sld>
+</file>
+
+<file path=ppt/slides/slide9.xml><?xml version="1.0" encoding="utf-8"?>
+<p:sld xmlns:p="http://schemas.openxmlformats.org/presentationml/2006/main">
+  <p:cSld>
+    <p:bg>
+      <p:bgPr>
+        <a:solidFill xmlns:a="http://schemas.openxmlformats.org/drawingml/2006/main">
+          <a:srgbClr val="FFFDF7"/>
+        </a:solidFill>
+      </p:bgPr>
+    </p:bg>
+    <p:spTree>
+      <p:nvGrpSpPr>
+        <p:cNvPr id="1" name=""/>
+        <p:cNvGrpSpPr/>
+        <p:nvPr/>
+      </p:nvGrpSpPr>
+      <p:grpSpPr>
+        <a:xfrm xmlns:a="http://schemas.openxmlformats.org/drawingml/2006/main"/>
+      </p:grpSpPr>
+      <p:sp>
+        <p:nvSpPr>
+          <p:cNvPr id="6" name="">
+            <a:extLst xmlns:a="http://schemas.openxmlformats.org/drawingml/2006/main">
+              <a:ext uri="{FF2B5EF4-FFF2-40B4-BE49-F238E27FC236}">
+                <a16:creationId xmlns:a16="http://schemas.microsoft.com/office/drawing/2014/main" id="{FE1AE1A2-9442-40CD-91E9-2B2E5D967397}"/>
+              </a:ext>
+            </a:extLst>
+          </p:cNvPr>
+          <p:cNvSpPr>
+            <a:spLocks xmlns:a="http://schemas.openxmlformats.org/drawingml/2006/main" noGrp="1"/>
+          </p:cNvSpPr>
+          <p:nvPr/>
+        </p:nvSpPr>
+        <p:spPr>
+          <a:xfrm xmlns:a="http://schemas.openxmlformats.org/drawingml/2006/main">
+            <a:off x="523875" y="285750"/>
+            <a:ext cx="11144250" cy="1066800"/>
+          </a:xfrm>
+          <a:prstGeom xmlns:a="http://schemas.openxmlformats.org/drawingml/2006/main" prst="rect">
+            <a:avLst/>
+          </a:prstGeom>
+          <a:noFill xmlns:a="http://schemas.openxmlformats.org/drawingml/2006/main"/>
+          <a:ln xmlns:a="http://schemas.openxmlformats.org/drawingml/2006/main" w="0">
+            <a:noFill/>
+          </a:ln>
+        </p:spPr>
+        <p:txBody>
+          <a:bodyPr xmlns:a="http://schemas.openxmlformats.org/drawingml/2006/main">
+            <a:noAutofit/>
+          </a:bodyPr>
+          <a:lstStyle xmlns:a="http://schemas.openxmlformats.org/drawingml/2006/main"/>
+          <a:p xmlns:a="http://schemas.openxmlformats.org/drawingml/2006/main">
+            <a:pPr>
+              <a:defRPr sz="3300" b="1">
+                <a:solidFill>
+                  <a:srgbClr val="29251F"/>
+                </a:solidFill>
+                <a:latin typeface="Arial"/>
+                <a:ea typeface="Arial"/>
+                <a:cs typeface="Arial"/>
+              </a:defRPr>
+            </a:pPr>
+            <a:r>
+              <a:rPr sz="3300" b="1">
+                <a:solidFill>
+                  <a:srgbClr val="29251F"/>
+                </a:solidFill>
+                <a:latin typeface="Arial"/>
+                <a:ea typeface="Arial"/>
+                <a:cs typeface="Arial"/>
+              </a:rPr>
+              <a:t>Auch der Letzte ist eingeladen</a:t>
+            </a:r>
+          </a:p>
+        </p:txBody>
+      </p:sp>
+      <p:sp>
+        <p:nvSpPr>
+          <p:cNvPr id="2" name="">
+            <a:extLst xmlns:a="http://schemas.openxmlformats.org/drawingml/2006/main">
+              <a:ext uri="{FF2B5EF4-FFF2-40B4-BE49-F238E27FC236}">
+                <a16:creationId xmlns:a16="http://schemas.microsoft.com/office/drawing/2014/main" id="{81A7F04E-8DCD-4DAE-A4CA-CCDBF81460EA}"/>
+              </a:ext>
+            </a:extLst>
+          </p:cNvPr>
+          <p:cNvSpPr>
+            <a:spLocks xmlns:a="http://schemas.openxmlformats.org/drawingml/2006/main" noGrp="1"/>
+          </p:cNvSpPr>
+          <p:nvPr/>
+        </p:nvSpPr>
+        <p:spPr>
+          <a:xfrm xmlns:a="http://schemas.openxmlformats.org/drawingml/2006/main">
+            <a:off x="523875" y="1676400"/>
+            <a:ext cx="5524500" cy="4000500"/>
+          </a:xfrm>
+          <a:prstGeom xmlns:a="http://schemas.openxmlformats.org/drawingml/2006/main" prst="rect">
+            <a:avLst/>
+          </a:prstGeom>
+          <a:noFill xmlns:a="http://schemas.openxmlformats.org/drawingml/2006/main"/>
+          <a:ln xmlns:a="http://schemas.openxmlformats.org/drawingml/2006/main" w="0">
+            <a:noFill/>
+          </a:ln>
+        </p:spPr>
+        <p:txBody>
+          <a:bodyPr xmlns:a="http://schemas.openxmlformats.org/drawingml/2006/main">
+            <a:noAutofit/>
+          </a:bodyPr>
+          <a:lstStyle xmlns:a="http://schemas.openxmlformats.org/drawingml/2006/main"/>
+          <a:p xmlns:a="http://schemas.openxmlformats.org/drawingml/2006/main">
+            <a:pPr>
+              <a:defRPr sz="2400" b="0">
+                <a:solidFill>
+                  <a:srgbClr val="29251F"/>
+                </a:solidFill>
+                <a:latin typeface="Arial"/>
+                <a:ea typeface="Arial"/>
+                <a:cs typeface="Arial"/>
+              </a:defRPr>
+            </a:pPr>
+            <a:r>
+              <a:rPr sz="2400" b="0">
+                <a:solidFill>
+                  <a:srgbClr val="29251F"/>
+                </a:solidFill>
+                <a:latin typeface="Arial"/>
+                <a:ea typeface="Arial"/>
+                <a:cs typeface="Arial"/>
+              </a:rPr>
+              <a:t>Mischa begleitete seine Großmutter</a:t>
+            </a:r>
+          </a:p>
+          <a:p xmlns:a="http://schemas.openxmlformats.org/drawingml/2006/main">
+            <a:pPr>
+              <a:defRPr sz="2400" b="0">
+                <a:solidFill>
+                  <a:srgbClr val="29251F"/>
+                </a:solidFill>
+                <a:latin typeface="Arial"/>
+                <a:ea typeface="Arial"/>
+                <a:cs typeface="Arial"/>
+              </a:defRPr>
+            </a:pPr>
+            <a:r>
+              <a:rPr sz="2400" b="0">
+                <a:solidFill>
+                  <a:srgbClr val="29251F"/>
+                </a:solidFill>
+                <a:latin typeface="Arial"/>
+                <a:ea typeface="Arial"/>
+                <a:cs typeface="Arial"/>
+              </a:rPr>
+              <a:t>Die Portionen bleiben gleich</a:t>
+            </a:r>
+          </a:p>
+          <a:p xmlns:a="http://schemas.openxmlformats.org/drawingml/2006/main">
+            <a:pPr>
+              <a:defRPr sz="2400" b="0">
+                <a:solidFill>
+                  <a:srgbClr val="29251F"/>
+                </a:solidFill>
+                <a:latin typeface="Arial"/>
+                <a:ea typeface="Arial"/>
+                <a:cs typeface="Arial"/>
+              </a:defRPr>
+            </a:pPr>
+            <a:r>
+              <a:rPr sz="2400" b="0">
+                <a:solidFill>
+                  <a:srgbClr val="29251F"/>
+                </a:solidFill>
+                <a:latin typeface="Arial"/>
+                <a:ea typeface="Arial"/>
+                <a:cs typeface="Arial"/>
+              </a:rPr>
+              <a:t>Was ändert sich an unserer Antwort?</a:t>
+            </a:r>
+          </a:p>
+        </p:txBody>
+      </p:sp>
+      <p:pic>
+        <p:nvPicPr>
+          <p:cNvPr id="8" name=""/>
+          <p:cNvPicPr>
+            <a:picLocks xmlns:a="http://schemas.openxmlformats.org/drawingml/2006/main" noChangeAspect="1"/>
+          </p:cNvPicPr>
+          <p:nvPr/>
+        </p:nvPicPr>
+        <p:blipFill>
+          <a:blip xmlns:r="http://schemas.openxmlformats.org/officeDocument/2006/relationships" xmlns:a="http://schemas.openxmlformats.org/drawingml/2006/main" r:embed="R079467718a674765"/>
+          <a:stretch xmlns:a="http://schemas.openxmlformats.org/drawingml/2006/main"/>
+        </p:blipFill>
+        <p:spPr>
+          <a:xfrm xmlns:a="http://schemas.openxmlformats.org/drawingml/2006/main">
+            <a:off x="6381750" y="2155190"/>
+            <a:ext cx="5238750" cy="2947670"/>
+          </a:xfrm>
+          <a:prstGeom xmlns:a="http://schemas.openxmlformats.org/drawingml/2006/main" prst="rect">
+            <a:avLst/>
+          </a:prstGeom>
+        </p:spPr>
+      </p:pic>
+      <p:sp>
+        <p:nvSpPr>
+          <p:cNvPr id="4" name="">
+            <a:extLst xmlns:a="http://schemas.openxmlformats.org/drawingml/2006/main">
+              <a:ext uri="{FF2B5EF4-FFF2-40B4-BE49-F238E27FC236}">
+                <a16:creationId xmlns:a16="http://schemas.microsoft.com/office/drawing/2014/main" id="{B6BBABDE-1AF8-4E9D-A5F2-130ECFD96E61}"/>
+              </a:ext>
+            </a:extLst>
+          </p:cNvPr>
+          <p:cNvSpPr>
+            <a:spLocks xmlns:a="http://schemas.openxmlformats.org/drawingml/2006/main" noGrp="1"/>
+          </p:cNvSpPr>
+          <p:nvPr/>
+        </p:nvSpPr>
+        <p:spPr>
+          <a:xfrm xmlns:a="http://schemas.openxmlformats.org/drawingml/2006/main">
+            <a:off x="523875" y="6143625"/>
+            <a:ext cx="9144000" cy="285750"/>
+          </a:xfrm>
+          <a:prstGeom xmlns:a="http://schemas.openxmlformats.org/drawingml/2006/main" prst="rect">
+            <a:avLst/>
+          </a:prstGeom>
+          <a:noFill xmlns:a="http://schemas.openxmlformats.org/drawingml/2006/main"/>
+          <a:ln xmlns:a="http://schemas.openxmlformats.org/drawingml/2006/main" w="0">
+            <a:noFill/>
+          </a:ln>
+        </p:spPr>
+        <p:txBody>
+          <a:bodyPr xmlns:a="http://schemas.openxmlformats.org/drawingml/2006/main">
+            <a:noAutofit/>
+          </a:bodyPr>
+          <a:lstStyle xmlns:a="http://schemas.openxmlformats.org/drawingml/2006/main"/>
+          <a:p xmlns:a="http://schemas.openxmlformats.org/drawingml/2006/main">
+            <a:pPr>
+              <a:defRPr sz="1350" b="0">
+                <a:solidFill>
+                  <a:srgbClr val="29251F"/>
+                </a:solidFill>
+                <a:latin typeface="Arial"/>
+                <a:ea typeface="Arial"/>
+                <a:cs typeface="Arial"/>
+              </a:defRPr>
+            </a:pPr>
+            <a:r>
+              <a:rPr sz="1350" b="0">
+                <a:solidFill>
+                  <a:srgbClr val="29251F"/>
+                </a:solidFill>
+                <a:latin typeface="Arial"/>
+                <a:ea typeface="Arial"/>
+                <a:cs typeface="Arial"/>
+              </a:rPr>
+              <a:t>Matthäus 20,1–16</a:t>
+            </a:r>
+          </a:p>
+        </p:txBody>
+      </p:sp>
+      <p:sp>
+        <p:nvSpPr>
+          <p:cNvPr id="5" name="">
+            <a:extLst xmlns:a="http://schemas.openxmlformats.org/drawingml/2006/main">
+              <a:ext uri="{FF2B5EF4-FFF2-40B4-BE49-F238E27FC236}">
+                <a16:creationId xmlns:a16="http://schemas.microsoft.com/office/drawing/2014/main" id="{C99A993E-AF74-4D61-9D9A-499073A87269}"/>
+              </a:ext>
+            </a:extLst>
+          </p:cNvPr>
+          <p:cNvSpPr>
+            <a:spLocks xmlns:a="http://schemas.openxmlformats.org/drawingml/2006/main" noGrp="1"/>
+          </p:cNvSpPr>
+          <p:nvPr/>
+        </p:nvSpPr>
+        <p:spPr>
+          <a:xfrm xmlns:a="http://schemas.openxmlformats.org/drawingml/2006/main">
+            <a:off x="10668000" y="6191250"/>
+            <a:ext cx="1047750" cy="285750"/>
+          </a:xfrm>
+          <a:prstGeom xmlns:a="http://schemas.openxmlformats.org/drawingml/2006/main" prst="rect">
+            <a:avLst/>
+          </a:prstGeom>
+          <a:noFill xmlns:a="http://schemas.openxmlformats.org/drawingml/2006/main"/>
+          <a:ln xmlns:a="http://schemas.openxmlformats.org/drawingml/2006/main" w="0">
+            <a:noFill/>
+          </a:ln>
+        </p:spPr>
+        <p:txBody>
+          <a:bodyPr xmlns:a="http://schemas.openxmlformats.org/drawingml/2006/main">
+            <a:noAutofit/>
+          </a:bodyPr>
+          <a:lstStyle xmlns:a="http://schemas.openxmlformats.org/drawingml/2006/main"/>
+          <a:p xmlns:a="http://schemas.openxmlformats.org/drawingml/2006/main">
+            <a:pPr>
+              <a:defRPr sz="1275" b="0">
+                <a:solidFill>
+                  <a:srgbClr val="29251F"/>
+                </a:solidFill>
+                <a:latin typeface="Arial"/>
+                <a:ea typeface="Arial"/>
+                <a:cs typeface="Arial"/>
+              </a:defRPr>
+            </a:pPr>
+            <a:r>
+              <a:rPr sz="1275" b="0">
+                <a:solidFill>
+                  <a:srgbClr val="29251F"/>
+                </a:solidFill>
+                <a:latin typeface="Arial"/>
+                <a:ea typeface="Arial"/>
+                <a:cs typeface="Arial"/>
+              </a:rPr>
+              <a:t>9 / 12</a:t>
+            </a:r>
+          </a:p>
+        </p:txBody>
+      </p:sp>
+    </p:spTree>
+    <p:extLst>
+      <p:ext uri="{BB962C8B-B14F-4D97-AF65-F5344CB8AC3E}">
+        <p14:creationId xmlns:p14="http://schemas.microsoft.com/office/powerpoint/2010/main" val="883254999"/>
       </p:ext>
     </p:extLst>
   </p:cSld>
